--- a/docs/deck/DR-Agent-Azure-Day-2026.pptx
+++ b/docs/deck/DR-Agent-Azure-Day-2026.pptx
@@ -780,7 +780,7 @@
           <a:p>
             <a:r>
               <a:rPr lang="en-US" dirty="0"/>
-              <a:t>Cost is where this gets compelling. Every AI agent call we made across two days and nine drills cost ₹8.33 in total, from Azure Cost Management. The entire environment so far cost ₹234. At Azure list prices the DR set-up itself is $38.26 a month. Compare that with ITIC's floor of $300,000 an hour: a month of DR costs less than half a second of downtime.</a:t>
+              <a:t>Cost is where this gets compelling. Every AI agent call we made across two days and nine drills cost 9 cents in total, from Azure Cost Management. The entire environment so far cost $2.44. At Azure list prices the DR set-up itself is $38.26 a month. At the 2026 average of $15,000 a minute, a whole month of DR costs less than a fifth of a second of downtime.</a:t>
             </a:r>
             <a:endParaRPr lang="en-US" dirty="0"/>
           </a:p>
@@ -1132,7 +1132,7 @@
           <a:p>
             <a:r>
               <a:rPr lang="en-US" dirty="0"/>
-              <a:t>Start with money. ITIC's 2024 survey of over 1,000 firms: for more than 90% of mid-size and large enterprises one hour of downtime costs over $300,000, and 41% say $1M to over $5M, excluding fines and litigation. Splunk with Oxford Economics (June 2024, 2,000 executives): downtime costs each Global 2000 company about $200M a year, roughly 9% of profits, including $22M of regulatory fines. And in July 2024 one faulty update caused an estimated $5.4B of direct losses to the Fortune 500, $1.15B of it in banking. Simple arithmetic: $300K an hour is $5,000 a minute.</a:t>
+              <a:t>Start with money, using the latest research. Splunk with Oxford Economics, May 2026, 2,000 executives: downtime now costs Global 2000 companies $15,000 a minute on average, about $900,000 an hour and $600 billion a year, including $51 million a year in regulatory fines per company. Uptime Institute's 2026 analysis: 57% say their last major outage cost over $100,000, and one in five over $1 million. And in October 2025 a single AWS region outage cost US companies an estimated $500 to $650 million. Even hyperscalers fail; what matters is whether your recovery works.</a:t>
             </a:r>
             <a:endParaRPr lang="en-US" dirty="0"/>
           </a:p>
@@ -1220,7 +1220,7 @@
           <a:p>
             <a:r>
               <a:rPr lang="en-US" dirty="0"/>
-              <a:t>Closer to home, the penalty is a growth freeze. HDFC Bank: after repeated outages, the most recent a power failure at a primary data centre, the RBI stopped new digital launches and new credit cards in December 2020; cards resumed in August 2021, digital launches only in March 2022. NSE: a nearly four-hour trading halt in February 2021 ended in a ₹72.64 crore settlement with SEBI. Kotak Mahindra Bank: in April 2024 the RBI cited deficiencies including business continuity and disaster recovery, plus frequent outages, and stopped online onboarding and new cards for about ten months.</a:t>
+              <a:t>Closer to home, the penalty is a growth freeze. HDFC Bank: after repeated outages, the most recent a power failure at a primary data centre, the RBI stopped new digital launches and new credit cards in December 2020; cards resumed in August 2021, digital launches only in March 2022. NSE: a nearly four-hour trading halt in February 2021 ended in a settlement of about $8.8 million with SEBI. Kotak Mahindra Bank: in April 2024 the RBI cited deficiencies including business continuity and disaster recovery, plus frequent outages, and stopped online onboarding and new cards for about ten months.</a:t>
             </a:r>
             <a:endParaRPr lang="en-US" dirty="0"/>
           </a:p>
@@ -1396,7 +1396,7 @@
           <a:p>
             <a:r>
               <a:rPr lang="en-US" dirty="0"/>
-              <a:t>So why don't companies just test? Cockroach Labs surveyed 1,000 executives: fewer than one in three do regular failover testing, and only 20% feel fully prepared. Uptime Institute found 85% of major human-error outages come from procedures not followed or flawed procedures, which is exactly what a stale runbook is. The reasons are structural: tests are disruptive and manual, environments drift between tests, runbooks go stale, and RTO/RPO are signed off on paper instead of measured.</a:t>
+              <a:t>So why don't companies just test? Cockroach Labs surveyed 1,000 executives: fewer than one in three do regular failover testing, and only 20% feel fully prepared. Uptime Institute's 2026 analysis names failure to follow established procedures as the leading driver of human-error outages, which is exactly what a stale runbook causes. The reasons are structural: tests are disruptive and manual, environments drift between tests, runbooks go stale, and RTO/RPO are signed off on paper instead of measured.</a:t>
             </a:r>
             <a:endParaRPr lang="en-US" dirty="0"/>
           </a:p>
@@ -1484,7 +1484,7 @@
           <a:p>
             <a:r>
               <a:rPr lang="en-US" dirty="0"/>
-              <a:t>Put it together with transparent inputs. A tier-1 payments service with a 30-minute target that has never really been tested. On the day, recovery takes four hours, like the NSE halt. At ITIC's floor of $300,000 an hour, that is $1.2M of direct loss, $1.05M of it beyond the target, before any regulatory action: the NSE settlement was ₹72.64 crore, and the RBI froze HDFC's and Kotak's digital growth for 10 to 15 months. Our agent measured 34.35 seconds for the same kind of service, with zero payments lost, and it can prove it again every week.</a:t>
+              <a:t>Put it together with transparent inputs. A tier-1 payments service with a 30-minute target that has never really been tested. On the day, recovery takes four hours, like the NSE halt. At the 2026 average of $15,000 a minute, that is $3.6 million of direct loss, $3.15 million of it beyond the target, before any regulatory action: NSE paid about $8.8 million to settle, and the RBI froze HDFC's and Kotak's digital growth for 10 to 15 months. Our agent measured 34.35 seconds for the same kind of service, with zero payments lost, and it can prove it again on demand.</a:t>
             </a:r>
             <a:endParaRPr lang="en-US" dirty="0"/>
           </a:p>
@@ -5056,7 +5056,7 @@
                 <a:ea typeface="Calibri" pitchFamily="34" charset="-122"/>
                 <a:cs typeface="Calibri" pitchFamily="34" charset="-120"/>
               </a:rPr>
-              <a:t>₹8.33</a:t>
+              <a:t>$0.09</a:t>
             </a:r>
             <a:endParaRPr lang="en-US" sz="4000" dirty="0"/>
           </a:p>
@@ -5134,7 +5134,7 @@
                 <a:ea typeface="Calibri" pitchFamily="34" charset="-122"/>
                 <a:cs typeface="Calibri" pitchFamily="34" charset="-120"/>
               </a:rPr>
-              <a:t>every Foundry agent run across 2 days of building and 9 drills (Azure Cost Management) [13]</a:t>
+              <a:t>every Foundry agent run across 2 days of building and 9 drills: $0.087 (Azure Cost Management) [12]</a:t>
             </a:r>
             <a:endParaRPr lang="en-US" sz="1150" dirty="0"/>
           </a:p>
@@ -5207,7 +5207,7 @@
                 <a:ea typeface="Calibri" pitchFamily="34" charset="-122"/>
                 <a:cs typeface="Calibri" pitchFamily="34" charset="-120"/>
               </a:rPr>
-              <a:t>₹234</a:t>
+              <a:t>$2.44</a:t>
             </a:r>
             <a:endParaRPr lang="en-US" sz="4000" dirty="0"/>
           </a:p>
@@ -5285,7 +5285,7 @@
                 <a:ea typeface="Calibri" pitchFamily="34" charset="-122"/>
                 <a:cs typeface="Calibri" pitchFamily="34" charset="-120"/>
               </a:rPr>
-              <a:t>two regions, database, VM, console, monitoring: everything, 17–18 Oct 2026 [13]</a:t>
+              <a:t>two regions, database, VM, console, monitoring: everything, 17–18 Oct 2026 (Azure Cost Management) [12]</a:t>
             </a:r>
             <a:endParaRPr lang="en-US" sz="1150" dirty="0"/>
           </a:p>
@@ -5436,7 +5436,7 @@
                 <a:ea typeface="Calibri" pitchFamily="34" charset="-122"/>
                 <a:cs typeface="Calibri" pitchFamily="34" charset="-120"/>
               </a:rPr>
-              <a:t>both regions + Traffic Manager at Azure list prices (Retail Prices API) [14]</a:t>
+              <a:t>both regions + Traffic Manager at Azure list prices (Retail Prices API) [13]</a:t>
             </a:r>
             <a:endParaRPr lang="en-US" sz="1150" dirty="0"/>
           </a:p>
@@ -5502,7 +5502,7 @@
                 <a:ea typeface="Calibri" pitchFamily="34" charset="-122"/>
                 <a:cs typeface="Calibri" pitchFamily="34" charset="-120"/>
               </a:rPr>
-              <a:t>A month of this DR set-up costs less than half a second of downtime </a:t>
+              <a:t>A month of this DR set-up costs less than a fifth of a second of downtime </a:t>
             </a:r>
             <a:pPr indent="0" marL="0">
               <a:buNone/>
@@ -5516,7 +5516,7 @@
                 <a:ea typeface="Calibri" pitchFamily="34" charset="-122"/>
                 <a:cs typeface="Calibri" pitchFamily="34" charset="-120"/>
               </a:rPr>
-              <a:t>at the ITIC floor of $300,000 an hour ($38.26 ÷ $83.33 per second = 0.46 s). [1][14]</a:t>
+              <a:t>at the 2026 average of $15,000 a minute ($38.26 ÷ $250 per second = 0.15 s). [1][13]</a:t>
             </a:r>
             <a:endParaRPr lang="en-US" sz="1600" dirty="0"/>
           </a:p>
@@ -6919,7 +6919,7 @@
                 <a:ea typeface="Calibri" pitchFamily="34" charset="-122"/>
                 <a:cs typeface="Calibri" pitchFamily="34" charset="-120"/>
               </a:rPr>
-              <a:t>[1] ITIC, 2024 Hourly Cost of Downtime Survey, Part 2 (L. DiDio), 1,000+ firms, Nov 2023–Mar 2024. calyptix.com/wp-content/uploads/ITIC-2024-Hourly-Cost-of-Downtime-Survey-Results-Part-2.pdf</a:t>
+              <a:t>[1] Splunk with Oxford Economics, The Hidden Costs of Downtime 2026, 19 May 2026 (2,000 Global 2000 executives). newsroom.cisco.com (The $600 Billion Wake-up Call)</a:t>
             </a:r>
             <a:endParaRPr lang="en-US" sz="1050" dirty="0"/>
           </a:p>
@@ -6939,7 +6939,7 @@
                 <a:ea typeface="Calibri" pitchFamily="34" charset="-122"/>
                 <a:cs typeface="Calibri" pitchFamily="34" charset="-120"/>
               </a:rPr>
-              <a:t>[2] Splunk with Oxford Economics, The Hidden Costs of Downtime, 12 Jun 2024. splunk.com/en_us/blog/cio-office/uncovering-downtime.html</a:t>
+              <a:t>[2] Uptime Institute, Annual Outage Analysis 2026, press release 13 May 2026. uptimeinstitute.com</a:t>
             </a:r>
             <a:endParaRPr lang="en-US" sz="1050" dirty="0"/>
           </a:p>
@@ -6959,7 +6959,7 @@
                 <a:ea typeface="Calibri" pitchFamily="34" charset="-122"/>
                 <a:cs typeface="Calibri" pitchFamily="34" charset="-120"/>
               </a:rPr>
-              <a:t>[3] Parametrix estimate of CrowdStrike outage losses (19 Jul 2024), reported by Dark Reading and Cybersecurity Dive, Jul 2024. darkreading.com/cybersecurity-operations/crowdstrike-outage-losses-estimated-staggering-54b</a:t>
+              <a:t>[3] Parametrix estimate of losses from the AWS us-east-1 outage of 20 Oct 2025 (Insurance Edge, 30 Oct 2025).</a:t>
             </a:r>
             <a:endParaRPr lang="en-US" sz="1050" dirty="0"/>
           </a:p>
@@ -6999,7 +6999,7 @@
                 <a:ea typeface="Calibri" pitchFamily="34" charset="-122"/>
                 <a:cs typeface="Calibri" pitchFamily="34" charset="-120"/>
               </a:rPr>
-              <a:t>[5] NSE and NSE Clearing settle the 24 Feb 2021 trading-halt case with SEBI for ₹72.64 crore (Moneylife; Business Standard, Jun 2023).</a:t>
+              <a:t>[5] NSE and NSE Clearing settle the 24 Feb 2021 trading-halt case with SEBI for ₹72.64 crore (Moneylife; Business Standard, Jun 2023); ≈ $8.8M at June 2023 rates of ₹82–83 per US$.</a:t>
             </a:r>
             <a:endParaRPr lang="en-US" sz="1050" dirty="0"/>
           </a:p>
@@ -7139,7 +7139,7 @@
                 <a:ea typeface="Calibri" pitchFamily="34" charset="-122"/>
                 <a:cs typeface="Calibri" pitchFamily="34" charset="-120"/>
               </a:rPr>
-              <a:t>[12] Uptime Institute, Annual Outage Analysis 2025, press release 6 May 2025. uptimeinstitute.com</a:t>
+              <a:t>[12] Azure Cost Management, actual cost by service in US$ (CostUSD), month to date, queried 18 Oct 2026 (our environment).</a:t>
             </a:r>
             <a:endParaRPr lang="en-US" sz="1050" dirty="0"/>
           </a:p>
@@ -7159,27 +7159,7 @@
                 <a:ea typeface="Calibri" pitchFamily="34" charset="-122"/>
                 <a:cs typeface="Calibri" pitchFamily="34" charset="-120"/>
               </a:rPr>
-              <a:t>[13] Azure Cost Management, subscription actual cost by service, month to date, queried 18 Oct 2026 (our environment).</a:t>
-            </a:r>
-            <a:endParaRPr lang="en-US" sz="1050" dirty="0"/>
-          </a:p>
-          <a:p>
-            <a:pPr indent="0" marL="0">
-              <a:spcAft>
-                <a:spcPts val="500"/>
-              </a:spcAft>
-              <a:buNone/>
-            </a:pPr>
-            <a:r>
-              <a:rPr lang="en-US" sz="1050" dirty="0">
-                <a:solidFill>
-                  <a:srgbClr val="1B2635"/>
-                </a:solidFill>
-                <a:latin typeface="Calibri" pitchFamily="34" charset="0"/>
-                <a:ea typeface="Calibri" pitchFamily="34" charset="-122"/>
-                <a:cs typeface="Calibri" pitchFamily="34" charset="-120"/>
-              </a:rPr>
-              <a:t>[14] Azure Retail Prices API (prices.azure.com), East Asia / Southeast Asia list prices for App Service B1 Linux, SQL Database Basic, Traffic Manager, 18 Oct 2026.</a:t>
+              <a:t>[13] Azure Retail Prices API (prices.azure.com), East Asia / Southeast Asia list prices for App Service B1 Linux, SQL Database Basic, Traffic Manager, 18 Oct 2026.</a:t>
             </a:r>
             <a:endParaRPr lang="en-US" sz="1050" dirty="0"/>
           </a:p>
@@ -7675,7 +7655,7 @@
                 <a:ea typeface="Calibri" pitchFamily="34" charset="-122"/>
                 <a:cs typeface="Calibri" pitchFamily="34" charset="-120"/>
               </a:rPr>
-              <a:t>One hour of downtime now costs more than most DR budgets</a:t>
+              <a:t>Downtime now costs about $900,000 an hour</a:t>
             </a:r>
             <a:endParaRPr lang="en-US" sz="3200" dirty="0"/>
           </a:p>
@@ -7714,7 +7694,7 @@
                 <a:ea typeface="Calibri" pitchFamily="34" charset="-122"/>
                 <a:cs typeface="Calibri" pitchFamily="34" charset="-120"/>
               </a:rPr>
-              <a:t>Independent surveys and real incidents, 2024: the cost of not recovering on time.</a:t>
+              <a:t>The latest independent research (2026) and a 2025 cloud outage: the cost of not recovering on time.</a:t>
             </a:r>
             <a:endParaRPr lang="en-US" sz="1500" dirty="0"/>
           </a:p>
@@ -7779,7 +7759,7 @@
               <a:buNone/>
             </a:pPr>
             <a:r>
-              <a:rPr lang="en-US" sz="4800" b="1" dirty="0">
+              <a:rPr lang="en-US" sz="4200" b="1" dirty="0">
                 <a:solidFill>
                   <a:srgbClr val="5E2CFE"/>
                 </a:solidFill>
@@ -7787,9 +7767,9 @@
                 <a:ea typeface="Calibri" pitchFamily="34" charset="-122"/>
                 <a:cs typeface="Calibri" pitchFamily="34" charset="-120"/>
               </a:rPr>
-              <a:t>$300K+</a:t>
-            </a:r>
-            <a:endParaRPr lang="en-US" sz="4800" dirty="0"/>
+              <a:t>$15,000</a:t>
+            </a:r>
+            <a:endParaRPr lang="en-US" sz="4200" dirty="0"/>
           </a:p>
         </p:txBody>
       </p:sp>
@@ -7826,7 +7806,7 @@
                 <a:ea typeface="Calibri" pitchFamily="34" charset="-122"/>
                 <a:cs typeface="Calibri" pitchFamily="34" charset="-120"/>
               </a:rPr>
-              <a:t>per hour of downtime</a:t>
+              <a:t>per minute of downtime</a:t>
             </a:r>
             <a:endParaRPr lang="en-US" sz="1600" dirty="0"/>
           </a:p>
@@ -7865,7 +7845,7 @@
                 <a:ea typeface="Calibri" pitchFamily="34" charset="-122"/>
                 <a:cs typeface="Calibri" pitchFamily="34" charset="-120"/>
               </a:rPr>
-              <a:t>for over 90% of mid-size and large enterprises. 41% put it at $1M to over $5M per hour, before fines and litigation.</a:t>
+              <a:t>is the average for Global 2000 companies: about $900,000 an hour and $600B a year in total. Regulatory fines alone average $51M per company a year.</a:t>
             </a:r>
             <a:endParaRPr lang="en-US" sz="1300" dirty="0"/>
           </a:p>
@@ -7904,7 +7884,7 @@
                 <a:ea typeface="Calibri" pitchFamily="34" charset="-122"/>
                 <a:cs typeface="Calibri" pitchFamily="34" charset="-120"/>
               </a:rPr>
-              <a:t>ITIC 2024 Hourly Cost of Downtime Survey (1,000+ firms) [1]</a:t>
+              <a:t>Splunk &amp; Oxford Economics, The Hidden Costs of Downtime, May 2026 (2,000 executives) [1]</a:t>
             </a:r>
             <a:endParaRPr lang="en-US" sz="950" dirty="0"/>
           </a:p>
@@ -7969,7 +7949,7 @@
               <a:buNone/>
             </a:pPr>
             <a:r>
-              <a:rPr lang="en-US" sz="4800" b="1" dirty="0">
+              <a:rPr lang="en-US" sz="4200" b="1" dirty="0">
                 <a:solidFill>
                   <a:srgbClr val="5E2CFE"/>
                 </a:solidFill>
@@ -7977,9 +7957,9 @@
                 <a:ea typeface="Calibri" pitchFamily="34" charset="-122"/>
                 <a:cs typeface="Calibri" pitchFamily="34" charset="-120"/>
               </a:rPr>
-              <a:t>$200M</a:t>
-            </a:r>
-            <a:endParaRPr lang="en-US" sz="4800" dirty="0"/>
+              <a:t>57%</a:t>
+            </a:r>
+            <a:endParaRPr lang="en-US" sz="4200" dirty="0"/>
           </a:p>
         </p:txBody>
       </p:sp>
@@ -8016,7 +7996,7 @@
                 <a:ea typeface="Calibri" pitchFamily="34" charset="-122"/>
                 <a:cs typeface="Calibri" pitchFamily="34" charset="-120"/>
               </a:rPr>
-              <a:t>per company, every year</a:t>
+              <a:t>had a last major outage over $100K</a:t>
             </a:r>
             <a:endParaRPr lang="en-US" sz="1600" dirty="0"/>
           </a:p>
@@ -8055,7 +8035,7 @@
                 <a:ea typeface="Calibri" pitchFamily="34" charset="-122"/>
                 <a:cs typeface="Calibri" pitchFamily="34" charset="-120"/>
               </a:rPr>
-              <a:t>lost to downtime by each Global 2000 company: about 9% of profits. Includes $49M lost revenue and $22M in regulatory fines.</a:t>
+              <a:t>and 1 in 5 operators said their last major outage cost more than $1 million, for the second year running.</a:t>
             </a:r>
             <a:endParaRPr lang="en-US" sz="1300" dirty="0"/>
           </a:p>
@@ -8094,7 +8074,7 @@
                 <a:ea typeface="Calibri" pitchFamily="34" charset="-122"/>
                 <a:cs typeface="Calibri" pitchFamily="34" charset="-120"/>
               </a:rPr>
-              <a:t>Splunk &amp; Oxford Economics, The Hidden Costs of Downtime, Jun 2024 (2,000 executives) [2]</a:t>
+              <a:t>Uptime Institute, Annual Outage Analysis 2026 [2]</a:t>
             </a:r>
             <a:endParaRPr lang="en-US" sz="950" dirty="0"/>
           </a:p>
@@ -8159,7 +8139,7 @@
               <a:buNone/>
             </a:pPr>
             <a:r>
-              <a:rPr lang="en-US" sz="4800" b="1" dirty="0">
+              <a:rPr lang="en-US" sz="4200" b="1" dirty="0">
                 <a:solidFill>
                   <a:srgbClr val="5E2CFE"/>
                 </a:solidFill>
@@ -8167,9 +8147,9 @@
                 <a:ea typeface="Calibri" pitchFamily="34" charset="-122"/>
                 <a:cs typeface="Calibri" pitchFamily="34" charset="-120"/>
               </a:rPr>
-              <a:t>$5.4B</a:t>
-            </a:r>
-            <a:endParaRPr lang="en-US" sz="4800" dirty="0"/>
+              <a:t>$500–650M</a:t>
+            </a:r>
+            <a:endParaRPr lang="en-US" sz="4200" dirty="0"/>
           </a:p>
         </p:txBody>
       </p:sp>
@@ -8206,7 +8186,7 @@
                 <a:ea typeface="Calibri" pitchFamily="34" charset="-122"/>
                 <a:cs typeface="Calibri" pitchFamily="34" charset="-120"/>
               </a:rPr>
-              <a:t>from one IT outage</a:t>
+              <a:t>from one cloud-region outage</a:t>
             </a:r>
             <a:endParaRPr lang="en-US" sz="1600" dirty="0"/>
           </a:p>
@@ -8245,7 +8225,7 @@
                 <a:ea typeface="Calibri" pitchFamily="34" charset="-122"/>
                 <a:cs typeface="Calibri" pitchFamily="34" charset="-120"/>
               </a:rPr>
-              <a:t>in direct losses to Fortune 500 companies from the 19 July 2024 CrowdStrike incident; banking alone about $1.15B. Insurance covers only 10–20%.</a:t>
+              <a:t>lost by US companies when AWS us-east-1 failed on 20 October 2025. Even hyperscalers fail; what matters is whether your recovery works.</a:t>
             </a:r>
             <a:endParaRPr lang="en-US" sz="1300" dirty="0"/>
           </a:p>
@@ -8284,7 +8264,7 @@
                 <a:ea typeface="Calibri" pitchFamily="34" charset="-122"/>
                 <a:cs typeface="Calibri" pitchFamily="34" charset="-120"/>
               </a:rPr>
-              <a:t>Parametrix estimate, Jul 2024 [3]</a:t>
+              <a:t>Parametrix estimate, Oct 2025 [3]</a:t>
             </a:r>
             <a:endParaRPr lang="en-US" sz="950" dirty="0"/>
           </a:p>
@@ -8350,7 +8330,7 @@
                 <a:ea typeface="Calibri" pitchFamily="34" charset="-122"/>
                 <a:cs typeface="Calibri" pitchFamily="34" charset="-120"/>
               </a:rPr>
-              <a:t>At $300K per hour, every minute of downtime costs about $5,000.</a:t>
+              <a:t>At $15,000 a minute, one hour of downtime costs about $900,000.</a:t>
             </a:r>
             <a:pPr indent="0" marL="0">
               <a:buNone/>
@@ -9017,7 +8997,7 @@
                 <a:ea typeface="Calibri" pitchFamily="34" charset="-122"/>
                 <a:cs typeface="Calibri" pitchFamily="34" charset="-120"/>
               </a:rPr>
-              <a:t>₹72.64 crore</a:t>
+              <a:t>≈ $8.8M</a:t>
             </a:r>
             <a:endParaRPr lang="en-US" sz="3400" dirty="0"/>
           </a:p>
@@ -9056,7 +9036,7 @@
                 <a:ea typeface="Calibri" pitchFamily="34" charset="-122"/>
                 <a:cs typeface="Calibri" pitchFamily="34" charset="-120"/>
               </a:rPr>
-              <a:t>paid by NSE and NSE Clearing to settle (2023)</a:t>
+              <a:t>paid by NSE and NSE Clearing to settle with SEBI (2023)</a:t>
             </a:r>
             <a:endParaRPr lang="en-US" sz="1200" dirty="0"/>
           </a:p>
@@ -10200,7 +10180,7 @@
                           <a:ea typeface="Calibri" pitchFamily="34" charset="-122"/>
                           <a:cs typeface="Calibri" pitchFamily="34" charset="-120"/>
                         </a:rPr>
-                        <a:t>Enforcement and settlements, as with NSE: ₹72.64 crore. [5]</a:t>
+                        <a:t>Enforcement and settlements, as with NSE: about $8.8M. [5]</a:t>
                       </a:r>
                       <a:endParaRPr lang="en-US" sz="1200" dirty="0">
                         <a:latin typeface="Calibri" charset="0"/>
@@ -11069,7 +11049,7 @@
                 <a:ea typeface="Calibri" pitchFamily="34" charset="-122"/>
                 <a:cs typeface="Calibri" pitchFamily="34" charset="-120"/>
               </a:rPr>
-              <a:t>85%</a:t>
+              <a:t>#1</a:t>
             </a:r>
             <a:endParaRPr lang="en-US" sz="3800" dirty="0"/>
           </a:p>
@@ -11108,7 +11088,7 @@
                 <a:ea typeface="Calibri" pitchFamily="34" charset="-122"/>
                 <a:cs typeface="Calibri" pitchFamily="34" charset="-120"/>
               </a:rPr>
-              <a:t>of major human-error outages come from staff not following procedures, or from flawed procedures</a:t>
+              <a:t>cause of human-error outages: staff not following established procedures</a:t>
             </a:r>
             <a:endParaRPr lang="en-US" sz="1350" dirty="0"/>
           </a:p>
@@ -11147,7 +11127,7 @@
                 <a:ea typeface="Calibri" pitchFamily="34" charset="-122"/>
                 <a:cs typeface="Calibri" pitchFamily="34" charset="-120"/>
               </a:rPr>
-              <a:t>Uptime Institute, Annual Outage Analysis 2025 [12]</a:t>
+              <a:t>Uptime Institute, Annual Outage Analysis 2026 [2]</a:t>
             </a:r>
             <a:endParaRPr lang="en-US" sz="950" dirty="0"/>
           </a:p>
@@ -12236,7 +12216,7 @@
                 <a:ea typeface="Calibri" pitchFamily="34" charset="-122"/>
                 <a:cs typeface="Calibri" pitchFamily="34" charset="-120"/>
               </a:rPr>
-              <a:t>$300,000</a:t>
+              <a:t>$900,000</a:t>
             </a:r>
             <a:endParaRPr lang="en-US" sz="2200" dirty="0"/>
           </a:p>
@@ -12275,7 +12255,7 @@
                 <a:ea typeface="Calibri" pitchFamily="34" charset="-122"/>
                 <a:cs typeface="Calibri" pitchFamily="34" charset="-120"/>
               </a:rPr>
-              <a:t>ITIC 2024 floor for 90%+ of mid-size and large firms [1]</a:t>
+              <a:t>$15,000 a minute, the Global 2000 average (Splunk &amp; Oxford Economics, 2026) [1]</a:t>
             </a:r>
             <a:endParaRPr lang="en-US" sz="1200" dirty="0"/>
           </a:p>
@@ -12380,7 +12360,7 @@
                 <a:ea typeface="Calibri" pitchFamily="34" charset="-122"/>
                 <a:cs typeface="Calibri" pitchFamily="34" charset="-120"/>
               </a:rPr>
-              <a:t>$1.2M</a:t>
+              <a:t>$3.6M</a:t>
             </a:r>
             <a:endParaRPr lang="en-US" sz="2200" dirty="0"/>
           </a:p>
@@ -12419,7 +12399,7 @@
                 <a:ea typeface="Calibri" pitchFamily="34" charset="-122"/>
                 <a:cs typeface="Calibri" pitchFamily="34" charset="-120"/>
               </a:rPr>
-              <a:t>4 h × $300K; $1.05M of it beyond the 30-minute target</a:t>
+              <a:t>4 h × $900K; $3.15M of it beyond the 30-minute target</a:t>
             </a:r>
             <a:endParaRPr lang="en-US" sz="1200" dirty="0"/>
           </a:p>
@@ -12524,7 +12504,7 @@
                 <a:ea typeface="Calibri" pitchFamily="34" charset="-122"/>
                 <a:cs typeface="Calibri" pitchFamily="34" charset="-120"/>
               </a:rPr>
-              <a:t>₹72.64 crore</a:t>
+              <a:t>≈ $8.8M</a:t>
             </a:r>
             <a:endParaRPr lang="en-US" sz="2200" dirty="0"/>
           </a:p>

--- a/docs/deck/DR-Agent-Azure-Day-2026.pptx
+++ b/docs/deck/DR-Agent-Azure-Day-2026.pptx
@@ -692,7 +692,7 @@
           <a:p>
             <a:r>
               <a:rPr lang="en-US" dirty="0"/>
-              <a:t>These are measured, not estimated. Eight drills without chaos: RTO between 29.6 and 40.4 seconds, median 33.5, against a 30-minute target; RPO zero every time. Failback about three minutes with no data loss. The reports VM was recovered by Site Recovery in under six minutes and proven by running a command inside it. And every second of RTO is accounted for: the latest 34.35 seconds split into 15.4 s SQL failover, 5.9 s Traffic Manager, 11.6 s DNS and health checks, and under a second each for the injection and our own bookkeeping.</a:t>
+              <a:t>These are measured, not estimated. Nine drills without chaos: RTO between 29.0 and 40.4 seconds, median 32.7, against a 30-minute target. RPO is proven write by write: in the latest drill the old primary acknowledged 6 writes while the forced failover was running, and 2 of them never reached the new primary, so 2.8 seconds of writes were lost, against a 15-minute target. That is exactly what a forced failover with asynchronous replication means, and our own audit found that our first, narrower measurement had missed it. Failback is planned and loses nothing. Site Recovery brought the reports VM up in Southeast Asia in 3 minutes 8 seconds, and we proved the service inside it at 3 minutes 55. Every second of the latest 29.04 s RTO is accounted for: 14.3 s SQL failover, 3.8 s Traffic Manager, 9.5 s DNS and health checks, and under a second each for the injection and our own bookkeeping.</a:t>
             </a:r>
             <a:endParaRPr lang="en-US" dirty="0"/>
           </a:p>
@@ -1484,7 +1484,7 @@
           <a:p>
             <a:r>
               <a:rPr lang="en-US" dirty="0"/>
-              <a:t>Put it together with transparent inputs. A tier-1 payments service with a 30-minute target that has never really been tested. On the day, recovery takes four hours, like the NSE halt. At the 2026 average of $15,000 a minute, that is $3.6 million of direct loss, $3.15 million of it beyond the target, before any regulatory action: NSE paid about $8.8 million to settle, and the RBI froze HDFC's and Kotak's digital growth for 10 to 15 months. Our agent measured 34.35 seconds for the same kind of service, with zero payments lost, and it can prove it again on demand.</a:t>
+              <a:t>Put it together with transparent inputs. A tier-1 payments service with a 30-minute target that has never really been tested. On the day, recovery takes four hours, like the NSE halt. At the 2026 average of $15,000 a minute, that is $3.6 million of direct loss, $3.15 million of it beyond the target, before any regulatory action: NSE paid about $8.8 million to settle, and the RBI froze HDFC's and Kotak's digital growth for 10 to 15 months. Our agent measured 29.04 seconds for the same kind of service, and proved the data loss write by write: 2.8 seconds of writes, against a 15-minute target. It can prove it again on demand.</a:t>
             </a:r>
             <a:endParaRPr lang="en-US" dirty="0"/>
           </a:p>
@@ -2821,7 +2821,7 @@
                 <a:ea typeface="Calibri" pitchFamily="34" charset="-122"/>
                 <a:cs typeface="Calibri" pitchFamily="34" charset="-120"/>
               </a:rPr>
-              <a:t>East Asia (primary) and Southeast Asia (DR). The control plane runs outside both, in South India, so it survives the disaster it manages.</a:t>
+              <a:t>East Asia (primary) and Southeast Asia (DR). The control plane runs outside both: console in South India, its state and secrets in Central India, agents in East US 2.</a:t>
             </a:r>
             <a:endParaRPr lang="en-US" sz="1500" dirty="0"/>
           </a:p>
@@ -3549,7 +3549,7 @@
                 <a:ea typeface="Calibri" pitchFamily="34" charset="-122"/>
                 <a:cs typeface="Calibri" pitchFamily="34" charset="-120"/>
               </a:rPr>
-              <a:t>Real failovers of the payments service, East Asia → Southeast Asia, 17–18 Oct 2026. Target: RTO 30 min, RPO 15 min.</a:t>
+              <a:t>Real failovers of the payments service, East Asia → Southeast Asia, 17–19 Oct 2026. Target: RTO 30 min, RPO 15 min.</a:t>
             </a:r>
             <a:endParaRPr lang="en-US" sz="1500" dirty="0"/>
           </a:p>
@@ -3622,7 +3622,7 @@
                 <a:ea typeface="Calibri" pitchFamily="34" charset="-122"/>
                 <a:cs typeface="Calibri" pitchFamily="34" charset="-120"/>
               </a:rPr>
-              <a:t>34.35 s</a:t>
+              <a:t>29.04 s</a:t>
             </a:r>
             <a:endParaRPr lang="en-US" sz="3000" dirty="0"/>
           </a:p>
@@ -3700,7 +3700,7 @@
                 <a:ea typeface="Calibri" pitchFamily="34" charset="-122"/>
                 <a:cs typeface="Calibri" pitchFamily="34" charset="-120"/>
               </a:rPr>
-              <a:t>29.6–40.4 s across 8 drills (median 33.5 s)</a:t>
+              <a:t>29.0–40.4 s across 9 drills (median 32.7 s)</a:t>
             </a:r>
             <a:endParaRPr lang="en-US" sz="1100" dirty="0"/>
           </a:p>
@@ -3773,7 +3773,7 @@
                 <a:ea typeface="Calibri" pitchFamily="34" charset="-122"/>
                 <a:cs typeface="Calibri" pitchFamily="34" charset="-120"/>
               </a:rPr>
-              <a:t>0 s</a:t>
+              <a:t>2.8 s</a:t>
             </a:r>
             <a:endParaRPr lang="en-US" sz="3000" dirty="0"/>
           </a:p>
@@ -3812,7 +3812,7 @@
                 <a:ea typeface="Calibri" pitchFamily="34" charset="-122"/>
                 <a:cs typeface="Calibri" pitchFamily="34" charset="-120"/>
               </a:rPr>
-              <a:t>RPO, every drill</a:t>
+              <a:t>RPO, proven write by write</a:t>
             </a:r>
             <a:endParaRPr lang="en-US" sz="1300" dirty="0"/>
           </a:p>
@@ -3851,7 +3851,7 @@
                 <a:ea typeface="Calibri" pitchFamily="34" charset="-122"/>
                 <a:cs typeface="Calibri" pitchFamily="34" charset="-120"/>
               </a:rPr>
-              <a:t>no confirmed payment lost (1 s heartbeat proof)</a:t>
+              <a:t>2 of 45 acknowledged writes lost in the forced failover</a:t>
             </a:r>
             <a:endParaRPr lang="en-US" sz="1100" dirty="0"/>
           </a:p>
@@ -3924,7 +3924,7 @@
                 <a:ea typeface="Calibri" pitchFamily="34" charset="-122"/>
                 <a:cs typeface="Calibri" pitchFamily="34" charset="-120"/>
               </a:rPr>
-              <a:t>3 min 14 s</a:t>
+              <a:t>3 min 44 s</a:t>
             </a:r>
             <a:endParaRPr lang="en-US" sz="3000" dirty="0"/>
           </a:p>
@@ -4075,7 +4075,7 @@
                 <a:ea typeface="Calibri" pitchFamily="34" charset="-122"/>
                 <a:cs typeface="Calibri" pitchFamily="34" charset="-120"/>
               </a:rPr>
-              <a:t>5 min 45 s</a:t>
+              <a:t>3 min 08 s</a:t>
             </a:r>
             <a:endParaRPr lang="en-US" sz="3000" dirty="0"/>
           </a:p>
@@ -4153,7 +4153,7 @@
                 <a:ea typeface="Calibri" pitchFamily="34" charset="-122"/>
                 <a:cs typeface="Calibri" pitchFamily="34" charset="-120"/>
               </a:rPr>
-              <a:t>proven by a command inside the VM</a:t>
+              <a:t>test-failover job; service verified inside the VM at 3 min 55 s</a:t>
             </a:r>
             <a:endParaRPr lang="en-US" sz="1100" dirty="0"/>
           </a:p>
@@ -4192,7 +4192,7 @@
                 <a:ea typeface="Calibri" pitchFamily="34" charset="-122"/>
                 <a:cs typeface="Calibri" pitchFamily="34" charset="-120"/>
               </a:rPr>
-              <a:t>Where the 34.35 s went (latest drill, one clock, segments add up exactly)</a:t>
+              <a:t>Where the 29.04 s went (latest drill, one clock, segments add up exactly)</a:t>
             </a:r>
             <a:endParaRPr lang="en-US" sz="1400" dirty="0"/>
           </a:p>
@@ -4207,7 +4207,7 @@
         <p:spPr>
           <a:xfrm>
             <a:off x="548640" y="3977640"/>
-            <a:ext cx="167157" cy="457200"/>
+            <a:ext cx="272034" cy="457200"/>
           </a:xfrm>
           <a:prstGeom prst="rect">
             <a:avLst/>
@@ -4231,8 +4231,8 @@
         </p:nvSpPr>
         <p:spPr>
           <a:xfrm>
-            <a:off x="715797" y="3977640"/>
-            <a:ext cx="4945461" cy="457200"/>
+            <a:off x="820674" y="3977640"/>
+            <a:ext cx="5456301" cy="457200"/>
           </a:xfrm>
           <a:prstGeom prst="rect">
             <a:avLst/>
@@ -4256,8 +4256,8 @@
         </p:nvSpPr>
         <p:spPr>
           <a:xfrm>
-            <a:off x="715797" y="3977640"/>
-            <a:ext cx="4945461" cy="457200"/>
+            <a:off x="820674" y="3977640"/>
+            <a:ext cx="5456301" cy="457200"/>
           </a:xfrm>
           <a:prstGeom prst="rect">
             <a:avLst/>
@@ -4281,7 +4281,7 @@
                 <a:ea typeface="Calibri" pitchFamily="34" charset="-122"/>
                 <a:cs typeface="Calibri" pitchFamily="34" charset="-120"/>
               </a:rPr>
-              <a:t>15.355 s</a:t>
+              <a:t>14.321 s</a:t>
             </a:r>
             <a:endParaRPr lang="en-US" sz="1200" dirty="0"/>
           </a:p>
@@ -4295,8 +4295,8 @@
         </p:nvSpPr>
         <p:spPr>
           <a:xfrm>
-            <a:off x="5661257" y="3977640"/>
-            <a:ext cx="1905395" cy="457200"/>
+            <a:off x="6276975" y="3977640"/>
+            <a:ext cx="1440942" cy="457200"/>
           </a:xfrm>
           <a:prstGeom prst="rect">
             <a:avLst/>
@@ -4320,8 +4320,8 @@
         </p:nvSpPr>
         <p:spPr>
           <a:xfrm>
-            <a:off x="5661257" y="3977640"/>
-            <a:ext cx="1905395" cy="457200"/>
+            <a:off x="6276975" y="3977640"/>
+            <a:ext cx="1440942" cy="457200"/>
           </a:xfrm>
           <a:prstGeom prst="rect">
             <a:avLst/>
@@ -4345,7 +4345,7 @@
                 <a:ea typeface="Calibri" pitchFamily="34" charset="-122"/>
                 <a:cs typeface="Calibri" pitchFamily="34" charset="-120"/>
               </a:rPr>
-              <a:t>5.916 s</a:t>
+              <a:t>3.782 s</a:t>
             </a:r>
             <a:endParaRPr lang="en-US" sz="1200" dirty="0"/>
           </a:p>
@@ -4359,8 +4359,8 @@
         </p:nvSpPr>
         <p:spPr>
           <a:xfrm>
-            <a:off x="7566653" y="3977640"/>
-            <a:ext cx="3742189" cy="457200"/>
+            <a:off x="7717917" y="3977640"/>
+            <a:ext cx="3611118" cy="457200"/>
           </a:xfrm>
           <a:prstGeom prst="rect">
             <a:avLst/>
@@ -4384,8 +4384,8 @@
         </p:nvSpPr>
         <p:spPr>
           <a:xfrm>
-            <a:off x="7566653" y="3977640"/>
-            <a:ext cx="3742189" cy="457200"/>
+            <a:off x="7717917" y="3977640"/>
+            <a:ext cx="3611118" cy="457200"/>
           </a:xfrm>
           <a:prstGeom prst="rect">
             <a:avLst/>
@@ -4409,7 +4409,7 @@
                 <a:ea typeface="Calibri" pitchFamily="34" charset="-122"/>
                 <a:cs typeface="Calibri" pitchFamily="34" charset="-120"/>
               </a:rPr>
-              <a:t>11.619 s</a:t>
+              <a:t>9.478 s</a:t>
             </a:r>
             <a:endParaRPr lang="en-US" sz="1200" dirty="0"/>
           </a:p>
@@ -4423,8 +4423,8 @@
         </p:nvSpPr>
         <p:spPr>
           <a:xfrm>
-            <a:off x="11308841" y="3977640"/>
-            <a:ext cx="304039" cy="457200"/>
+            <a:off x="11329035" y="3977640"/>
+            <a:ext cx="283845" cy="457200"/>
           </a:xfrm>
           <a:prstGeom prst="rect">
             <a:avLst/>
@@ -4498,7 +4498,7 @@
                 <a:ea typeface="Calibri" pitchFamily="34" charset="-122"/>
                 <a:cs typeface="Calibri" pitchFamily="34" charset="-120"/>
               </a:rPr>
-              <a:t>Outage injected  0.519 s</a:t>
+              <a:t>Outage injected  0.714 s</a:t>
             </a:r>
             <a:endParaRPr lang="en-US" sz="1050" dirty="0"/>
           </a:p>
@@ -4562,7 +4562,7 @@
                 <a:ea typeface="Calibri" pitchFamily="34" charset="-122"/>
                 <a:cs typeface="Calibri" pitchFamily="34" charset="-120"/>
               </a:rPr>
-              <a:t>SQL forced failover  15.355 s</a:t>
+              <a:t>SQL forced failover  14.321 s</a:t>
             </a:r>
             <a:endParaRPr lang="en-US" sz="1050" dirty="0"/>
           </a:p>
@@ -4626,7 +4626,7 @@
                 <a:ea typeface="Calibri" pitchFamily="34" charset="-122"/>
                 <a:cs typeface="Calibri" pitchFamily="34" charset="-120"/>
               </a:rPr>
-              <a:t>Traffic Manager reroute  5.916 s</a:t>
+              <a:t>Traffic Manager reroute  3.782 s</a:t>
             </a:r>
             <a:endParaRPr lang="en-US" sz="1050" dirty="0"/>
           </a:p>
@@ -4690,7 +4690,7 @@
                 <a:ea typeface="Calibri" pitchFamily="34" charset="-122"/>
                 <a:cs typeface="Calibri" pitchFamily="34" charset="-120"/>
               </a:rPr>
-              <a:t>DNS + health checks reach DR  11.619 s</a:t>
+              <a:t>DNS + health checks reach DR  9.478 s</a:t>
             </a:r>
             <a:endParaRPr lang="en-US" sz="1050" dirty="0"/>
           </a:p>
@@ -4754,7 +4754,7 @@
                 <a:ea typeface="Calibri" pitchFamily="34" charset="-122"/>
                 <a:cs typeface="Calibri" pitchFamily="34" charset="-120"/>
               </a:rPr>
-              <a:t>Engine bookkeeping  0.944 s</a:t>
+              <a:t>Engine bookkeeping  0.745 s</a:t>
             </a:r>
             <a:endParaRPr lang="en-US" sz="1050" dirty="0"/>
           </a:p>
@@ -4834,7 +4834,7 @@
                 <a:ea typeface="Calibri" pitchFamily="34" charset="-122"/>
                 <a:cs typeface="Calibri" pitchFamily="34" charset="-120"/>
               </a:rPr>
-              <a:t>RTO runs from the injected outage to the first healthy check through Traffic Manager (1 s probes; the previous failed check is shown as the precision window). RPO compares every confirmed heartbeat write with the rows that survived in the new primary. Chaos drill with a surprise fault: 57.4 s.</a:t>
+              <a:t>RTO runs from the injected outage to the first healthy check through Traffic Manager from Southeast Asia (the engine checks every second; the previous failed check is shown as the precision window). RPO: one confirmed write per second, and every write the database acknowledged until the failover completed must exist in the new primary. Chaos drill with a surprise fault: 57.4 s.</a:t>
             </a:r>
             <a:endParaRPr lang="en-US" sz="1250" dirty="0"/>
           </a:p>
@@ -5397,7 +5397,7 @@
                 <a:ea typeface="Calibri" pitchFamily="34" charset="-122"/>
                 <a:cs typeface="Calibri" pitchFamily="34" charset="-120"/>
               </a:rPr>
-              <a:t>per month for the DR set-up</a:t>
+              <a:t>per month for the PaaS DR pair</a:t>
             </a:r>
             <a:endParaRPr lang="en-US" sz="1500" dirty="0"/>
           </a:p>
@@ -5436,7 +5436,7 @@
                 <a:ea typeface="Calibri" pitchFamily="34" charset="-122"/>
                 <a:cs typeface="Calibri" pitchFamily="34" charset="-120"/>
               </a:rPr>
-              <a:t>both regions + Traffic Manager at Azure list prices (Retail Prices API) [13]</a:t>
+              <a:t>2× App Service B1, 2× SQL Basic, Traffic Manager at Azure list prices (Retail Prices API) [13]</a:t>
             </a:r>
             <a:endParaRPr lang="en-US" sz="1150" dirty="0"/>
           </a:p>
@@ -6169,7 +6169,7 @@
                 <a:ea typeface="Calibri" pitchFamily="34" charset="-122"/>
                 <a:cs typeface="Calibri" pitchFamily="34" charset="-120"/>
               </a:rPr>
-              <a:t>Your phone goes red, then reconnects to Southeast Asia in ~30 s with the same balance</a:t>
+              <a:t>Your phone goes red, then reconnects to Southeast Asia in about 35 s with the same balance</a:t>
             </a:r>
             <a:endParaRPr lang="en-US" sz="1350" dirty="0"/>
           </a:p>
@@ -6416,7 +6416,7 @@
                 <a:ea typeface="Calibri" pitchFamily="34" charset="-122"/>
                 <a:cs typeface="Calibri" pitchFamily="34" charset="-120"/>
               </a:rPr>
-              <a:t>weekly, and after every infrastructure change</a:t>
+              <a:t>on a set cadence (e.g. quarterly, as SEBI asks) and after every infrastructure change</a:t>
             </a:r>
             <a:endParaRPr lang="en-US" sz="1200" dirty="0"/>
           </a:p>
@@ -7433,7 +7433,7 @@
                 <a:ea typeface="Calibri" pitchFamily="34" charset="-122"/>
                 <a:cs typeface="Calibri" pitchFamily="34" charset="-120"/>
               </a:rPr>
-              <a:t>Fail over, measure, fail back: 9 live drills, RTO ~34 s, RPO 0</a:t>
+              <a:t>Fail over, measure, fail back: 10 live drills, RTO about 30 s, data loss proven write by write</a:t>
             </a:r>
             <a:endParaRPr lang="en-US" sz="1700" dirty="0"/>
           </a:p>
@@ -10825,7 +10825,7 @@
                 <a:ea typeface="Calibri" pitchFamily="34" charset="-122"/>
                 <a:cs typeface="Calibri" pitchFamily="34" charset="-120"/>
               </a:rPr>
-              <a:t>Cockroach Labs, State of Resilience 2025 (1,000 executives) [11]</a:t>
+              <a:t>Cockroach Labs, State of Resilience 2025 (1,000 executives, 2024 survey) [11]</a:t>
             </a:r>
             <a:endParaRPr lang="en-US" sz="950" dirty="0"/>
           </a:p>
@@ -12609,7 +12609,7 @@
                 <a:ea typeface="Calibri" pitchFamily="34" charset="-122"/>
                 <a:cs typeface="Calibri" pitchFamily="34" charset="-120"/>
               </a:rPr>
-              <a:t>The DR Agent measured 34.35 s</a:t>
+              <a:t>The DR Agent measured 29.04 s</a:t>
             </a:r>
             <a:pPr indent="0" marL="0">
               <a:buNone/>
@@ -12623,7 +12623,7 @@
                 <a:ea typeface="Calibri" pitchFamily="34" charset="-122"/>
                 <a:cs typeface="Calibri" pitchFamily="34" charset="-120"/>
               </a:rPr>
-              <a:t> to recover the same kind of service in our live Azure drill (18 Oct 2026), with zero payments lost, and proves it again on every run.</a:t>
+              <a:t> to recover the same kind of service in a live Azure drill (19 Oct 2026), and proved the data loss write by write: 2.8 s of writes, against a 15-minute target.</a:t>
             </a:r>
             <a:endParaRPr lang="en-US" sz="1450" dirty="0"/>
           </a:p>
@@ -13308,7 +13308,7 @@
                 <a:ea typeface="Calibri" pitchFamily="34" charset="-122"/>
                 <a:cs typeface="Calibri" pitchFamily="34" charset="-120"/>
               </a:rPr>
-              <a:t>builds a 21-step drill from an allowlist of safe actions</a:t>
+              <a:t>builds the drill from an allowlist of safe actions; the engine rejects any unsafe plan</a:t>
             </a:r>
             <a:endParaRPr lang="en-US" sz="1250" dirty="0"/>
           </a:p>
@@ -14621,7 +14621,7 @@
                 <a:ea typeface="Calibri" pitchFamily="34" charset="-122"/>
                 <a:cs typeface="Calibri" pitchFamily="34" charset="-120"/>
               </a:rPr>
-              <a:t>Versioned prompt agents in Azure AI Foundry Agent Service. Every answer must match a strict JSON schema and pass code checks.</a:t>
+              <a:t>Versioned prompt agents in Azure AI Foundry Agent Service. Every answer must match a strict JSON schema; every decision that drives an action is checked by code.</a:t>
             </a:r>
             <a:endParaRPr lang="en-US" sz="1500" dirty="0"/>
           </a:p>
@@ -17348,7 +17348,7 @@
                 <a:ea typeface="Calibri" pitchFamily="34" charset="-122"/>
                 <a:cs typeface="Calibri" pitchFamily="34" charset="-120"/>
               </a:rPr>
-              <a:t>The engine runs only 15 known actions (stop/start app, SQL failover, endpoint on/off, ASR test). Anything else is rejected.</a:t>
+              <a:t>15 known actions only (outage injection, start app, SQL failover, endpoint on/off, health waits, ASR test). Region-changing actions only where the safe sequence puts them.</a:t>
             </a:r>
             <a:endParaRPr lang="en-US" sz="1200" dirty="0"/>
           </a:p>
@@ -17670,7 +17670,7 @@
                 <a:ea typeface="Calibri" pitchFamily="34" charset="-122"/>
                 <a:cs typeface="Calibri" pitchFamily="34" charset="-120"/>
               </a:rPr>
-              <a:t>The plan, the forced database failover, the failback and any Validator fix wait for a named approver.</a:t>
+              <a:t>A named approver signs off the plan; the DB team gives the go for the forced failover; the app team approves failback; a human approves any fix. Plans without these gates are rejected.</a:t>
             </a:r>
             <a:endParaRPr lang="en-US" sz="1200" dirty="0"/>
           </a:p>

--- a/docs/deck/DR-Agent-Azure-Day-2026.pptx
+++ b/docs/deck/DR-Agent-Azure-Day-2026.pptx
@@ -20,9 +20,10 @@
     <p:sldId id="268" r:id="rId14"/>
     <p:sldId id="269" r:id="rId15"/>
     <p:sldId id="270" r:id="rId16"/>
+    <p:sldId id="271" r:id="rId17"/>
   </p:sldIdLst>
   <p:notesMasterIdLst>
-    <p:notesMasterId r:id="rId17"/>
+    <p:notesMasterId r:id="rId18"/>
   </p:notesMasterIdLst>
   <p:sldSz cx="12192000" cy="6858000"/>
   <p:notesSz cx="6858000" cy="12192000"/>
@@ -604,7 +605,7 @@
           <a:p>
             <a:r>
               <a:rPr lang="en-US" dirty="0"/>
-              <a:t>Everything runs on Azure. Users reach Contoso Payments through Traffic Manager with priority routing. App Service runs in both regions; Azure SQL replicates through a failover group; the reports VM is protected by Azure Site Recovery. The DR console and engine sit in South India, outside both regions, and call the six agents in Azure AI Foundry. Secrets live in Key Vault with managed identities; the whole environment is Bicep with one-click up and down.</a:t>
+              <a:t>Proving recovery once is not enough; the environment drifts between drills. So the DR Agent watches readiness by itself. Every 10 minutes, with no one asking, it runs the seven readiness checks. When a check starts failing, the Readiness agent investigates with its read-only tools and explains the cause. What happens next depends on the autonomy level: Observe only alerts; Propose fixes, the default, prepares the allowlisted fix and waits for a human to approve it; Auto-fix config drift applies only one kind of fix itself, copying a missing app setting to the Southeast Asia side, and records it in the audit trail. Autopilot never runs during a drill, never starts a drill and never touches production traffic. This is not hypothetical: on 19 October a scheduled check found the PAYMENT_PROVIDER setting missing in Southeast Asia, where the DR app was answering HTTP 503, without anyone triggering it. In production we would move this loop to an Azure Functions timer so it does not depend on the console.</a:t>
             </a:r>
             <a:endParaRPr lang="en-US" dirty="0"/>
           </a:p>
@@ -692,7 +693,7 @@
           <a:p>
             <a:r>
               <a:rPr lang="en-US" dirty="0"/>
-              <a:t>These are measured, not estimated. Nine drills without chaos: RTO between 29.0 and 40.4 seconds, median 32.7, against a 30-minute target. RPO is proven write by write: in the latest drill the old primary acknowledged 6 writes while the forced failover was running, and 2 of them never reached the new primary, so 2.8 seconds of writes were lost, against a 15-minute target. That is exactly what a forced failover with asynchronous replication means, and our own audit found that our first, narrower measurement had missed it. Failback is planned and loses nothing. Site Recovery brought the reports VM up in Southeast Asia in 3 minutes 8 seconds, and we proved the service inside it at 3 minutes 55. Every second of the latest 29.04 s RTO is accounted for: 14.3 s SQL failover, 3.8 s Traffic Manager, 9.5 s DNS and health checks, and under a second each for the injection and our own bookkeeping.</a:t>
+              <a:t>Everything runs on Azure. Users reach Contoso Payments through Traffic Manager with priority routing. App Service runs in both regions; Azure SQL replicates through a failover group; the reports VM is protected by Azure Site Recovery. The DR console and engine sit in South India, outside both regions, and call the six agents in Azure AI Foundry. Secrets live in Key Vault with managed identities; the whole environment is Bicep with one-click up and down.</a:t>
             </a:r>
             <a:endParaRPr lang="en-US" dirty="0"/>
           </a:p>
@@ -780,7 +781,7 @@
           <a:p>
             <a:r>
               <a:rPr lang="en-US" dirty="0"/>
-              <a:t>Cost is where this gets compelling. Every AI agent call we made across two days and nine drills cost 9 cents in total, from Azure Cost Management. The entire environment so far cost $2.44. At Azure list prices the DR set-up itself is $38.26 a month. At the 2026 average of $15,000 a minute, a whole month of DR costs less than a fifth of a second of downtime.</a:t>
+              <a:t>These are measured, not estimated. Ten completed drills so far: RTO between 27.74 and 40.43 seconds, against a 30-minute target. The headline drill ran on 19 October without extra load: RTO 29.04 seconds, and the data loss proven write by write: 2 of 45 acknowledged writes never reached the new primary, so 2.8 seconds of writes were lost, against a 15-minute target. That is what a forced failover with asynchronous replication means; our first, narrower measurement had reported zero, and our own audit found it. We then ran drills under payment load: 20 confirmed database writes per second from parallel writers, every write checked. The best of those: RTO 27.74 seconds, RPO 1.95 seconds, 15 of 466 acknowledged writes lost, failback 2 minutes 55 seconds; another load drill measured RTO 36.04 seconds and RPO 1.84 seconds, 13 of 156 writes lost. For demo week we run App Service Premium P0v3, and failback dropped from 3 minutes 44 seconds on B1 to between 1 minute 43 and 2 minutes 55. Site Recovery brought the reports VM up in Southeast Asia in 3 minutes 8 seconds, and we proved the service inside it at 3 minutes 55. Every second of the 29.04 s RTO is accounted for: 14.3 s SQL failover, 3.8 s Traffic Manager, 9.5 s DNS and health checks, and under a second each for the injection and our own bookkeeping. The Results page also compares each drill with earlier ones: RTO against the median, the biggest segment change, and findings that keep coming back; the Reporter agent gets the same history.</a:t>
             </a:r>
             <a:endParaRPr lang="en-US" dirty="0"/>
           </a:p>
@@ -868,7 +869,7 @@
           <a:p>
             <a:r>
               <a:rPr lang="en-US" dirty="0"/>
-              <a:t>Now the demo, on your own phone. Then the roadmap, which we keep clearly separate from what is built: scheduled drills, more Azure services as new allowlisted actions, Chaos Studio's fault library, Teams approval cards, and a resilience score across many applications.</a:t>
+              <a:t>Cost is where this gets compelling. Every AI agent call we made across two days and nine drills cost 9 cents in total, from Azure Cost Management. The entire environment so far cost $2.44. At Azure list prices the DR set-up itself is $38.26 a month. At the 2026 average of $15,000 a minute, a whole month of DR costs less than a fifth of a second of downtime. For demo week we temporarily upgrade to App Service Premium P0v3 and SQL Standard S1, about $6.75 a day, for faster restarts and failback; one script reverts it after the demo.</a:t>
             </a:r>
             <a:endParaRPr lang="en-US" dirty="0"/>
           </a:p>
@@ -956,7 +957,7 @@
           <a:p>
             <a:r>
               <a:rPr lang="en-US" dirty="0"/>
-              <a:t/>
+              <a:t>Now the demo, on your own phone. Autopilot has already found a configuration gap by itself; we approve the fix, run the drill under payment load, watch it on the live map and on your phones, and finish with the report that compares this drill with earlier ones. Then the roadmap, which we keep clearly separate from what is built: scheduled drills, more Azure services as new allowlisted actions, Chaos Studio's fault library, Teams approval cards, and a resilience score across many applications.</a:t>
             </a:r>
             <a:endParaRPr lang="en-US" dirty="0"/>
           </a:p>
@@ -1086,6 +1087,94 @@
 </p:notes>
 </file>
 
+<file path=ppt/notesSlides/notesSlide16.xml><?xml version="1.0" encoding="utf-8"?>
+<p:notes xmlns:a="http://schemas.openxmlformats.org/drawingml/2006/main" xmlns:r="http://schemas.openxmlformats.org/officeDocument/2006/relationships" xmlns:p="http://schemas.openxmlformats.org/presentationml/2006/main">
+  <p:cSld>
+    <p:spTree>
+      <p:nvGrpSpPr>
+        <p:cNvPr id="1" name=""/>
+        <p:cNvGrpSpPr/>
+        <p:nvPr/>
+      </p:nvGrpSpPr>
+      <p:grpSpPr>
+        <a:xfrm>
+          <a:off x="0" y="0"/>
+          <a:ext cx="0" cy="0"/>
+          <a:chOff x="0" y="0"/>
+          <a:chExt cx="0" cy="0"/>
+        </a:xfrm>
+      </p:grpSpPr>
+      <p:sp>
+        <p:nvSpPr>
+          <p:cNvPr id="2" name="Slide Image Placeholder 1"/>
+          <p:cNvSpPr>
+            <a:spLocks noGrp="1" noRot="1" noChangeAspect="1"/>
+          </p:cNvSpPr>
+          <p:nvPr>
+            <p:ph type="sldImg"/>
+          </p:nvPr>
+        </p:nvSpPr>
+        <p:spPr/>
+      </p:sp>
+      <p:sp>
+        <p:nvSpPr>
+          <p:cNvPr id="3" name="Notes Placeholder 2"/>
+          <p:cNvSpPr>
+            <a:spLocks noGrp="1"/>
+          </p:cNvSpPr>
+          <p:nvPr>
+            <p:ph type="body" idx="1"/>
+          </p:nvPr>
+        </p:nvSpPr>
+        <p:spPr/>
+        <p:txBody>
+          <a:bodyPr/>
+          <a:lstStyle/>
+          <a:p>
+            <a:r>
+              <a:rPr lang="en-US" dirty="0"/>
+              <a:t/>
+            </a:r>
+            <a:endParaRPr lang="en-US" dirty="0"/>
+          </a:p>
+        </p:txBody>
+      </p:sp>
+      <p:sp>
+        <p:nvSpPr>
+          <p:cNvPr id="4" name="Slide Number Placeholder 3"/>
+          <p:cNvSpPr>
+            <a:spLocks noGrp="1"/>
+          </p:cNvSpPr>
+          <p:nvPr>
+            <p:ph type="sldNum" sz="quarter" idx="10"/>
+          </p:nvPr>
+        </p:nvSpPr>
+        <p:spPr/>
+        <p:txBody>
+          <a:bodyPr/>
+          <a:lstStyle/>
+          <a:p>
+            <a:fld id="{F7021451-1387-4CA6-816F-3879F97B5CBC}" type="slidenum">
+              <a:rPr lang="en-US"/>
+              <a:t>16</a:t>
+            </a:fld>
+            <a:endParaRPr lang="en-US"/>
+          </a:p>
+        </p:txBody>
+      </p:sp>
+    </p:spTree>
+    <p:extLst>
+      <p:ext uri="{BB962C8B-B14F-4D97-AF65-F5344CB8AC3E}">
+        <p14:creationId xmlns:p14="http://schemas.microsoft.com/office/powerpoint/2010/main" val="1024086991"/>
+      </p:ext>
+    </p:extLst>
+  </p:cSld>
+  <p:clrMapOvr>
+    <a:masterClrMapping/>
+  </p:clrMapOvr>
+</p:notes>
+</file>
+
 <file path=ppt/notesSlides/notesSlide2.xml><?xml version="1.0" encoding="utf-8"?>
 <p:notes xmlns:a="http://schemas.openxmlformats.org/drawingml/2006/main" xmlns:r="http://schemas.openxmlformats.org/officeDocument/2006/relationships" xmlns:p="http://schemas.openxmlformats.org/presentationml/2006/main">
   <p:cSld>
@@ -1660,7 +1749,7 @@
           <a:p>
             <a:r>
               <a:rPr lang="en-US" dirty="0"/>
-              <a:t>Each agent is a versioned prompt agent in Azure AI Foundry with a strict JSON schema. Code gathers the facts, the agent decides, code checks the answer, and every agent has a deterministic fallback so the demo never depends on one model call. The live activity panel shows exactly what each agent did. It also exposed a real defect: we were giving the Architect a cost multiplier and a dollar budget; it guessed wrong. We fixed the input, not the model, and it is now right first time.</a:t>
+              <a:t>Each agent is a versioned prompt agent in Azure AI Foundry with a strict JSON schema. Code gathers the facts, the agent decides, code checks the answer, and every agent has a deterministic fallback so the demo never depends on one model call. The Validator and Readiness agents do more than read a prepared summary: through Foundry function calling they investigate with read-only tools: probing a region or Traffic Manager, reading the web apps, the SQL failover group and Site Recovery, and diffing app settings between regions. When something is wrong they are required to call at least one tool before they answer, and each agent may only use the tools on its own allowlist. The tools only read; they cannot change anything. Every call appears in the live activity panel, for example: the agent called app_settings_diff and found PAYMENT_PROVIDER only in East Asia. The panel also exposed a real defect earlier: we were giving the Architect a cost multiplier and a dollar budget; we fixed the input, not the model, and it is now right first time.</a:t>
             </a:r>
             <a:endParaRPr lang="en-US" dirty="0"/>
           </a:p>
@@ -1748,7 +1837,7 @@
           <a:p>
             <a:r>
               <a:rPr lang="en-US" dirty="0"/>
-              <a:t>This is why it is safe for a bank. Models never touch Azure directly. The engine runs only allowlisted actions, in a mandatory order, with named human approvals at the risky points, a kill switch, rollback, and a fallback for every agent. We proved it with a surprise fault mid-drill: the Validator diagnosed it, proposed an allowlisted fix, a human approved, and the service recovered in 57.4 seconds.</a:t>
+              <a:t>This is why it is safe for a bank. Models never touch Azure directly: the tools the agents can call only read. Writes happen only in the engine, through 15 allowlisted actions, in a mandatory order. The engine enforces plan safety rules: a plan without a human go before the outage and before failback is rejected, and approvals or commands for a step that is no longer waiting are refused. Add a kill switch, rollback, and a fallback for every agent. After an internal security review we also added login throttling, output escaping, HTTPS-only payment apps, and the public feed hides approver identities. We proved it with a surprise fault mid-drill: the Validator diagnosed it, proposed an allowlisted fix, a human approved, and the service recovered in 57.4 seconds.</a:t>
             </a:r>
             <a:endParaRPr lang="en-US" dirty="0"/>
           </a:p>
@@ -2782,7 +2871,7 @@
                 <a:ea typeface="Calibri" pitchFamily="34" charset="-122"/>
                 <a:cs typeface="Calibri" pitchFamily="34" charset="-120"/>
               </a:rPr>
-              <a:t>Architecture: 100% Azure, across an Azure paired region</a:t>
+              <a:t>Autopilot: it checks readiness by itself</a:t>
             </a:r>
             <a:endParaRPr lang="en-US" sz="3200" dirty="0"/>
           </a:p>
@@ -2821,15 +2910,74 @@
                 <a:ea typeface="Calibri" pitchFamily="34" charset="-122"/>
                 <a:cs typeface="Calibri" pitchFamily="34" charset="-120"/>
               </a:rPr>
-              <a:t>East Asia (primary) and Southeast Asia (DR). The control plane runs outside both: console in South India, its state and secrets in Central India, agents in East US 2.</a:t>
+              <a:t>Every 10 minutes, with no one asking. It never runs during a drill, never starts a drill and never touches traffic.</a:t>
             </a:r>
             <a:endParaRPr lang="en-US" sz="1500" dirty="0"/>
           </a:p>
         </p:txBody>
+      </p:sp>
+      <p:sp>
+        <p:nvSpPr>
+          <p:cNvPr id="4" name="Shape 2"/>
+          <p:cNvSpPr/>
+          <p:nvPr/>
+        </p:nvSpPr>
+        <p:spPr>
+          <a:xfrm>
+            <a:off x="548640" y="1600200"/>
+            <a:ext cx="2029968" cy="1965960"/>
+          </a:xfrm>
+          <a:prstGeom prst="roundRect">
+            <a:avLst>
+              <a:gd name="adj" fmla="val 3721"/>
+            </a:avLst>
+          </a:prstGeom>
+          <a:solidFill>
+            <a:srgbClr val="F1F5F9"/>
+          </a:solidFill>
+          <a:ln w="12700">
+            <a:solidFill>
+              <a:srgbClr val="F1F5F9"/>
+            </a:solidFill>
+            <a:prstDash val="solid"/>
+          </a:ln>
+          <a:effectLst>
+            <a:outerShdw sx="100000" sy="100000" kx="0" ky="0" algn="bl" rotWithShape="0" blurRad="76200" dist="25400" dir="5400000">
+              <a:srgbClr val="000000">
+                <a:alpha val="12000"/>
+              </a:srgbClr>
+            </a:outerShdw>
+          </a:effectLst>
+        </p:spPr>
+      </p:sp>
+      <p:sp>
+        <p:nvSpPr>
+          <p:cNvPr id="5" name="Shape 3"/>
+          <p:cNvSpPr/>
+          <p:nvPr/>
+        </p:nvSpPr>
+        <p:spPr>
+          <a:xfrm>
+            <a:off x="731520" y="1783080"/>
+            <a:ext cx="502920" cy="502920"/>
+          </a:xfrm>
+          <a:prstGeom prst="ellipse">
+            <a:avLst/>
+          </a:prstGeom>
+          <a:solidFill>
+            <a:srgbClr val="171721"/>
+          </a:solidFill>
+          <a:ln w="12700">
+            <a:solidFill>
+              <a:srgbClr val="171721"/>
+            </a:solidFill>
+            <a:prstDash val="solid"/>
+          </a:ln>
+        </p:spPr>
       </p:sp>
       <p:pic>
         <p:nvPicPr>
-          <p:cNvPr id="4" name="Image 0" descr="docs/deck/architecture-deck.png">    </p:cNvPr>
+          <p:cNvPr id="6" name="Image 0" descr="preencoded.png">    </p:cNvPr>
           <p:cNvPicPr>
             <a:picLocks noChangeAspect="1"/>
           </p:cNvPicPr>
@@ -2843,8 +2991,8 @@
         </p:blipFill>
         <p:spPr>
           <a:xfrm>
-            <a:off x="548640" y="1508760"/>
-            <a:ext cx="11064240" cy="4552474"/>
+            <a:off x="857250" y="1908810"/>
+            <a:ext cx="251460" cy="251460"/>
           </a:xfrm>
           <a:prstGeom prst="rect">
             <a:avLst/>
@@ -2853,18 +3001,1089 @@
       </p:pic>
       <p:sp>
         <p:nvSpPr>
-          <p:cNvPr id="5" name="Shape 2"/>
+          <p:cNvPr id="7" name="Text 4"/>
+          <p:cNvSpPr txBox="1"/>
+          <p:nvPr/>
+        </p:nvSpPr>
+        <p:spPr>
+          <a:xfrm>
+            <a:off x="731520" y="2377440"/>
+            <a:ext cx="1709928" cy="365760"/>
+          </a:xfrm>
+          <a:prstGeom prst="rect">
+            <a:avLst/>
+          </a:prstGeom>
+          <a:noFill/>
+          <a:ln/>
+        </p:spPr>
+        <p:txBody>
+          <a:bodyPr wrap="square" lIns="0" tIns="0" rIns="0" bIns="0" rtlCol="0" anchor="ctr"/>
+          <a:lstStyle/>
+          <a:p>
+            <a:pPr indent="0" marL="0">
+              <a:buNone/>
+            </a:pPr>
+            <a:r>
+              <a:rPr lang="en-US" sz="1400" b="1" dirty="0">
+                <a:solidFill>
+                  <a:srgbClr val="171721"/>
+                </a:solidFill>
+                <a:latin typeface="Calibri" pitchFamily="34" charset="0"/>
+                <a:ea typeface="Calibri" pitchFamily="34" charset="-122"/>
+                <a:cs typeface="Calibri" pitchFamily="34" charset="-120"/>
+              </a:rPr>
+              <a:t>Every 10 minutes</a:t>
+            </a:r>
+            <a:endParaRPr lang="en-US" sz="1400" dirty="0"/>
+          </a:p>
+        </p:txBody>
+      </p:sp>
+      <p:sp>
+        <p:nvSpPr>
+          <p:cNvPr id="8" name="Text 5"/>
+          <p:cNvSpPr txBox="1"/>
+          <p:nvPr/>
+        </p:nvSpPr>
+        <p:spPr>
+          <a:xfrm>
+            <a:off x="731520" y="2743200"/>
+            <a:ext cx="1709928" cy="731520"/>
+          </a:xfrm>
+          <a:prstGeom prst="rect">
+            <a:avLst/>
+          </a:prstGeom>
+          <a:noFill/>
+          <a:ln/>
+        </p:spPr>
+        <p:txBody>
+          <a:bodyPr wrap="square" lIns="0" tIns="0" rIns="0" bIns="0" rtlCol="0" anchor="t"/>
+          <a:lstStyle/>
+          <a:p>
+            <a:pPr indent="0" marL="0">
+              <a:buNone/>
+            </a:pPr>
+            <a:r>
+              <a:rPr lang="en-US" sz="1150" dirty="0">
+                <a:solidFill>
+                  <a:srgbClr val="1B2635"/>
+                </a:solidFill>
+                <a:latin typeface="Calibri" pitchFamily="34" charset="0"/>
+                <a:ea typeface="Calibri" pitchFamily="34" charset="-122"/>
+                <a:cs typeface="Calibri" pitchFamily="34" charset="-120"/>
+              </a:rPr>
+              <a:t>A scheduled check, or press Run check now</a:t>
+            </a:r>
+            <a:endParaRPr lang="en-US" sz="1150" dirty="0"/>
+          </a:p>
+        </p:txBody>
+      </p:sp>
+      <p:sp>
+        <p:nvSpPr>
+          <p:cNvPr id="9" name="Text 6"/>
+          <p:cNvSpPr txBox="1"/>
+          <p:nvPr/>
+        </p:nvSpPr>
+        <p:spPr>
+          <a:xfrm>
+            <a:off x="2578608" y="2377440"/>
+            <a:ext cx="228600" cy="365760"/>
+          </a:xfrm>
+          <a:prstGeom prst="rect">
+            <a:avLst/>
+          </a:prstGeom>
+          <a:noFill/>
+          <a:ln/>
+        </p:spPr>
+        <p:txBody>
+          <a:bodyPr wrap="square" lIns="0" tIns="0" rIns="0" bIns="0" rtlCol="0" anchor="ctr"/>
+          <a:lstStyle/>
+          <a:p>
+            <a:pPr algn="ctr" indent="0" marL="0">
+              <a:buNone/>
+            </a:pPr>
+            <a:r>
+              <a:rPr lang="en-US" sz="1600" b="1" dirty="0">
+                <a:solidFill>
+                  <a:srgbClr val="5E2CFE"/>
+                </a:solidFill>
+                <a:latin typeface="Calibri" pitchFamily="34" charset="0"/>
+                <a:ea typeface="Calibri" pitchFamily="34" charset="-122"/>
+                <a:cs typeface="Calibri" pitchFamily="34" charset="-120"/>
+              </a:rPr>
+              <a:t>→</a:t>
+            </a:r>
+            <a:endParaRPr lang="en-US" sz="1600" dirty="0"/>
+          </a:p>
+        </p:txBody>
+      </p:sp>
+      <p:sp>
+        <p:nvSpPr>
+          <p:cNvPr id="10" name="Shape 7"/>
           <p:cNvSpPr/>
           <p:nvPr/>
         </p:nvSpPr>
         <p:spPr>
           <a:xfrm>
-            <a:off x="548640" y="6144768"/>
-            <a:ext cx="1170432" cy="292608"/>
+            <a:off x="2807208" y="1600200"/>
+            <a:ext cx="2029968" cy="1965960"/>
           </a:xfrm>
           <a:prstGeom prst="roundRect">
             <a:avLst>
-              <a:gd name="adj" fmla="val 18750"/>
+              <a:gd name="adj" fmla="val 3721"/>
+            </a:avLst>
+          </a:prstGeom>
+          <a:solidFill>
+            <a:srgbClr val="F1F5F9"/>
+          </a:solidFill>
+          <a:ln w="12700">
+            <a:solidFill>
+              <a:srgbClr val="F1F5F9"/>
+            </a:solidFill>
+            <a:prstDash val="solid"/>
+          </a:ln>
+          <a:effectLst>
+            <a:outerShdw sx="100000" sy="100000" kx="0" ky="0" algn="bl" rotWithShape="0" blurRad="76200" dist="25400" dir="5400000">
+              <a:srgbClr val="000000">
+                <a:alpha val="12000"/>
+              </a:srgbClr>
+            </a:outerShdw>
+          </a:effectLst>
+        </p:spPr>
+      </p:sp>
+      <p:sp>
+        <p:nvSpPr>
+          <p:cNvPr id="11" name="Shape 8"/>
+          <p:cNvSpPr/>
+          <p:nvPr/>
+        </p:nvSpPr>
+        <p:spPr>
+          <a:xfrm>
+            <a:off x="2990088" y="1783080"/>
+            <a:ext cx="502920" cy="502920"/>
+          </a:xfrm>
+          <a:prstGeom prst="ellipse">
+            <a:avLst/>
+          </a:prstGeom>
+          <a:solidFill>
+            <a:srgbClr val="171721"/>
+          </a:solidFill>
+          <a:ln w="12700">
+            <a:solidFill>
+              <a:srgbClr val="171721"/>
+            </a:solidFill>
+            <a:prstDash val="solid"/>
+          </a:ln>
+        </p:spPr>
+      </p:sp>
+      <p:pic>
+        <p:nvPicPr>
+          <p:cNvPr id="12" name="Image 1" descr="preencoded.png">    </p:cNvPr>
+          <p:cNvPicPr>
+            <a:picLocks noChangeAspect="1"/>
+          </p:cNvPicPr>
+          <p:nvPr/>
+        </p:nvPicPr>
+        <p:blipFill>
+          <a:blip r:embed="rId2"/>
+          <a:stretch>
+            <a:fillRect/>
+          </a:stretch>
+        </p:blipFill>
+        <p:spPr>
+          <a:xfrm>
+            <a:off x="3115818" y="1908810"/>
+            <a:ext cx="251460" cy="251460"/>
+          </a:xfrm>
+          <a:prstGeom prst="rect">
+            <a:avLst/>
+          </a:prstGeom>
+        </p:spPr>
+      </p:pic>
+      <p:sp>
+        <p:nvSpPr>
+          <p:cNvPr id="13" name="Text 9"/>
+          <p:cNvSpPr txBox="1"/>
+          <p:nvPr/>
+        </p:nvSpPr>
+        <p:spPr>
+          <a:xfrm>
+            <a:off x="2990088" y="2377440"/>
+            <a:ext cx="1709928" cy="365760"/>
+          </a:xfrm>
+          <a:prstGeom prst="rect">
+            <a:avLst/>
+          </a:prstGeom>
+          <a:noFill/>
+          <a:ln/>
+        </p:spPr>
+        <p:txBody>
+          <a:bodyPr wrap="square" lIns="0" tIns="0" rIns="0" bIns="0" rtlCol="0" anchor="ctr"/>
+          <a:lstStyle/>
+          <a:p>
+            <a:pPr indent="0" marL="0">
+              <a:buNone/>
+            </a:pPr>
+            <a:r>
+              <a:rPr lang="en-US" sz="1400" b="1" dirty="0">
+                <a:solidFill>
+                  <a:srgbClr val="171721"/>
+                </a:solidFill>
+                <a:latin typeface="Calibri" pitchFamily="34" charset="0"/>
+                <a:ea typeface="Calibri" pitchFamily="34" charset="-122"/>
+                <a:cs typeface="Calibri" pitchFamily="34" charset="-120"/>
+              </a:rPr>
+              <a:t>7 readiness checks</a:t>
+            </a:r>
+            <a:endParaRPr lang="en-US" sz="1400" dirty="0"/>
+          </a:p>
+        </p:txBody>
+      </p:sp>
+      <p:sp>
+        <p:nvSpPr>
+          <p:cNvPr id="14" name="Text 10"/>
+          <p:cNvSpPr txBox="1"/>
+          <p:nvPr/>
+        </p:nvSpPr>
+        <p:spPr>
+          <a:xfrm>
+            <a:off x="2990088" y="2743200"/>
+            <a:ext cx="1709928" cy="731520"/>
+          </a:xfrm>
+          <a:prstGeom prst="rect">
+            <a:avLst/>
+          </a:prstGeom>
+          <a:noFill/>
+          <a:ln/>
+        </p:spPr>
+        <p:txBody>
+          <a:bodyPr wrap="square" lIns="0" tIns="0" rIns="0" bIns="0" rtlCol="0" anchor="t"/>
+          <a:lstStyle/>
+          <a:p>
+            <a:pPr indent="0" marL="0">
+              <a:buNone/>
+            </a:pPr>
+            <a:r>
+              <a:rPr lang="en-US" sz="1150" dirty="0">
+                <a:solidFill>
+                  <a:srgbClr val="1B2635"/>
+                </a:solidFill>
+                <a:latin typeface="Calibri" pitchFamily="34" charset="0"/>
+                <a:ea typeface="Calibri" pitchFamily="34" charset="-122"/>
+                <a:cs typeface="Calibri" pitchFamily="34" charset="-120"/>
+              </a:rPr>
+              <a:t>The same deterministic checks as Phase 1, with evidence</a:t>
+            </a:r>
+            <a:endParaRPr lang="en-US" sz="1150" dirty="0"/>
+          </a:p>
+        </p:txBody>
+      </p:sp>
+      <p:sp>
+        <p:nvSpPr>
+          <p:cNvPr id="15" name="Text 11"/>
+          <p:cNvSpPr txBox="1"/>
+          <p:nvPr/>
+        </p:nvSpPr>
+        <p:spPr>
+          <a:xfrm>
+            <a:off x="4837176" y="2377440"/>
+            <a:ext cx="228600" cy="365760"/>
+          </a:xfrm>
+          <a:prstGeom prst="rect">
+            <a:avLst/>
+          </a:prstGeom>
+          <a:noFill/>
+          <a:ln/>
+        </p:spPr>
+        <p:txBody>
+          <a:bodyPr wrap="square" lIns="0" tIns="0" rIns="0" bIns="0" rtlCol="0" anchor="ctr"/>
+          <a:lstStyle/>
+          <a:p>
+            <a:pPr algn="ctr" indent="0" marL="0">
+              <a:buNone/>
+            </a:pPr>
+            <a:r>
+              <a:rPr lang="en-US" sz="1600" b="1" dirty="0">
+                <a:solidFill>
+                  <a:srgbClr val="5E2CFE"/>
+                </a:solidFill>
+                <a:latin typeface="Calibri" pitchFamily="34" charset="0"/>
+                <a:ea typeface="Calibri" pitchFamily="34" charset="-122"/>
+                <a:cs typeface="Calibri" pitchFamily="34" charset="-120"/>
+              </a:rPr>
+              <a:t>→</a:t>
+            </a:r>
+            <a:endParaRPr lang="en-US" sz="1600" dirty="0"/>
+          </a:p>
+        </p:txBody>
+      </p:sp>
+      <p:sp>
+        <p:nvSpPr>
+          <p:cNvPr id="16" name="Shape 12"/>
+          <p:cNvSpPr/>
+          <p:nvPr/>
+        </p:nvSpPr>
+        <p:spPr>
+          <a:xfrm>
+            <a:off x="5065776" y="1600200"/>
+            <a:ext cx="2029968" cy="1965960"/>
+          </a:xfrm>
+          <a:prstGeom prst="roundRect">
+            <a:avLst>
+              <a:gd name="adj" fmla="val 3721"/>
+            </a:avLst>
+          </a:prstGeom>
+          <a:solidFill>
+            <a:srgbClr val="F1F5F9"/>
+          </a:solidFill>
+          <a:ln w="12700">
+            <a:solidFill>
+              <a:srgbClr val="F1F5F9"/>
+            </a:solidFill>
+            <a:prstDash val="solid"/>
+          </a:ln>
+          <a:effectLst>
+            <a:outerShdw sx="100000" sy="100000" kx="0" ky="0" algn="bl" rotWithShape="0" blurRad="76200" dist="25400" dir="5400000">
+              <a:srgbClr val="000000">
+                <a:alpha val="12000"/>
+              </a:srgbClr>
+            </a:outerShdw>
+          </a:effectLst>
+        </p:spPr>
+      </p:sp>
+      <p:sp>
+        <p:nvSpPr>
+          <p:cNvPr id="17" name="Shape 13"/>
+          <p:cNvSpPr/>
+          <p:nvPr/>
+        </p:nvSpPr>
+        <p:spPr>
+          <a:xfrm>
+            <a:off x="5248656" y="1783080"/>
+            <a:ext cx="502920" cy="502920"/>
+          </a:xfrm>
+          <a:prstGeom prst="ellipse">
+            <a:avLst/>
+          </a:prstGeom>
+          <a:solidFill>
+            <a:srgbClr val="5E2CFE"/>
+          </a:solidFill>
+          <a:ln w="12700">
+            <a:solidFill>
+              <a:srgbClr val="5E2CFE"/>
+            </a:solidFill>
+            <a:prstDash val="solid"/>
+          </a:ln>
+        </p:spPr>
+      </p:sp>
+      <p:pic>
+        <p:nvPicPr>
+          <p:cNvPr id="18" name="Image 2" descr="preencoded.png">    </p:cNvPr>
+          <p:cNvPicPr>
+            <a:picLocks noChangeAspect="1"/>
+          </p:cNvPicPr>
+          <p:nvPr/>
+        </p:nvPicPr>
+        <p:blipFill>
+          <a:blip r:embed="rId3"/>
+          <a:stretch>
+            <a:fillRect/>
+          </a:stretch>
+        </p:blipFill>
+        <p:spPr>
+          <a:xfrm>
+            <a:off x="5374386" y="1908810"/>
+            <a:ext cx="251460" cy="251460"/>
+          </a:xfrm>
+          <a:prstGeom prst="rect">
+            <a:avLst/>
+          </a:prstGeom>
+        </p:spPr>
+      </p:pic>
+      <p:sp>
+        <p:nvSpPr>
+          <p:cNvPr id="19" name="Text 14"/>
+          <p:cNvSpPr txBox="1"/>
+          <p:nvPr/>
+        </p:nvSpPr>
+        <p:spPr>
+          <a:xfrm>
+            <a:off x="5248656" y="2377440"/>
+            <a:ext cx="1709928" cy="365760"/>
+          </a:xfrm>
+          <a:prstGeom prst="rect">
+            <a:avLst/>
+          </a:prstGeom>
+          <a:noFill/>
+          <a:ln/>
+        </p:spPr>
+        <p:txBody>
+          <a:bodyPr wrap="square" lIns="0" tIns="0" rIns="0" bIns="0" rtlCol="0" anchor="ctr"/>
+          <a:lstStyle/>
+          <a:p>
+            <a:pPr indent="0" marL="0">
+              <a:buNone/>
+            </a:pPr>
+            <a:r>
+              <a:rPr lang="en-US" sz="1400" b="1" dirty="0">
+                <a:solidFill>
+                  <a:srgbClr val="171721"/>
+                </a:solidFill>
+                <a:latin typeface="Calibri" pitchFamily="34" charset="0"/>
+                <a:ea typeface="Calibri" pitchFamily="34" charset="-122"/>
+                <a:cs typeface="Calibri" pitchFamily="34" charset="-120"/>
+              </a:rPr>
+              <a:t>Agent investigates</a:t>
+            </a:r>
+            <a:endParaRPr lang="en-US" sz="1400" dirty="0"/>
+          </a:p>
+        </p:txBody>
+      </p:sp>
+      <p:sp>
+        <p:nvSpPr>
+          <p:cNvPr id="20" name="Text 15"/>
+          <p:cNvSpPr txBox="1"/>
+          <p:nvPr/>
+        </p:nvSpPr>
+        <p:spPr>
+          <a:xfrm>
+            <a:off x="5248656" y="2743200"/>
+            <a:ext cx="1709928" cy="731520"/>
+          </a:xfrm>
+          <a:prstGeom prst="rect">
+            <a:avLst/>
+          </a:prstGeom>
+          <a:noFill/>
+          <a:ln/>
+        </p:spPr>
+        <p:txBody>
+          <a:bodyPr wrap="square" lIns="0" tIns="0" rIns="0" bIns="0" rtlCol="0" anchor="t"/>
+          <a:lstStyle/>
+          <a:p>
+            <a:pPr indent="0" marL="0">
+              <a:buNone/>
+            </a:pPr>
+            <a:r>
+              <a:rPr lang="en-US" sz="1150" dirty="0">
+                <a:solidFill>
+                  <a:srgbClr val="1B2635"/>
+                </a:solidFill>
+                <a:latin typeface="Calibri" pitchFamily="34" charset="0"/>
+                <a:ea typeface="Calibri" pitchFamily="34" charset="-122"/>
+                <a:cs typeface="Calibri" pitchFamily="34" charset="-120"/>
+              </a:rPr>
+              <a:t>On a new failure, Readiness calls its read-only tools and explains the cause</a:t>
+            </a:r>
+            <a:endParaRPr lang="en-US" sz="1150" dirty="0"/>
+          </a:p>
+        </p:txBody>
+      </p:sp>
+      <p:sp>
+        <p:nvSpPr>
+          <p:cNvPr id="21" name="Text 16"/>
+          <p:cNvSpPr txBox="1"/>
+          <p:nvPr/>
+        </p:nvSpPr>
+        <p:spPr>
+          <a:xfrm>
+            <a:off x="7095744" y="2377440"/>
+            <a:ext cx="228600" cy="365760"/>
+          </a:xfrm>
+          <a:prstGeom prst="rect">
+            <a:avLst/>
+          </a:prstGeom>
+          <a:noFill/>
+          <a:ln/>
+        </p:spPr>
+        <p:txBody>
+          <a:bodyPr wrap="square" lIns="0" tIns="0" rIns="0" bIns="0" rtlCol="0" anchor="ctr"/>
+          <a:lstStyle/>
+          <a:p>
+            <a:pPr algn="ctr" indent="0" marL="0">
+              <a:buNone/>
+            </a:pPr>
+            <a:r>
+              <a:rPr lang="en-US" sz="1600" b="1" dirty="0">
+                <a:solidFill>
+                  <a:srgbClr val="5E2CFE"/>
+                </a:solidFill>
+                <a:latin typeface="Calibri" pitchFamily="34" charset="0"/>
+                <a:ea typeface="Calibri" pitchFamily="34" charset="-122"/>
+                <a:cs typeface="Calibri" pitchFamily="34" charset="-120"/>
+              </a:rPr>
+              <a:t>→</a:t>
+            </a:r>
+            <a:endParaRPr lang="en-US" sz="1600" dirty="0"/>
+          </a:p>
+        </p:txBody>
+      </p:sp>
+      <p:sp>
+        <p:nvSpPr>
+          <p:cNvPr id="22" name="Shape 17"/>
+          <p:cNvSpPr/>
+          <p:nvPr/>
+        </p:nvSpPr>
+        <p:spPr>
+          <a:xfrm>
+            <a:off x="7324344" y="1600200"/>
+            <a:ext cx="2029968" cy="1965960"/>
+          </a:xfrm>
+          <a:prstGeom prst="roundRect">
+            <a:avLst>
+              <a:gd name="adj" fmla="val 3721"/>
+            </a:avLst>
+          </a:prstGeom>
+          <a:solidFill>
+            <a:srgbClr val="F1F5F9"/>
+          </a:solidFill>
+          <a:ln w="12700">
+            <a:solidFill>
+              <a:srgbClr val="F1F5F9"/>
+            </a:solidFill>
+            <a:prstDash val="solid"/>
+          </a:ln>
+          <a:effectLst>
+            <a:outerShdw sx="100000" sy="100000" kx="0" ky="0" algn="bl" rotWithShape="0" blurRad="76200" dist="25400" dir="5400000">
+              <a:srgbClr val="000000">
+                <a:alpha val="12000"/>
+              </a:srgbClr>
+            </a:outerShdw>
+          </a:effectLst>
+        </p:spPr>
+      </p:sp>
+      <p:sp>
+        <p:nvSpPr>
+          <p:cNvPr id="23" name="Shape 18"/>
+          <p:cNvSpPr/>
+          <p:nvPr/>
+        </p:nvSpPr>
+        <p:spPr>
+          <a:xfrm>
+            <a:off x="7507224" y="1783080"/>
+            <a:ext cx="502920" cy="502920"/>
+          </a:xfrm>
+          <a:prstGeom prst="ellipse">
+            <a:avLst/>
+          </a:prstGeom>
+          <a:solidFill>
+            <a:srgbClr val="171721"/>
+          </a:solidFill>
+          <a:ln w="12700">
+            <a:solidFill>
+              <a:srgbClr val="171721"/>
+            </a:solidFill>
+            <a:prstDash val="solid"/>
+          </a:ln>
+        </p:spPr>
+      </p:sp>
+      <p:pic>
+        <p:nvPicPr>
+          <p:cNvPr id="24" name="Image 3" descr="preencoded.png">    </p:cNvPr>
+          <p:cNvPicPr>
+            <a:picLocks noChangeAspect="1"/>
+          </p:cNvPicPr>
+          <p:nvPr/>
+        </p:nvPicPr>
+        <p:blipFill>
+          <a:blip r:embed="rId4"/>
+          <a:stretch>
+            <a:fillRect/>
+          </a:stretch>
+        </p:blipFill>
+        <p:spPr>
+          <a:xfrm>
+            <a:off x="7632954" y="1908810"/>
+            <a:ext cx="251460" cy="251460"/>
+          </a:xfrm>
+          <a:prstGeom prst="rect">
+            <a:avLst/>
+          </a:prstGeom>
+        </p:spPr>
+      </p:pic>
+      <p:sp>
+        <p:nvSpPr>
+          <p:cNvPr id="25" name="Text 19"/>
+          <p:cNvSpPr txBox="1"/>
+          <p:nvPr/>
+        </p:nvSpPr>
+        <p:spPr>
+          <a:xfrm>
+            <a:off x="7507224" y="2377440"/>
+            <a:ext cx="1709928" cy="365760"/>
+          </a:xfrm>
+          <a:prstGeom prst="rect">
+            <a:avLst/>
+          </a:prstGeom>
+          <a:noFill/>
+          <a:ln/>
+        </p:spPr>
+        <p:txBody>
+          <a:bodyPr wrap="square" lIns="0" tIns="0" rIns="0" bIns="0" rtlCol="0" anchor="ctr"/>
+          <a:lstStyle/>
+          <a:p>
+            <a:pPr indent="0" marL="0">
+              <a:buNone/>
+            </a:pPr>
+            <a:r>
+              <a:rPr lang="en-US" sz="1400" b="1" dirty="0">
+                <a:solidFill>
+                  <a:srgbClr val="171721"/>
+                </a:solidFill>
+                <a:latin typeface="Calibri" pitchFamily="34" charset="0"/>
+                <a:ea typeface="Calibri" pitchFamily="34" charset="-122"/>
+                <a:cs typeface="Calibri" pitchFamily="34" charset="-120"/>
+              </a:rPr>
+              <a:t>Propose or auto-fix</a:t>
+            </a:r>
+            <a:endParaRPr lang="en-US" sz="1400" dirty="0"/>
+          </a:p>
+        </p:txBody>
+      </p:sp>
+      <p:sp>
+        <p:nvSpPr>
+          <p:cNvPr id="26" name="Text 20"/>
+          <p:cNvSpPr txBox="1"/>
+          <p:nvPr/>
+        </p:nvSpPr>
+        <p:spPr>
+          <a:xfrm>
+            <a:off x="7507224" y="2743200"/>
+            <a:ext cx="1709928" cy="731520"/>
+          </a:xfrm>
+          <a:prstGeom prst="rect">
+            <a:avLst/>
+          </a:prstGeom>
+          <a:noFill/>
+          <a:ln/>
+        </p:spPr>
+        <p:txBody>
+          <a:bodyPr wrap="square" lIns="0" tIns="0" rIns="0" bIns="0" rtlCol="0" anchor="t"/>
+          <a:lstStyle/>
+          <a:p>
+            <a:pPr indent="0" marL="0">
+              <a:buNone/>
+            </a:pPr>
+            <a:r>
+              <a:rPr lang="en-US" sz="1150" dirty="0">
+                <a:solidFill>
+                  <a:srgbClr val="1B2635"/>
+                </a:solidFill>
+                <a:latin typeface="Calibri" pitchFamily="34" charset="0"/>
+                <a:ea typeface="Calibri" pitchFamily="34" charset="-122"/>
+                <a:cs typeface="Calibri" pitchFamily="34" charset="-120"/>
+              </a:rPr>
+              <a:t>Only the allowlisted DR-side fix; by default it waits for a human</a:t>
+            </a:r>
+            <a:endParaRPr lang="en-US" sz="1150" dirty="0"/>
+          </a:p>
+        </p:txBody>
+      </p:sp>
+      <p:sp>
+        <p:nvSpPr>
+          <p:cNvPr id="27" name="Text 21"/>
+          <p:cNvSpPr txBox="1"/>
+          <p:nvPr/>
+        </p:nvSpPr>
+        <p:spPr>
+          <a:xfrm>
+            <a:off x="9354312" y="2377440"/>
+            <a:ext cx="228600" cy="365760"/>
+          </a:xfrm>
+          <a:prstGeom prst="rect">
+            <a:avLst/>
+          </a:prstGeom>
+          <a:noFill/>
+          <a:ln/>
+        </p:spPr>
+        <p:txBody>
+          <a:bodyPr wrap="square" lIns="0" tIns="0" rIns="0" bIns="0" rtlCol="0" anchor="ctr"/>
+          <a:lstStyle/>
+          <a:p>
+            <a:pPr algn="ctr" indent="0" marL="0">
+              <a:buNone/>
+            </a:pPr>
+            <a:r>
+              <a:rPr lang="en-US" sz="1600" b="1" dirty="0">
+                <a:solidFill>
+                  <a:srgbClr val="5E2CFE"/>
+                </a:solidFill>
+                <a:latin typeface="Calibri" pitchFamily="34" charset="0"/>
+                <a:ea typeface="Calibri" pitchFamily="34" charset="-122"/>
+                <a:cs typeface="Calibri" pitchFamily="34" charset="-120"/>
+              </a:rPr>
+              <a:t>→</a:t>
+            </a:r>
+            <a:endParaRPr lang="en-US" sz="1600" dirty="0"/>
+          </a:p>
+        </p:txBody>
+      </p:sp>
+      <p:sp>
+        <p:nvSpPr>
+          <p:cNvPr id="28" name="Shape 22"/>
+          <p:cNvSpPr/>
+          <p:nvPr/>
+        </p:nvSpPr>
+        <p:spPr>
+          <a:xfrm>
+            <a:off x="9582912" y="1600200"/>
+            <a:ext cx="2029968" cy="1965960"/>
+          </a:xfrm>
+          <a:prstGeom prst="roundRect">
+            <a:avLst>
+              <a:gd name="adj" fmla="val 3721"/>
+            </a:avLst>
+          </a:prstGeom>
+          <a:solidFill>
+            <a:srgbClr val="F1F5F9"/>
+          </a:solidFill>
+          <a:ln w="12700">
+            <a:solidFill>
+              <a:srgbClr val="F1F5F9"/>
+            </a:solidFill>
+            <a:prstDash val="solid"/>
+          </a:ln>
+          <a:effectLst>
+            <a:outerShdw sx="100000" sy="100000" kx="0" ky="0" algn="bl" rotWithShape="0" blurRad="76200" dist="25400" dir="5400000">
+              <a:srgbClr val="000000">
+                <a:alpha val="12000"/>
+              </a:srgbClr>
+            </a:outerShdw>
+          </a:effectLst>
+        </p:spPr>
+      </p:sp>
+      <p:sp>
+        <p:nvSpPr>
+          <p:cNvPr id="29" name="Shape 23"/>
+          <p:cNvSpPr/>
+          <p:nvPr/>
+        </p:nvSpPr>
+        <p:spPr>
+          <a:xfrm>
+            <a:off x="9765792" y="1783080"/>
+            <a:ext cx="502920" cy="502920"/>
+          </a:xfrm>
+          <a:prstGeom prst="ellipse">
+            <a:avLst/>
+          </a:prstGeom>
+          <a:solidFill>
+            <a:srgbClr val="171721"/>
+          </a:solidFill>
+          <a:ln w="12700">
+            <a:solidFill>
+              <a:srgbClr val="171721"/>
+            </a:solidFill>
+            <a:prstDash val="solid"/>
+          </a:ln>
+        </p:spPr>
+      </p:sp>
+      <p:pic>
+        <p:nvPicPr>
+          <p:cNvPr id="30" name="Image 4" descr="preencoded.png">    </p:cNvPr>
+          <p:cNvPicPr>
+            <a:picLocks noChangeAspect="1"/>
+          </p:cNvPicPr>
+          <p:nvPr/>
+        </p:nvPicPr>
+        <p:blipFill>
+          <a:blip r:embed="rId5"/>
+          <a:stretch>
+            <a:fillRect/>
+          </a:stretch>
+        </p:blipFill>
+        <p:spPr>
+          <a:xfrm>
+            <a:off x="9891522" y="1908810"/>
+            <a:ext cx="251460" cy="251460"/>
+          </a:xfrm>
+          <a:prstGeom prst="rect">
+            <a:avLst/>
+          </a:prstGeom>
+        </p:spPr>
+      </p:pic>
+      <p:sp>
+        <p:nvSpPr>
+          <p:cNvPr id="31" name="Text 24"/>
+          <p:cNvSpPr txBox="1"/>
+          <p:nvPr/>
+        </p:nvSpPr>
+        <p:spPr>
+          <a:xfrm>
+            <a:off x="9765792" y="2377440"/>
+            <a:ext cx="1709928" cy="365760"/>
+          </a:xfrm>
+          <a:prstGeom prst="rect">
+            <a:avLst/>
+          </a:prstGeom>
+          <a:noFill/>
+          <a:ln/>
+        </p:spPr>
+        <p:txBody>
+          <a:bodyPr wrap="square" lIns="0" tIns="0" rIns="0" bIns="0" rtlCol="0" anchor="ctr"/>
+          <a:lstStyle/>
+          <a:p>
+            <a:pPr indent="0" marL="0">
+              <a:buNone/>
+            </a:pPr>
+            <a:r>
+              <a:rPr lang="en-US" sz="1400" b="1" dirty="0">
+                <a:solidFill>
+                  <a:srgbClr val="171721"/>
+                </a:solidFill>
+                <a:latin typeface="Calibri" pitchFamily="34" charset="0"/>
+                <a:ea typeface="Calibri" pitchFamily="34" charset="-122"/>
+                <a:cs typeface="Calibri" pitchFamily="34" charset="-120"/>
+              </a:rPr>
+              <a:t>Audited</a:t>
+            </a:r>
+            <a:endParaRPr lang="en-US" sz="1400" dirty="0"/>
+          </a:p>
+        </p:txBody>
+      </p:sp>
+      <p:sp>
+        <p:nvSpPr>
+          <p:cNvPr id="32" name="Text 25"/>
+          <p:cNvSpPr txBox="1"/>
+          <p:nvPr/>
+        </p:nvSpPr>
+        <p:spPr>
+          <a:xfrm>
+            <a:off x="9765792" y="2743200"/>
+            <a:ext cx="1709928" cy="731520"/>
+          </a:xfrm>
+          <a:prstGeom prst="rect">
+            <a:avLst/>
+          </a:prstGeom>
+          <a:noFill/>
+          <a:ln/>
+        </p:spPr>
+        <p:txBody>
+          <a:bodyPr wrap="square" lIns="0" tIns="0" rIns="0" bIns="0" rtlCol="0" anchor="t"/>
+          <a:lstStyle/>
+          <a:p>
+            <a:pPr indent="0" marL="0">
+              <a:buNone/>
+            </a:pPr>
+            <a:r>
+              <a:rPr lang="en-US" sz="1150" dirty="0">
+                <a:solidFill>
+                  <a:srgbClr val="1B2635"/>
+                </a:solidFill>
+                <a:latin typeface="Calibri" pitchFamily="34" charset="0"/>
+                <a:ea typeface="Calibri" pitchFamily="34" charset="-122"/>
+                <a:cs typeface="Calibri" pitchFamily="34" charset="-120"/>
+              </a:rPr>
+              <a:t>Every check, finding and fix is stored and shown on the Overview</a:t>
+            </a:r>
+            <a:endParaRPr lang="en-US" sz="1150" dirty="0"/>
+          </a:p>
+        </p:txBody>
+      </p:sp>
+      <p:sp>
+        <p:nvSpPr>
+          <p:cNvPr id="33" name="Text 26"/>
+          <p:cNvSpPr txBox="1"/>
+          <p:nvPr/>
+        </p:nvSpPr>
+        <p:spPr>
+          <a:xfrm>
+            <a:off x="548640" y="3749040"/>
+            <a:ext cx="11064240" cy="365760"/>
+          </a:xfrm>
+          <a:prstGeom prst="rect">
+            <a:avLst/>
+          </a:prstGeom>
+          <a:noFill/>
+          <a:ln/>
+        </p:spPr>
+        <p:txBody>
+          <a:bodyPr wrap="square" lIns="0" tIns="0" rIns="0" bIns="0" rtlCol="0" anchor="ctr"/>
+          <a:lstStyle/>
+          <a:p>
+            <a:pPr indent="0" marL="0">
+              <a:buNone/>
+            </a:pPr>
+            <a:r>
+              <a:rPr lang="en-US" sz="1700" b="1" dirty="0">
+                <a:solidFill>
+                  <a:srgbClr val="171721"/>
+                </a:solidFill>
+                <a:latin typeface="Calibri" pitchFamily="34" charset="0"/>
+                <a:ea typeface="Calibri" pitchFamily="34" charset="-122"/>
+                <a:cs typeface="Calibri" pitchFamily="34" charset="-120"/>
+              </a:rPr>
+              <a:t>Three autonomy levels, chosen on the Overview</a:t>
+            </a:r>
+            <a:endParaRPr lang="en-US" sz="1700" dirty="0"/>
+          </a:p>
+        </p:txBody>
+      </p:sp>
+      <p:sp>
+        <p:nvSpPr>
+          <p:cNvPr id="34" name="Shape 27"/>
+          <p:cNvSpPr/>
+          <p:nvPr/>
+        </p:nvSpPr>
+        <p:spPr>
+          <a:xfrm>
+            <a:off x="548640" y="4160520"/>
+            <a:ext cx="3520440" cy="1051560"/>
+          </a:xfrm>
+          <a:prstGeom prst="roundRect">
+            <a:avLst>
+              <a:gd name="adj" fmla="val 6957"/>
+            </a:avLst>
+          </a:prstGeom>
+          <a:solidFill>
+            <a:srgbClr val="F1F5F9"/>
+          </a:solidFill>
+          <a:ln w="12700">
+            <a:solidFill>
+              <a:srgbClr val="F1F5F9"/>
+            </a:solidFill>
+            <a:prstDash val="solid"/>
+          </a:ln>
+        </p:spPr>
+      </p:sp>
+      <p:sp>
+        <p:nvSpPr>
+          <p:cNvPr id="35" name="Shape 28"/>
+          <p:cNvSpPr/>
+          <p:nvPr/>
+        </p:nvSpPr>
+        <p:spPr>
+          <a:xfrm>
+            <a:off x="731520" y="4389120"/>
+            <a:ext cx="457200" cy="457200"/>
+          </a:xfrm>
+          <a:prstGeom prst="ellipse">
+            <a:avLst/>
+          </a:prstGeom>
+          <a:solidFill>
+            <a:srgbClr val="171721"/>
+          </a:solidFill>
+          <a:ln w="12700">
+            <a:solidFill>
+              <a:srgbClr val="171721"/>
+            </a:solidFill>
+            <a:prstDash val="solid"/>
+          </a:ln>
+        </p:spPr>
+      </p:sp>
+      <p:pic>
+        <p:nvPicPr>
+          <p:cNvPr id="36" name="Image 5" descr="preencoded.png">    </p:cNvPr>
+          <p:cNvPicPr>
+            <a:picLocks noChangeAspect="1"/>
+          </p:cNvPicPr>
+          <p:nvPr/>
+        </p:nvPicPr>
+        <p:blipFill>
+          <a:blip r:embed="rId6"/>
+          <a:stretch>
+            <a:fillRect/>
+          </a:stretch>
+        </p:blipFill>
+        <p:spPr>
+          <a:xfrm>
+            <a:off x="845820" y="4503420"/>
+            <a:ext cx="228600" cy="228600"/>
+          </a:xfrm>
+          <a:prstGeom prst="rect">
+            <a:avLst/>
+          </a:prstGeom>
+        </p:spPr>
+      </p:pic>
+      <p:sp>
+        <p:nvSpPr>
+          <p:cNvPr id="37" name="Text 29"/>
+          <p:cNvSpPr txBox="1"/>
+          <p:nvPr/>
+        </p:nvSpPr>
+        <p:spPr>
+          <a:xfrm>
+            <a:off x="1325880" y="4270248"/>
+            <a:ext cx="2606040" cy="320040"/>
+          </a:xfrm>
+          <a:prstGeom prst="rect">
+            <a:avLst/>
+          </a:prstGeom>
+          <a:noFill/>
+          <a:ln/>
+        </p:spPr>
+        <p:txBody>
+          <a:bodyPr wrap="square" lIns="0" tIns="0" rIns="0" bIns="0" rtlCol="0" anchor="ctr"/>
+          <a:lstStyle/>
+          <a:p>
+            <a:pPr indent="0" marL="0">
+              <a:buNone/>
+            </a:pPr>
+            <a:r>
+              <a:rPr lang="en-US" sz="1350" b="1" dirty="0">
+                <a:solidFill>
+                  <a:srgbClr val="171721"/>
+                </a:solidFill>
+                <a:latin typeface="Calibri" pitchFamily="34" charset="0"/>
+                <a:ea typeface="Calibri" pitchFamily="34" charset="-122"/>
+                <a:cs typeface="Calibri" pitchFamily="34" charset="-120"/>
+              </a:rPr>
+              <a:t>Observe</a:t>
+            </a:r>
+            <a:endParaRPr lang="en-US" sz="1350" dirty="0"/>
+          </a:p>
+        </p:txBody>
+      </p:sp>
+      <p:sp>
+        <p:nvSpPr>
+          <p:cNvPr id="38" name="Text 30"/>
+          <p:cNvSpPr txBox="1"/>
+          <p:nvPr/>
+        </p:nvSpPr>
+        <p:spPr>
+          <a:xfrm>
+            <a:off x="1325880" y="4590288"/>
+            <a:ext cx="2606040" cy="566928"/>
+          </a:xfrm>
+          <a:prstGeom prst="rect">
+            <a:avLst/>
+          </a:prstGeom>
+          <a:noFill/>
+          <a:ln/>
+        </p:spPr>
+        <p:txBody>
+          <a:bodyPr wrap="square" lIns="0" tIns="0" rIns="0" bIns="0" rtlCol="0" anchor="t"/>
+          <a:lstStyle/>
+          <a:p>
+            <a:pPr indent="0" marL="0">
+              <a:buNone/>
+            </a:pPr>
+            <a:r>
+              <a:rPr lang="en-US" sz="1100" dirty="0">
+                <a:solidFill>
+                  <a:srgbClr val="1B2635"/>
+                </a:solidFill>
+                <a:latin typeface="Calibri" pitchFamily="34" charset="0"/>
+                <a:ea typeface="Calibri" pitchFamily="34" charset="-122"/>
+                <a:cs typeface="Calibri" pitchFamily="34" charset="-120"/>
+              </a:rPr>
+              <a:t>Alert only: the finding and the agent's explanation.</a:t>
+            </a:r>
+            <a:endParaRPr lang="en-US" sz="1100" dirty="0"/>
+          </a:p>
+        </p:txBody>
+      </p:sp>
+      <p:sp>
+        <p:nvSpPr>
+          <p:cNvPr id="39" name="Shape 31"/>
+          <p:cNvSpPr/>
+          <p:nvPr/>
+        </p:nvSpPr>
+        <p:spPr>
+          <a:xfrm>
+            <a:off x="4297680" y="4160520"/>
+            <a:ext cx="3520440" cy="1051560"/>
+          </a:xfrm>
+          <a:prstGeom prst="roundRect">
+            <a:avLst>
+              <a:gd name="adj" fmla="val 6957"/>
             </a:avLst>
           </a:prstGeom>
           <a:solidFill>
@@ -2880,80 +4099,63 @@
       </p:sp>
       <p:sp>
         <p:nvSpPr>
-          <p:cNvPr id="6" name="Text 3"/>
-          <p:cNvSpPr txBox="1"/>
-          <p:nvPr/>
-        </p:nvSpPr>
-        <p:spPr>
-          <a:xfrm>
-            <a:off x="548640" y="6144768"/>
-            <a:ext cx="1170432" cy="292608"/>
-          </a:xfrm>
-          <a:prstGeom prst="rect">
-            <a:avLst/>
-          </a:prstGeom>
-          <a:noFill/>
-          <a:ln/>
-        </p:spPr>
-        <p:txBody>
-          <a:bodyPr wrap="square" lIns="0" tIns="0" rIns="0" bIns="0" rtlCol="0" anchor="ctr"/>
-          <a:lstStyle/>
-          <a:p>
-            <a:pPr algn="ctr" indent="0" marL="0">
-              <a:buNone/>
-            </a:pPr>
-            <a:r>
-              <a:rPr lang="en-US" sz="850" b="1" dirty="0">
-                <a:solidFill>
-                  <a:srgbClr val="171721"/>
-                </a:solidFill>
-                <a:latin typeface="Calibri" pitchFamily="34" charset="0"/>
-                <a:ea typeface="Calibri" pitchFamily="34" charset="-122"/>
-                <a:cs typeface="Calibri" pitchFamily="34" charset="-120"/>
-              </a:rPr>
-              <a:t>App Service ×2</a:t>
-            </a:r>
-            <a:endParaRPr lang="en-US" sz="850" dirty="0"/>
-          </a:p>
-        </p:txBody>
-      </p:sp>
-      <p:sp>
-        <p:nvSpPr>
-          <p:cNvPr id="7" name="Shape 4"/>
+          <p:cNvPr id="40" name="Shape 32"/>
           <p:cNvSpPr/>
           <p:nvPr/>
         </p:nvSpPr>
         <p:spPr>
           <a:xfrm>
-            <a:off x="1787652" y="6144768"/>
-            <a:ext cx="1170432" cy="292608"/>
-          </a:xfrm>
-          <a:prstGeom prst="roundRect">
-            <a:avLst>
-              <a:gd name="adj" fmla="val 18750"/>
-            </a:avLst>
+            <a:off x="4480560" y="4389120"/>
+            <a:ext cx="457200" cy="457200"/>
+          </a:xfrm>
+          <a:prstGeom prst="ellipse">
+            <a:avLst/>
           </a:prstGeom>
           <a:solidFill>
-            <a:srgbClr val="EFE9FF"/>
+            <a:srgbClr val="5E2CFE"/>
           </a:solidFill>
           <a:ln w="12700">
             <a:solidFill>
-              <a:srgbClr val="EFE9FF"/>
+              <a:srgbClr val="5E2CFE"/>
             </a:solidFill>
             <a:prstDash val="solid"/>
           </a:ln>
         </p:spPr>
       </p:sp>
-      <p:sp>
-        <p:nvSpPr>
-          <p:cNvPr id="8" name="Text 5"/>
-          <p:cNvSpPr txBox="1"/>
-          <p:nvPr/>
-        </p:nvSpPr>
-        <p:spPr>
-          <a:xfrm>
-            <a:off x="1787652" y="6144768"/>
-            <a:ext cx="1170432" cy="292608"/>
+      <p:pic>
+        <p:nvPicPr>
+          <p:cNvPr id="41" name="Image 6" descr="preencoded.png">    </p:cNvPr>
+          <p:cNvPicPr>
+            <a:picLocks noChangeAspect="1"/>
+          </p:cNvPicPr>
+          <p:nvPr/>
+        </p:nvPicPr>
+        <p:blipFill>
+          <a:blip r:embed="rId7"/>
+          <a:stretch>
+            <a:fillRect/>
+          </a:stretch>
+        </p:blipFill>
+        <p:spPr>
+          <a:xfrm>
+            <a:off x="4594860" y="4503420"/>
+            <a:ext cx="228600" cy="228600"/>
+          </a:xfrm>
+          <a:prstGeom prst="rect">
+            <a:avLst/>
+          </a:prstGeom>
+        </p:spPr>
+      </p:pic>
+      <p:sp>
+        <p:nvSpPr>
+          <p:cNvPr id="42" name="Text 33"/>
+          <p:cNvSpPr txBox="1"/>
+          <p:nvPr/>
+        </p:nvSpPr>
+        <p:spPr>
+          <a:xfrm>
+            <a:off x="5074920" y="4270248"/>
+            <a:ext cx="2606040" cy="320040"/>
           </a:xfrm>
           <a:prstGeom prst="rect">
             <a:avLst/>
@@ -2965,11 +4167,11 @@
           <a:bodyPr wrap="square" lIns="0" tIns="0" rIns="0" bIns="0" rtlCol="0" anchor="ctr"/>
           <a:lstStyle/>
           <a:p>
-            <a:pPr algn="ctr" indent="0" marL="0">
-              <a:buNone/>
-            </a:pPr>
-            <a:r>
-              <a:rPr lang="en-US" sz="850" b="1" dirty="0">
+            <a:pPr indent="0" marL="0">
+              <a:buNone/>
+            </a:pPr>
+            <a:r>
+              <a:rPr lang="en-US" sz="1350" b="1" dirty="0">
                 <a:solidFill>
                   <a:srgbClr val="171721"/>
                 </a:solidFill>
@@ -2977,34 +4179,73 @@
                 <a:ea typeface="Calibri" pitchFamily="34" charset="-122"/>
                 <a:cs typeface="Calibri" pitchFamily="34" charset="-120"/>
               </a:rPr>
-              <a:t>Azure SQL failover group</a:t>
-            </a:r>
-            <a:endParaRPr lang="en-US" sz="850" dirty="0"/>
-          </a:p>
-        </p:txBody>
-      </p:sp>
-      <p:sp>
-        <p:nvSpPr>
-          <p:cNvPr id="9" name="Shape 6"/>
+              <a:t>Propose fixes (default)</a:t>
+            </a:r>
+            <a:endParaRPr lang="en-US" sz="1350" dirty="0"/>
+          </a:p>
+        </p:txBody>
+      </p:sp>
+      <p:sp>
+        <p:nvSpPr>
+          <p:cNvPr id="43" name="Text 34"/>
+          <p:cNvSpPr txBox="1"/>
+          <p:nvPr/>
+        </p:nvSpPr>
+        <p:spPr>
+          <a:xfrm>
+            <a:off x="5074920" y="4590288"/>
+            <a:ext cx="2606040" cy="566928"/>
+          </a:xfrm>
+          <a:prstGeom prst="rect">
+            <a:avLst/>
+          </a:prstGeom>
+          <a:noFill/>
+          <a:ln/>
+        </p:spPr>
+        <p:txBody>
+          <a:bodyPr wrap="square" lIns="0" tIns="0" rIns="0" bIns="0" rtlCol="0" anchor="t"/>
+          <a:lstStyle/>
+          <a:p>
+            <a:pPr indent="0" marL="0">
+              <a:buNone/>
+            </a:pPr>
+            <a:r>
+              <a:rPr lang="en-US" sz="1100" dirty="0">
+                <a:solidFill>
+                  <a:srgbClr val="1B2635"/>
+                </a:solidFill>
+                <a:latin typeface="Calibri" pitchFamily="34" charset="0"/>
+                <a:ea typeface="Calibri" pitchFamily="34" charset="-122"/>
+                <a:cs typeface="Calibri" pitchFamily="34" charset="-120"/>
+              </a:rPr>
+              <a:t>Prepares the allowlisted fix; it waits until a human clicks Approve fix.</a:t>
+            </a:r>
+            <a:endParaRPr lang="en-US" sz="1100" dirty="0"/>
+          </a:p>
+        </p:txBody>
+      </p:sp>
+      <p:sp>
+        <p:nvSpPr>
+          <p:cNvPr id="44" name="Shape 35"/>
           <p:cNvSpPr/>
           <p:nvPr/>
         </p:nvSpPr>
         <p:spPr>
           <a:xfrm>
-            <a:off x="3026664" y="6144768"/>
-            <a:ext cx="1170432" cy="292608"/>
+            <a:off x="8046720" y="4160520"/>
+            <a:ext cx="3520440" cy="1051560"/>
           </a:xfrm>
           <a:prstGeom prst="roundRect">
             <a:avLst>
-              <a:gd name="adj" fmla="val 18750"/>
+              <a:gd name="adj" fmla="val 6957"/>
             </a:avLst>
           </a:prstGeom>
           <a:solidFill>
-            <a:srgbClr val="EFE9FF"/>
+            <a:srgbClr val="F1F5F9"/>
           </a:solidFill>
           <a:ln w="12700">
             <a:solidFill>
-              <a:srgbClr val="EFE9FF"/>
+              <a:srgbClr val="F1F5F9"/>
             </a:solidFill>
             <a:prstDash val="solid"/>
           </a:ln>
@@ -3012,80 +4253,63 @@
       </p:sp>
       <p:sp>
         <p:nvSpPr>
-          <p:cNvPr id="10" name="Text 7"/>
-          <p:cNvSpPr txBox="1"/>
-          <p:nvPr/>
-        </p:nvSpPr>
-        <p:spPr>
-          <a:xfrm>
-            <a:off x="3026664" y="6144768"/>
-            <a:ext cx="1170432" cy="292608"/>
-          </a:xfrm>
-          <a:prstGeom prst="rect">
-            <a:avLst/>
-          </a:prstGeom>
-          <a:noFill/>
-          <a:ln/>
-        </p:spPr>
-        <p:txBody>
-          <a:bodyPr wrap="square" lIns="0" tIns="0" rIns="0" bIns="0" rtlCol="0" anchor="ctr"/>
-          <a:lstStyle/>
-          <a:p>
-            <a:pPr algn="ctr" indent="0" marL="0">
-              <a:buNone/>
-            </a:pPr>
-            <a:r>
-              <a:rPr lang="en-US" sz="850" b="1" dirty="0">
-                <a:solidFill>
-                  <a:srgbClr val="171721"/>
-                </a:solidFill>
-                <a:latin typeface="Calibri" pitchFamily="34" charset="0"/>
-                <a:ea typeface="Calibri" pitchFamily="34" charset="-122"/>
-                <a:cs typeface="Calibri" pitchFamily="34" charset="-120"/>
-              </a:rPr>
-              <a:t>Traffic Manager</a:t>
-            </a:r>
-            <a:endParaRPr lang="en-US" sz="850" dirty="0"/>
-          </a:p>
-        </p:txBody>
-      </p:sp>
-      <p:sp>
-        <p:nvSpPr>
-          <p:cNvPr id="11" name="Shape 8"/>
+          <p:cNvPr id="45" name="Shape 36"/>
           <p:cNvSpPr/>
           <p:nvPr/>
         </p:nvSpPr>
         <p:spPr>
           <a:xfrm>
-            <a:off x="4265676" y="6144768"/>
-            <a:ext cx="1170432" cy="292608"/>
-          </a:xfrm>
-          <a:prstGeom prst="roundRect">
-            <a:avLst>
-              <a:gd name="adj" fmla="val 18750"/>
-            </a:avLst>
+            <a:off x="8229600" y="4389120"/>
+            <a:ext cx="457200" cy="457200"/>
+          </a:xfrm>
+          <a:prstGeom prst="ellipse">
+            <a:avLst/>
           </a:prstGeom>
           <a:solidFill>
-            <a:srgbClr val="EFE9FF"/>
+            <a:srgbClr val="171721"/>
           </a:solidFill>
           <a:ln w="12700">
             <a:solidFill>
-              <a:srgbClr val="EFE9FF"/>
+              <a:srgbClr val="171721"/>
             </a:solidFill>
             <a:prstDash val="solid"/>
           </a:ln>
         </p:spPr>
       </p:sp>
-      <p:sp>
-        <p:nvSpPr>
-          <p:cNvPr id="12" name="Text 9"/>
-          <p:cNvSpPr txBox="1"/>
-          <p:nvPr/>
-        </p:nvSpPr>
-        <p:spPr>
-          <a:xfrm>
-            <a:off x="4265676" y="6144768"/>
-            <a:ext cx="1170432" cy="292608"/>
+      <p:pic>
+        <p:nvPicPr>
+          <p:cNvPr id="46" name="Image 7" descr="preencoded.png">    </p:cNvPr>
+          <p:cNvPicPr>
+            <a:picLocks noChangeAspect="1"/>
+          </p:cNvPicPr>
+          <p:nvPr/>
+        </p:nvPicPr>
+        <p:blipFill>
+          <a:blip r:embed="rId8"/>
+          <a:stretch>
+            <a:fillRect/>
+          </a:stretch>
+        </p:blipFill>
+        <p:spPr>
+          <a:xfrm>
+            <a:off x="8343900" y="4503420"/>
+            <a:ext cx="228600" cy="228600"/>
+          </a:xfrm>
+          <a:prstGeom prst="rect">
+            <a:avLst/>
+          </a:prstGeom>
+        </p:spPr>
+      </p:pic>
+      <p:sp>
+        <p:nvSpPr>
+          <p:cNvPr id="47" name="Text 37"/>
+          <p:cNvSpPr txBox="1"/>
+          <p:nvPr/>
+        </p:nvSpPr>
+        <p:spPr>
+          <a:xfrm>
+            <a:off x="8823960" y="4270248"/>
+            <a:ext cx="2606040" cy="320040"/>
           </a:xfrm>
           <a:prstGeom prst="rect">
             <a:avLst/>
@@ -3097,11 +4321,11 @@
           <a:bodyPr wrap="square" lIns="0" tIns="0" rIns="0" bIns="0" rtlCol="0" anchor="ctr"/>
           <a:lstStyle/>
           <a:p>
-            <a:pPr algn="ctr" indent="0" marL="0">
-              <a:buNone/>
-            </a:pPr>
-            <a:r>
-              <a:rPr lang="en-US" sz="850" b="1" dirty="0">
+            <a:pPr indent="0" marL="0">
+              <a:buNone/>
+            </a:pPr>
+            <a:r>
+              <a:rPr lang="en-US" sz="1350" b="1" dirty="0">
                 <a:solidFill>
                   <a:srgbClr val="171721"/>
                 </a:solidFill>
@@ -3109,34 +4333,73 @@
                 <a:ea typeface="Calibri" pitchFamily="34" charset="-122"/>
                 <a:cs typeface="Calibri" pitchFamily="34" charset="-120"/>
               </a:rPr>
-              <a:t>Site Recovery</a:t>
-            </a:r>
-            <a:endParaRPr lang="en-US" sz="850" dirty="0"/>
-          </a:p>
-        </p:txBody>
-      </p:sp>
-      <p:sp>
-        <p:nvSpPr>
-          <p:cNvPr id="13" name="Shape 10"/>
+              <a:t>Auto-fix config drift</a:t>
+            </a:r>
+            <a:endParaRPr lang="en-US" sz="1350" dirty="0"/>
+          </a:p>
+        </p:txBody>
+      </p:sp>
+      <p:sp>
+        <p:nvSpPr>
+          <p:cNvPr id="48" name="Text 38"/>
+          <p:cNvSpPr txBox="1"/>
+          <p:nvPr/>
+        </p:nvSpPr>
+        <p:spPr>
+          <a:xfrm>
+            <a:off x="8823960" y="4590288"/>
+            <a:ext cx="2606040" cy="566928"/>
+          </a:xfrm>
+          <a:prstGeom prst="rect">
+            <a:avLst/>
+          </a:prstGeom>
+          <a:noFill/>
+          <a:ln/>
+        </p:spPr>
+        <p:txBody>
+          <a:bodyPr wrap="square" lIns="0" tIns="0" rIns="0" bIns="0" rtlCol="0" anchor="t"/>
+          <a:lstStyle/>
+          <a:p>
+            <a:pPr indent="0" marL="0">
+              <a:buNone/>
+            </a:pPr>
+            <a:r>
+              <a:rPr lang="en-US" sz="1100" dirty="0">
+                <a:solidFill>
+                  <a:srgbClr val="1B2635"/>
+                </a:solidFill>
+                <a:latin typeface="Calibri" pitchFamily="34" charset="0"/>
+                <a:ea typeface="Calibri" pitchFamily="34" charset="-122"/>
+                <a:cs typeface="Calibri" pitchFamily="34" charset="-120"/>
+              </a:rPr>
+              <a:t>Applies only the DR-side fix itself: copy a missing app setting to Southeast Asia, audited.</a:t>
+            </a:r>
+            <a:endParaRPr lang="en-US" sz="1100" dirty="0"/>
+          </a:p>
+        </p:txBody>
+      </p:sp>
+      <p:sp>
+        <p:nvSpPr>
+          <p:cNvPr id="49" name="Shape 39"/>
           <p:cNvSpPr/>
           <p:nvPr/>
         </p:nvSpPr>
         <p:spPr>
           <a:xfrm>
-            <a:off x="5504688" y="6144768"/>
-            <a:ext cx="1170432" cy="292608"/>
+            <a:off x="548640" y="5394960"/>
+            <a:ext cx="11064240" cy="868680"/>
           </a:xfrm>
           <a:prstGeom prst="roundRect">
             <a:avLst>
-              <a:gd name="adj" fmla="val 18750"/>
+              <a:gd name="adj" fmla="val 8421"/>
             </a:avLst>
           </a:prstGeom>
           <a:solidFill>
-            <a:srgbClr val="EFE9FF"/>
+            <a:srgbClr val="171721"/>
           </a:solidFill>
           <a:ln w="12700">
             <a:solidFill>
-              <a:srgbClr val="EFE9FF"/>
+              <a:srgbClr val="171721"/>
             </a:solidFill>
             <a:prstDash val="solid"/>
           </a:ln>
@@ -3144,14 +4407,14 @@
       </p:sp>
       <p:sp>
         <p:nvSpPr>
-          <p:cNvPr id="14" name="Text 11"/>
-          <p:cNvSpPr txBox="1"/>
-          <p:nvPr/>
-        </p:nvSpPr>
-        <p:spPr>
-          <a:xfrm>
-            <a:off x="5504688" y="6144768"/>
-            <a:ext cx="1170432" cy="292608"/>
+          <p:cNvPr id="50" name="Text 40"/>
+          <p:cNvSpPr txBox="1"/>
+          <p:nvPr/>
+        </p:nvSpPr>
+        <p:spPr>
+          <a:xfrm>
+            <a:off x="777240" y="5394960"/>
+            <a:ext cx="10607040" cy="868680"/>
           </a:xfrm>
           <a:prstGeom prst="rect">
             <a:avLst/>
@@ -3163,61 +4426,48 @@
           <a:bodyPr wrap="square" lIns="0" tIns="0" rIns="0" bIns="0" rtlCol="0" anchor="ctr"/>
           <a:lstStyle/>
           <a:p>
-            <a:pPr algn="ctr" indent="0" marL="0">
-              <a:buNone/>
-            </a:pPr>
-            <a:r>
-              <a:rPr lang="en-US" sz="850" b="1" dirty="0">
-                <a:solidFill>
-                  <a:srgbClr val="171721"/>
-                </a:solidFill>
-                <a:latin typeface="Calibri" pitchFamily="34" charset="0"/>
-                <a:ea typeface="Calibri" pitchFamily="34" charset="-122"/>
-                <a:cs typeface="Calibri" pitchFamily="34" charset="-120"/>
-              </a:rPr>
-              <a:t>AI Foundry Agent Service</a:t>
-            </a:r>
-            <a:endParaRPr lang="en-US" sz="850" dirty="0"/>
-          </a:p>
-        </p:txBody>
-      </p:sp>
-      <p:sp>
-        <p:nvSpPr>
-          <p:cNvPr id="15" name="Shape 12"/>
-          <p:cNvSpPr/>
-          <p:nvPr/>
-        </p:nvSpPr>
-        <p:spPr>
-          <a:xfrm>
-            <a:off x="6743700" y="6144768"/>
-            <a:ext cx="1170432" cy="292608"/>
-          </a:xfrm>
-          <a:prstGeom prst="roundRect">
-            <a:avLst>
-              <a:gd name="adj" fmla="val 18750"/>
-            </a:avLst>
-          </a:prstGeom>
-          <a:solidFill>
-            <a:srgbClr val="EFE9FF"/>
-          </a:solidFill>
-          <a:ln w="12700">
-            <a:solidFill>
-              <a:srgbClr val="EFE9FF"/>
-            </a:solidFill>
-            <a:prstDash val="solid"/>
-          </a:ln>
-        </p:spPr>
-      </p:sp>
-      <p:sp>
-        <p:nvSpPr>
-          <p:cNvPr id="16" name="Text 13"/>
-          <p:cNvSpPr txBox="1"/>
-          <p:nvPr/>
-        </p:nvSpPr>
-        <p:spPr>
-          <a:xfrm>
-            <a:off x="6743700" y="6144768"/>
-            <a:ext cx="1170432" cy="292608"/>
+            <a:pPr indent="0" marL="0">
+              <a:buNone/>
+            </a:pPr>
+            <a:r>
+              <a:rPr lang="en-US" sz="1400" b="1" dirty="0">
+                <a:solidFill>
+                  <a:srgbClr val="FFFFFF"/>
+                </a:solidFill>
+                <a:latin typeface="Calibri" pitchFamily="34" charset="0"/>
+                <a:ea typeface="Calibri" pitchFamily="34" charset="-122"/>
+                <a:cs typeface="Calibri" pitchFamily="34" charset="-120"/>
+              </a:rPr>
+              <a:t>Real event, 19 Oct 2026: </a:t>
+            </a:r>
+            <a:pPr indent="0" marL="0">
+              <a:buNone/>
+            </a:pPr>
+            <a:r>
+              <a:rPr lang="en-US" sz="1400" dirty="0">
+                <a:solidFill>
+                  <a:srgbClr val="C9C3E6"/>
+                </a:solidFill>
+                <a:latin typeface="Calibri" pitchFamily="34" charset="0"/>
+                <a:ea typeface="Calibri" pitchFamily="34" charset="-122"/>
+                <a:cs typeface="Calibri" pitchFamily="34" charset="-120"/>
+              </a:rPr>
+              <a:t>a scheduled check, with no one asking, found PAYMENT_PROVIDER missing in Southeast Asia (the DR app answered HTTP 503). Had East Asia failed then, the DR site could not have taken payments.</a:t>
+            </a:r>
+            <a:endParaRPr lang="en-US" sz="1400" dirty="0"/>
+          </a:p>
+        </p:txBody>
+      </p:sp>
+      <p:sp>
+        <p:nvSpPr>
+          <p:cNvPr id="51" name="Text 41"/>
+          <p:cNvSpPr txBox="1"/>
+          <p:nvPr/>
+        </p:nvSpPr>
+        <p:spPr>
+          <a:xfrm>
+            <a:off x="548640" y="6473952"/>
+            <a:ext cx="11064240" cy="274320"/>
           </a:xfrm>
           <a:prstGeom prst="rect">
             <a:avLst/>
@@ -3229,219 +4479,21 @@
           <a:bodyPr wrap="square" lIns="0" tIns="0" rIns="0" bIns="0" rtlCol="0" anchor="ctr"/>
           <a:lstStyle/>
           <a:p>
-            <a:pPr algn="ctr" indent="0" marL="0">
-              <a:buNone/>
-            </a:pPr>
-            <a:r>
-              <a:rPr lang="en-US" sz="850" b="1" dirty="0">
-                <a:solidFill>
-                  <a:srgbClr val="171721"/>
-                </a:solidFill>
-                <a:latin typeface="Calibri" pitchFamily="34" charset="0"/>
-                <a:ea typeface="Calibri" pitchFamily="34" charset="-122"/>
-                <a:cs typeface="Calibri" pitchFamily="34" charset="-120"/>
-              </a:rPr>
-              <a:t>Key Vault + managed identity</a:t>
-            </a:r>
-            <a:endParaRPr lang="en-US" sz="850" dirty="0"/>
-          </a:p>
-        </p:txBody>
-      </p:sp>
-      <p:sp>
-        <p:nvSpPr>
-          <p:cNvPr id="17" name="Shape 14"/>
-          <p:cNvSpPr/>
-          <p:nvPr/>
-        </p:nvSpPr>
-        <p:spPr>
-          <a:xfrm>
-            <a:off x="7982712" y="6144768"/>
-            <a:ext cx="1170432" cy="292608"/>
-          </a:xfrm>
-          <a:prstGeom prst="roundRect">
-            <a:avLst>
-              <a:gd name="adj" fmla="val 18750"/>
-            </a:avLst>
-          </a:prstGeom>
-          <a:solidFill>
-            <a:srgbClr val="EFE9FF"/>
-          </a:solidFill>
-          <a:ln w="12700">
-            <a:solidFill>
-              <a:srgbClr val="EFE9FF"/>
-            </a:solidFill>
-            <a:prstDash val="solid"/>
-          </a:ln>
-        </p:spPr>
-      </p:sp>
-      <p:sp>
-        <p:nvSpPr>
-          <p:cNvPr id="18" name="Text 15"/>
-          <p:cNvSpPr txBox="1"/>
-          <p:nvPr/>
-        </p:nvSpPr>
-        <p:spPr>
-          <a:xfrm>
-            <a:off x="7982712" y="6144768"/>
-            <a:ext cx="1170432" cy="292608"/>
-          </a:xfrm>
-          <a:prstGeom prst="rect">
-            <a:avLst/>
-          </a:prstGeom>
-          <a:noFill/>
-          <a:ln/>
-        </p:spPr>
-        <p:txBody>
-          <a:bodyPr wrap="square" lIns="0" tIns="0" rIns="0" bIns="0" rtlCol="0" anchor="ctr"/>
-          <a:lstStyle/>
-          <a:p>
-            <a:pPr algn="ctr" indent="0" marL="0">
-              <a:buNone/>
-            </a:pPr>
-            <a:r>
-              <a:rPr lang="en-US" sz="850" b="1" dirty="0">
-                <a:solidFill>
-                  <a:srgbClr val="171721"/>
-                </a:solidFill>
-                <a:latin typeface="Calibri" pitchFamily="34" charset="0"/>
-                <a:ea typeface="Calibri" pitchFamily="34" charset="-122"/>
-                <a:cs typeface="Calibri" pitchFamily="34" charset="-120"/>
-              </a:rPr>
-              <a:t>Storage</a:t>
-            </a:r>
-            <a:endParaRPr lang="en-US" sz="850" dirty="0"/>
-          </a:p>
-        </p:txBody>
-      </p:sp>
-      <p:sp>
-        <p:nvSpPr>
-          <p:cNvPr id="19" name="Shape 16"/>
-          <p:cNvSpPr/>
-          <p:nvPr/>
-        </p:nvSpPr>
-        <p:spPr>
-          <a:xfrm>
-            <a:off x="9221724" y="6144768"/>
-            <a:ext cx="1170432" cy="292608"/>
-          </a:xfrm>
-          <a:prstGeom prst="roundRect">
-            <a:avLst>
-              <a:gd name="adj" fmla="val 18750"/>
-            </a:avLst>
-          </a:prstGeom>
-          <a:solidFill>
-            <a:srgbClr val="EFE9FF"/>
-          </a:solidFill>
-          <a:ln w="12700">
-            <a:solidFill>
-              <a:srgbClr val="EFE9FF"/>
-            </a:solidFill>
-            <a:prstDash val="solid"/>
-          </a:ln>
-        </p:spPr>
-      </p:sp>
-      <p:sp>
-        <p:nvSpPr>
-          <p:cNvPr id="20" name="Text 17"/>
-          <p:cNvSpPr txBox="1"/>
-          <p:nvPr/>
-        </p:nvSpPr>
-        <p:spPr>
-          <a:xfrm>
-            <a:off x="9221724" y="6144768"/>
-            <a:ext cx="1170432" cy="292608"/>
-          </a:xfrm>
-          <a:prstGeom prst="rect">
-            <a:avLst/>
-          </a:prstGeom>
-          <a:noFill/>
-          <a:ln/>
-        </p:spPr>
-        <p:txBody>
-          <a:bodyPr wrap="square" lIns="0" tIns="0" rIns="0" bIns="0" rtlCol="0" anchor="ctr"/>
-          <a:lstStyle/>
-          <a:p>
-            <a:pPr algn="ctr" indent="0" marL="0">
-              <a:buNone/>
-            </a:pPr>
-            <a:r>
-              <a:rPr lang="en-US" sz="850" b="1" dirty="0">
-                <a:solidFill>
-                  <a:srgbClr val="171721"/>
-                </a:solidFill>
-                <a:latin typeface="Calibri" pitchFamily="34" charset="0"/>
-                <a:ea typeface="Calibri" pitchFamily="34" charset="-122"/>
-                <a:cs typeface="Calibri" pitchFamily="34" charset="-120"/>
-              </a:rPr>
-              <a:t>Monitor + App Insights</a:t>
-            </a:r>
-            <a:endParaRPr lang="en-US" sz="850" dirty="0"/>
-          </a:p>
-        </p:txBody>
-      </p:sp>
-      <p:sp>
-        <p:nvSpPr>
-          <p:cNvPr id="21" name="Shape 18"/>
-          <p:cNvSpPr/>
-          <p:nvPr/>
-        </p:nvSpPr>
-        <p:spPr>
-          <a:xfrm>
-            <a:off x="10460736" y="6144768"/>
-            <a:ext cx="1170432" cy="292608"/>
-          </a:xfrm>
-          <a:prstGeom prst="roundRect">
-            <a:avLst>
-              <a:gd name="adj" fmla="val 18750"/>
-            </a:avLst>
-          </a:prstGeom>
-          <a:solidFill>
-            <a:srgbClr val="EFE9FF"/>
-          </a:solidFill>
-          <a:ln w="12700">
-            <a:solidFill>
-              <a:srgbClr val="EFE9FF"/>
-            </a:solidFill>
-            <a:prstDash val="solid"/>
-          </a:ln>
-        </p:spPr>
-      </p:sp>
-      <p:sp>
-        <p:nvSpPr>
-          <p:cNvPr id="22" name="Text 19"/>
-          <p:cNvSpPr txBox="1"/>
-          <p:nvPr/>
-        </p:nvSpPr>
-        <p:spPr>
-          <a:xfrm>
-            <a:off x="10460736" y="6144768"/>
-            <a:ext cx="1170432" cy="292608"/>
-          </a:xfrm>
-          <a:prstGeom prst="rect">
-            <a:avLst/>
-          </a:prstGeom>
-          <a:noFill/>
-          <a:ln/>
-        </p:spPr>
-        <p:txBody>
-          <a:bodyPr wrap="square" lIns="0" tIns="0" rIns="0" bIns="0" rtlCol="0" anchor="ctr"/>
-          <a:lstStyle/>
-          <a:p>
-            <a:pPr algn="ctr" indent="0" marL="0">
-              <a:buNone/>
-            </a:pPr>
-            <a:r>
-              <a:rPr lang="en-US" sz="850" b="1" dirty="0">
-                <a:solidFill>
-                  <a:srgbClr val="171721"/>
-                </a:solidFill>
-                <a:latin typeface="Calibri" pitchFamily="34" charset="0"/>
-                <a:ea typeface="Calibri" pitchFamily="34" charset="-122"/>
-                <a:cs typeface="Calibri" pitchFamily="34" charset="-120"/>
-              </a:rPr>
-              <a:t>Bicep: one-click up / down</a:t>
-            </a:r>
-            <a:endParaRPr lang="en-US" sz="850" dirty="0"/>
+            <a:pPr algn="r" indent="0" marL="0">
+              <a:buNone/>
+            </a:pPr>
+            <a:r>
+              <a:rPr lang="en-US" sz="900" dirty="0">
+                <a:solidFill>
+                  <a:srgbClr val="8C99AA"/>
+                </a:solidFill>
+                <a:latin typeface="Calibri" pitchFamily="34" charset="0"/>
+                <a:ea typeface="Calibri" pitchFamily="34" charset="-122"/>
+                <a:cs typeface="Calibri" pitchFamily="34" charset="-120"/>
+              </a:rPr>
+              <a:t>DR Agent: Autonomous DR Validation  ·  Team Azure Armada  ·  Azure Day 2026 Hackathon   10</a:t>
+            </a:r>
+            <a:endParaRPr lang="en-US" sz="900" dirty="0"/>
           </a:p>
         </p:txBody>
       </p:sp>
@@ -3510,7 +4562,7 @@
                 <a:ea typeface="Calibri" pitchFamily="34" charset="-122"/>
                 <a:cs typeface="Calibri" pitchFamily="34" charset="-120"/>
               </a:rPr>
-              <a:t>Measured on live Azure, not assumed</a:t>
+              <a:t>Architecture: 100% Azure, across an Azure paired region</a:t>
             </a:r>
             <a:endParaRPr lang="en-US" sz="3200" dirty="0"/>
           </a:p>
@@ -3549,1231 +4601,50 @@
                 <a:ea typeface="Calibri" pitchFamily="34" charset="-122"/>
                 <a:cs typeface="Calibri" pitchFamily="34" charset="-120"/>
               </a:rPr>
-              <a:t>Real failovers of the payments service, East Asia → Southeast Asia, 17–19 Oct 2026. Target: RTO 30 min, RPO 15 min.</a:t>
+              <a:t>East Asia (primary) and Southeast Asia (DR). The control plane runs outside both: console in South India, its state and secrets in Central India, agents in East US 2.</a:t>
             </a:r>
             <a:endParaRPr lang="en-US" sz="1500" dirty="0"/>
           </a:p>
         </p:txBody>
       </p:sp>
-      <p:sp>
-        <p:nvSpPr>
-          <p:cNvPr id="4" name="Shape 2"/>
+      <p:pic>
+        <p:nvPicPr>
+          <p:cNvPr id="4" name="Image 0" descr="docs/deck/architecture-deck.png">    </p:cNvPr>
+          <p:cNvPicPr>
+            <a:picLocks noChangeAspect="1"/>
+          </p:cNvPicPr>
+          <p:nvPr/>
+        </p:nvPicPr>
+        <p:blipFill>
+          <a:blip r:embed="rId1"/>
+          <a:stretch>
+            <a:fillRect/>
+          </a:stretch>
+        </p:blipFill>
+        <p:spPr>
+          <a:xfrm>
+            <a:off x="548640" y="1508760"/>
+            <a:ext cx="11064240" cy="4552474"/>
+          </a:xfrm>
+          <a:prstGeom prst="rect">
+            <a:avLst/>
+          </a:prstGeom>
+        </p:spPr>
+      </p:pic>
+      <p:sp>
+        <p:nvSpPr>
+          <p:cNvPr id="5" name="Shape 2"/>
           <p:cNvSpPr/>
           <p:nvPr/>
         </p:nvSpPr>
         <p:spPr>
           <a:xfrm>
-            <a:off x="548640" y="1600200"/>
-            <a:ext cx="2633472" cy="1691640"/>
+            <a:off x="548640" y="6144768"/>
+            <a:ext cx="1170432" cy="292608"/>
           </a:xfrm>
           <a:prstGeom prst="roundRect">
             <a:avLst>
-              <a:gd name="adj" fmla="val 4324"/>
-            </a:avLst>
-          </a:prstGeom>
-          <a:solidFill>
-            <a:srgbClr val="F1F5F9"/>
-          </a:solidFill>
-          <a:ln w="12700">
-            <a:solidFill>
-              <a:srgbClr val="F1F5F9"/>
-            </a:solidFill>
-            <a:prstDash val="solid"/>
-          </a:ln>
-          <a:effectLst>
-            <a:outerShdw sx="100000" sy="100000" kx="0" ky="0" algn="bl" rotWithShape="0" blurRad="76200" dist="25400" dir="5400000">
-              <a:srgbClr val="000000">
-                <a:alpha val="12000"/>
-              </a:srgbClr>
-            </a:outerShdw>
-          </a:effectLst>
-        </p:spPr>
-      </p:sp>
-      <p:sp>
-        <p:nvSpPr>
-          <p:cNvPr id="5" name="Text 3"/>
-          <p:cNvSpPr txBox="1"/>
-          <p:nvPr/>
-        </p:nvSpPr>
-        <p:spPr>
-          <a:xfrm>
-            <a:off x="731520" y="1737360"/>
-            <a:ext cx="2286000" cy="685800"/>
-          </a:xfrm>
-          <a:prstGeom prst="rect">
-            <a:avLst/>
-          </a:prstGeom>
-          <a:noFill/>
-          <a:ln/>
-        </p:spPr>
-        <p:txBody>
-          <a:bodyPr wrap="square" lIns="0" tIns="0" rIns="0" bIns="0" rtlCol="0" anchor="ctr"/>
-          <a:lstStyle/>
-          <a:p>
-            <a:pPr indent="0" marL="0">
-              <a:buNone/>
-            </a:pPr>
-            <a:r>
-              <a:rPr lang="en-US" sz="3000" b="1" dirty="0">
-                <a:solidFill>
-                  <a:srgbClr val="5E2CFE"/>
-                </a:solidFill>
-                <a:latin typeface="Calibri" pitchFamily="34" charset="0"/>
-                <a:ea typeface="Calibri" pitchFamily="34" charset="-122"/>
-                <a:cs typeface="Calibri" pitchFamily="34" charset="-120"/>
-              </a:rPr>
-              <a:t>29.04 s</a:t>
-            </a:r>
-            <a:endParaRPr lang="en-US" sz="3000" dirty="0"/>
-          </a:p>
-        </p:txBody>
-      </p:sp>
-      <p:sp>
-        <p:nvSpPr>
-          <p:cNvPr id="6" name="Text 4"/>
-          <p:cNvSpPr txBox="1"/>
-          <p:nvPr/>
-        </p:nvSpPr>
-        <p:spPr>
-          <a:xfrm>
-            <a:off x="731520" y="2423160"/>
-            <a:ext cx="2286000" cy="320040"/>
-          </a:xfrm>
-          <a:prstGeom prst="rect">
-            <a:avLst/>
-          </a:prstGeom>
-          <a:noFill/>
-          <a:ln/>
-        </p:spPr>
-        <p:txBody>
-          <a:bodyPr wrap="square" lIns="0" tIns="0" rIns="0" bIns="0" rtlCol="0" anchor="ctr"/>
-          <a:lstStyle/>
-          <a:p>
-            <a:pPr indent="0" marL="0">
-              <a:buNone/>
-            </a:pPr>
-            <a:r>
-              <a:rPr lang="en-US" sz="1300" b="1" dirty="0">
-                <a:solidFill>
-                  <a:srgbClr val="171721"/>
-                </a:solidFill>
-                <a:latin typeface="Calibri" pitchFamily="34" charset="0"/>
-                <a:ea typeface="Calibri" pitchFamily="34" charset="-122"/>
-                <a:cs typeface="Calibri" pitchFamily="34" charset="-120"/>
-              </a:rPr>
-              <a:t>RTO, latest drill</a:t>
-            </a:r>
-            <a:endParaRPr lang="en-US" sz="1300" dirty="0"/>
-          </a:p>
-        </p:txBody>
-      </p:sp>
-      <p:sp>
-        <p:nvSpPr>
-          <p:cNvPr id="7" name="Text 5"/>
-          <p:cNvSpPr txBox="1"/>
-          <p:nvPr/>
-        </p:nvSpPr>
-        <p:spPr>
-          <a:xfrm>
-            <a:off x="731520" y="2743200"/>
-            <a:ext cx="2331720" cy="457200"/>
-          </a:xfrm>
-          <a:prstGeom prst="rect">
-            <a:avLst/>
-          </a:prstGeom>
-          <a:noFill/>
-          <a:ln/>
-        </p:spPr>
-        <p:txBody>
-          <a:bodyPr wrap="square" lIns="0" tIns="0" rIns="0" bIns="0" rtlCol="0" anchor="t"/>
-          <a:lstStyle/>
-          <a:p>
-            <a:pPr indent="0" marL="0">
-              <a:buNone/>
-            </a:pPr>
-            <a:r>
-              <a:rPr lang="en-US" sz="1100" dirty="0">
-                <a:solidFill>
-                  <a:srgbClr val="5B6B7F"/>
-                </a:solidFill>
-                <a:latin typeface="Calibri" pitchFamily="34" charset="0"/>
-                <a:ea typeface="Calibri" pitchFamily="34" charset="-122"/>
-                <a:cs typeface="Calibri" pitchFamily="34" charset="-120"/>
-              </a:rPr>
-              <a:t>29.0–40.4 s across 9 drills (median 32.7 s)</a:t>
-            </a:r>
-            <a:endParaRPr lang="en-US" sz="1100" dirty="0"/>
-          </a:p>
-        </p:txBody>
-      </p:sp>
-      <p:sp>
-        <p:nvSpPr>
-          <p:cNvPr id="8" name="Shape 6"/>
-          <p:cNvSpPr/>
-          <p:nvPr/>
-        </p:nvSpPr>
-        <p:spPr>
-          <a:xfrm>
-            <a:off x="3346704" y="1600200"/>
-            <a:ext cx="2633472" cy="1691640"/>
-          </a:xfrm>
-          <a:prstGeom prst="roundRect">
-            <a:avLst>
-              <a:gd name="adj" fmla="val 4324"/>
-            </a:avLst>
-          </a:prstGeom>
-          <a:solidFill>
-            <a:srgbClr val="F1F5F9"/>
-          </a:solidFill>
-          <a:ln w="12700">
-            <a:solidFill>
-              <a:srgbClr val="F1F5F9"/>
-            </a:solidFill>
-            <a:prstDash val="solid"/>
-          </a:ln>
-          <a:effectLst>
-            <a:outerShdw sx="100000" sy="100000" kx="0" ky="0" algn="bl" rotWithShape="0" blurRad="76200" dist="25400" dir="5400000">
-              <a:srgbClr val="000000">
-                <a:alpha val="12000"/>
-              </a:srgbClr>
-            </a:outerShdw>
-          </a:effectLst>
-        </p:spPr>
-      </p:sp>
-      <p:sp>
-        <p:nvSpPr>
-          <p:cNvPr id="9" name="Text 7"/>
-          <p:cNvSpPr txBox="1"/>
-          <p:nvPr/>
-        </p:nvSpPr>
-        <p:spPr>
-          <a:xfrm>
-            <a:off x="3529584" y="1737360"/>
-            <a:ext cx="2286000" cy="685800"/>
-          </a:xfrm>
-          <a:prstGeom prst="rect">
-            <a:avLst/>
-          </a:prstGeom>
-          <a:noFill/>
-          <a:ln/>
-        </p:spPr>
-        <p:txBody>
-          <a:bodyPr wrap="square" lIns="0" tIns="0" rIns="0" bIns="0" rtlCol="0" anchor="ctr"/>
-          <a:lstStyle/>
-          <a:p>
-            <a:pPr indent="0" marL="0">
-              <a:buNone/>
-            </a:pPr>
-            <a:r>
-              <a:rPr lang="en-US" sz="3000" b="1" dirty="0">
-                <a:solidFill>
-                  <a:srgbClr val="5E2CFE"/>
-                </a:solidFill>
-                <a:latin typeface="Calibri" pitchFamily="34" charset="0"/>
-                <a:ea typeface="Calibri" pitchFamily="34" charset="-122"/>
-                <a:cs typeface="Calibri" pitchFamily="34" charset="-120"/>
-              </a:rPr>
-              <a:t>2.8 s</a:t>
-            </a:r>
-            <a:endParaRPr lang="en-US" sz="3000" dirty="0"/>
-          </a:p>
-        </p:txBody>
-      </p:sp>
-      <p:sp>
-        <p:nvSpPr>
-          <p:cNvPr id="10" name="Text 8"/>
-          <p:cNvSpPr txBox="1"/>
-          <p:nvPr/>
-        </p:nvSpPr>
-        <p:spPr>
-          <a:xfrm>
-            <a:off x="3529584" y="2423160"/>
-            <a:ext cx="2286000" cy="320040"/>
-          </a:xfrm>
-          <a:prstGeom prst="rect">
-            <a:avLst/>
-          </a:prstGeom>
-          <a:noFill/>
-          <a:ln/>
-        </p:spPr>
-        <p:txBody>
-          <a:bodyPr wrap="square" lIns="0" tIns="0" rIns="0" bIns="0" rtlCol="0" anchor="ctr"/>
-          <a:lstStyle/>
-          <a:p>
-            <a:pPr indent="0" marL="0">
-              <a:buNone/>
-            </a:pPr>
-            <a:r>
-              <a:rPr lang="en-US" sz="1300" b="1" dirty="0">
-                <a:solidFill>
-                  <a:srgbClr val="171721"/>
-                </a:solidFill>
-                <a:latin typeface="Calibri" pitchFamily="34" charset="0"/>
-                <a:ea typeface="Calibri" pitchFamily="34" charset="-122"/>
-                <a:cs typeface="Calibri" pitchFamily="34" charset="-120"/>
-              </a:rPr>
-              <a:t>RPO, proven write by write</a:t>
-            </a:r>
-            <a:endParaRPr lang="en-US" sz="1300" dirty="0"/>
-          </a:p>
-        </p:txBody>
-      </p:sp>
-      <p:sp>
-        <p:nvSpPr>
-          <p:cNvPr id="11" name="Text 9"/>
-          <p:cNvSpPr txBox="1"/>
-          <p:nvPr/>
-        </p:nvSpPr>
-        <p:spPr>
-          <a:xfrm>
-            <a:off x="3529584" y="2743200"/>
-            <a:ext cx="2331720" cy="457200"/>
-          </a:xfrm>
-          <a:prstGeom prst="rect">
-            <a:avLst/>
-          </a:prstGeom>
-          <a:noFill/>
-          <a:ln/>
-        </p:spPr>
-        <p:txBody>
-          <a:bodyPr wrap="square" lIns="0" tIns="0" rIns="0" bIns="0" rtlCol="0" anchor="t"/>
-          <a:lstStyle/>
-          <a:p>
-            <a:pPr indent="0" marL="0">
-              <a:buNone/>
-            </a:pPr>
-            <a:r>
-              <a:rPr lang="en-US" sz="1100" dirty="0">
-                <a:solidFill>
-                  <a:srgbClr val="5B6B7F"/>
-                </a:solidFill>
-                <a:latin typeface="Calibri" pitchFamily="34" charset="0"/>
-                <a:ea typeface="Calibri" pitchFamily="34" charset="-122"/>
-                <a:cs typeface="Calibri" pitchFamily="34" charset="-120"/>
-              </a:rPr>
-              <a:t>2 of 45 acknowledged writes lost in the forced failover</a:t>
-            </a:r>
-            <a:endParaRPr lang="en-US" sz="1100" dirty="0"/>
-          </a:p>
-        </p:txBody>
-      </p:sp>
-      <p:sp>
-        <p:nvSpPr>
-          <p:cNvPr id="12" name="Shape 10"/>
-          <p:cNvSpPr/>
-          <p:nvPr/>
-        </p:nvSpPr>
-        <p:spPr>
-          <a:xfrm>
-            <a:off x="6144768" y="1600200"/>
-            <a:ext cx="2633472" cy="1691640"/>
-          </a:xfrm>
-          <a:prstGeom prst="roundRect">
-            <a:avLst>
-              <a:gd name="adj" fmla="val 4324"/>
-            </a:avLst>
-          </a:prstGeom>
-          <a:solidFill>
-            <a:srgbClr val="F1F5F9"/>
-          </a:solidFill>
-          <a:ln w="12700">
-            <a:solidFill>
-              <a:srgbClr val="F1F5F9"/>
-            </a:solidFill>
-            <a:prstDash val="solid"/>
-          </a:ln>
-          <a:effectLst>
-            <a:outerShdw sx="100000" sy="100000" kx="0" ky="0" algn="bl" rotWithShape="0" blurRad="76200" dist="25400" dir="5400000">
-              <a:srgbClr val="000000">
-                <a:alpha val="12000"/>
-              </a:srgbClr>
-            </a:outerShdw>
-          </a:effectLst>
-        </p:spPr>
-      </p:sp>
-      <p:sp>
-        <p:nvSpPr>
-          <p:cNvPr id="13" name="Text 11"/>
-          <p:cNvSpPr txBox="1"/>
-          <p:nvPr/>
-        </p:nvSpPr>
-        <p:spPr>
-          <a:xfrm>
-            <a:off x="6327648" y="1737360"/>
-            <a:ext cx="2286000" cy="685800"/>
-          </a:xfrm>
-          <a:prstGeom prst="rect">
-            <a:avLst/>
-          </a:prstGeom>
-          <a:noFill/>
-          <a:ln/>
-        </p:spPr>
-        <p:txBody>
-          <a:bodyPr wrap="square" lIns="0" tIns="0" rIns="0" bIns="0" rtlCol="0" anchor="ctr"/>
-          <a:lstStyle/>
-          <a:p>
-            <a:pPr indent="0" marL="0">
-              <a:buNone/>
-            </a:pPr>
-            <a:r>
-              <a:rPr lang="en-US" sz="3000" b="1" dirty="0">
-                <a:solidFill>
-                  <a:srgbClr val="171721"/>
-                </a:solidFill>
-                <a:latin typeface="Calibri" pitchFamily="34" charset="0"/>
-                <a:ea typeface="Calibri" pitchFamily="34" charset="-122"/>
-                <a:cs typeface="Calibri" pitchFamily="34" charset="-120"/>
-              </a:rPr>
-              <a:t>3 min 44 s</a:t>
-            </a:r>
-            <a:endParaRPr lang="en-US" sz="3000" dirty="0"/>
-          </a:p>
-        </p:txBody>
-      </p:sp>
-      <p:sp>
-        <p:nvSpPr>
-          <p:cNvPr id="14" name="Text 12"/>
-          <p:cNvSpPr txBox="1"/>
-          <p:nvPr/>
-        </p:nvSpPr>
-        <p:spPr>
-          <a:xfrm>
-            <a:off x="6327648" y="2423160"/>
-            <a:ext cx="2286000" cy="320040"/>
-          </a:xfrm>
-          <a:prstGeom prst="rect">
-            <a:avLst/>
-          </a:prstGeom>
-          <a:noFill/>
-          <a:ln/>
-        </p:spPr>
-        <p:txBody>
-          <a:bodyPr wrap="square" lIns="0" tIns="0" rIns="0" bIns="0" rtlCol="0" anchor="ctr"/>
-          <a:lstStyle/>
-          <a:p>
-            <a:pPr indent="0" marL="0">
-              <a:buNone/>
-            </a:pPr>
-            <a:r>
-              <a:rPr lang="en-US" sz="1300" b="1" dirty="0">
-                <a:solidFill>
-                  <a:srgbClr val="171721"/>
-                </a:solidFill>
-                <a:latin typeface="Calibri" pitchFamily="34" charset="0"/>
-                <a:ea typeface="Calibri" pitchFamily="34" charset="-122"/>
-                <a:cs typeface="Calibri" pitchFamily="34" charset="-120"/>
-              </a:rPr>
-              <a:t>Failback to primary</a:t>
-            </a:r>
-            <a:endParaRPr lang="en-US" sz="1300" dirty="0"/>
-          </a:p>
-        </p:txBody>
-      </p:sp>
-      <p:sp>
-        <p:nvSpPr>
-          <p:cNvPr id="15" name="Text 13"/>
-          <p:cNvSpPr txBox="1"/>
-          <p:nvPr/>
-        </p:nvSpPr>
-        <p:spPr>
-          <a:xfrm>
-            <a:off x="6327648" y="2743200"/>
-            <a:ext cx="2331720" cy="457200"/>
-          </a:xfrm>
-          <a:prstGeom prst="rect">
-            <a:avLst/>
-          </a:prstGeom>
-          <a:noFill/>
-          <a:ln/>
-        </p:spPr>
-        <p:txBody>
-          <a:bodyPr wrap="square" lIns="0" tIns="0" rIns="0" bIns="0" rtlCol="0" anchor="t"/>
-          <a:lstStyle/>
-          <a:p>
-            <a:pPr indent="0" marL="0">
-              <a:buNone/>
-            </a:pPr>
-            <a:r>
-              <a:rPr lang="en-US" sz="1100" dirty="0">
-                <a:solidFill>
-                  <a:srgbClr val="5B6B7F"/>
-                </a:solidFill>
-                <a:latin typeface="Calibri" pitchFamily="34" charset="0"/>
-                <a:ea typeface="Calibri" pitchFamily="34" charset="-122"/>
-                <a:cs typeface="Calibri" pitchFamily="34" charset="-120"/>
-              </a:rPr>
-              <a:t>planned, no data loss</a:t>
-            </a:r>
-            <a:endParaRPr lang="en-US" sz="1100" dirty="0"/>
-          </a:p>
-        </p:txBody>
-      </p:sp>
-      <p:sp>
-        <p:nvSpPr>
-          <p:cNvPr id="16" name="Shape 14"/>
-          <p:cNvSpPr/>
-          <p:nvPr/>
-        </p:nvSpPr>
-        <p:spPr>
-          <a:xfrm>
-            <a:off x="8942832" y="1600200"/>
-            <a:ext cx="2633472" cy="1691640"/>
-          </a:xfrm>
-          <a:prstGeom prst="roundRect">
-            <a:avLst>
-              <a:gd name="adj" fmla="val 4324"/>
-            </a:avLst>
-          </a:prstGeom>
-          <a:solidFill>
-            <a:srgbClr val="F1F5F9"/>
-          </a:solidFill>
-          <a:ln w="12700">
-            <a:solidFill>
-              <a:srgbClr val="F1F5F9"/>
-            </a:solidFill>
-            <a:prstDash val="solid"/>
-          </a:ln>
-          <a:effectLst>
-            <a:outerShdw sx="100000" sy="100000" kx="0" ky="0" algn="bl" rotWithShape="0" blurRad="76200" dist="25400" dir="5400000">
-              <a:srgbClr val="000000">
-                <a:alpha val="12000"/>
-              </a:srgbClr>
-            </a:outerShdw>
-          </a:effectLst>
-        </p:spPr>
-      </p:sp>
-      <p:sp>
-        <p:nvSpPr>
-          <p:cNvPr id="17" name="Text 15"/>
-          <p:cNvSpPr txBox="1"/>
-          <p:nvPr/>
-        </p:nvSpPr>
-        <p:spPr>
-          <a:xfrm>
-            <a:off x="9125712" y="1737360"/>
-            <a:ext cx="2286000" cy="685800"/>
-          </a:xfrm>
-          <a:prstGeom prst="rect">
-            <a:avLst/>
-          </a:prstGeom>
-          <a:noFill/>
-          <a:ln/>
-        </p:spPr>
-        <p:txBody>
-          <a:bodyPr wrap="square" lIns="0" tIns="0" rIns="0" bIns="0" rtlCol="0" anchor="ctr"/>
-          <a:lstStyle/>
-          <a:p>
-            <a:pPr indent="0" marL="0">
-              <a:buNone/>
-            </a:pPr>
-            <a:r>
-              <a:rPr lang="en-US" sz="3000" b="1" dirty="0">
-                <a:solidFill>
-                  <a:srgbClr val="171721"/>
-                </a:solidFill>
-                <a:latin typeface="Calibri" pitchFamily="34" charset="0"/>
-                <a:ea typeface="Calibri" pitchFamily="34" charset="-122"/>
-                <a:cs typeface="Calibri" pitchFamily="34" charset="-120"/>
-              </a:rPr>
-              <a:t>3 min 08 s</a:t>
-            </a:r>
-            <a:endParaRPr lang="en-US" sz="3000" dirty="0"/>
-          </a:p>
-        </p:txBody>
-      </p:sp>
-      <p:sp>
-        <p:nvSpPr>
-          <p:cNvPr id="18" name="Text 16"/>
-          <p:cNvSpPr txBox="1"/>
-          <p:nvPr/>
-        </p:nvSpPr>
-        <p:spPr>
-          <a:xfrm>
-            <a:off x="9125712" y="2423160"/>
-            <a:ext cx="2286000" cy="320040"/>
-          </a:xfrm>
-          <a:prstGeom prst="rect">
-            <a:avLst/>
-          </a:prstGeom>
-          <a:noFill/>
-          <a:ln/>
-        </p:spPr>
-        <p:txBody>
-          <a:bodyPr wrap="square" lIns="0" tIns="0" rIns="0" bIns="0" rtlCol="0" anchor="ctr"/>
-          <a:lstStyle/>
-          <a:p>
-            <a:pPr indent="0" marL="0">
-              <a:buNone/>
-            </a:pPr>
-            <a:r>
-              <a:rPr lang="en-US" sz="1300" b="1" dirty="0">
-                <a:solidFill>
-                  <a:srgbClr val="171721"/>
-                </a:solidFill>
-                <a:latin typeface="Calibri" pitchFamily="34" charset="0"/>
-                <a:ea typeface="Calibri" pitchFamily="34" charset="-122"/>
-                <a:cs typeface="Calibri" pitchFamily="34" charset="-120"/>
-              </a:rPr>
-              <a:t>VM recovered by Site Recovery</a:t>
-            </a:r>
-            <a:endParaRPr lang="en-US" sz="1300" dirty="0"/>
-          </a:p>
-        </p:txBody>
-      </p:sp>
-      <p:sp>
-        <p:nvSpPr>
-          <p:cNvPr id="19" name="Text 17"/>
-          <p:cNvSpPr txBox="1"/>
-          <p:nvPr/>
-        </p:nvSpPr>
-        <p:spPr>
-          <a:xfrm>
-            <a:off x="9125712" y="2743200"/>
-            <a:ext cx="2331720" cy="457200"/>
-          </a:xfrm>
-          <a:prstGeom prst="rect">
-            <a:avLst/>
-          </a:prstGeom>
-          <a:noFill/>
-          <a:ln/>
-        </p:spPr>
-        <p:txBody>
-          <a:bodyPr wrap="square" lIns="0" tIns="0" rIns="0" bIns="0" rtlCol="0" anchor="t"/>
-          <a:lstStyle/>
-          <a:p>
-            <a:pPr indent="0" marL="0">
-              <a:buNone/>
-            </a:pPr>
-            <a:r>
-              <a:rPr lang="en-US" sz="1100" dirty="0">
-                <a:solidFill>
-                  <a:srgbClr val="5B6B7F"/>
-                </a:solidFill>
-                <a:latin typeface="Calibri" pitchFamily="34" charset="0"/>
-                <a:ea typeface="Calibri" pitchFamily="34" charset="-122"/>
-                <a:cs typeface="Calibri" pitchFamily="34" charset="-120"/>
-              </a:rPr>
-              <a:t>test-failover job; service verified inside the VM at 3 min 55 s</a:t>
-            </a:r>
-            <a:endParaRPr lang="en-US" sz="1100" dirty="0"/>
-          </a:p>
-        </p:txBody>
-      </p:sp>
-      <p:sp>
-        <p:nvSpPr>
-          <p:cNvPr id="20" name="Text 18"/>
-          <p:cNvSpPr txBox="1"/>
-          <p:nvPr/>
-        </p:nvSpPr>
-        <p:spPr>
-          <a:xfrm>
-            <a:off x="548640" y="3566160"/>
-            <a:ext cx="11064240" cy="320040"/>
-          </a:xfrm>
-          <a:prstGeom prst="rect">
-            <a:avLst/>
-          </a:prstGeom>
-          <a:noFill/>
-          <a:ln/>
-        </p:spPr>
-        <p:txBody>
-          <a:bodyPr wrap="square" lIns="0" tIns="0" rIns="0" bIns="0" rtlCol="0" anchor="ctr"/>
-          <a:lstStyle/>
-          <a:p>
-            <a:pPr indent="0" marL="0">
-              <a:buNone/>
-            </a:pPr>
-            <a:r>
-              <a:rPr lang="en-US" sz="1400" b="1" dirty="0">
-                <a:solidFill>
-                  <a:srgbClr val="171721"/>
-                </a:solidFill>
-                <a:latin typeface="Calibri" pitchFamily="34" charset="0"/>
-                <a:ea typeface="Calibri" pitchFamily="34" charset="-122"/>
-                <a:cs typeface="Calibri" pitchFamily="34" charset="-120"/>
-              </a:rPr>
-              <a:t>Where the 29.04 s went (latest drill, one clock, segments add up exactly)</a:t>
-            </a:r>
-            <a:endParaRPr lang="en-US" sz="1400" dirty="0"/>
-          </a:p>
-        </p:txBody>
-      </p:sp>
-      <p:sp>
-        <p:nvSpPr>
-          <p:cNvPr id="21" name="Shape 19"/>
-          <p:cNvSpPr/>
-          <p:nvPr/>
-        </p:nvSpPr>
-        <p:spPr>
-          <a:xfrm>
-            <a:off x="548640" y="3977640"/>
-            <a:ext cx="272034" cy="457200"/>
-          </a:xfrm>
-          <a:prstGeom prst="rect">
-            <a:avLst/>
-          </a:prstGeom>
-          <a:solidFill>
-            <a:srgbClr val="9F86FF"/>
-          </a:solidFill>
-          <a:ln w="12700">
-            <a:solidFill>
-              <a:srgbClr val="FFFFFF"/>
-            </a:solidFill>
-            <a:prstDash val="solid"/>
-          </a:ln>
-        </p:spPr>
-      </p:sp>
-      <p:sp>
-        <p:nvSpPr>
-          <p:cNvPr id="22" name="Shape 20"/>
-          <p:cNvSpPr/>
-          <p:nvPr/>
-        </p:nvSpPr>
-        <p:spPr>
-          <a:xfrm>
-            <a:off x="820674" y="3977640"/>
-            <a:ext cx="5456301" cy="457200"/>
-          </a:xfrm>
-          <a:prstGeom prst="rect">
-            <a:avLst/>
-          </a:prstGeom>
-          <a:solidFill>
-            <a:srgbClr val="5E2CFE"/>
-          </a:solidFill>
-          <a:ln w="12700">
-            <a:solidFill>
-              <a:srgbClr val="FFFFFF"/>
-            </a:solidFill>
-            <a:prstDash val="solid"/>
-          </a:ln>
-        </p:spPr>
-      </p:sp>
-      <p:sp>
-        <p:nvSpPr>
-          <p:cNvPr id="23" name="Text 21"/>
-          <p:cNvSpPr txBox="1"/>
-          <p:nvPr/>
-        </p:nvSpPr>
-        <p:spPr>
-          <a:xfrm>
-            <a:off x="820674" y="3977640"/>
-            <a:ext cx="5456301" cy="457200"/>
-          </a:xfrm>
-          <a:prstGeom prst="rect">
-            <a:avLst/>
-          </a:prstGeom>
-          <a:noFill/>
-          <a:ln/>
-        </p:spPr>
-        <p:txBody>
-          <a:bodyPr wrap="square" lIns="0" tIns="0" rIns="0" bIns="0" rtlCol="0" anchor="ctr"/>
-          <a:lstStyle/>
-          <a:p>
-            <a:pPr algn="ctr" indent="0" marL="0">
-              <a:buNone/>
-            </a:pPr>
-            <a:r>
-              <a:rPr lang="en-US" sz="1200" b="1" dirty="0">
-                <a:solidFill>
-                  <a:srgbClr val="FFFFFF"/>
-                </a:solidFill>
-                <a:latin typeface="Calibri" pitchFamily="34" charset="0"/>
-                <a:ea typeface="Calibri" pitchFamily="34" charset="-122"/>
-                <a:cs typeface="Calibri" pitchFamily="34" charset="-120"/>
-              </a:rPr>
-              <a:t>14.321 s</a:t>
-            </a:r>
-            <a:endParaRPr lang="en-US" sz="1200" dirty="0"/>
-          </a:p>
-        </p:txBody>
-      </p:sp>
-      <p:sp>
-        <p:nvSpPr>
-          <p:cNvPr id="24" name="Shape 22"/>
-          <p:cNvSpPr/>
-          <p:nvPr/>
-        </p:nvSpPr>
-        <p:spPr>
-          <a:xfrm>
-            <a:off x="6276975" y="3977640"/>
-            <a:ext cx="1440942" cy="457200"/>
-          </a:xfrm>
-          <a:prstGeom prst="rect">
-            <a:avLst/>
-          </a:prstGeom>
-          <a:solidFill>
-            <a:srgbClr val="C105B2"/>
-          </a:solidFill>
-          <a:ln w="12700">
-            <a:solidFill>
-              <a:srgbClr val="FFFFFF"/>
-            </a:solidFill>
-            <a:prstDash val="solid"/>
-          </a:ln>
-        </p:spPr>
-      </p:sp>
-      <p:sp>
-        <p:nvSpPr>
-          <p:cNvPr id="25" name="Text 23"/>
-          <p:cNvSpPr txBox="1"/>
-          <p:nvPr/>
-        </p:nvSpPr>
-        <p:spPr>
-          <a:xfrm>
-            <a:off x="6276975" y="3977640"/>
-            <a:ext cx="1440942" cy="457200"/>
-          </a:xfrm>
-          <a:prstGeom prst="rect">
-            <a:avLst/>
-          </a:prstGeom>
-          <a:noFill/>
-          <a:ln/>
-        </p:spPr>
-        <p:txBody>
-          <a:bodyPr wrap="square" lIns="0" tIns="0" rIns="0" bIns="0" rtlCol="0" anchor="ctr"/>
-          <a:lstStyle/>
-          <a:p>
-            <a:pPr algn="ctr" indent="0" marL="0">
-              <a:buNone/>
-            </a:pPr>
-            <a:r>
-              <a:rPr lang="en-US" sz="1200" b="1" dirty="0">
-                <a:solidFill>
-                  <a:srgbClr val="FFFFFF"/>
-                </a:solidFill>
-                <a:latin typeface="Calibri" pitchFamily="34" charset="0"/>
-                <a:ea typeface="Calibri" pitchFamily="34" charset="-122"/>
-                <a:cs typeface="Calibri" pitchFamily="34" charset="-120"/>
-              </a:rPr>
-              <a:t>3.782 s</a:t>
-            </a:r>
-            <a:endParaRPr lang="en-US" sz="1200" dirty="0"/>
-          </a:p>
-        </p:txBody>
-      </p:sp>
-      <p:sp>
-        <p:nvSpPr>
-          <p:cNvPr id="26" name="Shape 24"/>
-          <p:cNvSpPr/>
-          <p:nvPr/>
-        </p:nvSpPr>
-        <p:spPr>
-          <a:xfrm>
-            <a:off x="7717917" y="3977640"/>
-            <a:ext cx="3611118" cy="457200"/>
-          </a:xfrm>
-          <a:prstGeom prst="rect">
-            <a:avLst/>
-          </a:prstGeom>
-          <a:solidFill>
-            <a:srgbClr val="7C5CFF"/>
-          </a:solidFill>
-          <a:ln w="12700">
-            <a:solidFill>
-              <a:srgbClr val="FFFFFF"/>
-            </a:solidFill>
-            <a:prstDash val="solid"/>
-          </a:ln>
-        </p:spPr>
-      </p:sp>
-      <p:sp>
-        <p:nvSpPr>
-          <p:cNvPr id="27" name="Text 25"/>
-          <p:cNvSpPr txBox="1"/>
-          <p:nvPr/>
-        </p:nvSpPr>
-        <p:spPr>
-          <a:xfrm>
-            <a:off x="7717917" y="3977640"/>
-            <a:ext cx="3611118" cy="457200"/>
-          </a:xfrm>
-          <a:prstGeom prst="rect">
-            <a:avLst/>
-          </a:prstGeom>
-          <a:noFill/>
-          <a:ln/>
-        </p:spPr>
-        <p:txBody>
-          <a:bodyPr wrap="square" lIns="0" tIns="0" rIns="0" bIns="0" rtlCol="0" anchor="ctr"/>
-          <a:lstStyle/>
-          <a:p>
-            <a:pPr algn="ctr" indent="0" marL="0">
-              <a:buNone/>
-            </a:pPr>
-            <a:r>
-              <a:rPr lang="en-US" sz="1200" b="1" dirty="0">
-                <a:solidFill>
-                  <a:srgbClr val="FFFFFF"/>
-                </a:solidFill>
-                <a:latin typeface="Calibri" pitchFamily="34" charset="0"/>
-                <a:ea typeface="Calibri" pitchFamily="34" charset="-122"/>
-                <a:cs typeface="Calibri" pitchFamily="34" charset="-120"/>
-              </a:rPr>
-              <a:t>9.478 s</a:t>
-            </a:r>
-            <a:endParaRPr lang="en-US" sz="1200" dirty="0"/>
-          </a:p>
-        </p:txBody>
-      </p:sp>
-      <p:sp>
-        <p:nvSpPr>
-          <p:cNvPr id="28" name="Shape 26"/>
-          <p:cNvSpPr/>
-          <p:nvPr/>
-        </p:nvSpPr>
-        <p:spPr>
-          <a:xfrm>
-            <a:off x="11329035" y="3977640"/>
-            <a:ext cx="283845" cy="457200"/>
-          </a:xfrm>
-          <a:prstGeom prst="rect">
-            <a:avLst/>
-          </a:prstGeom>
-          <a:solidFill>
-            <a:srgbClr val="BDBDC7"/>
-          </a:solidFill>
-          <a:ln w="12700">
-            <a:solidFill>
-              <a:srgbClr val="FFFFFF"/>
-            </a:solidFill>
-            <a:prstDash val="solid"/>
-          </a:ln>
-        </p:spPr>
-      </p:sp>
-      <p:sp>
-        <p:nvSpPr>
-          <p:cNvPr id="29" name="Shape 27"/>
-          <p:cNvSpPr/>
-          <p:nvPr/>
-        </p:nvSpPr>
-        <p:spPr>
-          <a:xfrm>
-            <a:off x="548640" y="4617720"/>
-            <a:ext cx="164592" cy="164592"/>
-          </a:xfrm>
-          <a:prstGeom prst="rect">
-            <a:avLst/>
-          </a:prstGeom>
-          <a:solidFill>
-            <a:srgbClr val="9F86FF"/>
-          </a:solidFill>
-          <a:ln w="12700">
-            <a:solidFill>
-              <a:srgbClr val="9F86FF"/>
-            </a:solidFill>
-            <a:prstDash val="solid"/>
-          </a:ln>
-        </p:spPr>
-      </p:sp>
-      <p:sp>
-        <p:nvSpPr>
-          <p:cNvPr id="30" name="Text 28"/>
-          <p:cNvSpPr txBox="1"/>
-          <p:nvPr/>
-        </p:nvSpPr>
-        <p:spPr>
-          <a:xfrm>
-            <a:off x="777240" y="4544568"/>
-            <a:ext cx="1965960" cy="365760"/>
-          </a:xfrm>
-          <a:prstGeom prst="rect">
-            <a:avLst/>
-          </a:prstGeom>
-          <a:noFill/>
-          <a:ln/>
-        </p:spPr>
-        <p:txBody>
-          <a:bodyPr wrap="square" lIns="0" tIns="0" rIns="0" bIns="0" rtlCol="0" anchor="ctr"/>
-          <a:lstStyle/>
-          <a:p>
-            <a:pPr indent="0" marL="0">
-              <a:buNone/>
-            </a:pPr>
-            <a:r>
-              <a:rPr lang="en-US" sz="1050" dirty="0">
-                <a:solidFill>
-                  <a:srgbClr val="1B2635"/>
-                </a:solidFill>
-                <a:latin typeface="Calibri" pitchFamily="34" charset="0"/>
-                <a:ea typeface="Calibri" pitchFamily="34" charset="-122"/>
-                <a:cs typeface="Calibri" pitchFamily="34" charset="-120"/>
-              </a:rPr>
-              <a:t>Outage injected  0.714 s</a:t>
-            </a:r>
-            <a:endParaRPr lang="en-US" sz="1050" dirty="0"/>
-          </a:p>
-        </p:txBody>
-      </p:sp>
-      <p:sp>
-        <p:nvSpPr>
-          <p:cNvPr id="31" name="Shape 29"/>
-          <p:cNvSpPr/>
-          <p:nvPr/>
-        </p:nvSpPr>
-        <p:spPr>
-          <a:xfrm>
-            <a:off x="2761488" y="4617720"/>
-            <a:ext cx="164592" cy="164592"/>
-          </a:xfrm>
-          <a:prstGeom prst="rect">
-            <a:avLst/>
-          </a:prstGeom>
-          <a:solidFill>
-            <a:srgbClr val="5E2CFE"/>
-          </a:solidFill>
-          <a:ln w="12700">
-            <a:solidFill>
-              <a:srgbClr val="5E2CFE"/>
-            </a:solidFill>
-            <a:prstDash val="solid"/>
-          </a:ln>
-        </p:spPr>
-      </p:sp>
-      <p:sp>
-        <p:nvSpPr>
-          <p:cNvPr id="32" name="Text 30"/>
-          <p:cNvSpPr txBox="1"/>
-          <p:nvPr/>
-        </p:nvSpPr>
-        <p:spPr>
-          <a:xfrm>
-            <a:off x="2990088" y="4544568"/>
-            <a:ext cx="1965960" cy="365760"/>
-          </a:xfrm>
-          <a:prstGeom prst="rect">
-            <a:avLst/>
-          </a:prstGeom>
-          <a:noFill/>
-          <a:ln/>
-        </p:spPr>
-        <p:txBody>
-          <a:bodyPr wrap="square" lIns="0" tIns="0" rIns="0" bIns="0" rtlCol="0" anchor="ctr"/>
-          <a:lstStyle/>
-          <a:p>
-            <a:pPr indent="0" marL="0">
-              <a:buNone/>
-            </a:pPr>
-            <a:r>
-              <a:rPr lang="en-US" sz="1050" dirty="0">
-                <a:solidFill>
-                  <a:srgbClr val="1B2635"/>
-                </a:solidFill>
-                <a:latin typeface="Calibri" pitchFamily="34" charset="0"/>
-                <a:ea typeface="Calibri" pitchFamily="34" charset="-122"/>
-                <a:cs typeface="Calibri" pitchFamily="34" charset="-120"/>
-              </a:rPr>
-              <a:t>SQL forced failover  14.321 s</a:t>
-            </a:r>
-            <a:endParaRPr lang="en-US" sz="1050" dirty="0"/>
-          </a:p>
-        </p:txBody>
-      </p:sp>
-      <p:sp>
-        <p:nvSpPr>
-          <p:cNvPr id="33" name="Shape 31"/>
-          <p:cNvSpPr/>
-          <p:nvPr/>
-        </p:nvSpPr>
-        <p:spPr>
-          <a:xfrm>
-            <a:off x="4974336" y="4617720"/>
-            <a:ext cx="164592" cy="164592"/>
-          </a:xfrm>
-          <a:prstGeom prst="rect">
-            <a:avLst/>
-          </a:prstGeom>
-          <a:solidFill>
-            <a:srgbClr val="C105B2"/>
-          </a:solidFill>
-          <a:ln w="12700">
-            <a:solidFill>
-              <a:srgbClr val="C105B2"/>
-            </a:solidFill>
-            <a:prstDash val="solid"/>
-          </a:ln>
-        </p:spPr>
-      </p:sp>
-      <p:sp>
-        <p:nvSpPr>
-          <p:cNvPr id="34" name="Text 32"/>
-          <p:cNvSpPr txBox="1"/>
-          <p:nvPr/>
-        </p:nvSpPr>
-        <p:spPr>
-          <a:xfrm>
-            <a:off x="5202936" y="4544568"/>
-            <a:ext cx="1965960" cy="365760"/>
-          </a:xfrm>
-          <a:prstGeom prst="rect">
-            <a:avLst/>
-          </a:prstGeom>
-          <a:noFill/>
-          <a:ln/>
-        </p:spPr>
-        <p:txBody>
-          <a:bodyPr wrap="square" lIns="0" tIns="0" rIns="0" bIns="0" rtlCol="0" anchor="ctr"/>
-          <a:lstStyle/>
-          <a:p>
-            <a:pPr indent="0" marL="0">
-              <a:buNone/>
-            </a:pPr>
-            <a:r>
-              <a:rPr lang="en-US" sz="1050" dirty="0">
-                <a:solidFill>
-                  <a:srgbClr val="1B2635"/>
-                </a:solidFill>
-                <a:latin typeface="Calibri" pitchFamily="34" charset="0"/>
-                <a:ea typeface="Calibri" pitchFamily="34" charset="-122"/>
-                <a:cs typeface="Calibri" pitchFamily="34" charset="-120"/>
-              </a:rPr>
-              <a:t>Traffic Manager reroute  3.782 s</a:t>
-            </a:r>
-            <a:endParaRPr lang="en-US" sz="1050" dirty="0"/>
-          </a:p>
-        </p:txBody>
-      </p:sp>
-      <p:sp>
-        <p:nvSpPr>
-          <p:cNvPr id="35" name="Shape 33"/>
-          <p:cNvSpPr/>
-          <p:nvPr/>
-        </p:nvSpPr>
-        <p:spPr>
-          <a:xfrm>
-            <a:off x="7187184" y="4617720"/>
-            <a:ext cx="164592" cy="164592"/>
-          </a:xfrm>
-          <a:prstGeom prst="rect">
-            <a:avLst/>
-          </a:prstGeom>
-          <a:solidFill>
-            <a:srgbClr val="7C5CFF"/>
-          </a:solidFill>
-          <a:ln w="12700">
-            <a:solidFill>
-              <a:srgbClr val="7C5CFF"/>
-            </a:solidFill>
-            <a:prstDash val="solid"/>
-          </a:ln>
-        </p:spPr>
-      </p:sp>
-      <p:sp>
-        <p:nvSpPr>
-          <p:cNvPr id="36" name="Text 34"/>
-          <p:cNvSpPr txBox="1"/>
-          <p:nvPr/>
-        </p:nvSpPr>
-        <p:spPr>
-          <a:xfrm>
-            <a:off x="7415784" y="4544568"/>
-            <a:ext cx="1965960" cy="365760"/>
-          </a:xfrm>
-          <a:prstGeom prst="rect">
-            <a:avLst/>
-          </a:prstGeom>
-          <a:noFill/>
-          <a:ln/>
-        </p:spPr>
-        <p:txBody>
-          <a:bodyPr wrap="square" lIns="0" tIns="0" rIns="0" bIns="0" rtlCol="0" anchor="ctr"/>
-          <a:lstStyle/>
-          <a:p>
-            <a:pPr indent="0" marL="0">
-              <a:buNone/>
-            </a:pPr>
-            <a:r>
-              <a:rPr lang="en-US" sz="1050" dirty="0">
-                <a:solidFill>
-                  <a:srgbClr val="1B2635"/>
-                </a:solidFill>
-                <a:latin typeface="Calibri" pitchFamily="34" charset="0"/>
-                <a:ea typeface="Calibri" pitchFamily="34" charset="-122"/>
-                <a:cs typeface="Calibri" pitchFamily="34" charset="-120"/>
-              </a:rPr>
-              <a:t>DNS + health checks reach DR  9.478 s</a:t>
-            </a:r>
-            <a:endParaRPr lang="en-US" sz="1050" dirty="0"/>
-          </a:p>
-        </p:txBody>
-      </p:sp>
-      <p:sp>
-        <p:nvSpPr>
-          <p:cNvPr id="37" name="Shape 35"/>
-          <p:cNvSpPr/>
-          <p:nvPr/>
-        </p:nvSpPr>
-        <p:spPr>
-          <a:xfrm>
-            <a:off x="9400032" y="4617720"/>
-            <a:ext cx="164592" cy="164592"/>
-          </a:xfrm>
-          <a:prstGeom prst="rect">
-            <a:avLst/>
-          </a:prstGeom>
-          <a:solidFill>
-            <a:srgbClr val="BDBDC7"/>
-          </a:solidFill>
-          <a:ln w="12700">
-            <a:solidFill>
-              <a:srgbClr val="BDBDC7"/>
-            </a:solidFill>
-            <a:prstDash val="solid"/>
-          </a:ln>
-        </p:spPr>
-      </p:sp>
-      <p:sp>
-        <p:nvSpPr>
-          <p:cNvPr id="38" name="Text 36"/>
-          <p:cNvSpPr txBox="1"/>
-          <p:nvPr/>
-        </p:nvSpPr>
-        <p:spPr>
-          <a:xfrm>
-            <a:off x="9628632" y="4544568"/>
-            <a:ext cx="1965960" cy="365760"/>
-          </a:xfrm>
-          <a:prstGeom prst="rect">
-            <a:avLst/>
-          </a:prstGeom>
-          <a:noFill/>
-          <a:ln/>
-        </p:spPr>
-        <p:txBody>
-          <a:bodyPr wrap="square" lIns="0" tIns="0" rIns="0" bIns="0" rtlCol="0" anchor="ctr"/>
-          <a:lstStyle/>
-          <a:p>
-            <a:pPr indent="0" marL="0">
-              <a:buNone/>
-            </a:pPr>
-            <a:r>
-              <a:rPr lang="en-US" sz="1050" dirty="0">
-                <a:solidFill>
-                  <a:srgbClr val="1B2635"/>
-                </a:solidFill>
-                <a:latin typeface="Calibri" pitchFamily="34" charset="0"/>
-                <a:ea typeface="Calibri" pitchFamily="34" charset="-122"/>
-                <a:cs typeface="Calibri" pitchFamily="34" charset="-120"/>
-              </a:rPr>
-              <a:t>Engine bookkeeping  0.745 s</a:t>
-            </a:r>
-            <a:endParaRPr lang="en-US" sz="1050" dirty="0"/>
-          </a:p>
-        </p:txBody>
-      </p:sp>
-      <p:sp>
-        <p:nvSpPr>
-          <p:cNvPr id="39" name="Shape 37"/>
-          <p:cNvSpPr/>
-          <p:nvPr/>
-        </p:nvSpPr>
-        <p:spPr>
-          <a:xfrm>
-            <a:off x="548640" y="5120640"/>
-            <a:ext cx="11064240" cy="1143000"/>
-          </a:xfrm>
-          <a:prstGeom prst="roundRect">
-            <a:avLst>
-              <a:gd name="adj" fmla="val 6400"/>
+              <a:gd name="adj" fmla="val 18750"/>
             </a:avLst>
           </a:prstGeom>
           <a:solidFill>
@@ -4789,14 +4660,14 @@
       </p:sp>
       <p:sp>
         <p:nvSpPr>
-          <p:cNvPr id="40" name="Text 38"/>
-          <p:cNvSpPr txBox="1"/>
-          <p:nvPr/>
-        </p:nvSpPr>
-        <p:spPr>
-          <a:xfrm>
-            <a:off x="777240" y="5120640"/>
-            <a:ext cx="10607040" cy="1143000"/>
+          <p:cNvPr id="6" name="Text 3"/>
+          <p:cNvSpPr txBox="1"/>
+          <p:nvPr/>
+        </p:nvSpPr>
+        <p:spPr>
+          <a:xfrm>
+            <a:off x="548640" y="6144768"/>
+            <a:ext cx="1170432" cy="292608"/>
           </a:xfrm>
           <a:prstGeom prst="rect">
             <a:avLst/>
@@ -4808,11 +4679,11 @@
           <a:bodyPr wrap="square" lIns="0" tIns="0" rIns="0" bIns="0" rtlCol="0" anchor="ctr"/>
           <a:lstStyle/>
           <a:p>
-            <a:pPr indent="0" marL="0">
-              <a:buNone/>
-            </a:pPr>
-            <a:r>
-              <a:rPr lang="en-US" sz="1250" b="1" dirty="0">
+            <a:pPr algn="ctr" indent="0" marL="0">
+              <a:buNone/>
+            </a:pPr>
+            <a:r>
+              <a:rPr lang="en-US" sz="850" b="1" dirty="0">
                 <a:solidFill>
                   <a:srgbClr val="171721"/>
                 </a:solidFill>
@@ -4820,36 +4691,49 @@
                 <a:ea typeface="Calibri" pitchFamily="34" charset="-122"/>
                 <a:cs typeface="Calibri" pitchFamily="34" charset="-120"/>
               </a:rPr>
-              <a:t>Why judges can trust the numbers: </a:t>
-            </a:r>
-            <a:pPr indent="0" marL="0">
-              <a:buNone/>
-            </a:pPr>
-            <a:r>
-              <a:rPr lang="en-US" sz="1250" dirty="0">
-                <a:solidFill>
-                  <a:srgbClr val="1B2635"/>
-                </a:solidFill>
-                <a:latin typeface="Calibri" pitchFamily="34" charset="0"/>
-                <a:ea typeface="Calibri" pitchFamily="34" charset="-122"/>
-                <a:cs typeface="Calibri" pitchFamily="34" charset="-120"/>
-              </a:rPr>
-              <a:t>RTO runs from the injected outage to the first healthy check through Traffic Manager from Southeast Asia (the engine checks every second; the previous failed check is shown as the precision window). RPO: one confirmed write per second, and every write the database acknowledged until the failover completed must exist in the new primary. Chaos drill with a surprise fault: 57.4 s.</a:t>
-            </a:r>
-            <a:endParaRPr lang="en-US" sz="1250" dirty="0"/>
-          </a:p>
-        </p:txBody>
-      </p:sp>
-      <p:sp>
-        <p:nvSpPr>
-          <p:cNvPr id="41" name="Text 39"/>
-          <p:cNvSpPr txBox="1"/>
-          <p:nvPr/>
-        </p:nvSpPr>
-        <p:spPr>
-          <a:xfrm>
-            <a:off x="548640" y="6473952"/>
-            <a:ext cx="11064240" cy="274320"/>
+              <a:t>App Service ×2</a:t>
+            </a:r>
+            <a:endParaRPr lang="en-US" sz="850" dirty="0"/>
+          </a:p>
+        </p:txBody>
+      </p:sp>
+      <p:sp>
+        <p:nvSpPr>
+          <p:cNvPr id="7" name="Shape 4"/>
+          <p:cNvSpPr/>
+          <p:nvPr/>
+        </p:nvSpPr>
+        <p:spPr>
+          <a:xfrm>
+            <a:off x="1787652" y="6144768"/>
+            <a:ext cx="1170432" cy="292608"/>
+          </a:xfrm>
+          <a:prstGeom prst="roundRect">
+            <a:avLst>
+              <a:gd name="adj" fmla="val 18750"/>
+            </a:avLst>
+          </a:prstGeom>
+          <a:solidFill>
+            <a:srgbClr val="EFE9FF"/>
+          </a:solidFill>
+          <a:ln w="12700">
+            <a:solidFill>
+              <a:srgbClr val="EFE9FF"/>
+            </a:solidFill>
+            <a:prstDash val="solid"/>
+          </a:ln>
+        </p:spPr>
+      </p:sp>
+      <p:sp>
+        <p:nvSpPr>
+          <p:cNvPr id="8" name="Text 5"/>
+          <p:cNvSpPr txBox="1"/>
+          <p:nvPr/>
+        </p:nvSpPr>
+        <p:spPr>
+          <a:xfrm>
+            <a:off x="1787652" y="6144768"/>
+            <a:ext cx="1170432" cy="292608"/>
           </a:xfrm>
           <a:prstGeom prst="rect">
             <a:avLst/>
@@ -4861,21 +4745,483 @@
           <a:bodyPr wrap="square" lIns="0" tIns="0" rIns="0" bIns="0" rtlCol="0" anchor="ctr"/>
           <a:lstStyle/>
           <a:p>
-            <a:pPr algn="r" indent="0" marL="0">
-              <a:buNone/>
-            </a:pPr>
-            <a:r>
-              <a:rPr lang="en-US" sz="900" dirty="0">
-                <a:solidFill>
-                  <a:srgbClr val="8C99AA"/>
-                </a:solidFill>
-                <a:latin typeface="Calibri" pitchFamily="34" charset="0"/>
-                <a:ea typeface="Calibri" pitchFamily="34" charset="-122"/>
-                <a:cs typeface="Calibri" pitchFamily="34" charset="-120"/>
-              </a:rPr>
-              <a:t>DR Agent: Autonomous DR Validation  ·  Team Azure Armada  ·  Azure Day 2026 Hackathon   11</a:t>
-            </a:r>
-            <a:endParaRPr lang="en-US" sz="900" dirty="0"/>
+            <a:pPr algn="ctr" indent="0" marL="0">
+              <a:buNone/>
+            </a:pPr>
+            <a:r>
+              <a:rPr lang="en-US" sz="850" b="1" dirty="0">
+                <a:solidFill>
+                  <a:srgbClr val="171721"/>
+                </a:solidFill>
+                <a:latin typeface="Calibri" pitchFamily="34" charset="0"/>
+                <a:ea typeface="Calibri" pitchFamily="34" charset="-122"/>
+                <a:cs typeface="Calibri" pitchFamily="34" charset="-120"/>
+              </a:rPr>
+              <a:t>Azure SQL failover group</a:t>
+            </a:r>
+            <a:endParaRPr lang="en-US" sz="850" dirty="0"/>
+          </a:p>
+        </p:txBody>
+      </p:sp>
+      <p:sp>
+        <p:nvSpPr>
+          <p:cNvPr id="9" name="Shape 6"/>
+          <p:cNvSpPr/>
+          <p:nvPr/>
+        </p:nvSpPr>
+        <p:spPr>
+          <a:xfrm>
+            <a:off x="3026664" y="6144768"/>
+            <a:ext cx="1170432" cy="292608"/>
+          </a:xfrm>
+          <a:prstGeom prst="roundRect">
+            <a:avLst>
+              <a:gd name="adj" fmla="val 18750"/>
+            </a:avLst>
+          </a:prstGeom>
+          <a:solidFill>
+            <a:srgbClr val="EFE9FF"/>
+          </a:solidFill>
+          <a:ln w="12700">
+            <a:solidFill>
+              <a:srgbClr val="EFE9FF"/>
+            </a:solidFill>
+            <a:prstDash val="solid"/>
+          </a:ln>
+        </p:spPr>
+      </p:sp>
+      <p:sp>
+        <p:nvSpPr>
+          <p:cNvPr id="10" name="Text 7"/>
+          <p:cNvSpPr txBox="1"/>
+          <p:nvPr/>
+        </p:nvSpPr>
+        <p:spPr>
+          <a:xfrm>
+            <a:off x="3026664" y="6144768"/>
+            <a:ext cx="1170432" cy="292608"/>
+          </a:xfrm>
+          <a:prstGeom prst="rect">
+            <a:avLst/>
+          </a:prstGeom>
+          <a:noFill/>
+          <a:ln/>
+        </p:spPr>
+        <p:txBody>
+          <a:bodyPr wrap="square" lIns="0" tIns="0" rIns="0" bIns="0" rtlCol="0" anchor="ctr"/>
+          <a:lstStyle/>
+          <a:p>
+            <a:pPr algn="ctr" indent="0" marL="0">
+              <a:buNone/>
+            </a:pPr>
+            <a:r>
+              <a:rPr lang="en-US" sz="850" b="1" dirty="0">
+                <a:solidFill>
+                  <a:srgbClr val="171721"/>
+                </a:solidFill>
+                <a:latin typeface="Calibri" pitchFamily="34" charset="0"/>
+                <a:ea typeface="Calibri" pitchFamily="34" charset="-122"/>
+                <a:cs typeface="Calibri" pitchFamily="34" charset="-120"/>
+              </a:rPr>
+              <a:t>Traffic Manager</a:t>
+            </a:r>
+            <a:endParaRPr lang="en-US" sz="850" dirty="0"/>
+          </a:p>
+        </p:txBody>
+      </p:sp>
+      <p:sp>
+        <p:nvSpPr>
+          <p:cNvPr id="11" name="Shape 8"/>
+          <p:cNvSpPr/>
+          <p:nvPr/>
+        </p:nvSpPr>
+        <p:spPr>
+          <a:xfrm>
+            <a:off x="4265676" y="6144768"/>
+            <a:ext cx="1170432" cy="292608"/>
+          </a:xfrm>
+          <a:prstGeom prst="roundRect">
+            <a:avLst>
+              <a:gd name="adj" fmla="val 18750"/>
+            </a:avLst>
+          </a:prstGeom>
+          <a:solidFill>
+            <a:srgbClr val="EFE9FF"/>
+          </a:solidFill>
+          <a:ln w="12700">
+            <a:solidFill>
+              <a:srgbClr val="EFE9FF"/>
+            </a:solidFill>
+            <a:prstDash val="solid"/>
+          </a:ln>
+        </p:spPr>
+      </p:sp>
+      <p:sp>
+        <p:nvSpPr>
+          <p:cNvPr id="12" name="Text 9"/>
+          <p:cNvSpPr txBox="1"/>
+          <p:nvPr/>
+        </p:nvSpPr>
+        <p:spPr>
+          <a:xfrm>
+            <a:off x="4265676" y="6144768"/>
+            <a:ext cx="1170432" cy="292608"/>
+          </a:xfrm>
+          <a:prstGeom prst="rect">
+            <a:avLst/>
+          </a:prstGeom>
+          <a:noFill/>
+          <a:ln/>
+        </p:spPr>
+        <p:txBody>
+          <a:bodyPr wrap="square" lIns="0" tIns="0" rIns="0" bIns="0" rtlCol="0" anchor="ctr"/>
+          <a:lstStyle/>
+          <a:p>
+            <a:pPr algn="ctr" indent="0" marL="0">
+              <a:buNone/>
+            </a:pPr>
+            <a:r>
+              <a:rPr lang="en-US" sz="850" b="1" dirty="0">
+                <a:solidFill>
+                  <a:srgbClr val="171721"/>
+                </a:solidFill>
+                <a:latin typeface="Calibri" pitchFamily="34" charset="0"/>
+                <a:ea typeface="Calibri" pitchFamily="34" charset="-122"/>
+                <a:cs typeface="Calibri" pitchFamily="34" charset="-120"/>
+              </a:rPr>
+              <a:t>Site Recovery</a:t>
+            </a:r>
+            <a:endParaRPr lang="en-US" sz="850" dirty="0"/>
+          </a:p>
+        </p:txBody>
+      </p:sp>
+      <p:sp>
+        <p:nvSpPr>
+          <p:cNvPr id="13" name="Shape 10"/>
+          <p:cNvSpPr/>
+          <p:nvPr/>
+        </p:nvSpPr>
+        <p:spPr>
+          <a:xfrm>
+            <a:off x="5504688" y="6144768"/>
+            <a:ext cx="1170432" cy="292608"/>
+          </a:xfrm>
+          <a:prstGeom prst="roundRect">
+            <a:avLst>
+              <a:gd name="adj" fmla="val 18750"/>
+            </a:avLst>
+          </a:prstGeom>
+          <a:solidFill>
+            <a:srgbClr val="EFE9FF"/>
+          </a:solidFill>
+          <a:ln w="12700">
+            <a:solidFill>
+              <a:srgbClr val="EFE9FF"/>
+            </a:solidFill>
+            <a:prstDash val="solid"/>
+          </a:ln>
+        </p:spPr>
+      </p:sp>
+      <p:sp>
+        <p:nvSpPr>
+          <p:cNvPr id="14" name="Text 11"/>
+          <p:cNvSpPr txBox="1"/>
+          <p:nvPr/>
+        </p:nvSpPr>
+        <p:spPr>
+          <a:xfrm>
+            <a:off x="5504688" y="6144768"/>
+            <a:ext cx="1170432" cy="292608"/>
+          </a:xfrm>
+          <a:prstGeom prst="rect">
+            <a:avLst/>
+          </a:prstGeom>
+          <a:noFill/>
+          <a:ln/>
+        </p:spPr>
+        <p:txBody>
+          <a:bodyPr wrap="square" lIns="0" tIns="0" rIns="0" bIns="0" rtlCol="0" anchor="ctr"/>
+          <a:lstStyle/>
+          <a:p>
+            <a:pPr algn="ctr" indent="0" marL="0">
+              <a:buNone/>
+            </a:pPr>
+            <a:r>
+              <a:rPr lang="en-US" sz="850" b="1" dirty="0">
+                <a:solidFill>
+                  <a:srgbClr val="171721"/>
+                </a:solidFill>
+                <a:latin typeface="Calibri" pitchFamily="34" charset="0"/>
+                <a:ea typeface="Calibri" pitchFamily="34" charset="-122"/>
+                <a:cs typeface="Calibri" pitchFamily="34" charset="-120"/>
+              </a:rPr>
+              <a:t>AI Foundry Agent Service</a:t>
+            </a:r>
+            <a:endParaRPr lang="en-US" sz="850" dirty="0"/>
+          </a:p>
+        </p:txBody>
+      </p:sp>
+      <p:sp>
+        <p:nvSpPr>
+          <p:cNvPr id="15" name="Shape 12"/>
+          <p:cNvSpPr/>
+          <p:nvPr/>
+        </p:nvSpPr>
+        <p:spPr>
+          <a:xfrm>
+            <a:off x="6743700" y="6144768"/>
+            <a:ext cx="1170432" cy="292608"/>
+          </a:xfrm>
+          <a:prstGeom prst="roundRect">
+            <a:avLst>
+              <a:gd name="adj" fmla="val 18750"/>
+            </a:avLst>
+          </a:prstGeom>
+          <a:solidFill>
+            <a:srgbClr val="EFE9FF"/>
+          </a:solidFill>
+          <a:ln w="12700">
+            <a:solidFill>
+              <a:srgbClr val="EFE9FF"/>
+            </a:solidFill>
+            <a:prstDash val="solid"/>
+          </a:ln>
+        </p:spPr>
+      </p:sp>
+      <p:sp>
+        <p:nvSpPr>
+          <p:cNvPr id="16" name="Text 13"/>
+          <p:cNvSpPr txBox="1"/>
+          <p:nvPr/>
+        </p:nvSpPr>
+        <p:spPr>
+          <a:xfrm>
+            <a:off x="6743700" y="6144768"/>
+            <a:ext cx="1170432" cy="292608"/>
+          </a:xfrm>
+          <a:prstGeom prst="rect">
+            <a:avLst/>
+          </a:prstGeom>
+          <a:noFill/>
+          <a:ln/>
+        </p:spPr>
+        <p:txBody>
+          <a:bodyPr wrap="square" lIns="0" tIns="0" rIns="0" bIns="0" rtlCol="0" anchor="ctr"/>
+          <a:lstStyle/>
+          <a:p>
+            <a:pPr algn="ctr" indent="0" marL="0">
+              <a:buNone/>
+            </a:pPr>
+            <a:r>
+              <a:rPr lang="en-US" sz="850" b="1" dirty="0">
+                <a:solidFill>
+                  <a:srgbClr val="171721"/>
+                </a:solidFill>
+                <a:latin typeface="Calibri" pitchFamily="34" charset="0"/>
+                <a:ea typeface="Calibri" pitchFamily="34" charset="-122"/>
+                <a:cs typeface="Calibri" pitchFamily="34" charset="-120"/>
+              </a:rPr>
+              <a:t>Key Vault + managed identity</a:t>
+            </a:r>
+            <a:endParaRPr lang="en-US" sz="850" dirty="0"/>
+          </a:p>
+        </p:txBody>
+      </p:sp>
+      <p:sp>
+        <p:nvSpPr>
+          <p:cNvPr id="17" name="Shape 14"/>
+          <p:cNvSpPr/>
+          <p:nvPr/>
+        </p:nvSpPr>
+        <p:spPr>
+          <a:xfrm>
+            <a:off x="7982712" y="6144768"/>
+            <a:ext cx="1170432" cy="292608"/>
+          </a:xfrm>
+          <a:prstGeom prst="roundRect">
+            <a:avLst>
+              <a:gd name="adj" fmla="val 18750"/>
+            </a:avLst>
+          </a:prstGeom>
+          <a:solidFill>
+            <a:srgbClr val="EFE9FF"/>
+          </a:solidFill>
+          <a:ln w="12700">
+            <a:solidFill>
+              <a:srgbClr val="EFE9FF"/>
+            </a:solidFill>
+            <a:prstDash val="solid"/>
+          </a:ln>
+        </p:spPr>
+      </p:sp>
+      <p:sp>
+        <p:nvSpPr>
+          <p:cNvPr id="18" name="Text 15"/>
+          <p:cNvSpPr txBox="1"/>
+          <p:nvPr/>
+        </p:nvSpPr>
+        <p:spPr>
+          <a:xfrm>
+            <a:off x="7982712" y="6144768"/>
+            <a:ext cx="1170432" cy="292608"/>
+          </a:xfrm>
+          <a:prstGeom prst="rect">
+            <a:avLst/>
+          </a:prstGeom>
+          <a:noFill/>
+          <a:ln/>
+        </p:spPr>
+        <p:txBody>
+          <a:bodyPr wrap="square" lIns="0" tIns="0" rIns="0" bIns="0" rtlCol="0" anchor="ctr"/>
+          <a:lstStyle/>
+          <a:p>
+            <a:pPr algn="ctr" indent="0" marL="0">
+              <a:buNone/>
+            </a:pPr>
+            <a:r>
+              <a:rPr lang="en-US" sz="850" b="1" dirty="0">
+                <a:solidFill>
+                  <a:srgbClr val="171721"/>
+                </a:solidFill>
+                <a:latin typeface="Calibri" pitchFamily="34" charset="0"/>
+                <a:ea typeface="Calibri" pitchFamily="34" charset="-122"/>
+                <a:cs typeface="Calibri" pitchFamily="34" charset="-120"/>
+              </a:rPr>
+              <a:t>Storage</a:t>
+            </a:r>
+            <a:endParaRPr lang="en-US" sz="850" dirty="0"/>
+          </a:p>
+        </p:txBody>
+      </p:sp>
+      <p:sp>
+        <p:nvSpPr>
+          <p:cNvPr id="19" name="Shape 16"/>
+          <p:cNvSpPr/>
+          <p:nvPr/>
+        </p:nvSpPr>
+        <p:spPr>
+          <a:xfrm>
+            <a:off x="9221724" y="6144768"/>
+            <a:ext cx="1170432" cy="292608"/>
+          </a:xfrm>
+          <a:prstGeom prst="roundRect">
+            <a:avLst>
+              <a:gd name="adj" fmla="val 18750"/>
+            </a:avLst>
+          </a:prstGeom>
+          <a:solidFill>
+            <a:srgbClr val="EFE9FF"/>
+          </a:solidFill>
+          <a:ln w="12700">
+            <a:solidFill>
+              <a:srgbClr val="EFE9FF"/>
+            </a:solidFill>
+            <a:prstDash val="solid"/>
+          </a:ln>
+        </p:spPr>
+      </p:sp>
+      <p:sp>
+        <p:nvSpPr>
+          <p:cNvPr id="20" name="Text 17"/>
+          <p:cNvSpPr txBox="1"/>
+          <p:nvPr/>
+        </p:nvSpPr>
+        <p:spPr>
+          <a:xfrm>
+            <a:off x="9221724" y="6144768"/>
+            <a:ext cx="1170432" cy="292608"/>
+          </a:xfrm>
+          <a:prstGeom prst="rect">
+            <a:avLst/>
+          </a:prstGeom>
+          <a:noFill/>
+          <a:ln/>
+        </p:spPr>
+        <p:txBody>
+          <a:bodyPr wrap="square" lIns="0" tIns="0" rIns="0" bIns="0" rtlCol="0" anchor="ctr"/>
+          <a:lstStyle/>
+          <a:p>
+            <a:pPr algn="ctr" indent="0" marL="0">
+              <a:buNone/>
+            </a:pPr>
+            <a:r>
+              <a:rPr lang="en-US" sz="850" b="1" dirty="0">
+                <a:solidFill>
+                  <a:srgbClr val="171721"/>
+                </a:solidFill>
+                <a:latin typeface="Calibri" pitchFamily="34" charset="0"/>
+                <a:ea typeface="Calibri" pitchFamily="34" charset="-122"/>
+                <a:cs typeface="Calibri" pitchFamily="34" charset="-120"/>
+              </a:rPr>
+              <a:t>Monitor + App Insights</a:t>
+            </a:r>
+            <a:endParaRPr lang="en-US" sz="850" dirty="0"/>
+          </a:p>
+        </p:txBody>
+      </p:sp>
+      <p:sp>
+        <p:nvSpPr>
+          <p:cNvPr id="21" name="Shape 18"/>
+          <p:cNvSpPr/>
+          <p:nvPr/>
+        </p:nvSpPr>
+        <p:spPr>
+          <a:xfrm>
+            <a:off x="10460736" y="6144768"/>
+            <a:ext cx="1170432" cy="292608"/>
+          </a:xfrm>
+          <a:prstGeom prst="roundRect">
+            <a:avLst>
+              <a:gd name="adj" fmla="val 18750"/>
+            </a:avLst>
+          </a:prstGeom>
+          <a:solidFill>
+            <a:srgbClr val="EFE9FF"/>
+          </a:solidFill>
+          <a:ln w="12700">
+            <a:solidFill>
+              <a:srgbClr val="EFE9FF"/>
+            </a:solidFill>
+            <a:prstDash val="solid"/>
+          </a:ln>
+        </p:spPr>
+      </p:sp>
+      <p:sp>
+        <p:nvSpPr>
+          <p:cNvPr id="22" name="Text 19"/>
+          <p:cNvSpPr txBox="1"/>
+          <p:nvPr/>
+        </p:nvSpPr>
+        <p:spPr>
+          <a:xfrm>
+            <a:off x="10460736" y="6144768"/>
+            <a:ext cx="1170432" cy="292608"/>
+          </a:xfrm>
+          <a:prstGeom prst="rect">
+            <a:avLst/>
+          </a:prstGeom>
+          <a:noFill/>
+          <a:ln/>
+        </p:spPr>
+        <p:txBody>
+          <a:bodyPr wrap="square" lIns="0" tIns="0" rIns="0" bIns="0" rtlCol="0" anchor="ctr"/>
+          <a:lstStyle/>
+          <a:p>
+            <a:pPr algn="ctr" indent="0" marL="0">
+              <a:buNone/>
+            </a:pPr>
+            <a:r>
+              <a:rPr lang="en-US" sz="850" b="1" dirty="0">
+                <a:solidFill>
+                  <a:srgbClr val="171721"/>
+                </a:solidFill>
+                <a:latin typeface="Calibri" pitchFamily="34" charset="0"/>
+                <a:ea typeface="Calibri" pitchFamily="34" charset="-122"/>
+                <a:cs typeface="Calibri" pitchFamily="34" charset="-120"/>
+              </a:rPr>
+              <a:t>Bicep: one-click up / down</a:t>
+            </a:r>
+            <a:endParaRPr lang="en-US" sz="850" dirty="0"/>
           </a:p>
         </p:txBody>
       </p:sp>
@@ -4944,7 +5290,7 @@
                 <a:ea typeface="Calibri" pitchFamily="34" charset="-122"/>
                 <a:cs typeface="Calibri" pitchFamily="34" charset="-120"/>
               </a:rPr>
-              <a:t>What it costs to prove recovery</a:t>
+              <a:t>Measured on live Azure, not assumed</a:t>
             </a:r>
             <a:endParaRPr lang="en-US" sz="3200" dirty="0"/>
           </a:p>
@@ -4983,7 +5329,7 @@
                 <a:ea typeface="Calibri" pitchFamily="34" charset="-122"/>
                 <a:cs typeface="Calibri" pitchFamily="34" charset="-120"/>
               </a:rPr>
-              <a:t>Actual Azure bills and list prices for what we built, compared with the cost of downtime.</a:t>
+              <a:t>Real failovers of the payments service, East Asia → Southeast Asia, 17–19 Oct 2026. Target: RTO 30 min, RPO 15 min.</a:t>
             </a:r>
             <a:endParaRPr lang="en-US" sz="1500" dirty="0"/>
           </a:p>
@@ -4997,12 +5343,12 @@
         </p:nvSpPr>
         <p:spPr>
           <a:xfrm>
-            <a:off x="548640" y="1600200"/>
-            <a:ext cx="3520440" cy="2331720"/>
+            <a:off x="548640" y="1554480"/>
+            <a:ext cx="2633472" cy="1554480"/>
           </a:xfrm>
           <a:prstGeom prst="roundRect">
             <a:avLst>
-              <a:gd name="adj" fmla="val 3137"/>
+              <a:gd name="adj" fmla="val 4706"/>
             </a:avLst>
           </a:prstGeom>
           <a:solidFill>
@@ -5031,8 +5377,8 @@
         </p:nvSpPr>
         <p:spPr>
           <a:xfrm>
-            <a:off x="822960" y="1783080"/>
-            <a:ext cx="3017520" cy="777240"/>
+            <a:off x="731520" y="1645920"/>
+            <a:ext cx="2286000" cy="640080"/>
           </a:xfrm>
           <a:prstGeom prst="rect">
             <a:avLst/>
@@ -5048,7 +5394,7 @@
               <a:buNone/>
             </a:pPr>
             <a:r>
-              <a:rPr lang="en-US" sz="4000" b="1" dirty="0">
+              <a:rPr lang="en-US" sz="3000" b="1" dirty="0">
                 <a:solidFill>
                   <a:srgbClr val="5E2CFE"/>
                 </a:solidFill>
@@ -5056,9 +5402,9 @@
                 <a:ea typeface="Calibri" pitchFamily="34" charset="-122"/>
                 <a:cs typeface="Calibri" pitchFamily="34" charset="-120"/>
               </a:rPr>
-              <a:t>$0.09</a:t>
-            </a:r>
-            <a:endParaRPr lang="en-US" sz="4000" dirty="0"/>
+              <a:t>29.04 s</a:t>
+            </a:r>
+            <a:endParaRPr lang="en-US" sz="3000" dirty="0"/>
           </a:p>
         </p:txBody>
       </p:sp>
@@ -5070,8 +5416,8 @@
         </p:nvSpPr>
         <p:spPr>
           <a:xfrm>
-            <a:off x="822960" y="2560320"/>
-            <a:ext cx="3017520" cy="365760"/>
+            <a:off x="731520" y="2286000"/>
+            <a:ext cx="2331720" cy="292608"/>
           </a:xfrm>
           <a:prstGeom prst="rect">
             <a:avLst/>
@@ -5087,7 +5433,7 @@
               <a:buNone/>
             </a:pPr>
             <a:r>
-              <a:rPr lang="en-US" sz="1500" b="1" dirty="0">
+              <a:rPr lang="en-US" sz="1250" b="1" dirty="0">
                 <a:solidFill>
                   <a:srgbClr val="171721"/>
                 </a:solidFill>
@@ -5095,9 +5441,9 @@
                 <a:ea typeface="Calibri" pitchFamily="34" charset="-122"/>
                 <a:cs typeface="Calibri" pitchFamily="34" charset="-120"/>
               </a:rPr>
-              <a:t>all AI agent calls</a:t>
-            </a:r>
-            <a:endParaRPr lang="en-US" sz="1500" dirty="0"/>
+              <a:t>RTO, 19 Oct drill, no load</a:t>
+            </a:r>
+            <a:endParaRPr lang="en-US" sz="1250" dirty="0"/>
           </a:p>
         </p:txBody>
       </p:sp>
@@ -5109,8 +5455,8 @@
         </p:nvSpPr>
         <p:spPr>
           <a:xfrm>
-            <a:off x="822960" y="2971800"/>
-            <a:ext cx="3017520" cy="868680"/>
+            <a:off x="731520" y="2587752"/>
+            <a:ext cx="2331720" cy="475488"/>
           </a:xfrm>
           <a:prstGeom prst="rect">
             <a:avLst/>
@@ -5126,7 +5472,7 @@
               <a:buNone/>
             </a:pPr>
             <a:r>
-              <a:rPr lang="en-US" sz="1150" dirty="0">
+              <a:rPr lang="en-US" sz="1050" dirty="0">
                 <a:solidFill>
                   <a:srgbClr val="5B6B7F"/>
                 </a:solidFill>
@@ -5134,9 +5480,9 @@
                 <a:ea typeface="Calibri" pitchFamily="34" charset="-122"/>
                 <a:cs typeface="Calibri" pitchFamily="34" charset="-120"/>
               </a:rPr>
-              <a:t>every Foundry agent run across 2 days of building and 9 drills: $0.087 (Azure Cost Management) [12]</a:t>
-            </a:r>
-            <a:endParaRPr lang="en-US" sz="1150" dirty="0"/>
+              <a:t>27.74–40.43 s across all 10 drills</a:t>
+            </a:r>
+            <a:endParaRPr lang="en-US" sz="1050" dirty="0"/>
           </a:p>
         </p:txBody>
       </p:sp>
@@ -5148,12 +5494,12 @@
         </p:nvSpPr>
         <p:spPr>
           <a:xfrm>
-            <a:off x="4297680" y="1600200"/>
-            <a:ext cx="3520440" cy="2331720"/>
+            <a:off x="3346704" y="1554480"/>
+            <a:ext cx="2633472" cy="1554480"/>
           </a:xfrm>
           <a:prstGeom prst="roundRect">
             <a:avLst>
-              <a:gd name="adj" fmla="val 3137"/>
+              <a:gd name="adj" fmla="val 4706"/>
             </a:avLst>
           </a:prstGeom>
           <a:solidFill>
@@ -5182,8 +5528,8 @@
         </p:nvSpPr>
         <p:spPr>
           <a:xfrm>
-            <a:off x="4572000" y="1783080"/>
-            <a:ext cx="3017520" cy="777240"/>
+            <a:off x="3529584" y="1645920"/>
+            <a:ext cx="2286000" cy="640080"/>
           </a:xfrm>
           <a:prstGeom prst="rect">
             <a:avLst/>
@@ -5199,7 +5545,7 @@
               <a:buNone/>
             </a:pPr>
             <a:r>
-              <a:rPr lang="en-US" sz="4000" b="1" dirty="0">
+              <a:rPr lang="en-US" sz="3000" b="1" dirty="0">
                 <a:solidFill>
                   <a:srgbClr val="5E2CFE"/>
                 </a:solidFill>
@@ -5207,9 +5553,9 @@
                 <a:ea typeface="Calibri" pitchFamily="34" charset="-122"/>
                 <a:cs typeface="Calibri" pitchFamily="34" charset="-120"/>
               </a:rPr>
-              <a:t>$2.44</a:t>
-            </a:r>
-            <a:endParaRPr lang="en-US" sz="4000" dirty="0"/>
+              <a:t>2.80 s</a:t>
+            </a:r>
+            <a:endParaRPr lang="en-US" sz="3000" dirty="0"/>
           </a:p>
         </p:txBody>
       </p:sp>
@@ -5221,8 +5567,8 @@
         </p:nvSpPr>
         <p:spPr>
           <a:xfrm>
-            <a:off x="4572000" y="2560320"/>
-            <a:ext cx="3017520" cy="365760"/>
+            <a:off x="3529584" y="2286000"/>
+            <a:ext cx="2331720" cy="292608"/>
           </a:xfrm>
           <a:prstGeom prst="rect">
             <a:avLst/>
@@ -5238,7 +5584,7 @@
               <a:buNone/>
             </a:pPr>
             <a:r>
-              <a:rPr lang="en-US" sz="1500" b="1" dirty="0">
+              <a:rPr lang="en-US" sz="1250" b="1" dirty="0">
                 <a:solidFill>
                   <a:srgbClr val="171721"/>
                 </a:solidFill>
@@ -5246,9 +5592,9 @@
                 <a:ea typeface="Calibri" pitchFamily="34" charset="-122"/>
                 <a:cs typeface="Calibri" pitchFamily="34" charset="-120"/>
               </a:rPr>
-              <a:t>entire environment so far</a:t>
-            </a:r>
-            <a:endParaRPr lang="en-US" sz="1500" dirty="0"/>
+              <a:t>RPO, proven write by write</a:t>
+            </a:r>
+            <a:endParaRPr lang="en-US" sz="1250" dirty="0"/>
           </a:p>
         </p:txBody>
       </p:sp>
@@ -5260,8 +5606,8 @@
         </p:nvSpPr>
         <p:spPr>
           <a:xfrm>
-            <a:off x="4572000" y="2971800"/>
-            <a:ext cx="3017520" cy="868680"/>
+            <a:off x="3529584" y="2587752"/>
+            <a:ext cx="2331720" cy="475488"/>
           </a:xfrm>
           <a:prstGeom prst="rect">
             <a:avLst/>
@@ -5277,7 +5623,7 @@
               <a:buNone/>
             </a:pPr>
             <a:r>
-              <a:rPr lang="en-US" sz="1150" dirty="0">
+              <a:rPr lang="en-US" sz="1050" dirty="0">
                 <a:solidFill>
                   <a:srgbClr val="5B6B7F"/>
                 </a:solidFill>
@@ -5285,9 +5631,9 @@
                 <a:ea typeface="Calibri" pitchFamily="34" charset="-122"/>
                 <a:cs typeface="Calibri" pitchFamily="34" charset="-120"/>
               </a:rPr>
-              <a:t>two regions, database, VM, console, monitoring: everything, 17–18 Oct 2026 (Azure Cost Management) [12]</a:t>
-            </a:r>
-            <a:endParaRPr lang="en-US" sz="1150" dirty="0"/>
+              <a:t>same drill: 2 of 45 acknowledged writes lost in the forced failover</a:t>
+            </a:r>
+            <a:endParaRPr lang="en-US" sz="1050" dirty="0"/>
           </a:p>
         </p:txBody>
       </p:sp>
@@ -5299,12 +5645,12 @@
         </p:nvSpPr>
         <p:spPr>
           <a:xfrm>
-            <a:off x="8046720" y="1600200"/>
-            <a:ext cx="3520440" cy="2331720"/>
+            <a:off x="6144768" y="1554480"/>
+            <a:ext cx="2633472" cy="1554480"/>
           </a:xfrm>
           <a:prstGeom prst="roundRect">
             <a:avLst>
-              <a:gd name="adj" fmla="val 3137"/>
+              <a:gd name="adj" fmla="val 4706"/>
             </a:avLst>
           </a:prstGeom>
           <a:solidFill>
@@ -5333,8 +5679,8 @@
         </p:nvSpPr>
         <p:spPr>
           <a:xfrm>
-            <a:off x="8321040" y="1783080"/>
-            <a:ext cx="3017520" cy="777240"/>
+            <a:off x="6327648" y="1645920"/>
+            <a:ext cx="2286000" cy="640080"/>
           </a:xfrm>
           <a:prstGeom prst="rect">
             <a:avLst/>
@@ -5350,17 +5696,17 @@
               <a:buNone/>
             </a:pPr>
             <a:r>
-              <a:rPr lang="en-US" sz="4000" b="1" dirty="0">
-                <a:solidFill>
-                  <a:srgbClr val="5E2CFE"/>
-                </a:solidFill>
-                <a:latin typeface="Calibri" pitchFamily="34" charset="0"/>
-                <a:ea typeface="Calibri" pitchFamily="34" charset="-122"/>
-                <a:cs typeface="Calibri" pitchFamily="34" charset="-120"/>
-              </a:rPr>
-              <a:t>$38.26</a:t>
-            </a:r>
-            <a:endParaRPr lang="en-US" sz="4000" dirty="0"/>
+              <a:rPr lang="en-US" sz="3000" b="1" dirty="0">
+                <a:solidFill>
+                  <a:srgbClr val="171721"/>
+                </a:solidFill>
+                <a:latin typeface="Calibri" pitchFamily="34" charset="0"/>
+                <a:ea typeface="Calibri" pitchFamily="34" charset="-122"/>
+                <a:cs typeface="Calibri" pitchFamily="34" charset="-120"/>
+              </a:rPr>
+              <a:t>1 min 43 s</a:t>
+            </a:r>
+            <a:endParaRPr lang="en-US" sz="3000" dirty="0"/>
           </a:p>
         </p:txBody>
       </p:sp>
@@ -5372,8 +5718,8 @@
         </p:nvSpPr>
         <p:spPr>
           <a:xfrm>
-            <a:off x="8321040" y="2560320"/>
-            <a:ext cx="3017520" cy="365760"/>
+            <a:off x="6327648" y="2286000"/>
+            <a:ext cx="2331720" cy="292608"/>
           </a:xfrm>
           <a:prstGeom prst="rect">
             <a:avLst/>
@@ -5389,7 +5735,7 @@
               <a:buNone/>
             </a:pPr>
             <a:r>
-              <a:rPr lang="en-US" sz="1500" b="1" dirty="0">
+              <a:rPr lang="en-US" sz="1250" b="1" dirty="0">
                 <a:solidFill>
                   <a:srgbClr val="171721"/>
                 </a:solidFill>
@@ -5397,9 +5743,9 @@
                 <a:ea typeface="Calibri" pitchFamily="34" charset="-122"/>
                 <a:cs typeface="Calibri" pitchFamily="34" charset="-120"/>
               </a:rPr>
-              <a:t>per month for the PaaS DR pair</a:t>
-            </a:r>
-            <a:endParaRPr lang="en-US" sz="1500" dirty="0"/>
+              <a:t>Failback to primary</a:t>
+            </a:r>
+            <a:endParaRPr lang="en-US" sz="1250" dirty="0"/>
           </a:p>
         </p:txBody>
       </p:sp>
@@ -5411,8 +5757,8 @@
         </p:nvSpPr>
         <p:spPr>
           <a:xfrm>
-            <a:off x="8321040" y="2971800"/>
-            <a:ext cx="3017520" cy="868680"/>
+            <a:off x="6327648" y="2587752"/>
+            <a:ext cx="2331720" cy="475488"/>
           </a:xfrm>
           <a:prstGeom prst="rect">
             <a:avLst/>
@@ -5428,7 +5774,7 @@
               <a:buNone/>
             </a:pPr>
             <a:r>
-              <a:rPr lang="en-US" sz="1150" dirty="0">
+              <a:rPr lang="en-US" sz="1050" dirty="0">
                 <a:solidFill>
                   <a:srgbClr val="5B6B7F"/>
                 </a:solidFill>
@@ -5436,9 +5782,9 @@
                 <a:ea typeface="Calibri" pitchFamily="34" charset="-122"/>
                 <a:cs typeface="Calibri" pitchFamily="34" charset="-120"/>
               </a:rPr>
-              <a:t>2× App Service B1, 2× SQL Basic, Traffic Manager at Azure list prices (Retail Prices API) [13]</a:t>
-            </a:r>
-            <a:endParaRPr lang="en-US" sz="1150" dirty="0"/>
+              <a:t>1 min 43 s – 2 min 55 s on Premium P0v3 (3 min 44 s on B1); planned</a:t>
+            </a:r>
+            <a:endParaRPr lang="en-US" sz="1050" dirty="0"/>
           </a:p>
         </p:txBody>
       </p:sp>
@@ -5450,23 +5796,30 @@
         </p:nvSpPr>
         <p:spPr>
           <a:xfrm>
-            <a:off x="548640" y="4160520"/>
-            <a:ext cx="11064240" cy="1051560"/>
+            <a:off x="8942832" y="1554480"/>
+            <a:ext cx="2633472" cy="1554480"/>
           </a:xfrm>
           <a:prstGeom prst="roundRect">
             <a:avLst>
-              <a:gd name="adj" fmla="val 6957"/>
+              <a:gd name="adj" fmla="val 4706"/>
             </a:avLst>
           </a:prstGeom>
           <a:solidFill>
-            <a:srgbClr val="171721"/>
+            <a:srgbClr val="F1F5F9"/>
           </a:solidFill>
           <a:ln w="12700">
             <a:solidFill>
-              <a:srgbClr val="171721"/>
+              <a:srgbClr val="F1F5F9"/>
             </a:solidFill>
             <a:prstDash val="solid"/>
           </a:ln>
+          <a:effectLst>
+            <a:outerShdw sx="100000" sy="100000" kx="0" ky="0" algn="bl" rotWithShape="0" blurRad="76200" dist="25400" dir="5400000">
+              <a:srgbClr val="000000">
+                <a:alpha val="12000"/>
+              </a:srgbClr>
+            </a:outerShdw>
+          </a:effectLst>
         </p:spPr>
       </p:sp>
       <p:sp>
@@ -5477,8 +5830,8 @@
         </p:nvSpPr>
         <p:spPr>
           <a:xfrm>
-            <a:off x="777240" y="4160520"/>
-            <a:ext cx="10607040" cy="1051560"/>
+            <a:off x="9125712" y="1645920"/>
+            <a:ext cx="2286000" cy="640080"/>
           </a:xfrm>
           <a:prstGeom prst="rect">
             <a:avLst/>
@@ -5494,7 +5847,293 @@
               <a:buNone/>
             </a:pPr>
             <a:r>
-              <a:rPr lang="en-US" sz="1600" b="1" dirty="0">
+              <a:rPr lang="en-US" sz="3000" b="1" dirty="0">
+                <a:solidFill>
+                  <a:srgbClr val="171721"/>
+                </a:solidFill>
+                <a:latin typeface="Calibri" pitchFamily="34" charset="0"/>
+                <a:ea typeface="Calibri" pitchFamily="34" charset="-122"/>
+                <a:cs typeface="Calibri" pitchFamily="34" charset="-120"/>
+              </a:rPr>
+              <a:t>3 min 08 s</a:t>
+            </a:r>
+            <a:endParaRPr lang="en-US" sz="3000" dirty="0"/>
+          </a:p>
+        </p:txBody>
+      </p:sp>
+      <p:sp>
+        <p:nvSpPr>
+          <p:cNvPr id="18" name="Text 16"/>
+          <p:cNvSpPr txBox="1"/>
+          <p:nvPr/>
+        </p:nvSpPr>
+        <p:spPr>
+          <a:xfrm>
+            <a:off x="9125712" y="2286000"/>
+            <a:ext cx="2331720" cy="292608"/>
+          </a:xfrm>
+          <a:prstGeom prst="rect">
+            <a:avLst/>
+          </a:prstGeom>
+          <a:noFill/>
+          <a:ln/>
+        </p:spPr>
+        <p:txBody>
+          <a:bodyPr wrap="square" lIns="0" tIns="0" rIns="0" bIns="0" rtlCol="0" anchor="ctr"/>
+          <a:lstStyle/>
+          <a:p>
+            <a:pPr indent="0" marL="0">
+              <a:buNone/>
+            </a:pPr>
+            <a:r>
+              <a:rPr lang="en-US" sz="1250" b="1" dirty="0">
+                <a:solidFill>
+                  <a:srgbClr val="171721"/>
+                </a:solidFill>
+                <a:latin typeface="Calibri" pitchFamily="34" charset="0"/>
+                <a:ea typeface="Calibri" pitchFamily="34" charset="-122"/>
+                <a:cs typeface="Calibri" pitchFamily="34" charset="-120"/>
+              </a:rPr>
+              <a:t>VM recovered by Site Recovery</a:t>
+            </a:r>
+            <a:endParaRPr lang="en-US" sz="1250" dirty="0"/>
+          </a:p>
+        </p:txBody>
+      </p:sp>
+      <p:sp>
+        <p:nvSpPr>
+          <p:cNvPr id="19" name="Text 17"/>
+          <p:cNvSpPr txBox="1"/>
+          <p:nvPr/>
+        </p:nvSpPr>
+        <p:spPr>
+          <a:xfrm>
+            <a:off x="9125712" y="2587752"/>
+            <a:ext cx="2331720" cy="475488"/>
+          </a:xfrm>
+          <a:prstGeom prst="rect">
+            <a:avLst/>
+          </a:prstGeom>
+          <a:noFill/>
+          <a:ln/>
+        </p:spPr>
+        <p:txBody>
+          <a:bodyPr wrap="square" lIns="0" tIns="0" rIns="0" bIns="0" rtlCol="0" anchor="t"/>
+          <a:lstStyle/>
+          <a:p>
+            <a:pPr indent="0" marL="0">
+              <a:buNone/>
+            </a:pPr>
+            <a:r>
+              <a:rPr lang="en-US" sz="1050" dirty="0">
+                <a:solidFill>
+                  <a:srgbClr val="5B6B7F"/>
+                </a:solidFill>
+                <a:latin typeface="Calibri" pitchFamily="34" charset="0"/>
+                <a:ea typeface="Calibri" pitchFamily="34" charset="-122"/>
+                <a:cs typeface="Calibri" pitchFamily="34" charset="-120"/>
+              </a:rPr>
+              <a:t>test-failover job; service verified inside the VM at 3 min 55 s</a:t>
+            </a:r>
+            <a:endParaRPr lang="en-US" sz="1050" dirty="0"/>
+          </a:p>
+        </p:txBody>
+      </p:sp>
+      <p:sp>
+        <p:nvSpPr>
+          <p:cNvPr id="20" name="Shape 18"/>
+          <p:cNvSpPr/>
+          <p:nvPr/>
+        </p:nvSpPr>
+        <p:spPr>
+          <a:xfrm>
+            <a:off x="548640" y="3246120"/>
+            <a:ext cx="11064240" cy="457200"/>
+          </a:xfrm>
+          <a:prstGeom prst="roundRect">
+            <a:avLst>
+              <a:gd name="adj" fmla="val 16000"/>
+            </a:avLst>
+          </a:prstGeom>
+          <a:solidFill>
+            <a:srgbClr val="FDF0DB"/>
+          </a:solidFill>
+          <a:ln w="12700">
+            <a:solidFill>
+              <a:srgbClr val="FDF0DB"/>
+            </a:solidFill>
+            <a:prstDash val="solid"/>
+          </a:ln>
+        </p:spPr>
+      </p:sp>
+      <p:sp>
+        <p:nvSpPr>
+          <p:cNvPr id="21" name="Text 19"/>
+          <p:cNvSpPr txBox="1"/>
+          <p:nvPr/>
+        </p:nvSpPr>
+        <p:spPr>
+          <a:xfrm>
+            <a:off x="777240" y="3246120"/>
+            <a:ext cx="10607040" cy="457200"/>
+          </a:xfrm>
+          <a:prstGeom prst="rect">
+            <a:avLst/>
+          </a:prstGeom>
+          <a:noFill/>
+          <a:ln/>
+        </p:spPr>
+        <p:txBody>
+          <a:bodyPr wrap="square" lIns="0" tIns="0" rIns="0" bIns="0" rtlCol="0" anchor="ctr"/>
+          <a:lstStyle/>
+          <a:p>
+            <a:pPr indent="0" marL="0">
+              <a:buNone/>
+            </a:pPr>
+            <a:r>
+              <a:rPr lang="en-US" sz="1300" b="1" dirty="0">
+                <a:solidFill>
+                  <a:srgbClr val="171721"/>
+                </a:solidFill>
+                <a:latin typeface="Calibri" pitchFamily="34" charset="0"/>
+                <a:ea typeface="Calibri" pitchFamily="34" charset="-122"/>
+                <a:cs typeface="Calibri" pitchFamily="34" charset="-120"/>
+              </a:rPr>
+              <a:t>Under payment load (20 writes/s, every write checked), 19 Oct:  </a:t>
+            </a:r>
+            <a:pPr indent="0" marL="0">
+              <a:buNone/>
+            </a:pPr>
+            <a:r>
+              <a:rPr lang="en-US" sz="1300" dirty="0">
+                <a:solidFill>
+                  <a:srgbClr val="1B2635"/>
+                </a:solidFill>
+                <a:latin typeface="Calibri" pitchFamily="34" charset="0"/>
+                <a:ea typeface="Calibri" pitchFamily="34" charset="-122"/>
+                <a:cs typeface="Calibri" pitchFamily="34" charset="-120"/>
+              </a:rPr>
+              <a:t>RTO 27.74 s  ·  RPO 1.95 s (15 of 466 acknowledged writes lost)  ·  failback 2 min 55 s</a:t>
+            </a:r>
+            <a:endParaRPr lang="en-US" sz="1300" dirty="0"/>
+          </a:p>
+        </p:txBody>
+      </p:sp>
+      <p:sp>
+        <p:nvSpPr>
+          <p:cNvPr id="22" name="Text 20"/>
+          <p:cNvSpPr txBox="1"/>
+          <p:nvPr/>
+        </p:nvSpPr>
+        <p:spPr>
+          <a:xfrm>
+            <a:off x="548640" y="3840480"/>
+            <a:ext cx="11064240" cy="320040"/>
+          </a:xfrm>
+          <a:prstGeom prst="rect">
+            <a:avLst/>
+          </a:prstGeom>
+          <a:noFill/>
+          <a:ln/>
+        </p:spPr>
+        <p:txBody>
+          <a:bodyPr wrap="square" lIns="0" tIns="0" rIns="0" bIns="0" rtlCol="0" anchor="ctr"/>
+          <a:lstStyle/>
+          <a:p>
+            <a:pPr indent="0" marL="0">
+              <a:buNone/>
+            </a:pPr>
+            <a:r>
+              <a:rPr lang="en-US" sz="1400" b="1" dirty="0">
+                <a:solidFill>
+                  <a:srgbClr val="171721"/>
+                </a:solidFill>
+                <a:latin typeface="Calibri" pitchFamily="34" charset="0"/>
+                <a:ea typeface="Calibri" pitchFamily="34" charset="-122"/>
+                <a:cs typeface="Calibri" pitchFamily="34" charset="-120"/>
+              </a:rPr>
+              <a:t>Where the 29.04 s went (19 Oct drill without load, one clock, segments add up exactly)</a:t>
+            </a:r>
+            <a:endParaRPr lang="en-US" sz="1400" dirty="0"/>
+          </a:p>
+        </p:txBody>
+      </p:sp>
+      <p:sp>
+        <p:nvSpPr>
+          <p:cNvPr id="23" name="Shape 21"/>
+          <p:cNvSpPr/>
+          <p:nvPr/>
+        </p:nvSpPr>
+        <p:spPr>
+          <a:xfrm>
+            <a:off x="548640" y="4206240"/>
+            <a:ext cx="272034" cy="411480"/>
+          </a:xfrm>
+          <a:prstGeom prst="rect">
+            <a:avLst/>
+          </a:prstGeom>
+          <a:solidFill>
+            <a:srgbClr val="9F86FF"/>
+          </a:solidFill>
+          <a:ln w="12700">
+            <a:solidFill>
+              <a:srgbClr val="FFFFFF"/>
+            </a:solidFill>
+            <a:prstDash val="solid"/>
+          </a:ln>
+        </p:spPr>
+      </p:sp>
+      <p:sp>
+        <p:nvSpPr>
+          <p:cNvPr id="24" name="Shape 22"/>
+          <p:cNvSpPr/>
+          <p:nvPr/>
+        </p:nvSpPr>
+        <p:spPr>
+          <a:xfrm>
+            <a:off x="820674" y="4206240"/>
+            <a:ext cx="5456301" cy="411480"/>
+          </a:xfrm>
+          <a:prstGeom prst="rect">
+            <a:avLst/>
+          </a:prstGeom>
+          <a:solidFill>
+            <a:srgbClr val="5E2CFE"/>
+          </a:solidFill>
+          <a:ln w="12700">
+            <a:solidFill>
+              <a:srgbClr val="FFFFFF"/>
+            </a:solidFill>
+            <a:prstDash val="solid"/>
+          </a:ln>
+        </p:spPr>
+      </p:sp>
+      <p:sp>
+        <p:nvSpPr>
+          <p:cNvPr id="25" name="Text 23"/>
+          <p:cNvSpPr txBox="1"/>
+          <p:nvPr/>
+        </p:nvSpPr>
+        <p:spPr>
+          <a:xfrm>
+            <a:off x="820674" y="4206240"/>
+            <a:ext cx="5456301" cy="411480"/>
+          </a:xfrm>
+          <a:prstGeom prst="rect">
+            <a:avLst/>
+          </a:prstGeom>
+          <a:noFill/>
+          <a:ln/>
+        </p:spPr>
+        <p:txBody>
+          <a:bodyPr wrap="square" lIns="0" tIns="0" rIns="0" bIns="0" rtlCol="0" anchor="ctr"/>
+          <a:lstStyle/>
+          <a:p>
+            <a:pPr algn="ctr" indent="0" marL="0">
+              <a:buNone/>
+            </a:pPr>
+            <a:r>
+              <a:rPr lang="en-US" sz="1200" b="1" dirty="0">
                 <a:solidFill>
                   <a:srgbClr val="FFFFFF"/>
                 </a:solidFill>
@@ -5502,52 +6141,538 @@
                 <a:ea typeface="Calibri" pitchFamily="34" charset="-122"/>
                 <a:cs typeface="Calibri" pitchFamily="34" charset="-120"/>
               </a:rPr>
-              <a:t>A month of this DR set-up costs less than a fifth of a second of downtime </a:t>
-            </a:r>
-            <a:pPr indent="0" marL="0">
-              <a:buNone/>
-            </a:pPr>
-            <a:r>
-              <a:rPr lang="en-US" sz="1600" dirty="0">
-                <a:solidFill>
-                  <a:srgbClr val="C9C3E6"/>
-                </a:solidFill>
-                <a:latin typeface="Calibri" pitchFamily="34" charset="0"/>
-                <a:ea typeface="Calibri" pitchFamily="34" charset="-122"/>
-                <a:cs typeface="Calibri" pitchFamily="34" charset="-120"/>
-              </a:rPr>
-              <a:t>at the 2026 average of $15,000 a minute ($38.26 ÷ $250 per second = 0.15 s). [1][13]</a:t>
-            </a:r>
-            <a:endParaRPr lang="en-US" sz="1600" dirty="0"/>
-          </a:p>
-        </p:txBody>
-      </p:sp>
-      <p:sp>
-        <p:nvSpPr>
-          <p:cNvPr id="18" name="Text 16"/>
-          <p:cNvSpPr txBox="1"/>
-          <p:nvPr/>
-        </p:nvSpPr>
-        <p:spPr>
-          <a:xfrm>
-            <a:off x="548640" y="5440680"/>
-            <a:ext cx="11064240" cy="822960"/>
-          </a:xfrm>
-          <a:prstGeom prst="rect">
-            <a:avLst/>
-          </a:prstGeom>
-          <a:noFill/>
-          <a:ln/>
-        </p:spPr>
-        <p:txBody>
-          <a:bodyPr wrap="square" lIns="0" tIns="0" rIns="0" bIns="0" rtlCol="0" anchor="t"/>
-          <a:lstStyle/>
-          <a:p>
-            <a:pPr indent="0" marL="0">
-              <a:buNone/>
-            </a:pPr>
-            <a:r>
-              <a:rPr lang="en-US" sz="1300" b="1" dirty="0">
+              <a:t>14.321 s</a:t>
+            </a:r>
+            <a:endParaRPr lang="en-US" sz="1200" dirty="0"/>
+          </a:p>
+        </p:txBody>
+      </p:sp>
+      <p:sp>
+        <p:nvSpPr>
+          <p:cNvPr id="26" name="Shape 24"/>
+          <p:cNvSpPr/>
+          <p:nvPr/>
+        </p:nvSpPr>
+        <p:spPr>
+          <a:xfrm>
+            <a:off x="6276975" y="4206240"/>
+            <a:ext cx="1440942" cy="411480"/>
+          </a:xfrm>
+          <a:prstGeom prst="rect">
+            <a:avLst/>
+          </a:prstGeom>
+          <a:solidFill>
+            <a:srgbClr val="C105B2"/>
+          </a:solidFill>
+          <a:ln w="12700">
+            <a:solidFill>
+              <a:srgbClr val="FFFFFF"/>
+            </a:solidFill>
+            <a:prstDash val="solid"/>
+          </a:ln>
+        </p:spPr>
+      </p:sp>
+      <p:sp>
+        <p:nvSpPr>
+          <p:cNvPr id="27" name="Text 25"/>
+          <p:cNvSpPr txBox="1"/>
+          <p:nvPr/>
+        </p:nvSpPr>
+        <p:spPr>
+          <a:xfrm>
+            <a:off x="6276975" y="4206240"/>
+            <a:ext cx="1440942" cy="411480"/>
+          </a:xfrm>
+          <a:prstGeom prst="rect">
+            <a:avLst/>
+          </a:prstGeom>
+          <a:noFill/>
+          <a:ln/>
+        </p:spPr>
+        <p:txBody>
+          <a:bodyPr wrap="square" lIns="0" tIns="0" rIns="0" bIns="0" rtlCol="0" anchor="ctr"/>
+          <a:lstStyle/>
+          <a:p>
+            <a:pPr algn="ctr" indent="0" marL="0">
+              <a:buNone/>
+            </a:pPr>
+            <a:r>
+              <a:rPr lang="en-US" sz="1200" b="1" dirty="0">
+                <a:solidFill>
+                  <a:srgbClr val="FFFFFF"/>
+                </a:solidFill>
+                <a:latin typeface="Calibri" pitchFamily="34" charset="0"/>
+                <a:ea typeface="Calibri" pitchFamily="34" charset="-122"/>
+                <a:cs typeface="Calibri" pitchFamily="34" charset="-120"/>
+              </a:rPr>
+              <a:t>3.782 s</a:t>
+            </a:r>
+            <a:endParaRPr lang="en-US" sz="1200" dirty="0"/>
+          </a:p>
+        </p:txBody>
+      </p:sp>
+      <p:sp>
+        <p:nvSpPr>
+          <p:cNvPr id="28" name="Shape 26"/>
+          <p:cNvSpPr/>
+          <p:nvPr/>
+        </p:nvSpPr>
+        <p:spPr>
+          <a:xfrm>
+            <a:off x="7717917" y="4206240"/>
+            <a:ext cx="3611118" cy="411480"/>
+          </a:xfrm>
+          <a:prstGeom prst="rect">
+            <a:avLst/>
+          </a:prstGeom>
+          <a:solidFill>
+            <a:srgbClr val="7C5CFF"/>
+          </a:solidFill>
+          <a:ln w="12700">
+            <a:solidFill>
+              <a:srgbClr val="FFFFFF"/>
+            </a:solidFill>
+            <a:prstDash val="solid"/>
+          </a:ln>
+        </p:spPr>
+      </p:sp>
+      <p:sp>
+        <p:nvSpPr>
+          <p:cNvPr id="29" name="Text 27"/>
+          <p:cNvSpPr txBox="1"/>
+          <p:nvPr/>
+        </p:nvSpPr>
+        <p:spPr>
+          <a:xfrm>
+            <a:off x="7717917" y="4206240"/>
+            <a:ext cx="3611118" cy="411480"/>
+          </a:xfrm>
+          <a:prstGeom prst="rect">
+            <a:avLst/>
+          </a:prstGeom>
+          <a:noFill/>
+          <a:ln/>
+        </p:spPr>
+        <p:txBody>
+          <a:bodyPr wrap="square" lIns="0" tIns="0" rIns="0" bIns="0" rtlCol="0" anchor="ctr"/>
+          <a:lstStyle/>
+          <a:p>
+            <a:pPr algn="ctr" indent="0" marL="0">
+              <a:buNone/>
+            </a:pPr>
+            <a:r>
+              <a:rPr lang="en-US" sz="1200" b="1" dirty="0">
+                <a:solidFill>
+                  <a:srgbClr val="FFFFFF"/>
+                </a:solidFill>
+                <a:latin typeface="Calibri" pitchFamily="34" charset="0"/>
+                <a:ea typeface="Calibri" pitchFamily="34" charset="-122"/>
+                <a:cs typeface="Calibri" pitchFamily="34" charset="-120"/>
+              </a:rPr>
+              <a:t>9.478 s</a:t>
+            </a:r>
+            <a:endParaRPr lang="en-US" sz="1200" dirty="0"/>
+          </a:p>
+        </p:txBody>
+      </p:sp>
+      <p:sp>
+        <p:nvSpPr>
+          <p:cNvPr id="30" name="Shape 28"/>
+          <p:cNvSpPr/>
+          <p:nvPr/>
+        </p:nvSpPr>
+        <p:spPr>
+          <a:xfrm>
+            <a:off x="11329035" y="4206240"/>
+            <a:ext cx="283845" cy="411480"/>
+          </a:xfrm>
+          <a:prstGeom prst="rect">
+            <a:avLst/>
+          </a:prstGeom>
+          <a:solidFill>
+            <a:srgbClr val="BDBDC7"/>
+          </a:solidFill>
+          <a:ln w="12700">
+            <a:solidFill>
+              <a:srgbClr val="FFFFFF"/>
+            </a:solidFill>
+            <a:prstDash val="solid"/>
+          </a:ln>
+        </p:spPr>
+      </p:sp>
+      <p:sp>
+        <p:nvSpPr>
+          <p:cNvPr id="31" name="Shape 29"/>
+          <p:cNvSpPr/>
+          <p:nvPr/>
+        </p:nvSpPr>
+        <p:spPr>
+          <a:xfrm>
+            <a:off x="548640" y="4764024"/>
+            <a:ext cx="164592" cy="164592"/>
+          </a:xfrm>
+          <a:prstGeom prst="rect">
+            <a:avLst/>
+          </a:prstGeom>
+          <a:solidFill>
+            <a:srgbClr val="9F86FF"/>
+          </a:solidFill>
+          <a:ln w="12700">
+            <a:solidFill>
+              <a:srgbClr val="9F86FF"/>
+            </a:solidFill>
+            <a:prstDash val="solid"/>
+          </a:ln>
+        </p:spPr>
+      </p:sp>
+      <p:sp>
+        <p:nvSpPr>
+          <p:cNvPr id="32" name="Text 30"/>
+          <p:cNvSpPr txBox="1"/>
+          <p:nvPr/>
+        </p:nvSpPr>
+        <p:spPr>
+          <a:xfrm>
+            <a:off x="777240" y="4690872"/>
+            <a:ext cx="1965960" cy="329184"/>
+          </a:xfrm>
+          <a:prstGeom prst="rect">
+            <a:avLst/>
+          </a:prstGeom>
+          <a:noFill/>
+          <a:ln/>
+        </p:spPr>
+        <p:txBody>
+          <a:bodyPr wrap="square" lIns="0" tIns="0" rIns="0" bIns="0" rtlCol="0" anchor="ctr"/>
+          <a:lstStyle/>
+          <a:p>
+            <a:pPr indent="0" marL="0">
+              <a:buNone/>
+            </a:pPr>
+            <a:r>
+              <a:rPr lang="en-US" sz="1050" dirty="0">
+                <a:solidFill>
+                  <a:srgbClr val="1B2635"/>
+                </a:solidFill>
+                <a:latin typeface="Calibri" pitchFamily="34" charset="0"/>
+                <a:ea typeface="Calibri" pitchFamily="34" charset="-122"/>
+                <a:cs typeface="Calibri" pitchFamily="34" charset="-120"/>
+              </a:rPr>
+              <a:t>Outage injected  0.714 s</a:t>
+            </a:r>
+            <a:endParaRPr lang="en-US" sz="1050" dirty="0"/>
+          </a:p>
+        </p:txBody>
+      </p:sp>
+      <p:sp>
+        <p:nvSpPr>
+          <p:cNvPr id="33" name="Shape 31"/>
+          <p:cNvSpPr/>
+          <p:nvPr/>
+        </p:nvSpPr>
+        <p:spPr>
+          <a:xfrm>
+            <a:off x="2761488" y="4764024"/>
+            <a:ext cx="164592" cy="164592"/>
+          </a:xfrm>
+          <a:prstGeom prst="rect">
+            <a:avLst/>
+          </a:prstGeom>
+          <a:solidFill>
+            <a:srgbClr val="5E2CFE"/>
+          </a:solidFill>
+          <a:ln w="12700">
+            <a:solidFill>
+              <a:srgbClr val="5E2CFE"/>
+            </a:solidFill>
+            <a:prstDash val="solid"/>
+          </a:ln>
+        </p:spPr>
+      </p:sp>
+      <p:sp>
+        <p:nvSpPr>
+          <p:cNvPr id="34" name="Text 32"/>
+          <p:cNvSpPr txBox="1"/>
+          <p:nvPr/>
+        </p:nvSpPr>
+        <p:spPr>
+          <a:xfrm>
+            <a:off x="2990088" y="4690872"/>
+            <a:ext cx="1965960" cy="329184"/>
+          </a:xfrm>
+          <a:prstGeom prst="rect">
+            <a:avLst/>
+          </a:prstGeom>
+          <a:noFill/>
+          <a:ln/>
+        </p:spPr>
+        <p:txBody>
+          <a:bodyPr wrap="square" lIns="0" tIns="0" rIns="0" bIns="0" rtlCol="0" anchor="ctr"/>
+          <a:lstStyle/>
+          <a:p>
+            <a:pPr indent="0" marL="0">
+              <a:buNone/>
+            </a:pPr>
+            <a:r>
+              <a:rPr lang="en-US" sz="1050" dirty="0">
+                <a:solidFill>
+                  <a:srgbClr val="1B2635"/>
+                </a:solidFill>
+                <a:latin typeface="Calibri" pitchFamily="34" charset="0"/>
+                <a:ea typeface="Calibri" pitchFamily="34" charset="-122"/>
+                <a:cs typeface="Calibri" pitchFamily="34" charset="-120"/>
+              </a:rPr>
+              <a:t>SQL forced failover  14.321 s</a:t>
+            </a:r>
+            <a:endParaRPr lang="en-US" sz="1050" dirty="0"/>
+          </a:p>
+        </p:txBody>
+      </p:sp>
+      <p:sp>
+        <p:nvSpPr>
+          <p:cNvPr id="35" name="Shape 33"/>
+          <p:cNvSpPr/>
+          <p:nvPr/>
+        </p:nvSpPr>
+        <p:spPr>
+          <a:xfrm>
+            <a:off x="4974336" y="4764024"/>
+            <a:ext cx="164592" cy="164592"/>
+          </a:xfrm>
+          <a:prstGeom prst="rect">
+            <a:avLst/>
+          </a:prstGeom>
+          <a:solidFill>
+            <a:srgbClr val="C105B2"/>
+          </a:solidFill>
+          <a:ln w="12700">
+            <a:solidFill>
+              <a:srgbClr val="C105B2"/>
+            </a:solidFill>
+            <a:prstDash val="solid"/>
+          </a:ln>
+        </p:spPr>
+      </p:sp>
+      <p:sp>
+        <p:nvSpPr>
+          <p:cNvPr id="36" name="Text 34"/>
+          <p:cNvSpPr txBox="1"/>
+          <p:nvPr/>
+        </p:nvSpPr>
+        <p:spPr>
+          <a:xfrm>
+            <a:off x="5202936" y="4690872"/>
+            <a:ext cx="1965960" cy="329184"/>
+          </a:xfrm>
+          <a:prstGeom prst="rect">
+            <a:avLst/>
+          </a:prstGeom>
+          <a:noFill/>
+          <a:ln/>
+        </p:spPr>
+        <p:txBody>
+          <a:bodyPr wrap="square" lIns="0" tIns="0" rIns="0" bIns="0" rtlCol="0" anchor="ctr"/>
+          <a:lstStyle/>
+          <a:p>
+            <a:pPr indent="0" marL="0">
+              <a:buNone/>
+            </a:pPr>
+            <a:r>
+              <a:rPr lang="en-US" sz="1050" dirty="0">
+                <a:solidFill>
+                  <a:srgbClr val="1B2635"/>
+                </a:solidFill>
+                <a:latin typeface="Calibri" pitchFamily="34" charset="0"/>
+                <a:ea typeface="Calibri" pitchFamily="34" charset="-122"/>
+                <a:cs typeface="Calibri" pitchFamily="34" charset="-120"/>
+              </a:rPr>
+              <a:t>Traffic Manager reroute  3.782 s</a:t>
+            </a:r>
+            <a:endParaRPr lang="en-US" sz="1050" dirty="0"/>
+          </a:p>
+        </p:txBody>
+      </p:sp>
+      <p:sp>
+        <p:nvSpPr>
+          <p:cNvPr id="37" name="Shape 35"/>
+          <p:cNvSpPr/>
+          <p:nvPr/>
+        </p:nvSpPr>
+        <p:spPr>
+          <a:xfrm>
+            <a:off x="7187184" y="4764024"/>
+            <a:ext cx="164592" cy="164592"/>
+          </a:xfrm>
+          <a:prstGeom prst="rect">
+            <a:avLst/>
+          </a:prstGeom>
+          <a:solidFill>
+            <a:srgbClr val="7C5CFF"/>
+          </a:solidFill>
+          <a:ln w="12700">
+            <a:solidFill>
+              <a:srgbClr val="7C5CFF"/>
+            </a:solidFill>
+            <a:prstDash val="solid"/>
+          </a:ln>
+        </p:spPr>
+      </p:sp>
+      <p:sp>
+        <p:nvSpPr>
+          <p:cNvPr id="38" name="Text 36"/>
+          <p:cNvSpPr txBox="1"/>
+          <p:nvPr/>
+        </p:nvSpPr>
+        <p:spPr>
+          <a:xfrm>
+            <a:off x="7415784" y="4690872"/>
+            <a:ext cx="1965960" cy="329184"/>
+          </a:xfrm>
+          <a:prstGeom prst="rect">
+            <a:avLst/>
+          </a:prstGeom>
+          <a:noFill/>
+          <a:ln/>
+        </p:spPr>
+        <p:txBody>
+          <a:bodyPr wrap="square" lIns="0" tIns="0" rIns="0" bIns="0" rtlCol="0" anchor="ctr"/>
+          <a:lstStyle/>
+          <a:p>
+            <a:pPr indent="0" marL="0">
+              <a:buNone/>
+            </a:pPr>
+            <a:r>
+              <a:rPr lang="en-US" sz="1050" dirty="0">
+                <a:solidFill>
+                  <a:srgbClr val="1B2635"/>
+                </a:solidFill>
+                <a:latin typeface="Calibri" pitchFamily="34" charset="0"/>
+                <a:ea typeface="Calibri" pitchFamily="34" charset="-122"/>
+                <a:cs typeface="Calibri" pitchFamily="34" charset="-120"/>
+              </a:rPr>
+              <a:t>DNS + health checks  9.478 s</a:t>
+            </a:r>
+            <a:endParaRPr lang="en-US" sz="1050" dirty="0"/>
+          </a:p>
+        </p:txBody>
+      </p:sp>
+      <p:sp>
+        <p:nvSpPr>
+          <p:cNvPr id="39" name="Shape 37"/>
+          <p:cNvSpPr/>
+          <p:nvPr/>
+        </p:nvSpPr>
+        <p:spPr>
+          <a:xfrm>
+            <a:off x="9400032" y="4764024"/>
+            <a:ext cx="164592" cy="164592"/>
+          </a:xfrm>
+          <a:prstGeom prst="rect">
+            <a:avLst/>
+          </a:prstGeom>
+          <a:solidFill>
+            <a:srgbClr val="BDBDC7"/>
+          </a:solidFill>
+          <a:ln w="12700">
+            <a:solidFill>
+              <a:srgbClr val="BDBDC7"/>
+            </a:solidFill>
+            <a:prstDash val="solid"/>
+          </a:ln>
+        </p:spPr>
+      </p:sp>
+      <p:sp>
+        <p:nvSpPr>
+          <p:cNvPr id="40" name="Text 38"/>
+          <p:cNvSpPr txBox="1"/>
+          <p:nvPr/>
+        </p:nvSpPr>
+        <p:spPr>
+          <a:xfrm>
+            <a:off x="9628632" y="4690872"/>
+            <a:ext cx="1965960" cy="329184"/>
+          </a:xfrm>
+          <a:prstGeom prst="rect">
+            <a:avLst/>
+          </a:prstGeom>
+          <a:noFill/>
+          <a:ln/>
+        </p:spPr>
+        <p:txBody>
+          <a:bodyPr wrap="square" lIns="0" tIns="0" rIns="0" bIns="0" rtlCol="0" anchor="ctr"/>
+          <a:lstStyle/>
+          <a:p>
+            <a:pPr indent="0" marL="0">
+              <a:buNone/>
+            </a:pPr>
+            <a:r>
+              <a:rPr lang="en-US" sz="1050" dirty="0">
+                <a:solidFill>
+                  <a:srgbClr val="1B2635"/>
+                </a:solidFill>
+                <a:latin typeface="Calibri" pitchFamily="34" charset="0"/>
+                <a:ea typeface="Calibri" pitchFamily="34" charset="-122"/>
+                <a:cs typeface="Calibri" pitchFamily="34" charset="-120"/>
+              </a:rPr>
+              <a:t>Engine bookkeeping  0.745 s</a:t>
+            </a:r>
+            <a:endParaRPr lang="en-US" sz="1050" dirty="0"/>
+          </a:p>
+        </p:txBody>
+      </p:sp>
+      <p:sp>
+        <p:nvSpPr>
+          <p:cNvPr id="41" name="Shape 39"/>
+          <p:cNvSpPr/>
+          <p:nvPr/>
+        </p:nvSpPr>
+        <p:spPr>
+          <a:xfrm>
+            <a:off x="548640" y="5166360"/>
+            <a:ext cx="11064240" cy="1097280"/>
+          </a:xfrm>
+          <a:prstGeom prst="roundRect">
+            <a:avLst>
+              <a:gd name="adj" fmla="val 6667"/>
+            </a:avLst>
+          </a:prstGeom>
+          <a:solidFill>
+            <a:srgbClr val="EFE9FF"/>
+          </a:solidFill>
+          <a:ln w="12700">
+            <a:solidFill>
+              <a:srgbClr val="EFE9FF"/>
+            </a:solidFill>
+            <a:prstDash val="solid"/>
+          </a:ln>
+        </p:spPr>
+      </p:sp>
+      <p:sp>
+        <p:nvSpPr>
+          <p:cNvPr id="42" name="Text 40"/>
+          <p:cNvSpPr txBox="1"/>
+          <p:nvPr/>
+        </p:nvSpPr>
+        <p:spPr>
+          <a:xfrm>
+            <a:off x="777240" y="5166360"/>
+            <a:ext cx="10607040" cy="1097280"/>
+          </a:xfrm>
+          <a:prstGeom prst="rect">
+            <a:avLst/>
+          </a:prstGeom>
+          <a:noFill/>
+          <a:ln/>
+        </p:spPr>
+        <p:txBody>
+          <a:bodyPr wrap="square" lIns="0" tIns="0" rIns="0" bIns="0" rtlCol="0" anchor="ctr"/>
+          <a:lstStyle/>
+          <a:p>
+            <a:pPr indent="0" marL="0">
+              <a:buNone/>
+            </a:pPr>
+            <a:r>
+              <a:rPr lang="en-US" sz="1250" b="1" dirty="0">
                 <a:solidFill>
                   <a:srgbClr val="171721"/>
                 </a:solidFill>
@@ -5555,13 +6680,13 @@
                 <a:ea typeface="Calibri" pitchFamily="34" charset="-122"/>
                 <a:cs typeface="Calibri" pitchFamily="34" charset="-120"/>
               </a:rPr>
-              <a:t>Cost-aware by design: </a:t>
-            </a:r>
-            <a:pPr indent="0" marL="0">
-              <a:buNone/>
-            </a:pPr>
-            <a:r>
-              <a:rPr lang="en-US" sz="1300" dirty="0">
+              <a:t>Why judges can trust the numbers: </a:t>
+            </a:r>
+            <a:pPr indent="0" marL="0">
+              <a:buNone/>
+            </a:pPr>
+            <a:r>
+              <a:rPr lang="en-US" sz="1250" dirty="0">
                 <a:solidFill>
                   <a:srgbClr val="1B2635"/>
                 </a:solidFill>
@@ -5569,15 +6694,15 @@
                 <a:ea typeface="Calibri" pitchFamily="34" charset="-122"/>
                 <a:cs typeface="Calibri" pitchFamily="34" charset="-120"/>
               </a:rPr>
-              <a:t>the Architect prices every strategy from live Azure list prices and flags anything over budget; the whole environment is created and removed with one command (up.sh / down.sh), so nothing runs when it is not needed.</a:t>
-            </a:r>
-            <a:endParaRPr lang="en-US" sz="1300" dirty="0"/>
-          </a:p>
-        </p:txBody>
-      </p:sp>
-      <p:sp>
-        <p:nvSpPr>
-          <p:cNvPr id="19" name="Text 17"/>
+              <a:t>RTO runs from the injected outage to the first healthy check through Traffic Manager from Southeast Asia (checked every second). RPO is proven write by write: every write the database acknowledged until the forced failover completed, including during it, must exist in the new primary. Our earlier "RPO 0" came from a narrower method; our own audit found it.</a:t>
+            </a:r>
+            <a:endParaRPr lang="en-US" sz="1250" dirty="0"/>
+          </a:p>
+        </p:txBody>
+      </p:sp>
+      <p:sp>
+        <p:nvSpPr>
+          <p:cNvPr id="43" name="Text 41"/>
           <p:cNvSpPr txBox="1"/>
           <p:nvPr/>
         </p:nvSpPr>
@@ -5679,7 +6804,7 @@
                 <a:ea typeface="Calibri" pitchFamily="34" charset="-122"/>
                 <a:cs typeface="Calibri" pitchFamily="34" charset="-120"/>
               </a:rPr>
-              <a:t>Live demo, and where it goes next</a:t>
+              <a:t>What it costs to prove recovery</a:t>
             </a:r>
             <a:endParaRPr lang="en-US" sz="3200" dirty="0"/>
           </a:p>
@@ -5718,7 +6843,7 @@
                 <a:ea typeface="Calibri" pitchFamily="34" charset="-122"/>
                 <a:cs typeface="Calibri" pitchFamily="34" charset="-120"/>
               </a:rPr>
-              <a:t>What you will see in the next minutes, on your own phone.</a:t>
+              <a:t>Actual Azure bills and list prices for what we built, compared with the cost of downtime.</a:t>
             </a:r>
             <a:endParaRPr lang="en-US" sz="1500" dirty="0"/>
           </a:p>
@@ -5726,572 +6851,18 @@
       </p:sp>
       <p:sp>
         <p:nvSpPr>
-          <p:cNvPr id="4" name="Text 2"/>
-          <p:cNvSpPr txBox="1"/>
-          <p:nvPr/>
-        </p:nvSpPr>
-        <p:spPr>
-          <a:xfrm>
-            <a:off x="548640" y="1554480"/>
-            <a:ext cx="5486400" cy="365760"/>
-          </a:xfrm>
-          <a:prstGeom prst="rect">
-            <a:avLst/>
-          </a:prstGeom>
-          <a:noFill/>
-          <a:ln/>
-        </p:spPr>
-        <p:txBody>
-          <a:bodyPr wrap="square" lIns="0" tIns="0" rIns="0" bIns="0" rtlCol="0" anchor="ctr"/>
-          <a:lstStyle/>
-          <a:p>
-            <a:pPr indent="0" marL="0">
-              <a:buNone/>
-            </a:pPr>
-            <a:r>
-              <a:rPr lang="en-US" sz="1800" b="1" dirty="0">
-                <a:solidFill>
-                  <a:srgbClr val="171721"/>
-                </a:solidFill>
-                <a:latin typeface="Calibri" pitchFamily="34" charset="0"/>
-                <a:ea typeface="Calibri" pitchFamily="34" charset="-122"/>
-                <a:cs typeface="Calibri" pitchFamily="34" charset="-120"/>
-              </a:rPr>
-              <a:t>The demo</a:t>
-            </a:r>
-            <a:endParaRPr lang="en-US" sz="1800" dirty="0"/>
-          </a:p>
-        </p:txBody>
-      </p:sp>
-      <p:sp>
-        <p:nvSpPr>
-          <p:cNvPr id="5" name="Shape 3"/>
+          <p:cNvPr id="4" name="Shape 2"/>
           <p:cNvSpPr/>
           <p:nvPr/>
         </p:nvSpPr>
         <p:spPr>
           <a:xfrm>
-            <a:off x="548640" y="2057400"/>
-            <a:ext cx="411480" cy="411480"/>
-          </a:xfrm>
-          <a:prstGeom prst="ellipse">
-            <a:avLst/>
-          </a:prstGeom>
-          <a:solidFill>
-            <a:srgbClr val="5E2CFE"/>
-          </a:solidFill>
-          <a:ln w="12700">
-            <a:solidFill>
-              <a:srgbClr val="5E2CFE"/>
-            </a:solidFill>
-            <a:prstDash val="solid"/>
-          </a:ln>
-        </p:spPr>
-      </p:sp>
-      <p:sp>
-        <p:nvSpPr>
-          <p:cNvPr id="6" name="Text 4"/>
-          <p:cNvSpPr txBox="1"/>
-          <p:nvPr/>
-        </p:nvSpPr>
-        <p:spPr>
-          <a:xfrm>
-            <a:off x="548640" y="2057400"/>
-            <a:ext cx="411480" cy="411480"/>
-          </a:xfrm>
-          <a:prstGeom prst="rect">
-            <a:avLst/>
-          </a:prstGeom>
-          <a:noFill/>
-          <a:ln/>
-        </p:spPr>
-        <p:txBody>
-          <a:bodyPr wrap="square" lIns="0" tIns="0" rIns="0" bIns="0" rtlCol="0" anchor="ctr"/>
-          <a:lstStyle/>
-          <a:p>
-            <a:pPr algn="ctr" indent="0" marL="0">
-              <a:buNone/>
-            </a:pPr>
-            <a:r>
-              <a:rPr lang="en-US" sz="1400" b="1" dirty="0">
-                <a:solidFill>
-                  <a:srgbClr val="FFFFFF"/>
-                </a:solidFill>
-                <a:latin typeface="Calibri" pitchFamily="34" charset="0"/>
-                <a:ea typeface="Calibri" pitchFamily="34" charset="-122"/>
-                <a:cs typeface="Calibri" pitchFamily="34" charset="-120"/>
-              </a:rPr>
-              <a:t>1</a:t>
-            </a:r>
-            <a:endParaRPr lang="en-US" sz="1400" dirty="0"/>
-          </a:p>
-        </p:txBody>
-      </p:sp>
-      <p:sp>
-        <p:nvSpPr>
-          <p:cNvPr id="7" name="Text 5"/>
-          <p:cNvSpPr txBox="1"/>
-          <p:nvPr/>
-        </p:nvSpPr>
-        <p:spPr>
-          <a:xfrm>
-            <a:off x="1097280" y="2011680"/>
-            <a:ext cx="5120640" cy="548640"/>
-          </a:xfrm>
-          <a:prstGeom prst="rect">
-            <a:avLst/>
-          </a:prstGeom>
-          <a:noFill/>
-          <a:ln/>
-        </p:spPr>
-        <p:txBody>
-          <a:bodyPr wrap="square" lIns="0" tIns="0" rIns="0" bIns="0" rtlCol="0" anchor="ctr"/>
-          <a:lstStyle/>
-          <a:p>
-            <a:pPr indent="0" marL="0">
-              <a:buNone/>
-            </a:pPr>
-            <a:r>
-              <a:rPr lang="en-US" sz="1350" dirty="0">
-                <a:solidFill>
-                  <a:srgbClr val="1B2635"/>
-                </a:solidFill>
-                <a:latin typeface="Calibri" pitchFamily="34" charset="0"/>
-                <a:ea typeface="Calibri" pitchFamily="34" charset="-122"/>
-                <a:cs typeface="Calibri" pitchFamily="34" charset="-120"/>
-              </a:rPr>
-              <a:t>Scan the QR code: Contoso Payments opens on your phone; make a payment</a:t>
-            </a:r>
-            <a:endParaRPr lang="en-US" sz="1350" dirty="0"/>
-          </a:p>
-        </p:txBody>
-      </p:sp>
-      <p:sp>
-        <p:nvSpPr>
-          <p:cNvPr id="8" name="Shape 6"/>
-          <p:cNvSpPr/>
-          <p:nvPr/>
-        </p:nvSpPr>
-        <p:spPr>
-          <a:xfrm>
-            <a:off x="548640" y="2843784"/>
-            <a:ext cx="411480" cy="411480"/>
-          </a:xfrm>
-          <a:prstGeom prst="ellipse">
-            <a:avLst/>
-          </a:prstGeom>
-          <a:solidFill>
-            <a:srgbClr val="5E2CFE"/>
-          </a:solidFill>
-          <a:ln w="12700">
-            <a:solidFill>
-              <a:srgbClr val="5E2CFE"/>
-            </a:solidFill>
-            <a:prstDash val="solid"/>
-          </a:ln>
-        </p:spPr>
-      </p:sp>
-      <p:sp>
-        <p:nvSpPr>
-          <p:cNvPr id="9" name="Text 7"/>
-          <p:cNvSpPr txBox="1"/>
-          <p:nvPr/>
-        </p:nvSpPr>
-        <p:spPr>
-          <a:xfrm>
-            <a:off x="548640" y="2843784"/>
-            <a:ext cx="411480" cy="411480"/>
-          </a:xfrm>
-          <a:prstGeom prst="rect">
-            <a:avLst/>
-          </a:prstGeom>
-          <a:noFill/>
-          <a:ln/>
-        </p:spPr>
-        <p:txBody>
-          <a:bodyPr wrap="square" lIns="0" tIns="0" rIns="0" bIns="0" rtlCol="0" anchor="ctr"/>
-          <a:lstStyle/>
-          <a:p>
-            <a:pPr algn="ctr" indent="0" marL="0">
-              <a:buNone/>
-            </a:pPr>
-            <a:r>
-              <a:rPr lang="en-US" sz="1400" b="1" dirty="0">
-                <a:solidFill>
-                  <a:srgbClr val="FFFFFF"/>
-                </a:solidFill>
-                <a:latin typeface="Calibri" pitchFamily="34" charset="0"/>
-                <a:ea typeface="Calibri" pitchFamily="34" charset="-122"/>
-                <a:cs typeface="Calibri" pitchFamily="34" charset="-120"/>
-              </a:rPr>
-              <a:t>2</a:t>
-            </a:r>
-            <a:endParaRPr lang="en-US" sz="1400" dirty="0"/>
-          </a:p>
-        </p:txBody>
-      </p:sp>
-      <p:sp>
-        <p:nvSpPr>
-          <p:cNvPr id="10" name="Text 8"/>
-          <p:cNvSpPr txBox="1"/>
-          <p:nvPr/>
-        </p:nvSpPr>
-        <p:spPr>
-          <a:xfrm>
-            <a:off x="1097280" y="2798064"/>
-            <a:ext cx="5120640" cy="548640"/>
-          </a:xfrm>
-          <a:prstGeom prst="rect">
-            <a:avLst/>
-          </a:prstGeom>
-          <a:noFill/>
-          <a:ln/>
-        </p:spPr>
-        <p:txBody>
-          <a:bodyPr wrap="square" lIns="0" tIns="0" rIns="0" bIns="0" rtlCol="0" anchor="ctr"/>
-          <a:lstStyle/>
-          <a:p>
-            <a:pPr indent="0" marL="0">
-              <a:buNone/>
-            </a:pPr>
-            <a:r>
-              <a:rPr lang="en-US" sz="1350" dirty="0">
-                <a:solidFill>
-                  <a:srgbClr val="1B2635"/>
-                </a:solidFill>
-                <a:latin typeface="Calibri" pitchFamily="34" charset="0"/>
-                <a:ea typeface="Calibri" pitchFamily="34" charset="-122"/>
-                <a:cs typeface="Calibri" pitchFamily="34" charset="-120"/>
-              </a:rPr>
-              <a:t>Readiness says NO-GO: Southeast Asia is missing a setting; one approved click fixes it</a:t>
-            </a:r>
-            <a:endParaRPr lang="en-US" sz="1350" dirty="0"/>
-          </a:p>
-        </p:txBody>
-      </p:sp>
-      <p:sp>
-        <p:nvSpPr>
-          <p:cNvPr id="11" name="Shape 9"/>
-          <p:cNvSpPr/>
-          <p:nvPr/>
-        </p:nvSpPr>
-        <p:spPr>
-          <a:xfrm>
-            <a:off x="548640" y="3630168"/>
-            <a:ext cx="411480" cy="411480"/>
-          </a:xfrm>
-          <a:prstGeom prst="ellipse">
-            <a:avLst/>
-          </a:prstGeom>
-          <a:solidFill>
-            <a:srgbClr val="5E2CFE"/>
-          </a:solidFill>
-          <a:ln w="12700">
-            <a:solidFill>
-              <a:srgbClr val="5E2CFE"/>
-            </a:solidFill>
-            <a:prstDash val="solid"/>
-          </a:ln>
-        </p:spPr>
-      </p:sp>
-      <p:sp>
-        <p:nvSpPr>
-          <p:cNvPr id="12" name="Text 10"/>
-          <p:cNvSpPr txBox="1"/>
-          <p:nvPr/>
-        </p:nvSpPr>
-        <p:spPr>
-          <a:xfrm>
-            <a:off x="548640" y="3630168"/>
-            <a:ext cx="411480" cy="411480"/>
-          </a:xfrm>
-          <a:prstGeom prst="rect">
-            <a:avLst/>
-          </a:prstGeom>
-          <a:noFill/>
-          <a:ln/>
-        </p:spPr>
-        <p:txBody>
-          <a:bodyPr wrap="square" lIns="0" tIns="0" rIns="0" bIns="0" rtlCol="0" anchor="ctr"/>
-          <a:lstStyle/>
-          <a:p>
-            <a:pPr algn="ctr" indent="0" marL="0">
-              <a:buNone/>
-            </a:pPr>
-            <a:r>
-              <a:rPr lang="en-US" sz="1400" b="1" dirty="0">
-                <a:solidFill>
-                  <a:srgbClr val="FFFFFF"/>
-                </a:solidFill>
-                <a:latin typeface="Calibri" pitchFamily="34" charset="0"/>
-                <a:ea typeface="Calibri" pitchFamily="34" charset="-122"/>
-                <a:cs typeface="Calibri" pitchFamily="34" charset="-120"/>
-              </a:rPr>
-              <a:t>3</a:t>
-            </a:r>
-            <a:endParaRPr lang="en-US" sz="1400" dirty="0"/>
-          </a:p>
-        </p:txBody>
-      </p:sp>
-      <p:sp>
-        <p:nvSpPr>
-          <p:cNvPr id="13" name="Text 11"/>
-          <p:cNvSpPr txBox="1"/>
-          <p:nvPr/>
-        </p:nvSpPr>
-        <p:spPr>
-          <a:xfrm>
-            <a:off x="1097280" y="3584448"/>
-            <a:ext cx="5120640" cy="548640"/>
-          </a:xfrm>
-          <a:prstGeom prst="rect">
-            <a:avLst/>
-          </a:prstGeom>
-          <a:noFill/>
-          <a:ln/>
-        </p:spPr>
-        <p:txBody>
-          <a:bodyPr wrap="square" lIns="0" tIns="0" rIns="0" bIns="0" rtlCol="0" anchor="ctr"/>
-          <a:lstStyle/>
-          <a:p>
-            <a:pPr indent="0" marL="0">
-              <a:buNone/>
-            </a:pPr>
-            <a:r>
-              <a:rPr lang="en-US" sz="1350" dirty="0">
-                <a:solidFill>
-                  <a:srgbClr val="1B2635"/>
-                </a:solidFill>
-                <a:latin typeface="Calibri" pitchFamily="34" charset="0"/>
-                <a:ea typeface="Calibri" pitchFamily="34" charset="-122"/>
-                <a:cs typeface="Calibri" pitchFamily="34" charset="-120"/>
-              </a:rPr>
-              <a:t>The Planner builds the drill; we approve it and inject the outage</a:t>
-            </a:r>
-            <a:endParaRPr lang="en-US" sz="1350" dirty="0"/>
-          </a:p>
-        </p:txBody>
-      </p:sp>
-      <p:sp>
-        <p:nvSpPr>
-          <p:cNvPr id="14" name="Shape 12"/>
-          <p:cNvSpPr/>
-          <p:nvPr/>
-        </p:nvSpPr>
-        <p:spPr>
-          <a:xfrm>
-            <a:off x="548640" y="4416552"/>
-            <a:ext cx="411480" cy="411480"/>
-          </a:xfrm>
-          <a:prstGeom prst="ellipse">
-            <a:avLst/>
-          </a:prstGeom>
-          <a:solidFill>
-            <a:srgbClr val="5E2CFE"/>
-          </a:solidFill>
-          <a:ln w="12700">
-            <a:solidFill>
-              <a:srgbClr val="5E2CFE"/>
-            </a:solidFill>
-            <a:prstDash val="solid"/>
-          </a:ln>
-        </p:spPr>
-      </p:sp>
-      <p:sp>
-        <p:nvSpPr>
-          <p:cNvPr id="15" name="Text 13"/>
-          <p:cNvSpPr txBox="1"/>
-          <p:nvPr/>
-        </p:nvSpPr>
-        <p:spPr>
-          <a:xfrm>
-            <a:off x="548640" y="4416552"/>
-            <a:ext cx="411480" cy="411480"/>
-          </a:xfrm>
-          <a:prstGeom prst="rect">
-            <a:avLst/>
-          </a:prstGeom>
-          <a:noFill/>
-          <a:ln/>
-        </p:spPr>
-        <p:txBody>
-          <a:bodyPr wrap="square" lIns="0" tIns="0" rIns="0" bIns="0" rtlCol="0" anchor="ctr"/>
-          <a:lstStyle/>
-          <a:p>
-            <a:pPr algn="ctr" indent="0" marL="0">
-              <a:buNone/>
-            </a:pPr>
-            <a:r>
-              <a:rPr lang="en-US" sz="1400" b="1" dirty="0">
-                <a:solidFill>
-                  <a:srgbClr val="FFFFFF"/>
-                </a:solidFill>
-                <a:latin typeface="Calibri" pitchFamily="34" charset="0"/>
-                <a:ea typeface="Calibri" pitchFamily="34" charset="-122"/>
-                <a:cs typeface="Calibri" pitchFamily="34" charset="-120"/>
-              </a:rPr>
-              <a:t>4</a:t>
-            </a:r>
-            <a:endParaRPr lang="en-US" sz="1400" dirty="0"/>
-          </a:p>
-        </p:txBody>
-      </p:sp>
-      <p:sp>
-        <p:nvSpPr>
-          <p:cNvPr id="16" name="Text 14"/>
-          <p:cNvSpPr txBox="1"/>
-          <p:nvPr/>
-        </p:nvSpPr>
-        <p:spPr>
-          <a:xfrm>
-            <a:off x="1097280" y="4370832"/>
-            <a:ext cx="5120640" cy="548640"/>
-          </a:xfrm>
-          <a:prstGeom prst="rect">
-            <a:avLst/>
-          </a:prstGeom>
-          <a:noFill/>
-          <a:ln/>
-        </p:spPr>
-        <p:txBody>
-          <a:bodyPr wrap="square" lIns="0" tIns="0" rIns="0" bIns="0" rtlCol="0" anchor="ctr"/>
-          <a:lstStyle/>
-          <a:p>
-            <a:pPr indent="0" marL="0">
-              <a:buNone/>
-            </a:pPr>
-            <a:r>
-              <a:rPr lang="en-US" sz="1350" dirty="0">
-                <a:solidFill>
-                  <a:srgbClr val="1B2635"/>
-                </a:solidFill>
-                <a:latin typeface="Calibri" pitchFamily="34" charset="0"/>
-                <a:ea typeface="Calibri" pitchFamily="34" charset="-122"/>
-                <a:cs typeface="Calibri" pitchFamily="34" charset="-120"/>
-              </a:rPr>
-              <a:t>Your phone goes red, then reconnects to Southeast Asia in about 35 s with the same balance</a:t>
-            </a:r>
-            <a:endParaRPr lang="en-US" sz="1350" dirty="0"/>
-          </a:p>
-        </p:txBody>
-      </p:sp>
-      <p:sp>
-        <p:nvSpPr>
-          <p:cNvPr id="17" name="Shape 15"/>
-          <p:cNvSpPr/>
-          <p:nvPr/>
-        </p:nvSpPr>
-        <p:spPr>
-          <a:xfrm>
-            <a:off x="548640" y="5202936"/>
-            <a:ext cx="411480" cy="411480"/>
-          </a:xfrm>
-          <a:prstGeom prst="ellipse">
-            <a:avLst/>
-          </a:prstGeom>
-          <a:solidFill>
-            <a:srgbClr val="5E2CFE"/>
-          </a:solidFill>
-          <a:ln w="12700">
-            <a:solidFill>
-              <a:srgbClr val="5E2CFE"/>
-            </a:solidFill>
-            <a:prstDash val="solid"/>
-          </a:ln>
-        </p:spPr>
-      </p:sp>
-      <p:sp>
-        <p:nvSpPr>
-          <p:cNvPr id="18" name="Text 16"/>
-          <p:cNvSpPr txBox="1"/>
-          <p:nvPr/>
-        </p:nvSpPr>
-        <p:spPr>
-          <a:xfrm>
-            <a:off x="548640" y="5202936"/>
-            <a:ext cx="411480" cy="411480"/>
-          </a:xfrm>
-          <a:prstGeom prst="rect">
-            <a:avLst/>
-          </a:prstGeom>
-          <a:noFill/>
-          <a:ln/>
-        </p:spPr>
-        <p:txBody>
-          <a:bodyPr wrap="square" lIns="0" tIns="0" rIns="0" bIns="0" rtlCol="0" anchor="ctr"/>
-          <a:lstStyle/>
-          <a:p>
-            <a:pPr algn="ctr" indent="0" marL="0">
-              <a:buNone/>
-            </a:pPr>
-            <a:r>
-              <a:rPr lang="en-US" sz="1400" b="1" dirty="0">
-                <a:solidFill>
-                  <a:srgbClr val="FFFFFF"/>
-                </a:solidFill>
-                <a:latin typeface="Calibri" pitchFamily="34" charset="0"/>
-                <a:ea typeface="Calibri" pitchFamily="34" charset="-122"/>
-                <a:cs typeface="Calibri" pitchFamily="34" charset="-120"/>
-              </a:rPr>
-              <a:t>5</a:t>
-            </a:r>
-            <a:endParaRPr lang="en-US" sz="1400" dirty="0"/>
-          </a:p>
-        </p:txBody>
-      </p:sp>
-      <p:sp>
-        <p:nvSpPr>
-          <p:cNvPr id="19" name="Text 17"/>
-          <p:cNvSpPr txBox="1"/>
-          <p:nvPr/>
-        </p:nvSpPr>
-        <p:spPr>
-          <a:xfrm>
-            <a:off x="1097280" y="5157216"/>
-            <a:ext cx="5120640" cy="548640"/>
-          </a:xfrm>
-          <a:prstGeom prst="rect">
-            <a:avLst/>
-          </a:prstGeom>
-          <a:noFill/>
-          <a:ln/>
-        </p:spPr>
-        <p:txBody>
-          <a:bodyPr wrap="square" lIns="0" tIns="0" rIns="0" bIns="0" rtlCol="0" anchor="ctr"/>
-          <a:lstStyle/>
-          <a:p>
-            <a:pPr indent="0" marL="0">
-              <a:buNone/>
-            </a:pPr>
-            <a:r>
-              <a:rPr lang="en-US" sz="1350" dirty="0">
-                <a:solidFill>
-                  <a:srgbClr val="1B2635"/>
-                </a:solidFill>
-                <a:latin typeface="Calibri" pitchFamily="34" charset="0"/>
-                <a:ea typeface="Calibri" pitchFamily="34" charset="-122"/>
-                <a:cs typeface="Calibri" pitchFamily="34" charset="-120"/>
-              </a:rPr>
-              <a:t>Failback, then the report: RTO, RPO and every second accounted for</a:t>
-            </a:r>
-            <a:endParaRPr lang="en-US" sz="1350" dirty="0"/>
-          </a:p>
-        </p:txBody>
-      </p:sp>
-      <p:sp>
-        <p:nvSpPr>
-          <p:cNvPr id="20" name="Shape 18"/>
-          <p:cNvSpPr/>
-          <p:nvPr/>
-        </p:nvSpPr>
-        <p:spPr>
-          <a:xfrm>
-            <a:off x="6583680" y="1554480"/>
-            <a:ext cx="5029200" cy="4709160"/>
+            <a:off x="548640" y="1600200"/>
+            <a:ext cx="3520440" cy="2331720"/>
           </a:xfrm>
           <a:prstGeom prst="roundRect">
             <a:avLst>
-              <a:gd name="adj" fmla="val 1553"/>
+              <a:gd name="adj" fmla="val 3137"/>
             </a:avLst>
           </a:prstGeom>
           <a:solidFill>
@@ -6303,18 +6874,25 @@
             </a:solidFill>
             <a:prstDash val="solid"/>
           </a:ln>
-        </p:spPr>
-      </p:sp>
-      <p:sp>
-        <p:nvSpPr>
-          <p:cNvPr id="21" name="Text 19"/>
-          <p:cNvSpPr txBox="1"/>
-          <p:nvPr/>
-        </p:nvSpPr>
-        <p:spPr>
-          <a:xfrm>
-            <a:off x="6858000" y="1737360"/>
-            <a:ext cx="4572000" cy="365760"/>
+          <a:effectLst>
+            <a:outerShdw sx="100000" sy="100000" kx="0" ky="0" algn="bl" rotWithShape="0" blurRad="76200" dist="25400" dir="5400000">
+              <a:srgbClr val="000000">
+                <a:alpha val="12000"/>
+              </a:srgbClr>
+            </a:outerShdw>
+          </a:effectLst>
+        </p:spPr>
+      </p:sp>
+      <p:sp>
+        <p:nvSpPr>
+          <p:cNvPr id="5" name="Text 3"/>
+          <p:cNvSpPr txBox="1"/>
+          <p:nvPr/>
+        </p:nvSpPr>
+        <p:spPr>
+          <a:xfrm>
+            <a:off x="822960" y="1783080"/>
+            <a:ext cx="3017520" cy="777240"/>
           </a:xfrm>
           <a:prstGeom prst="rect">
             <a:avLst/>
@@ -6330,7 +6908,46 @@
               <a:buNone/>
             </a:pPr>
             <a:r>
-              <a:rPr lang="en-US" sz="1800" b="1" dirty="0">
+              <a:rPr lang="en-US" sz="4000" b="1" dirty="0">
+                <a:solidFill>
+                  <a:srgbClr val="5E2CFE"/>
+                </a:solidFill>
+                <a:latin typeface="Calibri" pitchFamily="34" charset="0"/>
+                <a:ea typeface="Calibri" pitchFamily="34" charset="-122"/>
+                <a:cs typeface="Calibri" pitchFamily="34" charset="-120"/>
+              </a:rPr>
+              <a:t>$0.09</a:t>
+            </a:r>
+            <a:endParaRPr lang="en-US" sz="4000" dirty="0"/>
+          </a:p>
+        </p:txBody>
+      </p:sp>
+      <p:sp>
+        <p:nvSpPr>
+          <p:cNvPr id="6" name="Text 4"/>
+          <p:cNvSpPr txBox="1"/>
+          <p:nvPr/>
+        </p:nvSpPr>
+        <p:spPr>
+          <a:xfrm>
+            <a:off x="822960" y="2560320"/>
+            <a:ext cx="3017520" cy="365760"/>
+          </a:xfrm>
+          <a:prstGeom prst="rect">
+            <a:avLst/>
+          </a:prstGeom>
+          <a:noFill/>
+          <a:ln/>
+        </p:spPr>
+        <p:txBody>
+          <a:bodyPr wrap="square" lIns="0" tIns="0" rIns="0" bIns="0" rtlCol="0" anchor="ctr"/>
+          <a:lstStyle/>
+          <a:p>
+            <a:pPr indent="0" marL="0">
+              <a:buNone/>
+            </a:pPr>
+            <a:r>
+              <a:rPr lang="en-US" sz="1500" b="1" dirty="0">
                 <a:solidFill>
                   <a:srgbClr val="171721"/>
                 </a:solidFill>
@@ -6338,22 +6955,95 @@
                 <a:ea typeface="Calibri" pitchFamily="34" charset="-122"/>
                 <a:cs typeface="Calibri" pitchFamily="34" charset="-120"/>
               </a:rPr>
-              <a:t>Roadmap (not in the demo)</a:t>
-            </a:r>
-            <a:endParaRPr lang="en-US" sz="1800" dirty="0"/>
-          </a:p>
-        </p:txBody>
-      </p:sp>
-      <p:sp>
-        <p:nvSpPr>
-          <p:cNvPr id="22" name="Text 20"/>
-          <p:cNvSpPr txBox="1"/>
-          <p:nvPr/>
-        </p:nvSpPr>
-        <p:spPr>
-          <a:xfrm>
-            <a:off x="6858000" y="2240280"/>
-            <a:ext cx="4526280" cy="292608"/>
+              <a:t>all AI agent calls</a:t>
+            </a:r>
+            <a:endParaRPr lang="en-US" sz="1500" dirty="0"/>
+          </a:p>
+        </p:txBody>
+      </p:sp>
+      <p:sp>
+        <p:nvSpPr>
+          <p:cNvPr id="7" name="Text 5"/>
+          <p:cNvSpPr txBox="1"/>
+          <p:nvPr/>
+        </p:nvSpPr>
+        <p:spPr>
+          <a:xfrm>
+            <a:off x="822960" y="2971800"/>
+            <a:ext cx="3017520" cy="868680"/>
+          </a:xfrm>
+          <a:prstGeom prst="rect">
+            <a:avLst/>
+          </a:prstGeom>
+          <a:noFill/>
+          <a:ln/>
+        </p:spPr>
+        <p:txBody>
+          <a:bodyPr wrap="square" lIns="0" tIns="0" rIns="0" bIns="0" rtlCol="0" anchor="t"/>
+          <a:lstStyle/>
+          <a:p>
+            <a:pPr indent="0" marL="0">
+              <a:buNone/>
+            </a:pPr>
+            <a:r>
+              <a:rPr lang="en-US" sz="1150" dirty="0">
+                <a:solidFill>
+                  <a:srgbClr val="5B6B7F"/>
+                </a:solidFill>
+                <a:latin typeface="Calibri" pitchFamily="34" charset="0"/>
+                <a:ea typeface="Calibri" pitchFamily="34" charset="-122"/>
+                <a:cs typeface="Calibri" pitchFamily="34" charset="-120"/>
+              </a:rPr>
+              <a:t>every Foundry agent run across 2 days of building and 9 drills: $0.087 (Azure Cost Management) [12]</a:t>
+            </a:r>
+            <a:endParaRPr lang="en-US" sz="1150" dirty="0"/>
+          </a:p>
+        </p:txBody>
+      </p:sp>
+      <p:sp>
+        <p:nvSpPr>
+          <p:cNvPr id="8" name="Shape 6"/>
+          <p:cNvSpPr/>
+          <p:nvPr/>
+        </p:nvSpPr>
+        <p:spPr>
+          <a:xfrm>
+            <a:off x="4297680" y="1600200"/>
+            <a:ext cx="3520440" cy="2331720"/>
+          </a:xfrm>
+          <a:prstGeom prst="roundRect">
+            <a:avLst>
+              <a:gd name="adj" fmla="val 3137"/>
+            </a:avLst>
+          </a:prstGeom>
+          <a:solidFill>
+            <a:srgbClr val="F1F5F9"/>
+          </a:solidFill>
+          <a:ln w="12700">
+            <a:solidFill>
+              <a:srgbClr val="F1F5F9"/>
+            </a:solidFill>
+            <a:prstDash val="solid"/>
+          </a:ln>
+          <a:effectLst>
+            <a:outerShdw sx="100000" sy="100000" kx="0" ky="0" algn="bl" rotWithShape="0" blurRad="76200" dist="25400" dir="5400000">
+              <a:srgbClr val="000000">
+                <a:alpha val="12000"/>
+              </a:srgbClr>
+            </a:outerShdw>
+          </a:effectLst>
+        </p:spPr>
+      </p:sp>
+      <p:sp>
+        <p:nvSpPr>
+          <p:cNvPr id="9" name="Text 7"/>
+          <p:cNvSpPr txBox="1"/>
+          <p:nvPr/>
+        </p:nvSpPr>
+        <p:spPr>
+          <a:xfrm>
+            <a:off x="4572000" y="1783080"/>
+            <a:ext cx="3017520" cy="777240"/>
           </a:xfrm>
           <a:prstGeom prst="rect">
             <a:avLst/>
@@ -6369,7 +7059,46 @@
               <a:buNone/>
             </a:pPr>
             <a:r>
-              <a:rPr lang="en-US" sz="1350" b="1" dirty="0">
+              <a:rPr lang="en-US" sz="4000" b="1" dirty="0">
+                <a:solidFill>
+                  <a:srgbClr val="5E2CFE"/>
+                </a:solidFill>
+                <a:latin typeface="Calibri" pitchFamily="34" charset="0"/>
+                <a:ea typeface="Calibri" pitchFamily="34" charset="-122"/>
+                <a:cs typeface="Calibri" pitchFamily="34" charset="-120"/>
+              </a:rPr>
+              <a:t>$2.44</a:t>
+            </a:r>
+            <a:endParaRPr lang="en-US" sz="4000" dirty="0"/>
+          </a:p>
+        </p:txBody>
+      </p:sp>
+      <p:sp>
+        <p:nvSpPr>
+          <p:cNvPr id="10" name="Text 8"/>
+          <p:cNvSpPr txBox="1"/>
+          <p:nvPr/>
+        </p:nvSpPr>
+        <p:spPr>
+          <a:xfrm>
+            <a:off x="4572000" y="2560320"/>
+            <a:ext cx="3017520" cy="365760"/>
+          </a:xfrm>
+          <a:prstGeom prst="rect">
+            <a:avLst/>
+          </a:prstGeom>
+          <a:noFill/>
+          <a:ln/>
+        </p:spPr>
+        <p:txBody>
+          <a:bodyPr wrap="square" lIns="0" tIns="0" rIns="0" bIns="0" rtlCol="0" anchor="ctr"/>
+          <a:lstStyle/>
+          <a:p>
+            <a:pPr indent="0" marL="0">
+              <a:buNone/>
+            </a:pPr>
+            <a:r>
+              <a:rPr lang="en-US" sz="1500" b="1" dirty="0">
                 <a:solidFill>
                   <a:srgbClr val="171721"/>
                 </a:solidFill>
@@ -6377,22 +7106,95 @@
                 <a:ea typeface="Calibri" pitchFamily="34" charset="-122"/>
                 <a:cs typeface="Calibri" pitchFamily="34" charset="-120"/>
               </a:rPr>
-              <a:t>Scheduled drills</a:t>
-            </a:r>
-            <a:endParaRPr lang="en-US" sz="1350" dirty="0"/>
-          </a:p>
-        </p:txBody>
-      </p:sp>
-      <p:sp>
-        <p:nvSpPr>
-          <p:cNvPr id="23" name="Text 21"/>
-          <p:cNvSpPr txBox="1"/>
-          <p:nvPr/>
-        </p:nvSpPr>
-        <p:spPr>
-          <a:xfrm>
-            <a:off x="6858000" y="2532888"/>
-            <a:ext cx="4526280" cy="365760"/>
+              <a:t>entire environment so far</a:t>
+            </a:r>
+            <a:endParaRPr lang="en-US" sz="1500" dirty="0"/>
+          </a:p>
+        </p:txBody>
+      </p:sp>
+      <p:sp>
+        <p:nvSpPr>
+          <p:cNvPr id="11" name="Text 9"/>
+          <p:cNvSpPr txBox="1"/>
+          <p:nvPr/>
+        </p:nvSpPr>
+        <p:spPr>
+          <a:xfrm>
+            <a:off x="4572000" y="2971800"/>
+            <a:ext cx="3017520" cy="868680"/>
+          </a:xfrm>
+          <a:prstGeom prst="rect">
+            <a:avLst/>
+          </a:prstGeom>
+          <a:noFill/>
+          <a:ln/>
+        </p:spPr>
+        <p:txBody>
+          <a:bodyPr wrap="square" lIns="0" tIns="0" rIns="0" bIns="0" rtlCol="0" anchor="t"/>
+          <a:lstStyle/>
+          <a:p>
+            <a:pPr indent="0" marL="0">
+              <a:buNone/>
+            </a:pPr>
+            <a:r>
+              <a:rPr lang="en-US" sz="1150" dirty="0">
+                <a:solidFill>
+                  <a:srgbClr val="5B6B7F"/>
+                </a:solidFill>
+                <a:latin typeface="Calibri" pitchFamily="34" charset="0"/>
+                <a:ea typeface="Calibri" pitchFamily="34" charset="-122"/>
+                <a:cs typeface="Calibri" pitchFamily="34" charset="-120"/>
+              </a:rPr>
+              <a:t>two regions, database, VM, console, monitoring: everything, 17–18 Oct 2026 (Azure Cost Management) [12]</a:t>
+            </a:r>
+            <a:endParaRPr lang="en-US" sz="1150" dirty="0"/>
+          </a:p>
+        </p:txBody>
+      </p:sp>
+      <p:sp>
+        <p:nvSpPr>
+          <p:cNvPr id="12" name="Shape 10"/>
+          <p:cNvSpPr/>
+          <p:nvPr/>
+        </p:nvSpPr>
+        <p:spPr>
+          <a:xfrm>
+            <a:off x="8046720" y="1600200"/>
+            <a:ext cx="3520440" cy="2331720"/>
+          </a:xfrm>
+          <a:prstGeom prst="roundRect">
+            <a:avLst>
+              <a:gd name="adj" fmla="val 3137"/>
+            </a:avLst>
+          </a:prstGeom>
+          <a:solidFill>
+            <a:srgbClr val="F1F5F9"/>
+          </a:solidFill>
+          <a:ln w="12700">
+            <a:solidFill>
+              <a:srgbClr val="F1F5F9"/>
+            </a:solidFill>
+            <a:prstDash val="solid"/>
+          </a:ln>
+          <a:effectLst>
+            <a:outerShdw sx="100000" sy="100000" kx="0" ky="0" algn="bl" rotWithShape="0" blurRad="76200" dist="25400" dir="5400000">
+              <a:srgbClr val="000000">
+                <a:alpha val="12000"/>
+              </a:srgbClr>
+            </a:outerShdw>
+          </a:effectLst>
+        </p:spPr>
+      </p:sp>
+      <p:sp>
+        <p:nvSpPr>
+          <p:cNvPr id="13" name="Text 11"/>
+          <p:cNvSpPr txBox="1"/>
+          <p:nvPr/>
+        </p:nvSpPr>
+        <p:spPr>
+          <a:xfrm>
+            <a:off x="8321040" y="1783080"/>
+            <a:ext cx="3017520" cy="777240"/>
           </a:xfrm>
           <a:prstGeom prst="rect">
             <a:avLst/>
@@ -6408,7 +7210,218 @@
               <a:buNone/>
             </a:pPr>
             <a:r>
-              <a:rPr lang="en-US" sz="1200" dirty="0">
+              <a:rPr lang="en-US" sz="4000" b="1" dirty="0">
+                <a:solidFill>
+                  <a:srgbClr val="5E2CFE"/>
+                </a:solidFill>
+                <a:latin typeface="Calibri" pitchFamily="34" charset="0"/>
+                <a:ea typeface="Calibri" pitchFamily="34" charset="-122"/>
+                <a:cs typeface="Calibri" pitchFamily="34" charset="-120"/>
+              </a:rPr>
+              <a:t>$38.26</a:t>
+            </a:r>
+            <a:endParaRPr lang="en-US" sz="4000" dirty="0"/>
+          </a:p>
+        </p:txBody>
+      </p:sp>
+      <p:sp>
+        <p:nvSpPr>
+          <p:cNvPr id="14" name="Text 12"/>
+          <p:cNvSpPr txBox="1"/>
+          <p:nvPr/>
+        </p:nvSpPr>
+        <p:spPr>
+          <a:xfrm>
+            <a:off x="8321040" y="2560320"/>
+            <a:ext cx="3017520" cy="365760"/>
+          </a:xfrm>
+          <a:prstGeom prst="rect">
+            <a:avLst/>
+          </a:prstGeom>
+          <a:noFill/>
+          <a:ln/>
+        </p:spPr>
+        <p:txBody>
+          <a:bodyPr wrap="square" lIns="0" tIns="0" rIns="0" bIns="0" rtlCol="0" anchor="ctr"/>
+          <a:lstStyle/>
+          <a:p>
+            <a:pPr indent="0" marL="0">
+              <a:buNone/>
+            </a:pPr>
+            <a:r>
+              <a:rPr lang="en-US" sz="1500" b="1" dirty="0">
+                <a:solidFill>
+                  <a:srgbClr val="171721"/>
+                </a:solidFill>
+                <a:latin typeface="Calibri" pitchFamily="34" charset="0"/>
+                <a:ea typeface="Calibri" pitchFamily="34" charset="-122"/>
+                <a:cs typeface="Calibri" pitchFamily="34" charset="-120"/>
+              </a:rPr>
+              <a:t>per month for the PaaS DR pair</a:t>
+            </a:r>
+            <a:endParaRPr lang="en-US" sz="1500" dirty="0"/>
+          </a:p>
+        </p:txBody>
+      </p:sp>
+      <p:sp>
+        <p:nvSpPr>
+          <p:cNvPr id="15" name="Text 13"/>
+          <p:cNvSpPr txBox="1"/>
+          <p:nvPr/>
+        </p:nvSpPr>
+        <p:spPr>
+          <a:xfrm>
+            <a:off x="8321040" y="2971800"/>
+            <a:ext cx="3017520" cy="868680"/>
+          </a:xfrm>
+          <a:prstGeom prst="rect">
+            <a:avLst/>
+          </a:prstGeom>
+          <a:noFill/>
+          <a:ln/>
+        </p:spPr>
+        <p:txBody>
+          <a:bodyPr wrap="square" lIns="0" tIns="0" rIns="0" bIns="0" rtlCol="0" anchor="t"/>
+          <a:lstStyle/>
+          <a:p>
+            <a:pPr indent="0" marL="0">
+              <a:buNone/>
+            </a:pPr>
+            <a:r>
+              <a:rPr lang="en-US" sz="1150" dirty="0">
+                <a:solidFill>
+                  <a:srgbClr val="5B6B7F"/>
+                </a:solidFill>
+                <a:latin typeface="Calibri" pitchFamily="34" charset="0"/>
+                <a:ea typeface="Calibri" pitchFamily="34" charset="-122"/>
+                <a:cs typeface="Calibri" pitchFamily="34" charset="-120"/>
+              </a:rPr>
+              <a:t>2× App Service B1, 2× SQL Basic, Traffic Manager at Azure list prices (Retail Prices API) [13]</a:t>
+            </a:r>
+            <a:endParaRPr lang="en-US" sz="1150" dirty="0"/>
+          </a:p>
+        </p:txBody>
+      </p:sp>
+      <p:sp>
+        <p:nvSpPr>
+          <p:cNvPr id="16" name="Shape 14"/>
+          <p:cNvSpPr/>
+          <p:nvPr/>
+        </p:nvSpPr>
+        <p:spPr>
+          <a:xfrm>
+            <a:off x="548640" y="4160520"/>
+            <a:ext cx="11064240" cy="1051560"/>
+          </a:xfrm>
+          <a:prstGeom prst="roundRect">
+            <a:avLst>
+              <a:gd name="adj" fmla="val 6957"/>
+            </a:avLst>
+          </a:prstGeom>
+          <a:solidFill>
+            <a:srgbClr val="171721"/>
+          </a:solidFill>
+          <a:ln w="12700">
+            <a:solidFill>
+              <a:srgbClr val="171721"/>
+            </a:solidFill>
+            <a:prstDash val="solid"/>
+          </a:ln>
+        </p:spPr>
+      </p:sp>
+      <p:sp>
+        <p:nvSpPr>
+          <p:cNvPr id="17" name="Text 15"/>
+          <p:cNvSpPr txBox="1"/>
+          <p:nvPr/>
+        </p:nvSpPr>
+        <p:spPr>
+          <a:xfrm>
+            <a:off x="777240" y="4160520"/>
+            <a:ext cx="10607040" cy="1051560"/>
+          </a:xfrm>
+          <a:prstGeom prst="rect">
+            <a:avLst/>
+          </a:prstGeom>
+          <a:noFill/>
+          <a:ln/>
+        </p:spPr>
+        <p:txBody>
+          <a:bodyPr wrap="square" lIns="0" tIns="0" rIns="0" bIns="0" rtlCol="0" anchor="ctr"/>
+          <a:lstStyle/>
+          <a:p>
+            <a:pPr indent="0" marL="0">
+              <a:buNone/>
+            </a:pPr>
+            <a:r>
+              <a:rPr lang="en-US" sz="1600" b="1" dirty="0">
+                <a:solidFill>
+                  <a:srgbClr val="FFFFFF"/>
+                </a:solidFill>
+                <a:latin typeface="Calibri" pitchFamily="34" charset="0"/>
+                <a:ea typeface="Calibri" pitchFamily="34" charset="-122"/>
+                <a:cs typeface="Calibri" pitchFamily="34" charset="-120"/>
+              </a:rPr>
+              <a:t>A month of this DR set-up costs less than a fifth of a second of downtime </a:t>
+            </a:r>
+            <a:pPr indent="0" marL="0">
+              <a:buNone/>
+            </a:pPr>
+            <a:r>
+              <a:rPr lang="en-US" sz="1600" dirty="0">
+                <a:solidFill>
+                  <a:srgbClr val="C9C3E6"/>
+                </a:solidFill>
+                <a:latin typeface="Calibri" pitchFamily="34" charset="0"/>
+                <a:ea typeface="Calibri" pitchFamily="34" charset="-122"/>
+                <a:cs typeface="Calibri" pitchFamily="34" charset="-120"/>
+              </a:rPr>
+              <a:t>at the 2026 average of $15,000 a minute ($38.26 ÷ $250 per second = 0.15 s). [1][13]</a:t>
+            </a:r>
+            <a:endParaRPr lang="en-US" sz="1600" dirty="0"/>
+          </a:p>
+        </p:txBody>
+      </p:sp>
+      <p:sp>
+        <p:nvSpPr>
+          <p:cNvPr id="18" name="Text 16"/>
+          <p:cNvSpPr txBox="1"/>
+          <p:nvPr/>
+        </p:nvSpPr>
+        <p:spPr>
+          <a:xfrm>
+            <a:off x="548640" y="5440680"/>
+            <a:ext cx="11064240" cy="822960"/>
+          </a:xfrm>
+          <a:prstGeom prst="rect">
+            <a:avLst/>
+          </a:prstGeom>
+          <a:noFill/>
+          <a:ln/>
+        </p:spPr>
+        <p:txBody>
+          <a:bodyPr wrap="square" lIns="0" tIns="0" rIns="0" bIns="0" rtlCol="0" anchor="t"/>
+          <a:lstStyle/>
+          <a:p>
+            <a:pPr indent="0" marL="0">
+              <a:buNone/>
+            </a:pPr>
+            <a:r>
+              <a:rPr lang="en-US" sz="1300" b="1" dirty="0">
+                <a:solidFill>
+                  <a:srgbClr val="171721"/>
+                </a:solidFill>
+                <a:latin typeface="Calibri" pitchFamily="34" charset="0"/>
+                <a:ea typeface="Calibri" pitchFamily="34" charset="-122"/>
+                <a:cs typeface="Calibri" pitchFamily="34" charset="-120"/>
+              </a:rPr>
+              <a:t>Cost-aware by design: </a:t>
+            </a:r>
+            <a:pPr indent="0" marL="0">
+              <a:buNone/>
+            </a:pPr>
+            <a:r>
+              <a:rPr lang="en-US" sz="1300" dirty="0">
                 <a:solidFill>
                   <a:srgbClr val="1B2635"/>
                 </a:solidFill>
@@ -6416,327 +7429,15 @@
                 <a:ea typeface="Calibri" pitchFamily="34" charset="-122"/>
                 <a:cs typeface="Calibri" pitchFamily="34" charset="-120"/>
               </a:rPr>
-              <a:t>on a set cadence (e.g. quarterly, as SEBI asks) and after every infrastructure change</a:t>
-            </a:r>
-            <a:endParaRPr lang="en-US" sz="1200" dirty="0"/>
-          </a:p>
-        </p:txBody>
-      </p:sp>
-      <p:sp>
-        <p:nvSpPr>
-          <p:cNvPr id="24" name="Text 22"/>
-          <p:cNvSpPr txBox="1"/>
-          <p:nvPr/>
-        </p:nvSpPr>
-        <p:spPr>
-          <a:xfrm>
-            <a:off x="6858000" y="3017520"/>
-            <a:ext cx="4526280" cy="292608"/>
-          </a:xfrm>
-          <a:prstGeom prst="rect">
-            <a:avLst/>
-          </a:prstGeom>
-          <a:noFill/>
-          <a:ln/>
-        </p:spPr>
-        <p:txBody>
-          <a:bodyPr wrap="square" lIns="0" tIns="0" rIns="0" bIns="0" rtlCol="0" anchor="ctr"/>
-          <a:lstStyle/>
-          <a:p>
-            <a:pPr indent="0" marL="0">
-              <a:buNone/>
-            </a:pPr>
-            <a:r>
-              <a:rPr lang="en-US" sz="1350" b="1" dirty="0">
-                <a:solidFill>
-                  <a:srgbClr val="171721"/>
-                </a:solidFill>
-                <a:latin typeface="Calibri" pitchFamily="34" charset="0"/>
-                <a:ea typeface="Calibri" pitchFamily="34" charset="-122"/>
-                <a:cs typeface="Calibri" pitchFamily="34" charset="-120"/>
-              </a:rPr>
-              <a:t>More services</a:t>
-            </a:r>
-            <a:endParaRPr lang="en-US" sz="1350" dirty="0"/>
-          </a:p>
-        </p:txBody>
-      </p:sp>
-      <p:sp>
-        <p:nvSpPr>
-          <p:cNvPr id="25" name="Text 23"/>
-          <p:cNvSpPr txBox="1"/>
-          <p:nvPr/>
-        </p:nvSpPr>
-        <p:spPr>
-          <a:xfrm>
-            <a:off x="6858000" y="3310128"/>
-            <a:ext cx="4526280" cy="365760"/>
-          </a:xfrm>
-          <a:prstGeom prst="rect">
-            <a:avLst/>
-          </a:prstGeom>
-          <a:noFill/>
-          <a:ln/>
-        </p:spPr>
-        <p:txBody>
-          <a:bodyPr wrap="square" lIns="0" tIns="0" rIns="0" bIns="0" rtlCol="0" anchor="ctr"/>
-          <a:lstStyle/>
-          <a:p>
-            <a:pPr indent="0" marL="0">
-              <a:buNone/>
-            </a:pPr>
-            <a:r>
-              <a:rPr lang="en-US" sz="1200" dirty="0">
-                <a:solidFill>
-                  <a:srgbClr val="1B2635"/>
-                </a:solidFill>
-                <a:latin typeface="Calibri" pitchFamily="34" charset="0"/>
-                <a:ea typeface="Calibri" pitchFamily="34" charset="-122"/>
-                <a:cs typeface="Calibri" pitchFamily="34" charset="-120"/>
-              </a:rPr>
-              <a:t>AKS, Cosmos DB, Storage, Service Bus as new allowlisted actions</a:t>
-            </a:r>
-            <a:endParaRPr lang="en-US" sz="1200" dirty="0"/>
-          </a:p>
-        </p:txBody>
-      </p:sp>
-      <p:sp>
-        <p:nvSpPr>
-          <p:cNvPr id="26" name="Text 24"/>
-          <p:cNvSpPr txBox="1"/>
-          <p:nvPr/>
-        </p:nvSpPr>
-        <p:spPr>
-          <a:xfrm>
-            <a:off x="6858000" y="3794760"/>
-            <a:ext cx="4526280" cy="292608"/>
-          </a:xfrm>
-          <a:prstGeom prst="rect">
-            <a:avLst/>
-          </a:prstGeom>
-          <a:noFill/>
-          <a:ln/>
-        </p:spPr>
-        <p:txBody>
-          <a:bodyPr wrap="square" lIns="0" tIns="0" rIns="0" bIns="0" rtlCol="0" anchor="ctr"/>
-          <a:lstStyle/>
-          <a:p>
-            <a:pPr indent="0" marL="0">
-              <a:buNone/>
-            </a:pPr>
-            <a:r>
-              <a:rPr lang="en-US" sz="1350" b="1" dirty="0">
-                <a:solidFill>
-                  <a:srgbClr val="171721"/>
-                </a:solidFill>
-                <a:latin typeface="Calibri" pitchFamily="34" charset="0"/>
-                <a:ea typeface="Calibri" pitchFamily="34" charset="-122"/>
-                <a:cs typeface="Calibri" pitchFamily="34" charset="-120"/>
-              </a:rPr>
-              <a:t>Azure Chaos Studio</a:t>
-            </a:r>
-            <a:endParaRPr lang="en-US" sz="1350" dirty="0"/>
-          </a:p>
-        </p:txBody>
-      </p:sp>
-      <p:sp>
-        <p:nvSpPr>
-          <p:cNvPr id="27" name="Text 25"/>
-          <p:cNvSpPr txBox="1"/>
-          <p:nvPr/>
-        </p:nvSpPr>
-        <p:spPr>
-          <a:xfrm>
-            <a:off x="6858000" y="4087368"/>
-            <a:ext cx="4526280" cy="365760"/>
-          </a:xfrm>
-          <a:prstGeom prst="rect">
-            <a:avLst/>
-          </a:prstGeom>
-          <a:noFill/>
-          <a:ln/>
-        </p:spPr>
-        <p:txBody>
-          <a:bodyPr wrap="square" lIns="0" tIns="0" rIns="0" bIns="0" rtlCol="0" anchor="ctr"/>
-          <a:lstStyle/>
-          <a:p>
-            <a:pPr indent="0" marL="0">
-              <a:buNone/>
-            </a:pPr>
-            <a:r>
-              <a:rPr lang="en-US" sz="1200" dirty="0">
-                <a:solidFill>
-                  <a:srgbClr val="1B2635"/>
-                </a:solidFill>
-                <a:latin typeface="Calibri" pitchFamily="34" charset="0"/>
-                <a:ea typeface="Calibri" pitchFamily="34" charset="-122"/>
-                <a:cs typeface="Calibri" pitchFamily="34" charset="-120"/>
-              </a:rPr>
-              <a:t>standard fault library alongside our own faults</a:t>
-            </a:r>
-            <a:endParaRPr lang="en-US" sz="1200" dirty="0"/>
-          </a:p>
-        </p:txBody>
-      </p:sp>
-      <p:sp>
-        <p:nvSpPr>
-          <p:cNvPr id="28" name="Text 26"/>
-          <p:cNvSpPr txBox="1"/>
-          <p:nvPr/>
-        </p:nvSpPr>
-        <p:spPr>
-          <a:xfrm>
-            <a:off x="6858000" y="4572000"/>
-            <a:ext cx="4526280" cy="292608"/>
-          </a:xfrm>
-          <a:prstGeom prst="rect">
-            <a:avLst/>
-          </a:prstGeom>
-          <a:noFill/>
-          <a:ln/>
-        </p:spPr>
-        <p:txBody>
-          <a:bodyPr wrap="square" lIns="0" tIns="0" rIns="0" bIns="0" rtlCol="0" anchor="ctr"/>
-          <a:lstStyle/>
-          <a:p>
-            <a:pPr indent="0" marL="0">
-              <a:buNone/>
-            </a:pPr>
-            <a:r>
-              <a:rPr lang="en-US" sz="1350" b="1" dirty="0">
-                <a:solidFill>
-                  <a:srgbClr val="171721"/>
-                </a:solidFill>
-                <a:latin typeface="Calibri" pitchFamily="34" charset="0"/>
-                <a:ea typeface="Calibri" pitchFamily="34" charset="-122"/>
-                <a:cs typeface="Calibri" pitchFamily="34" charset="-120"/>
-              </a:rPr>
-              <a:t>Approvals where teams work</a:t>
-            </a:r>
-            <a:endParaRPr lang="en-US" sz="1350" dirty="0"/>
-          </a:p>
-        </p:txBody>
-      </p:sp>
-      <p:sp>
-        <p:nvSpPr>
-          <p:cNvPr id="29" name="Text 27"/>
-          <p:cNvSpPr txBox="1"/>
-          <p:nvPr/>
-        </p:nvSpPr>
-        <p:spPr>
-          <a:xfrm>
-            <a:off x="6858000" y="4864608"/>
-            <a:ext cx="4526280" cy="365760"/>
-          </a:xfrm>
-          <a:prstGeom prst="rect">
-            <a:avLst/>
-          </a:prstGeom>
-          <a:noFill/>
-          <a:ln/>
-        </p:spPr>
-        <p:txBody>
-          <a:bodyPr wrap="square" lIns="0" tIns="0" rIns="0" bIns="0" rtlCol="0" anchor="ctr"/>
-          <a:lstStyle/>
-          <a:p>
-            <a:pPr indent="0" marL="0">
-              <a:buNone/>
-            </a:pPr>
-            <a:r>
-              <a:rPr lang="en-US" sz="1200" dirty="0">
-                <a:solidFill>
-                  <a:srgbClr val="1B2635"/>
-                </a:solidFill>
-                <a:latin typeface="Calibri" pitchFamily="34" charset="0"/>
-                <a:ea typeface="Calibri" pitchFamily="34" charset="-122"/>
-                <a:cs typeface="Calibri" pitchFamily="34" charset="-120"/>
-              </a:rPr>
-              <a:t>Microsoft Teams approval cards</a:t>
-            </a:r>
-            <a:endParaRPr lang="en-US" sz="1200" dirty="0"/>
-          </a:p>
-        </p:txBody>
-      </p:sp>
-      <p:sp>
-        <p:nvSpPr>
-          <p:cNvPr id="30" name="Text 28"/>
-          <p:cNvSpPr txBox="1"/>
-          <p:nvPr/>
-        </p:nvSpPr>
-        <p:spPr>
-          <a:xfrm>
-            <a:off x="6858000" y="5349240"/>
-            <a:ext cx="4526280" cy="292608"/>
-          </a:xfrm>
-          <a:prstGeom prst="rect">
-            <a:avLst/>
-          </a:prstGeom>
-          <a:noFill/>
-          <a:ln/>
-        </p:spPr>
-        <p:txBody>
-          <a:bodyPr wrap="square" lIns="0" tIns="0" rIns="0" bIns="0" rtlCol="0" anchor="ctr"/>
-          <a:lstStyle/>
-          <a:p>
-            <a:pPr indent="0" marL="0">
-              <a:buNone/>
-            </a:pPr>
-            <a:r>
-              <a:rPr lang="en-US" sz="1350" b="1" dirty="0">
-                <a:solidFill>
-                  <a:srgbClr val="171721"/>
-                </a:solidFill>
-                <a:latin typeface="Calibri" pitchFamily="34" charset="0"/>
-                <a:ea typeface="Calibri" pitchFamily="34" charset="-122"/>
-                <a:cs typeface="Calibri" pitchFamily="34" charset="-120"/>
-              </a:rPr>
-              <a:t>Portfolio view</a:t>
-            </a:r>
-            <a:endParaRPr lang="en-US" sz="1350" dirty="0"/>
-          </a:p>
-        </p:txBody>
-      </p:sp>
-      <p:sp>
-        <p:nvSpPr>
-          <p:cNvPr id="31" name="Text 29"/>
-          <p:cNvSpPr txBox="1"/>
-          <p:nvPr/>
-        </p:nvSpPr>
-        <p:spPr>
-          <a:xfrm>
-            <a:off x="6858000" y="5641848"/>
-            <a:ext cx="4526280" cy="365760"/>
-          </a:xfrm>
-          <a:prstGeom prst="rect">
-            <a:avLst/>
-          </a:prstGeom>
-          <a:noFill/>
-          <a:ln/>
-        </p:spPr>
-        <p:txBody>
-          <a:bodyPr wrap="square" lIns="0" tIns="0" rIns="0" bIns="0" rtlCol="0" anchor="ctr"/>
-          <a:lstStyle/>
-          <a:p>
-            <a:pPr indent="0" marL="0">
-              <a:buNone/>
-            </a:pPr>
-            <a:r>
-              <a:rPr lang="en-US" sz="1200" dirty="0">
-                <a:solidFill>
-                  <a:srgbClr val="1B2635"/>
-                </a:solidFill>
-                <a:latin typeface="Calibri" pitchFamily="34" charset="0"/>
-                <a:ea typeface="Calibri" pitchFamily="34" charset="-122"/>
-                <a:cs typeface="Calibri" pitchFamily="34" charset="-120"/>
-              </a:rPr>
-              <a:t>resilience score across many applications</a:t>
-            </a:r>
-            <a:endParaRPr lang="en-US" sz="1200" dirty="0"/>
-          </a:p>
-        </p:txBody>
-      </p:sp>
-      <p:sp>
-        <p:nvSpPr>
-          <p:cNvPr id="32" name="Text 30"/>
+              <a:t>the Architect prices every strategy from live Azure list prices and flags anything over budget; the whole environment is created and removed with one command (up.sh / down.sh). For demo week only, App Service Premium P0v3 + SQL S1 (about $6.75 a day), reverted with demo-tier.sh down.</a:t>
+            </a:r>
+            <a:endParaRPr lang="en-US" sz="1300" dirty="0"/>
+          </a:p>
+        </p:txBody>
+      </p:sp>
+      <p:sp>
+        <p:nvSpPr>
+          <p:cNvPr id="19" name="Text 17"/>
           <p:cNvSpPr txBox="1"/>
           <p:nvPr/>
         </p:nvSpPr>
@@ -6838,7 +7539,7 @@
                 <a:ea typeface="Calibri" pitchFamily="34" charset="-122"/>
                 <a:cs typeface="Calibri" pitchFamily="34" charset="-120"/>
               </a:rPr>
-              <a:t>Sources</a:t>
+              <a:t>Live demo, and where it goes next</a:t>
             </a:r>
             <a:endParaRPr lang="en-US" sz="3200" dirty="0"/>
           </a:p>
@@ -6877,7 +7578,7 @@
                 <a:ea typeface="Calibri" pitchFamily="34" charset="-122"/>
                 <a:cs typeface="Calibri" pitchFamily="34" charset="-120"/>
               </a:rPr>
-              <a:t>Every figure in this deck is taken from the source below. Our own figures come from live drills on Azure.</a:t>
+              <a:t>What you will see in the next minutes, on your own phone.</a:t>
             </a:r>
             <a:endParaRPr lang="en-US" sz="1500" dirty="0"/>
           </a:p>
@@ -6891,27 +7592,127 @@
         </p:nvSpPr>
         <p:spPr>
           <a:xfrm>
-            <a:off x="548640" y="1508760"/>
-            <a:ext cx="11064240" cy="4846320"/>
-          </a:xfrm>
-          <a:prstGeom prst="rect">
-            <a:avLst/>
-          </a:prstGeom>
-          <a:noFill/>
-          <a:ln/>
-        </p:spPr>
-        <p:txBody>
-          <a:bodyPr wrap="square" lIns="0" tIns="0" rIns="0" bIns="0" rtlCol="0" anchor="t"/>
-          <a:lstStyle/>
-          <a:p>
-            <a:pPr indent="0" marL="0">
-              <a:spcAft>
-                <a:spcPts val="500"/>
-              </a:spcAft>
-              <a:buNone/>
-            </a:pPr>
-            <a:r>
-              <a:rPr lang="en-US" sz="1050" dirty="0">
+            <a:off x="548640" y="1554480"/>
+            <a:ext cx="5486400" cy="365760"/>
+          </a:xfrm>
+          <a:prstGeom prst="rect">
+            <a:avLst/>
+          </a:prstGeom>
+          <a:noFill/>
+          <a:ln/>
+        </p:spPr>
+        <p:txBody>
+          <a:bodyPr wrap="square" lIns="0" tIns="0" rIns="0" bIns="0" rtlCol="0" anchor="ctr"/>
+          <a:lstStyle/>
+          <a:p>
+            <a:pPr indent="0" marL="0">
+              <a:buNone/>
+            </a:pPr>
+            <a:r>
+              <a:rPr lang="en-US" sz="1800" b="1" dirty="0">
+                <a:solidFill>
+                  <a:srgbClr val="171721"/>
+                </a:solidFill>
+                <a:latin typeface="Calibri" pitchFamily="34" charset="0"/>
+                <a:ea typeface="Calibri" pitchFamily="34" charset="-122"/>
+                <a:cs typeface="Calibri" pitchFamily="34" charset="-120"/>
+              </a:rPr>
+              <a:t>The demo</a:t>
+            </a:r>
+            <a:endParaRPr lang="en-US" sz="1800" dirty="0"/>
+          </a:p>
+        </p:txBody>
+      </p:sp>
+      <p:sp>
+        <p:nvSpPr>
+          <p:cNvPr id="5" name="Shape 3"/>
+          <p:cNvSpPr/>
+          <p:nvPr/>
+        </p:nvSpPr>
+        <p:spPr>
+          <a:xfrm>
+            <a:off x="548640" y="2057400"/>
+            <a:ext cx="411480" cy="411480"/>
+          </a:xfrm>
+          <a:prstGeom prst="ellipse">
+            <a:avLst/>
+          </a:prstGeom>
+          <a:solidFill>
+            <a:srgbClr val="5E2CFE"/>
+          </a:solidFill>
+          <a:ln w="12700">
+            <a:solidFill>
+              <a:srgbClr val="5E2CFE"/>
+            </a:solidFill>
+            <a:prstDash val="solid"/>
+          </a:ln>
+        </p:spPr>
+      </p:sp>
+      <p:sp>
+        <p:nvSpPr>
+          <p:cNvPr id="6" name="Text 4"/>
+          <p:cNvSpPr txBox="1"/>
+          <p:nvPr/>
+        </p:nvSpPr>
+        <p:spPr>
+          <a:xfrm>
+            <a:off x="548640" y="2057400"/>
+            <a:ext cx="411480" cy="411480"/>
+          </a:xfrm>
+          <a:prstGeom prst="rect">
+            <a:avLst/>
+          </a:prstGeom>
+          <a:noFill/>
+          <a:ln/>
+        </p:spPr>
+        <p:txBody>
+          <a:bodyPr wrap="square" lIns="0" tIns="0" rIns="0" bIns="0" rtlCol="0" anchor="ctr"/>
+          <a:lstStyle/>
+          <a:p>
+            <a:pPr algn="ctr" indent="0" marL="0">
+              <a:buNone/>
+            </a:pPr>
+            <a:r>
+              <a:rPr lang="en-US" sz="1400" b="1" dirty="0">
+                <a:solidFill>
+                  <a:srgbClr val="FFFFFF"/>
+                </a:solidFill>
+                <a:latin typeface="Calibri" pitchFamily="34" charset="0"/>
+                <a:ea typeface="Calibri" pitchFamily="34" charset="-122"/>
+                <a:cs typeface="Calibri" pitchFamily="34" charset="-120"/>
+              </a:rPr>
+              <a:t>1</a:t>
+            </a:r>
+            <a:endParaRPr lang="en-US" sz="1400" dirty="0"/>
+          </a:p>
+        </p:txBody>
+      </p:sp>
+      <p:sp>
+        <p:nvSpPr>
+          <p:cNvPr id="7" name="Text 5"/>
+          <p:cNvSpPr txBox="1"/>
+          <p:nvPr/>
+        </p:nvSpPr>
+        <p:spPr>
+          <a:xfrm>
+            <a:off x="1097280" y="2011680"/>
+            <a:ext cx="5120640" cy="548640"/>
+          </a:xfrm>
+          <a:prstGeom prst="rect">
+            <a:avLst/>
+          </a:prstGeom>
+          <a:noFill/>
+          <a:ln/>
+        </p:spPr>
+        <p:txBody>
+          <a:bodyPr wrap="square" lIns="0" tIns="0" rIns="0" bIns="0" rtlCol="0" anchor="ctr"/>
+          <a:lstStyle/>
+          <a:p>
+            <a:pPr indent="0" marL="0">
+              <a:buNone/>
+            </a:pPr>
+            <a:r>
+              <a:rPr lang="en-US" sz="1350" dirty="0">
                 <a:solidFill>
                   <a:srgbClr val="1B2635"/>
                 </a:solidFill>
@@ -6919,19 +7720,102 @@
                 <a:ea typeface="Calibri" pitchFamily="34" charset="-122"/>
                 <a:cs typeface="Calibri" pitchFamily="34" charset="-120"/>
               </a:rPr>
-              <a:t>[1] Splunk with Oxford Economics, The Hidden Costs of Downtime 2026, 19 May 2026 (2,000 Global 2000 executives). newsroom.cisco.com (The $600 Billion Wake-up Call)</a:t>
-            </a:r>
-            <a:endParaRPr lang="en-US" sz="1050" dirty="0"/>
-          </a:p>
-          <a:p>
-            <a:pPr indent="0" marL="0">
-              <a:spcAft>
-                <a:spcPts val="500"/>
-              </a:spcAft>
-              <a:buNone/>
-            </a:pPr>
-            <a:r>
-              <a:rPr lang="en-US" sz="1050" dirty="0">
+              <a:t>Scan the QR code: Contoso Payments opens on your phone; make a payment</a:t>
+            </a:r>
+            <a:endParaRPr lang="en-US" sz="1350" dirty="0"/>
+          </a:p>
+        </p:txBody>
+      </p:sp>
+      <p:sp>
+        <p:nvSpPr>
+          <p:cNvPr id="8" name="Shape 6"/>
+          <p:cNvSpPr/>
+          <p:nvPr/>
+        </p:nvSpPr>
+        <p:spPr>
+          <a:xfrm>
+            <a:off x="548640" y="2843784"/>
+            <a:ext cx="411480" cy="411480"/>
+          </a:xfrm>
+          <a:prstGeom prst="ellipse">
+            <a:avLst/>
+          </a:prstGeom>
+          <a:solidFill>
+            <a:srgbClr val="5E2CFE"/>
+          </a:solidFill>
+          <a:ln w="12700">
+            <a:solidFill>
+              <a:srgbClr val="5E2CFE"/>
+            </a:solidFill>
+            <a:prstDash val="solid"/>
+          </a:ln>
+        </p:spPr>
+      </p:sp>
+      <p:sp>
+        <p:nvSpPr>
+          <p:cNvPr id="9" name="Text 7"/>
+          <p:cNvSpPr txBox="1"/>
+          <p:nvPr/>
+        </p:nvSpPr>
+        <p:spPr>
+          <a:xfrm>
+            <a:off x="548640" y="2843784"/>
+            <a:ext cx="411480" cy="411480"/>
+          </a:xfrm>
+          <a:prstGeom prst="rect">
+            <a:avLst/>
+          </a:prstGeom>
+          <a:noFill/>
+          <a:ln/>
+        </p:spPr>
+        <p:txBody>
+          <a:bodyPr wrap="square" lIns="0" tIns="0" rIns="0" bIns="0" rtlCol="0" anchor="ctr"/>
+          <a:lstStyle/>
+          <a:p>
+            <a:pPr algn="ctr" indent="0" marL="0">
+              <a:buNone/>
+            </a:pPr>
+            <a:r>
+              <a:rPr lang="en-US" sz="1400" b="1" dirty="0">
+                <a:solidFill>
+                  <a:srgbClr val="FFFFFF"/>
+                </a:solidFill>
+                <a:latin typeface="Calibri" pitchFamily="34" charset="0"/>
+                <a:ea typeface="Calibri" pitchFamily="34" charset="-122"/>
+                <a:cs typeface="Calibri" pitchFamily="34" charset="-120"/>
+              </a:rPr>
+              <a:t>2</a:t>
+            </a:r>
+            <a:endParaRPr lang="en-US" sz="1400" dirty="0"/>
+          </a:p>
+        </p:txBody>
+      </p:sp>
+      <p:sp>
+        <p:nvSpPr>
+          <p:cNvPr id="10" name="Text 8"/>
+          <p:cNvSpPr txBox="1"/>
+          <p:nvPr/>
+        </p:nvSpPr>
+        <p:spPr>
+          <a:xfrm>
+            <a:off x="1097280" y="2798064"/>
+            <a:ext cx="5120640" cy="548640"/>
+          </a:xfrm>
+          <a:prstGeom prst="rect">
+            <a:avLst/>
+          </a:prstGeom>
+          <a:noFill/>
+          <a:ln/>
+        </p:spPr>
+        <p:txBody>
+          <a:bodyPr wrap="square" lIns="0" tIns="0" rIns="0" bIns="0" rtlCol="0" anchor="ctr"/>
+          <a:lstStyle/>
+          <a:p>
+            <a:pPr indent="0" marL="0">
+              <a:buNone/>
+            </a:pPr>
+            <a:r>
+              <a:rPr lang="en-US" sz="1350" dirty="0">
                 <a:solidFill>
                   <a:srgbClr val="1B2635"/>
                 </a:solidFill>
@@ -6939,19 +7823,102 @@
                 <a:ea typeface="Calibri" pitchFamily="34" charset="-122"/>
                 <a:cs typeface="Calibri" pitchFamily="34" charset="-120"/>
               </a:rPr>
-              <a:t>[2] Uptime Institute, Annual Outage Analysis 2026, press release 13 May 2026. uptimeinstitute.com</a:t>
-            </a:r>
-            <a:endParaRPr lang="en-US" sz="1050" dirty="0"/>
-          </a:p>
-          <a:p>
-            <a:pPr indent="0" marL="0">
-              <a:spcAft>
-                <a:spcPts val="500"/>
-              </a:spcAft>
-              <a:buNone/>
-            </a:pPr>
-            <a:r>
-              <a:rPr lang="en-US" sz="1050" dirty="0">
+              <a:t>Autopilot already found it, unasked: Southeast Asia is missing a setting; the agent shows its tool calls; one approved click fixes it</a:t>
+            </a:r>
+            <a:endParaRPr lang="en-US" sz="1350" dirty="0"/>
+          </a:p>
+        </p:txBody>
+      </p:sp>
+      <p:sp>
+        <p:nvSpPr>
+          <p:cNvPr id="11" name="Shape 9"/>
+          <p:cNvSpPr/>
+          <p:nvPr/>
+        </p:nvSpPr>
+        <p:spPr>
+          <a:xfrm>
+            <a:off x="548640" y="3630168"/>
+            <a:ext cx="411480" cy="411480"/>
+          </a:xfrm>
+          <a:prstGeom prst="ellipse">
+            <a:avLst/>
+          </a:prstGeom>
+          <a:solidFill>
+            <a:srgbClr val="5E2CFE"/>
+          </a:solidFill>
+          <a:ln w="12700">
+            <a:solidFill>
+              <a:srgbClr val="5E2CFE"/>
+            </a:solidFill>
+            <a:prstDash val="solid"/>
+          </a:ln>
+        </p:spPr>
+      </p:sp>
+      <p:sp>
+        <p:nvSpPr>
+          <p:cNvPr id="12" name="Text 10"/>
+          <p:cNvSpPr txBox="1"/>
+          <p:nvPr/>
+        </p:nvSpPr>
+        <p:spPr>
+          <a:xfrm>
+            <a:off x="548640" y="3630168"/>
+            <a:ext cx="411480" cy="411480"/>
+          </a:xfrm>
+          <a:prstGeom prst="rect">
+            <a:avLst/>
+          </a:prstGeom>
+          <a:noFill/>
+          <a:ln/>
+        </p:spPr>
+        <p:txBody>
+          <a:bodyPr wrap="square" lIns="0" tIns="0" rIns="0" bIns="0" rtlCol="0" anchor="ctr"/>
+          <a:lstStyle/>
+          <a:p>
+            <a:pPr algn="ctr" indent="0" marL="0">
+              <a:buNone/>
+            </a:pPr>
+            <a:r>
+              <a:rPr lang="en-US" sz="1400" b="1" dirty="0">
+                <a:solidFill>
+                  <a:srgbClr val="FFFFFF"/>
+                </a:solidFill>
+                <a:latin typeface="Calibri" pitchFamily="34" charset="0"/>
+                <a:ea typeface="Calibri" pitchFamily="34" charset="-122"/>
+                <a:cs typeface="Calibri" pitchFamily="34" charset="-120"/>
+              </a:rPr>
+              <a:t>3</a:t>
+            </a:r>
+            <a:endParaRPr lang="en-US" sz="1400" dirty="0"/>
+          </a:p>
+        </p:txBody>
+      </p:sp>
+      <p:sp>
+        <p:nvSpPr>
+          <p:cNvPr id="13" name="Text 11"/>
+          <p:cNvSpPr txBox="1"/>
+          <p:nvPr/>
+        </p:nvSpPr>
+        <p:spPr>
+          <a:xfrm>
+            <a:off x="1097280" y="3584448"/>
+            <a:ext cx="5120640" cy="548640"/>
+          </a:xfrm>
+          <a:prstGeom prst="rect">
+            <a:avLst/>
+          </a:prstGeom>
+          <a:noFill/>
+          <a:ln/>
+        </p:spPr>
+        <p:txBody>
+          <a:bodyPr wrap="square" lIns="0" tIns="0" rIns="0" bIns="0" rtlCol="0" anchor="ctr"/>
+          <a:lstStyle/>
+          <a:p>
+            <a:pPr indent="0" marL="0">
+              <a:buNone/>
+            </a:pPr>
+            <a:r>
+              <a:rPr lang="en-US" sz="1350" dirty="0">
                 <a:solidFill>
                   <a:srgbClr val="1B2635"/>
                 </a:solidFill>
@@ -6959,19 +7926,102 @@
                 <a:ea typeface="Calibri" pitchFamily="34" charset="-122"/>
                 <a:cs typeface="Calibri" pitchFamily="34" charset="-120"/>
               </a:rPr>
-              <a:t>[3] Parametrix estimate of losses from the AWS us-east-1 outage of 20 Oct 2025 (Insurance Edge, 30 Oct 2025).</a:t>
-            </a:r>
-            <a:endParaRPr lang="en-US" sz="1050" dirty="0"/>
-          </a:p>
-          <a:p>
-            <a:pPr indent="0" marL="0">
-              <a:spcAft>
-                <a:spcPts val="500"/>
-              </a:spcAft>
-              <a:buNone/>
-            </a:pPr>
-            <a:r>
-              <a:rPr lang="en-US" sz="1050" dirty="0">
+              <a:t>The Planner builds the drill; we approve it and start it under payment load (20 writes/s)</a:t>
+            </a:r>
+            <a:endParaRPr lang="en-US" sz="1350" dirty="0"/>
+          </a:p>
+        </p:txBody>
+      </p:sp>
+      <p:sp>
+        <p:nvSpPr>
+          <p:cNvPr id="14" name="Shape 12"/>
+          <p:cNvSpPr/>
+          <p:nvPr/>
+        </p:nvSpPr>
+        <p:spPr>
+          <a:xfrm>
+            <a:off x="548640" y="4416552"/>
+            <a:ext cx="411480" cy="411480"/>
+          </a:xfrm>
+          <a:prstGeom prst="ellipse">
+            <a:avLst/>
+          </a:prstGeom>
+          <a:solidFill>
+            <a:srgbClr val="5E2CFE"/>
+          </a:solidFill>
+          <a:ln w="12700">
+            <a:solidFill>
+              <a:srgbClr val="5E2CFE"/>
+            </a:solidFill>
+            <a:prstDash val="solid"/>
+          </a:ln>
+        </p:spPr>
+      </p:sp>
+      <p:sp>
+        <p:nvSpPr>
+          <p:cNvPr id="15" name="Text 13"/>
+          <p:cNvSpPr txBox="1"/>
+          <p:nvPr/>
+        </p:nvSpPr>
+        <p:spPr>
+          <a:xfrm>
+            <a:off x="548640" y="4416552"/>
+            <a:ext cx="411480" cy="411480"/>
+          </a:xfrm>
+          <a:prstGeom prst="rect">
+            <a:avLst/>
+          </a:prstGeom>
+          <a:noFill/>
+          <a:ln/>
+        </p:spPr>
+        <p:txBody>
+          <a:bodyPr wrap="square" lIns="0" tIns="0" rIns="0" bIns="0" rtlCol="0" anchor="ctr"/>
+          <a:lstStyle/>
+          <a:p>
+            <a:pPr algn="ctr" indent="0" marL="0">
+              <a:buNone/>
+            </a:pPr>
+            <a:r>
+              <a:rPr lang="en-US" sz="1400" b="1" dirty="0">
+                <a:solidFill>
+                  <a:srgbClr val="FFFFFF"/>
+                </a:solidFill>
+                <a:latin typeface="Calibri" pitchFamily="34" charset="0"/>
+                <a:ea typeface="Calibri" pitchFamily="34" charset="-122"/>
+                <a:cs typeface="Calibri" pitchFamily="34" charset="-120"/>
+              </a:rPr>
+              <a:t>4</a:t>
+            </a:r>
+            <a:endParaRPr lang="en-US" sz="1400" dirty="0"/>
+          </a:p>
+        </p:txBody>
+      </p:sp>
+      <p:sp>
+        <p:nvSpPr>
+          <p:cNvPr id="16" name="Text 14"/>
+          <p:cNvSpPr txBox="1"/>
+          <p:nvPr/>
+        </p:nvSpPr>
+        <p:spPr>
+          <a:xfrm>
+            <a:off x="1097280" y="4370832"/>
+            <a:ext cx="5120640" cy="548640"/>
+          </a:xfrm>
+          <a:prstGeom prst="rect">
+            <a:avLst/>
+          </a:prstGeom>
+          <a:noFill/>
+          <a:ln/>
+        </p:spPr>
+        <p:txBody>
+          <a:bodyPr wrap="square" lIns="0" tIns="0" rIns="0" bIns="0" rtlCol="0" anchor="ctr"/>
+          <a:lstStyle/>
+          <a:p>
+            <a:pPr indent="0" marL="0">
+              <a:buNone/>
+            </a:pPr>
+            <a:r>
+              <a:rPr lang="en-US" sz="1350" dirty="0">
                 <a:solidFill>
                   <a:srgbClr val="1B2635"/>
                 </a:solidFill>
@@ -6979,19 +8029,102 @@
                 <a:ea typeface="Calibri" pitchFamily="34" charset="-122"/>
                 <a:cs typeface="Calibri" pitchFamily="34" charset="-120"/>
               </a:rPr>
-              <a:t>[4] RBI order to HDFC Bank, 2 Dec 2020 (Outlook Business, 3 Dec 2020); curbs lifted 17 Aug 2021 (cards) and 11 Mar 2022 (digital) (Business Standard, 12 Mar 2022).</a:t>
-            </a:r>
-            <a:endParaRPr lang="en-US" sz="1050" dirty="0"/>
-          </a:p>
-          <a:p>
-            <a:pPr indent="0" marL="0">
-              <a:spcAft>
-                <a:spcPts val="500"/>
-              </a:spcAft>
-              <a:buNone/>
-            </a:pPr>
-            <a:r>
-              <a:rPr lang="en-US" sz="1050" dirty="0">
+              <a:t>The live map shows traffic and the primary database moving; your phone reconnects to Southeast Asia in about 30–40 s</a:t>
+            </a:r>
+            <a:endParaRPr lang="en-US" sz="1350" dirty="0"/>
+          </a:p>
+        </p:txBody>
+      </p:sp>
+      <p:sp>
+        <p:nvSpPr>
+          <p:cNvPr id="17" name="Shape 15"/>
+          <p:cNvSpPr/>
+          <p:nvPr/>
+        </p:nvSpPr>
+        <p:spPr>
+          <a:xfrm>
+            <a:off x="548640" y="5202936"/>
+            <a:ext cx="411480" cy="411480"/>
+          </a:xfrm>
+          <a:prstGeom prst="ellipse">
+            <a:avLst/>
+          </a:prstGeom>
+          <a:solidFill>
+            <a:srgbClr val="5E2CFE"/>
+          </a:solidFill>
+          <a:ln w="12700">
+            <a:solidFill>
+              <a:srgbClr val="5E2CFE"/>
+            </a:solidFill>
+            <a:prstDash val="solid"/>
+          </a:ln>
+        </p:spPr>
+      </p:sp>
+      <p:sp>
+        <p:nvSpPr>
+          <p:cNvPr id="18" name="Text 16"/>
+          <p:cNvSpPr txBox="1"/>
+          <p:nvPr/>
+        </p:nvSpPr>
+        <p:spPr>
+          <a:xfrm>
+            <a:off x="548640" y="5202936"/>
+            <a:ext cx="411480" cy="411480"/>
+          </a:xfrm>
+          <a:prstGeom prst="rect">
+            <a:avLst/>
+          </a:prstGeom>
+          <a:noFill/>
+          <a:ln/>
+        </p:spPr>
+        <p:txBody>
+          <a:bodyPr wrap="square" lIns="0" tIns="0" rIns="0" bIns="0" rtlCol="0" anchor="ctr"/>
+          <a:lstStyle/>
+          <a:p>
+            <a:pPr algn="ctr" indent="0" marL="0">
+              <a:buNone/>
+            </a:pPr>
+            <a:r>
+              <a:rPr lang="en-US" sz="1400" b="1" dirty="0">
+                <a:solidFill>
+                  <a:srgbClr val="FFFFFF"/>
+                </a:solidFill>
+                <a:latin typeface="Calibri" pitchFamily="34" charset="0"/>
+                <a:ea typeface="Calibri" pitchFamily="34" charset="-122"/>
+                <a:cs typeface="Calibri" pitchFamily="34" charset="-120"/>
+              </a:rPr>
+              <a:t>5</a:t>
+            </a:r>
+            <a:endParaRPr lang="en-US" sz="1400" dirty="0"/>
+          </a:p>
+        </p:txBody>
+      </p:sp>
+      <p:sp>
+        <p:nvSpPr>
+          <p:cNvPr id="19" name="Text 17"/>
+          <p:cNvSpPr txBox="1"/>
+          <p:nvPr/>
+        </p:nvSpPr>
+        <p:spPr>
+          <a:xfrm>
+            <a:off x="1097280" y="5157216"/>
+            <a:ext cx="5120640" cy="548640"/>
+          </a:xfrm>
+          <a:prstGeom prst="rect">
+            <a:avLst/>
+          </a:prstGeom>
+          <a:noFill/>
+          <a:ln/>
+        </p:spPr>
+        <p:txBody>
+          <a:bodyPr wrap="square" lIns="0" tIns="0" rIns="0" bIns="0" rtlCol="0" anchor="ctr"/>
+          <a:lstStyle/>
+          <a:p>
+            <a:pPr indent="0" marL="0">
+              <a:buNone/>
+            </a:pPr>
+            <a:r>
+              <a:rPr lang="en-US" sz="1350" dirty="0">
                 <a:solidFill>
                   <a:srgbClr val="1B2635"/>
                 </a:solidFill>
@@ -6999,19 +8132,143 @@
                 <a:ea typeface="Calibri" pitchFamily="34" charset="-122"/>
                 <a:cs typeface="Calibri" pitchFamily="34" charset="-120"/>
               </a:rPr>
-              <a:t>[5] NSE and NSE Clearing settle the 24 Feb 2021 trading-halt case with SEBI for ₹72.64 crore (Moneylife; Business Standard, Jun 2023); ≈ $8.8M at June 2023 rates of ₹82–83 per US$.</a:t>
-            </a:r>
-            <a:endParaRPr lang="en-US" sz="1050" dirty="0"/>
-          </a:p>
-          <a:p>
-            <a:pPr indent="0" marL="0">
-              <a:spcAft>
-                <a:spcPts val="500"/>
-              </a:spcAft>
-              <a:buNone/>
-            </a:pPr>
-            <a:r>
-              <a:rPr lang="en-US" sz="1050" dirty="0">
+              <a:t>Failback, then the report: RTO, RPO write by write, compared with earlier drills</a:t>
+            </a:r>
+            <a:endParaRPr lang="en-US" sz="1350" dirty="0"/>
+          </a:p>
+        </p:txBody>
+      </p:sp>
+      <p:sp>
+        <p:nvSpPr>
+          <p:cNvPr id="20" name="Shape 18"/>
+          <p:cNvSpPr/>
+          <p:nvPr/>
+        </p:nvSpPr>
+        <p:spPr>
+          <a:xfrm>
+            <a:off x="6583680" y="1554480"/>
+            <a:ext cx="5029200" cy="4709160"/>
+          </a:xfrm>
+          <a:prstGeom prst="roundRect">
+            <a:avLst>
+              <a:gd name="adj" fmla="val 1553"/>
+            </a:avLst>
+          </a:prstGeom>
+          <a:solidFill>
+            <a:srgbClr val="F1F5F9"/>
+          </a:solidFill>
+          <a:ln w="12700">
+            <a:solidFill>
+              <a:srgbClr val="F1F5F9"/>
+            </a:solidFill>
+            <a:prstDash val="solid"/>
+          </a:ln>
+        </p:spPr>
+      </p:sp>
+      <p:sp>
+        <p:nvSpPr>
+          <p:cNvPr id="21" name="Text 19"/>
+          <p:cNvSpPr txBox="1"/>
+          <p:nvPr/>
+        </p:nvSpPr>
+        <p:spPr>
+          <a:xfrm>
+            <a:off x="6858000" y="1737360"/>
+            <a:ext cx="4572000" cy="365760"/>
+          </a:xfrm>
+          <a:prstGeom prst="rect">
+            <a:avLst/>
+          </a:prstGeom>
+          <a:noFill/>
+          <a:ln/>
+        </p:spPr>
+        <p:txBody>
+          <a:bodyPr wrap="square" lIns="0" tIns="0" rIns="0" bIns="0" rtlCol="0" anchor="ctr"/>
+          <a:lstStyle/>
+          <a:p>
+            <a:pPr indent="0" marL="0">
+              <a:buNone/>
+            </a:pPr>
+            <a:r>
+              <a:rPr lang="en-US" sz="1800" b="1" dirty="0">
+                <a:solidFill>
+                  <a:srgbClr val="171721"/>
+                </a:solidFill>
+                <a:latin typeface="Calibri" pitchFamily="34" charset="0"/>
+                <a:ea typeface="Calibri" pitchFamily="34" charset="-122"/>
+                <a:cs typeface="Calibri" pitchFamily="34" charset="-120"/>
+              </a:rPr>
+              <a:t>Roadmap (not in the demo)</a:t>
+            </a:r>
+            <a:endParaRPr lang="en-US" sz="1800" dirty="0"/>
+          </a:p>
+        </p:txBody>
+      </p:sp>
+      <p:sp>
+        <p:nvSpPr>
+          <p:cNvPr id="22" name="Text 20"/>
+          <p:cNvSpPr txBox="1"/>
+          <p:nvPr/>
+        </p:nvSpPr>
+        <p:spPr>
+          <a:xfrm>
+            <a:off x="6858000" y="2240280"/>
+            <a:ext cx="4526280" cy="292608"/>
+          </a:xfrm>
+          <a:prstGeom prst="rect">
+            <a:avLst/>
+          </a:prstGeom>
+          <a:noFill/>
+          <a:ln/>
+        </p:spPr>
+        <p:txBody>
+          <a:bodyPr wrap="square" lIns="0" tIns="0" rIns="0" bIns="0" rtlCol="0" anchor="ctr"/>
+          <a:lstStyle/>
+          <a:p>
+            <a:pPr indent="0" marL="0">
+              <a:buNone/>
+            </a:pPr>
+            <a:r>
+              <a:rPr lang="en-US" sz="1350" b="1" dirty="0">
+                <a:solidFill>
+                  <a:srgbClr val="171721"/>
+                </a:solidFill>
+                <a:latin typeface="Calibri" pitchFamily="34" charset="0"/>
+                <a:ea typeface="Calibri" pitchFamily="34" charset="-122"/>
+                <a:cs typeface="Calibri" pitchFamily="34" charset="-120"/>
+              </a:rPr>
+              <a:t>Scheduled drills</a:t>
+            </a:r>
+            <a:endParaRPr lang="en-US" sz="1350" dirty="0"/>
+          </a:p>
+        </p:txBody>
+      </p:sp>
+      <p:sp>
+        <p:nvSpPr>
+          <p:cNvPr id="23" name="Text 21"/>
+          <p:cNvSpPr txBox="1"/>
+          <p:nvPr/>
+        </p:nvSpPr>
+        <p:spPr>
+          <a:xfrm>
+            <a:off x="6858000" y="2532888"/>
+            <a:ext cx="4526280" cy="365760"/>
+          </a:xfrm>
+          <a:prstGeom prst="rect">
+            <a:avLst/>
+          </a:prstGeom>
+          <a:noFill/>
+          <a:ln/>
+        </p:spPr>
+        <p:txBody>
+          <a:bodyPr wrap="square" lIns="0" tIns="0" rIns="0" bIns="0" rtlCol="0" anchor="ctr"/>
+          <a:lstStyle/>
+          <a:p>
+            <a:pPr indent="0" marL="0">
+              <a:buNone/>
+            </a:pPr>
+            <a:r>
+              <a:rPr lang="en-US" sz="1200" dirty="0">
                 <a:solidFill>
                   <a:srgbClr val="1B2635"/>
                 </a:solidFill>
@@ -7019,19 +8276,77 @@
                 <a:ea typeface="Calibri" pitchFamily="34" charset="-122"/>
                 <a:cs typeface="Calibri" pitchFamily="34" charset="-120"/>
               </a:rPr>
-              <a:t>[6] RBI action on Kotak Mahindra Bank under Sec. 35A, 24 Apr 2024 (TechCrunch); restrictions lifted 12 Feb 2025 (Business Standard).</a:t>
-            </a:r>
-            <a:endParaRPr lang="en-US" sz="1050" dirty="0"/>
-          </a:p>
-          <a:p>
-            <a:pPr indent="0" marL="0">
-              <a:spcAft>
-                <a:spcPts val="500"/>
-              </a:spcAft>
-              <a:buNone/>
-            </a:pPr>
-            <a:r>
-              <a:rPr lang="en-US" sz="1050" dirty="0">
+              <a:t>on a set cadence (e.g. quarterly, as SEBI asks) and after every infrastructure change</a:t>
+            </a:r>
+            <a:endParaRPr lang="en-US" sz="1200" dirty="0"/>
+          </a:p>
+        </p:txBody>
+      </p:sp>
+      <p:sp>
+        <p:nvSpPr>
+          <p:cNvPr id="24" name="Text 22"/>
+          <p:cNvSpPr txBox="1"/>
+          <p:nvPr/>
+        </p:nvSpPr>
+        <p:spPr>
+          <a:xfrm>
+            <a:off x="6858000" y="3017520"/>
+            <a:ext cx="4526280" cy="292608"/>
+          </a:xfrm>
+          <a:prstGeom prst="rect">
+            <a:avLst/>
+          </a:prstGeom>
+          <a:noFill/>
+          <a:ln/>
+        </p:spPr>
+        <p:txBody>
+          <a:bodyPr wrap="square" lIns="0" tIns="0" rIns="0" bIns="0" rtlCol="0" anchor="ctr"/>
+          <a:lstStyle/>
+          <a:p>
+            <a:pPr indent="0" marL="0">
+              <a:buNone/>
+            </a:pPr>
+            <a:r>
+              <a:rPr lang="en-US" sz="1350" b="1" dirty="0">
+                <a:solidFill>
+                  <a:srgbClr val="171721"/>
+                </a:solidFill>
+                <a:latin typeface="Calibri" pitchFamily="34" charset="0"/>
+                <a:ea typeface="Calibri" pitchFamily="34" charset="-122"/>
+                <a:cs typeface="Calibri" pitchFamily="34" charset="-120"/>
+              </a:rPr>
+              <a:t>More services</a:t>
+            </a:r>
+            <a:endParaRPr lang="en-US" sz="1350" dirty="0"/>
+          </a:p>
+        </p:txBody>
+      </p:sp>
+      <p:sp>
+        <p:nvSpPr>
+          <p:cNvPr id="25" name="Text 23"/>
+          <p:cNvSpPr txBox="1"/>
+          <p:nvPr/>
+        </p:nvSpPr>
+        <p:spPr>
+          <a:xfrm>
+            <a:off x="6858000" y="3310128"/>
+            <a:ext cx="4526280" cy="365760"/>
+          </a:xfrm>
+          <a:prstGeom prst="rect">
+            <a:avLst/>
+          </a:prstGeom>
+          <a:noFill/>
+          <a:ln/>
+        </p:spPr>
+        <p:txBody>
+          <a:bodyPr wrap="square" lIns="0" tIns="0" rIns="0" bIns="0" rtlCol="0" anchor="ctr"/>
+          <a:lstStyle/>
+          <a:p>
+            <a:pPr indent="0" marL="0">
+              <a:buNone/>
+            </a:pPr>
+            <a:r>
+              <a:rPr lang="en-US" sz="1200" dirty="0">
                 <a:solidFill>
                   <a:srgbClr val="1B2635"/>
                 </a:solidFill>
@@ -7039,19 +8354,77 @@
                 <a:ea typeface="Calibri" pitchFamily="34" charset="-122"/>
                 <a:cs typeface="Calibri" pitchFamily="34" charset="-120"/>
               </a:rPr>
-              <a:t>[7] RBI, Cybersecurity, Technology: Risk, Resilience and Assurance Framework Directions, 31 Jul 2026, summarised by KPMG India, Sep 2026.</a:t>
-            </a:r>
-            <a:endParaRPr lang="en-US" sz="1050" dirty="0"/>
-          </a:p>
-          <a:p>
-            <a:pPr indent="0" marL="0">
-              <a:spcAft>
-                <a:spcPts val="500"/>
-              </a:spcAft>
-              <a:buNone/>
-            </a:pPr>
-            <a:r>
-              <a:rPr lang="en-US" sz="1050" dirty="0">
+              <a:t>AKS, Cosmos DB, Storage, Service Bus as new allowlisted actions</a:t>
+            </a:r>
+            <a:endParaRPr lang="en-US" sz="1200" dirty="0"/>
+          </a:p>
+        </p:txBody>
+      </p:sp>
+      <p:sp>
+        <p:nvSpPr>
+          <p:cNvPr id="26" name="Text 24"/>
+          <p:cNvSpPr txBox="1"/>
+          <p:nvPr/>
+        </p:nvSpPr>
+        <p:spPr>
+          <a:xfrm>
+            <a:off x="6858000" y="3794760"/>
+            <a:ext cx="4526280" cy="292608"/>
+          </a:xfrm>
+          <a:prstGeom prst="rect">
+            <a:avLst/>
+          </a:prstGeom>
+          <a:noFill/>
+          <a:ln/>
+        </p:spPr>
+        <p:txBody>
+          <a:bodyPr wrap="square" lIns="0" tIns="0" rIns="0" bIns="0" rtlCol="0" anchor="ctr"/>
+          <a:lstStyle/>
+          <a:p>
+            <a:pPr indent="0" marL="0">
+              <a:buNone/>
+            </a:pPr>
+            <a:r>
+              <a:rPr lang="en-US" sz="1350" b="1" dirty="0">
+                <a:solidFill>
+                  <a:srgbClr val="171721"/>
+                </a:solidFill>
+                <a:latin typeface="Calibri" pitchFamily="34" charset="0"/>
+                <a:ea typeface="Calibri" pitchFamily="34" charset="-122"/>
+                <a:cs typeface="Calibri" pitchFamily="34" charset="-120"/>
+              </a:rPr>
+              <a:t>Azure Chaos Studio</a:t>
+            </a:r>
+            <a:endParaRPr lang="en-US" sz="1350" dirty="0"/>
+          </a:p>
+        </p:txBody>
+      </p:sp>
+      <p:sp>
+        <p:nvSpPr>
+          <p:cNvPr id="27" name="Text 25"/>
+          <p:cNvSpPr txBox="1"/>
+          <p:nvPr/>
+        </p:nvSpPr>
+        <p:spPr>
+          <a:xfrm>
+            <a:off x="6858000" y="4087368"/>
+            <a:ext cx="4526280" cy="365760"/>
+          </a:xfrm>
+          <a:prstGeom prst="rect">
+            <a:avLst/>
+          </a:prstGeom>
+          <a:noFill/>
+          <a:ln/>
+        </p:spPr>
+        <p:txBody>
+          <a:bodyPr wrap="square" lIns="0" tIns="0" rIns="0" bIns="0" rtlCol="0" anchor="ctr"/>
+          <a:lstStyle/>
+          <a:p>
+            <a:pPr indent="0" marL="0">
+              <a:buNone/>
+            </a:pPr>
+            <a:r>
+              <a:rPr lang="en-US" sz="1200" dirty="0">
                 <a:solidFill>
                   <a:srgbClr val="1B2635"/>
                 </a:solidFill>
@@ -7059,19 +8432,77 @@
                 <a:ea typeface="Calibri" pitchFamily="34" charset="-122"/>
                 <a:cs typeface="Calibri" pitchFamily="34" charset="-120"/>
               </a:rPr>
-              <a:t>[8] SEBI Cybersecurity and Cyber Resilience Framework: RTO 2 hours, RPO 15 minutes (clarification reported by PTI / The Week, 28 Aug 2025).</a:t>
-            </a:r>
-            <a:endParaRPr lang="en-US" sz="1050" dirty="0"/>
-          </a:p>
-          <a:p>
-            <a:pPr indent="0" marL="0">
-              <a:spcAft>
-                <a:spcPts val="500"/>
-              </a:spcAft>
-              <a:buNone/>
-            </a:pPr>
-            <a:r>
-              <a:rPr lang="en-US" sz="1050" dirty="0">
+              <a:t>standard fault library alongside our own faults</a:t>
+            </a:r>
+            <a:endParaRPr lang="en-US" sz="1200" dirty="0"/>
+          </a:p>
+        </p:txBody>
+      </p:sp>
+      <p:sp>
+        <p:nvSpPr>
+          <p:cNvPr id="28" name="Text 26"/>
+          <p:cNvSpPr txBox="1"/>
+          <p:nvPr/>
+        </p:nvSpPr>
+        <p:spPr>
+          <a:xfrm>
+            <a:off x="6858000" y="4572000"/>
+            <a:ext cx="4526280" cy="292608"/>
+          </a:xfrm>
+          <a:prstGeom prst="rect">
+            <a:avLst/>
+          </a:prstGeom>
+          <a:noFill/>
+          <a:ln/>
+        </p:spPr>
+        <p:txBody>
+          <a:bodyPr wrap="square" lIns="0" tIns="0" rIns="0" bIns="0" rtlCol="0" anchor="ctr"/>
+          <a:lstStyle/>
+          <a:p>
+            <a:pPr indent="0" marL="0">
+              <a:buNone/>
+            </a:pPr>
+            <a:r>
+              <a:rPr lang="en-US" sz="1350" b="1" dirty="0">
+                <a:solidFill>
+                  <a:srgbClr val="171721"/>
+                </a:solidFill>
+                <a:latin typeface="Calibri" pitchFamily="34" charset="0"/>
+                <a:ea typeface="Calibri" pitchFamily="34" charset="-122"/>
+                <a:cs typeface="Calibri" pitchFamily="34" charset="-120"/>
+              </a:rPr>
+              <a:t>Approvals where teams work</a:t>
+            </a:r>
+            <a:endParaRPr lang="en-US" sz="1350" dirty="0"/>
+          </a:p>
+        </p:txBody>
+      </p:sp>
+      <p:sp>
+        <p:nvSpPr>
+          <p:cNvPr id="29" name="Text 27"/>
+          <p:cNvSpPr txBox="1"/>
+          <p:nvPr/>
+        </p:nvSpPr>
+        <p:spPr>
+          <a:xfrm>
+            <a:off x="6858000" y="4864608"/>
+            <a:ext cx="4526280" cy="365760"/>
+          </a:xfrm>
+          <a:prstGeom prst="rect">
+            <a:avLst/>
+          </a:prstGeom>
+          <a:noFill/>
+          <a:ln/>
+        </p:spPr>
+        <p:txBody>
+          <a:bodyPr wrap="square" lIns="0" tIns="0" rIns="0" bIns="0" rtlCol="0" anchor="ctr"/>
+          <a:lstStyle/>
+          <a:p>
+            <a:pPr indent="0" marL="0">
+              <a:buNone/>
+            </a:pPr>
+            <a:r>
+              <a:rPr lang="en-US" sz="1200" dirty="0">
                 <a:solidFill>
                   <a:srgbClr val="1B2635"/>
                 </a:solidFill>
@@ -7079,19 +8510,77 @@
                 <a:ea typeface="Calibri" pitchFamily="34" charset="-122"/>
                 <a:cs typeface="Calibri" pitchFamily="34" charset="-120"/>
               </a:rPr>
-              <a:t>[9] SEBI framework for market infrastructure institutions: DR site within 45 minutes, quarterly drills (Business Standard, 22 Mar 2021).</a:t>
-            </a:r>
-            <a:endParaRPr lang="en-US" sz="1050" dirty="0"/>
-          </a:p>
-          <a:p>
-            <a:pPr indent="0" marL="0">
-              <a:spcAft>
-                <a:spcPts val="500"/>
-              </a:spcAft>
-              <a:buNone/>
-            </a:pPr>
-            <a:r>
-              <a:rPr lang="en-US" sz="1050" dirty="0">
+              <a:t>Microsoft Teams approval cards</a:t>
+            </a:r>
+            <a:endParaRPr lang="en-US" sz="1200" dirty="0"/>
+          </a:p>
+        </p:txBody>
+      </p:sp>
+      <p:sp>
+        <p:nvSpPr>
+          <p:cNvPr id="30" name="Text 28"/>
+          <p:cNvSpPr txBox="1"/>
+          <p:nvPr/>
+        </p:nvSpPr>
+        <p:spPr>
+          <a:xfrm>
+            <a:off x="6858000" y="5349240"/>
+            <a:ext cx="4526280" cy="292608"/>
+          </a:xfrm>
+          <a:prstGeom prst="rect">
+            <a:avLst/>
+          </a:prstGeom>
+          <a:noFill/>
+          <a:ln/>
+        </p:spPr>
+        <p:txBody>
+          <a:bodyPr wrap="square" lIns="0" tIns="0" rIns="0" bIns="0" rtlCol="0" anchor="ctr"/>
+          <a:lstStyle/>
+          <a:p>
+            <a:pPr indent="0" marL="0">
+              <a:buNone/>
+            </a:pPr>
+            <a:r>
+              <a:rPr lang="en-US" sz="1350" b="1" dirty="0">
+                <a:solidFill>
+                  <a:srgbClr val="171721"/>
+                </a:solidFill>
+                <a:latin typeface="Calibri" pitchFamily="34" charset="0"/>
+                <a:ea typeface="Calibri" pitchFamily="34" charset="-122"/>
+                <a:cs typeface="Calibri" pitchFamily="34" charset="-120"/>
+              </a:rPr>
+              <a:t>Portfolio view</a:t>
+            </a:r>
+            <a:endParaRPr lang="en-US" sz="1350" dirty="0"/>
+          </a:p>
+        </p:txBody>
+      </p:sp>
+      <p:sp>
+        <p:nvSpPr>
+          <p:cNvPr id="31" name="Text 29"/>
+          <p:cNvSpPr txBox="1"/>
+          <p:nvPr/>
+        </p:nvSpPr>
+        <p:spPr>
+          <a:xfrm>
+            <a:off x="6858000" y="5641848"/>
+            <a:ext cx="4526280" cy="365760"/>
+          </a:xfrm>
+          <a:prstGeom prst="rect">
+            <a:avLst/>
+          </a:prstGeom>
+          <a:noFill/>
+          <a:ln/>
+        </p:spPr>
+        <p:txBody>
+          <a:bodyPr wrap="square" lIns="0" tIns="0" rIns="0" bIns="0" rtlCol="0" anchor="ctr"/>
+          <a:lstStyle/>
+          <a:p>
+            <a:pPr indent="0" marL="0">
+              <a:buNone/>
+            </a:pPr>
+            <a:r>
+              <a:rPr lang="en-US" sz="1200" dirty="0">
                 <a:solidFill>
                   <a:srgbClr val="1B2635"/>
                 </a:solidFill>
@@ -7099,95 +8588,15 @@
                 <a:ea typeface="Calibri" pitchFamily="34" charset="-122"/>
                 <a:cs typeface="Calibri" pitchFamily="34" charset="-120"/>
               </a:rPr>
-              <a:t>[10] Regulation (EU) 2022/2554 (DORA), Articles 11(6), 12, 35(7)–(8), 50, 51. eur-lex.europa.eu/eli/reg/2022/2554/oj</a:t>
-            </a:r>
-            <a:endParaRPr lang="en-US" sz="1050" dirty="0"/>
-          </a:p>
-          <a:p>
-            <a:pPr indent="0" marL="0">
-              <a:spcAft>
-                <a:spcPts val="500"/>
-              </a:spcAft>
-              <a:buNone/>
-            </a:pPr>
-            <a:r>
-              <a:rPr lang="en-US" sz="1050" dirty="0">
-                <a:solidFill>
-                  <a:srgbClr val="1B2635"/>
-                </a:solidFill>
-                <a:latin typeface="Calibri" pitchFamily="34" charset="0"/>
-                <a:ea typeface="Calibri" pitchFamily="34" charset="-122"/>
-                <a:cs typeface="Calibri" pitchFamily="34" charset="-120"/>
-              </a:rPr>
-              <a:t>[11] Cockroach Labs with Wakefield Research, The State of Resilience 2025 (1,000 executives, Aug–Sep 2024). cockroachlabs.com</a:t>
-            </a:r>
-            <a:endParaRPr lang="en-US" sz="1050" dirty="0"/>
-          </a:p>
-          <a:p>
-            <a:pPr indent="0" marL="0">
-              <a:spcAft>
-                <a:spcPts val="500"/>
-              </a:spcAft>
-              <a:buNone/>
-            </a:pPr>
-            <a:r>
-              <a:rPr lang="en-US" sz="1050" dirty="0">
-                <a:solidFill>
-                  <a:srgbClr val="1B2635"/>
-                </a:solidFill>
-                <a:latin typeface="Calibri" pitchFamily="34" charset="0"/>
-                <a:ea typeface="Calibri" pitchFamily="34" charset="-122"/>
-                <a:cs typeface="Calibri" pitchFamily="34" charset="-120"/>
-              </a:rPr>
-              <a:t>[12] Azure Cost Management, actual cost by service in US$ (CostUSD), month to date, queried 18 Oct 2026 (our environment).</a:t>
-            </a:r>
-            <a:endParaRPr lang="en-US" sz="1050" dirty="0"/>
-          </a:p>
-          <a:p>
-            <a:pPr indent="0" marL="0">
-              <a:spcAft>
-                <a:spcPts val="500"/>
-              </a:spcAft>
-              <a:buNone/>
-            </a:pPr>
-            <a:r>
-              <a:rPr lang="en-US" sz="1050" dirty="0">
-                <a:solidFill>
-                  <a:srgbClr val="1B2635"/>
-                </a:solidFill>
-                <a:latin typeface="Calibri" pitchFamily="34" charset="0"/>
-                <a:ea typeface="Calibri" pitchFamily="34" charset="-122"/>
-                <a:cs typeface="Calibri" pitchFamily="34" charset="-120"/>
-              </a:rPr>
-              <a:t>[13] Azure Retail Prices API (prices.azure.com), East Asia / Southeast Asia list prices for App Service B1 Linux, SQL Database Basic, Traffic Manager, 18 Oct 2026.</a:t>
-            </a:r>
-            <a:endParaRPr lang="en-US" sz="1050" dirty="0"/>
-          </a:p>
-          <a:p>
-            <a:pPr indent="0" marL="0">
-              <a:spcAft>
-                <a:spcPts val="500"/>
-              </a:spcAft>
-              <a:buNone/>
-            </a:pPr>
-            <a:r>
-              <a:rPr lang="en-US" sz="1050" dirty="0">
-                <a:solidFill>
-                  <a:srgbClr val="1B2635"/>
-                </a:solidFill>
-                <a:latin typeface="Calibri" pitchFamily="34" charset="0"/>
-                <a:ea typeface="Calibri" pitchFamily="34" charset="-122"/>
-                <a:cs typeface="Calibri" pitchFamily="34" charset="-120"/>
-              </a:rPr>
-              <a:t>Our measurements: 9 drills recorded by the DR Agent (17–18 Oct 2026); each report keeps the raw timestamps, events and approvals.</a:t>
-            </a:r>
-            <a:endParaRPr lang="en-US" sz="1050" dirty="0"/>
-          </a:p>
-        </p:txBody>
-      </p:sp>
-      <p:sp>
-        <p:nvSpPr>
-          <p:cNvPr id="5" name="Text 3"/>
+              <a:t>resilience score across many applications</a:t>
+            </a:r>
+            <a:endParaRPr lang="en-US" sz="1200" dirty="0"/>
+          </a:p>
+        </p:txBody>
+      </p:sp>
+      <p:sp>
+        <p:nvSpPr>
+          <p:cNvPr id="32" name="Text 30"/>
           <p:cNvSpPr txBox="1"/>
           <p:nvPr/>
         </p:nvSpPr>
@@ -7235,6 +8644,457 @@
 <file path=ppt/slides/slide15.xml><?xml version="1.0" encoding="utf-8"?>
 <p:sld xmlns:a="http://schemas.openxmlformats.org/drawingml/2006/main" xmlns:r="http://schemas.openxmlformats.org/officeDocument/2006/relationships" xmlns:p="http://schemas.openxmlformats.org/presentationml/2006/main">
   <p:cSld name="Slide 15">
+    <p:bg>
+      <p:bgPr>
+        <a:solidFill>
+          <a:srgbClr val="FFFFFF"/>
+        </a:solidFill>
+      </p:bgPr>
+    </p:bg>
+    <p:spTree>
+      <p:nvGrpSpPr>
+        <p:cNvPr id="1" name=""/>
+        <p:cNvGrpSpPr/>
+        <p:nvPr/>
+      </p:nvGrpSpPr>
+      <p:grpSpPr>
+        <a:xfrm>
+          <a:off x="0" y="0"/>
+          <a:ext cx="0" cy="0"/>
+          <a:chOff x="0" y="0"/>
+          <a:chExt cx="0" cy="0"/>
+        </a:xfrm>
+      </p:grpSpPr>
+      <p:sp>
+        <p:nvSpPr>
+          <p:cNvPr id="2" name="Text 0"/>
+          <p:cNvSpPr txBox="1"/>
+          <p:nvPr/>
+        </p:nvSpPr>
+        <p:spPr>
+          <a:xfrm>
+            <a:off x="548640" y="320040"/>
+            <a:ext cx="11064240" cy="685800"/>
+          </a:xfrm>
+          <a:prstGeom prst="rect">
+            <a:avLst/>
+          </a:prstGeom>
+          <a:noFill/>
+          <a:ln/>
+        </p:spPr>
+        <p:txBody>
+          <a:bodyPr wrap="square" lIns="0" tIns="0" rIns="0" bIns="0" rtlCol="0" anchor="ctr"/>
+          <a:lstStyle/>
+          <a:p>
+            <a:pPr indent="0" marL="0">
+              <a:buNone/>
+            </a:pPr>
+            <a:r>
+              <a:rPr lang="en-US" sz="3200" b="1" dirty="0">
+                <a:solidFill>
+                  <a:srgbClr val="171721"/>
+                </a:solidFill>
+                <a:latin typeface="Calibri" pitchFamily="34" charset="0"/>
+                <a:ea typeface="Calibri" pitchFamily="34" charset="-122"/>
+                <a:cs typeface="Calibri" pitchFamily="34" charset="-120"/>
+              </a:rPr>
+              <a:t>Sources</a:t>
+            </a:r>
+            <a:endParaRPr lang="en-US" sz="3200" dirty="0"/>
+          </a:p>
+        </p:txBody>
+      </p:sp>
+      <p:sp>
+        <p:nvSpPr>
+          <p:cNvPr id="3" name="Text 1"/>
+          <p:cNvSpPr txBox="1"/>
+          <p:nvPr/>
+        </p:nvSpPr>
+        <p:spPr>
+          <a:xfrm>
+            <a:off x="548640" y="987552"/>
+            <a:ext cx="11064240" cy="365760"/>
+          </a:xfrm>
+          <a:prstGeom prst="rect">
+            <a:avLst/>
+          </a:prstGeom>
+          <a:noFill/>
+          <a:ln/>
+        </p:spPr>
+        <p:txBody>
+          <a:bodyPr wrap="square" lIns="0" tIns="0" rIns="0" bIns="0" rtlCol="0" anchor="ctr"/>
+          <a:lstStyle/>
+          <a:p>
+            <a:pPr indent="0" marL="0">
+              <a:buNone/>
+            </a:pPr>
+            <a:r>
+              <a:rPr lang="en-US" sz="1500" i="1" dirty="0">
+                <a:solidFill>
+                  <a:srgbClr val="5B6B7F"/>
+                </a:solidFill>
+                <a:latin typeface="Calibri" pitchFamily="34" charset="0"/>
+                <a:ea typeface="Calibri" pitchFamily="34" charset="-122"/>
+                <a:cs typeface="Calibri" pitchFamily="34" charset="-120"/>
+              </a:rPr>
+              <a:t>Every figure in this deck is taken from the source below. Our own figures come from live drills on Azure.</a:t>
+            </a:r>
+            <a:endParaRPr lang="en-US" sz="1500" dirty="0"/>
+          </a:p>
+        </p:txBody>
+      </p:sp>
+      <p:sp>
+        <p:nvSpPr>
+          <p:cNvPr id="4" name="Text 2"/>
+          <p:cNvSpPr txBox="1"/>
+          <p:nvPr/>
+        </p:nvSpPr>
+        <p:spPr>
+          <a:xfrm>
+            <a:off x="548640" y="1508760"/>
+            <a:ext cx="11064240" cy="4846320"/>
+          </a:xfrm>
+          <a:prstGeom prst="rect">
+            <a:avLst/>
+          </a:prstGeom>
+          <a:noFill/>
+          <a:ln/>
+        </p:spPr>
+        <p:txBody>
+          <a:bodyPr wrap="square" lIns="0" tIns="0" rIns="0" bIns="0" rtlCol="0" anchor="t"/>
+          <a:lstStyle/>
+          <a:p>
+            <a:pPr indent="0" marL="0">
+              <a:spcAft>
+                <a:spcPts val="500"/>
+              </a:spcAft>
+              <a:buNone/>
+            </a:pPr>
+            <a:r>
+              <a:rPr lang="en-US" sz="1050" dirty="0">
+                <a:solidFill>
+                  <a:srgbClr val="1B2635"/>
+                </a:solidFill>
+                <a:latin typeface="Calibri" pitchFamily="34" charset="0"/>
+                <a:ea typeface="Calibri" pitchFamily="34" charset="-122"/>
+                <a:cs typeface="Calibri" pitchFamily="34" charset="-120"/>
+              </a:rPr>
+              <a:t>[1] Splunk with Oxford Economics, The Hidden Costs of Downtime 2026, 19 May 2026 (2,000 Global 2000 executives). newsroom.cisco.com (The $600 Billion Wake-up Call)</a:t>
+            </a:r>
+            <a:endParaRPr lang="en-US" sz="1050" dirty="0"/>
+          </a:p>
+          <a:p>
+            <a:pPr indent="0" marL="0">
+              <a:spcAft>
+                <a:spcPts val="500"/>
+              </a:spcAft>
+              <a:buNone/>
+            </a:pPr>
+            <a:r>
+              <a:rPr lang="en-US" sz="1050" dirty="0">
+                <a:solidFill>
+                  <a:srgbClr val="1B2635"/>
+                </a:solidFill>
+                <a:latin typeface="Calibri" pitchFamily="34" charset="0"/>
+                <a:ea typeface="Calibri" pitchFamily="34" charset="-122"/>
+                <a:cs typeface="Calibri" pitchFamily="34" charset="-120"/>
+              </a:rPr>
+              <a:t>[2] Uptime Institute, Annual Outage Analysis 2026, press release 13 May 2026. uptimeinstitute.com</a:t>
+            </a:r>
+            <a:endParaRPr lang="en-US" sz="1050" dirty="0"/>
+          </a:p>
+          <a:p>
+            <a:pPr indent="0" marL="0">
+              <a:spcAft>
+                <a:spcPts val="500"/>
+              </a:spcAft>
+              <a:buNone/>
+            </a:pPr>
+            <a:r>
+              <a:rPr lang="en-US" sz="1050" dirty="0">
+                <a:solidFill>
+                  <a:srgbClr val="1B2635"/>
+                </a:solidFill>
+                <a:latin typeface="Calibri" pitchFamily="34" charset="0"/>
+                <a:ea typeface="Calibri" pitchFamily="34" charset="-122"/>
+                <a:cs typeface="Calibri" pitchFamily="34" charset="-120"/>
+              </a:rPr>
+              <a:t>[3] Parametrix estimate of losses from the AWS us-east-1 outage of 20 Oct 2025 (Insurance Edge, 30 Oct 2025).</a:t>
+            </a:r>
+            <a:endParaRPr lang="en-US" sz="1050" dirty="0"/>
+          </a:p>
+          <a:p>
+            <a:pPr indent="0" marL="0">
+              <a:spcAft>
+                <a:spcPts val="500"/>
+              </a:spcAft>
+              <a:buNone/>
+            </a:pPr>
+            <a:r>
+              <a:rPr lang="en-US" sz="1050" dirty="0">
+                <a:solidFill>
+                  <a:srgbClr val="1B2635"/>
+                </a:solidFill>
+                <a:latin typeface="Calibri" pitchFamily="34" charset="0"/>
+                <a:ea typeface="Calibri" pitchFamily="34" charset="-122"/>
+                <a:cs typeface="Calibri" pitchFamily="34" charset="-120"/>
+              </a:rPr>
+              <a:t>[4] RBI order to HDFC Bank, 2 Dec 2020 (Outlook Business, 3 Dec 2020); curbs lifted 17 Aug 2021 (cards) and 11 Mar 2022 (digital) (Business Standard, 12 Mar 2022).</a:t>
+            </a:r>
+            <a:endParaRPr lang="en-US" sz="1050" dirty="0"/>
+          </a:p>
+          <a:p>
+            <a:pPr indent="0" marL="0">
+              <a:spcAft>
+                <a:spcPts val="500"/>
+              </a:spcAft>
+              <a:buNone/>
+            </a:pPr>
+            <a:r>
+              <a:rPr lang="en-US" sz="1050" dirty="0">
+                <a:solidFill>
+                  <a:srgbClr val="1B2635"/>
+                </a:solidFill>
+                <a:latin typeface="Calibri" pitchFamily="34" charset="0"/>
+                <a:ea typeface="Calibri" pitchFamily="34" charset="-122"/>
+                <a:cs typeface="Calibri" pitchFamily="34" charset="-120"/>
+              </a:rPr>
+              <a:t>[5] NSE and NSE Clearing settle the 24 Feb 2021 trading-halt case with SEBI for ₹72.64 crore (Moneylife; Business Standard, Jun 2023); ≈ $8.8M at June 2023 rates of ₹82–83 per US$.</a:t>
+            </a:r>
+            <a:endParaRPr lang="en-US" sz="1050" dirty="0"/>
+          </a:p>
+          <a:p>
+            <a:pPr indent="0" marL="0">
+              <a:spcAft>
+                <a:spcPts val="500"/>
+              </a:spcAft>
+              <a:buNone/>
+            </a:pPr>
+            <a:r>
+              <a:rPr lang="en-US" sz="1050" dirty="0">
+                <a:solidFill>
+                  <a:srgbClr val="1B2635"/>
+                </a:solidFill>
+                <a:latin typeface="Calibri" pitchFamily="34" charset="0"/>
+                <a:ea typeface="Calibri" pitchFamily="34" charset="-122"/>
+                <a:cs typeface="Calibri" pitchFamily="34" charset="-120"/>
+              </a:rPr>
+              <a:t>[6] RBI action on Kotak Mahindra Bank under Sec. 35A, 24 Apr 2024 (TechCrunch); restrictions lifted 12 Feb 2025 (Business Standard).</a:t>
+            </a:r>
+            <a:endParaRPr lang="en-US" sz="1050" dirty="0"/>
+          </a:p>
+          <a:p>
+            <a:pPr indent="0" marL="0">
+              <a:spcAft>
+                <a:spcPts val="500"/>
+              </a:spcAft>
+              <a:buNone/>
+            </a:pPr>
+            <a:r>
+              <a:rPr lang="en-US" sz="1050" dirty="0">
+                <a:solidFill>
+                  <a:srgbClr val="1B2635"/>
+                </a:solidFill>
+                <a:latin typeface="Calibri" pitchFamily="34" charset="0"/>
+                <a:ea typeface="Calibri" pitchFamily="34" charset="-122"/>
+                <a:cs typeface="Calibri" pitchFamily="34" charset="-120"/>
+              </a:rPr>
+              <a:t>[7] RBI, Cybersecurity, Technology: Risk, Resilience and Assurance Framework Directions, 31 Jul 2026, summarised by KPMG India, Sep 2026.</a:t>
+            </a:r>
+            <a:endParaRPr lang="en-US" sz="1050" dirty="0"/>
+          </a:p>
+          <a:p>
+            <a:pPr indent="0" marL="0">
+              <a:spcAft>
+                <a:spcPts val="500"/>
+              </a:spcAft>
+              <a:buNone/>
+            </a:pPr>
+            <a:r>
+              <a:rPr lang="en-US" sz="1050" dirty="0">
+                <a:solidFill>
+                  <a:srgbClr val="1B2635"/>
+                </a:solidFill>
+                <a:latin typeface="Calibri" pitchFamily="34" charset="0"/>
+                <a:ea typeface="Calibri" pitchFamily="34" charset="-122"/>
+                <a:cs typeface="Calibri" pitchFamily="34" charset="-120"/>
+              </a:rPr>
+              <a:t>[8] SEBI Cybersecurity and Cyber Resilience Framework: RTO 2 hours, RPO 15 minutes (clarification reported by PTI / The Week, 28 Aug 2025).</a:t>
+            </a:r>
+            <a:endParaRPr lang="en-US" sz="1050" dirty="0"/>
+          </a:p>
+          <a:p>
+            <a:pPr indent="0" marL="0">
+              <a:spcAft>
+                <a:spcPts val="500"/>
+              </a:spcAft>
+              <a:buNone/>
+            </a:pPr>
+            <a:r>
+              <a:rPr lang="en-US" sz="1050" dirty="0">
+                <a:solidFill>
+                  <a:srgbClr val="1B2635"/>
+                </a:solidFill>
+                <a:latin typeface="Calibri" pitchFamily="34" charset="0"/>
+                <a:ea typeface="Calibri" pitchFamily="34" charset="-122"/>
+                <a:cs typeface="Calibri" pitchFamily="34" charset="-120"/>
+              </a:rPr>
+              <a:t>[9] SEBI framework for market infrastructure institutions: DR site within 45 minutes, quarterly drills (Business Standard, 22 Mar 2021).</a:t>
+            </a:r>
+            <a:endParaRPr lang="en-US" sz="1050" dirty="0"/>
+          </a:p>
+          <a:p>
+            <a:pPr indent="0" marL="0">
+              <a:spcAft>
+                <a:spcPts val="500"/>
+              </a:spcAft>
+              <a:buNone/>
+            </a:pPr>
+            <a:r>
+              <a:rPr lang="en-US" sz="1050" dirty="0">
+                <a:solidFill>
+                  <a:srgbClr val="1B2635"/>
+                </a:solidFill>
+                <a:latin typeface="Calibri" pitchFamily="34" charset="0"/>
+                <a:ea typeface="Calibri" pitchFamily="34" charset="-122"/>
+                <a:cs typeface="Calibri" pitchFamily="34" charset="-120"/>
+              </a:rPr>
+              <a:t>[10] Regulation (EU) 2022/2554 (DORA), Articles 11(6), 12, 35(7)–(8), 50, 51. eur-lex.europa.eu/eli/reg/2022/2554/oj</a:t>
+            </a:r>
+            <a:endParaRPr lang="en-US" sz="1050" dirty="0"/>
+          </a:p>
+          <a:p>
+            <a:pPr indent="0" marL="0">
+              <a:spcAft>
+                <a:spcPts val="500"/>
+              </a:spcAft>
+              <a:buNone/>
+            </a:pPr>
+            <a:r>
+              <a:rPr lang="en-US" sz="1050" dirty="0">
+                <a:solidFill>
+                  <a:srgbClr val="1B2635"/>
+                </a:solidFill>
+                <a:latin typeface="Calibri" pitchFamily="34" charset="0"/>
+                <a:ea typeface="Calibri" pitchFamily="34" charset="-122"/>
+                <a:cs typeface="Calibri" pitchFamily="34" charset="-120"/>
+              </a:rPr>
+              <a:t>[11] Cockroach Labs with Wakefield Research, The State of Resilience 2025 (1,000 executives, Aug–Sep 2024). cockroachlabs.com</a:t>
+            </a:r>
+            <a:endParaRPr lang="en-US" sz="1050" dirty="0"/>
+          </a:p>
+          <a:p>
+            <a:pPr indent="0" marL="0">
+              <a:spcAft>
+                <a:spcPts val="500"/>
+              </a:spcAft>
+              <a:buNone/>
+            </a:pPr>
+            <a:r>
+              <a:rPr lang="en-US" sz="1050" dirty="0">
+                <a:solidFill>
+                  <a:srgbClr val="1B2635"/>
+                </a:solidFill>
+                <a:latin typeface="Calibri" pitchFamily="34" charset="0"/>
+                <a:ea typeface="Calibri" pitchFamily="34" charset="-122"/>
+                <a:cs typeface="Calibri" pitchFamily="34" charset="-120"/>
+              </a:rPr>
+              <a:t>[12] Azure Cost Management, actual cost by service in US$ (CostUSD), month to date, queried 18 Oct 2026 (our environment).</a:t>
+            </a:r>
+            <a:endParaRPr lang="en-US" sz="1050" dirty="0"/>
+          </a:p>
+          <a:p>
+            <a:pPr indent="0" marL="0">
+              <a:spcAft>
+                <a:spcPts val="500"/>
+              </a:spcAft>
+              <a:buNone/>
+            </a:pPr>
+            <a:r>
+              <a:rPr lang="en-US" sz="1050" dirty="0">
+                <a:solidFill>
+                  <a:srgbClr val="1B2635"/>
+                </a:solidFill>
+                <a:latin typeface="Calibri" pitchFamily="34" charset="0"/>
+                <a:ea typeface="Calibri" pitchFamily="34" charset="-122"/>
+                <a:cs typeface="Calibri" pitchFamily="34" charset="-120"/>
+              </a:rPr>
+              <a:t>[13] Azure Retail Prices API (prices.azure.com), East Asia / Southeast Asia list prices for App Service B1 Linux, SQL Database Basic, Traffic Manager, 18 Oct 2026.</a:t>
+            </a:r>
+            <a:endParaRPr lang="en-US" sz="1050" dirty="0"/>
+          </a:p>
+          <a:p>
+            <a:pPr indent="0" marL="0">
+              <a:spcAft>
+                <a:spcPts val="500"/>
+              </a:spcAft>
+              <a:buNone/>
+            </a:pPr>
+            <a:r>
+              <a:rPr lang="en-US" sz="1050" dirty="0">
+                <a:solidFill>
+                  <a:srgbClr val="1B2635"/>
+                </a:solidFill>
+                <a:latin typeface="Calibri" pitchFamily="34" charset="0"/>
+                <a:ea typeface="Calibri" pitchFamily="34" charset="-122"/>
+                <a:cs typeface="Calibri" pitchFamily="34" charset="-120"/>
+              </a:rPr>
+              <a:t>Our measurements: 10 completed drills recorded by the DR Agent (17–19 Oct 2026), including drills under payment load; each report keeps the raw timestamps, events, writes and approvals.</a:t>
+            </a:r>
+            <a:endParaRPr lang="en-US" sz="1050" dirty="0"/>
+          </a:p>
+        </p:txBody>
+      </p:sp>
+      <p:sp>
+        <p:nvSpPr>
+          <p:cNvPr id="5" name="Text 3"/>
+          <p:cNvSpPr txBox="1"/>
+          <p:nvPr/>
+        </p:nvSpPr>
+        <p:spPr>
+          <a:xfrm>
+            <a:off x="548640" y="6473952"/>
+            <a:ext cx="11064240" cy="274320"/>
+          </a:xfrm>
+          <a:prstGeom prst="rect">
+            <a:avLst/>
+          </a:prstGeom>
+          <a:noFill/>
+          <a:ln/>
+        </p:spPr>
+        <p:txBody>
+          <a:bodyPr wrap="square" lIns="0" tIns="0" rIns="0" bIns="0" rtlCol="0" anchor="ctr"/>
+          <a:lstStyle/>
+          <a:p>
+            <a:pPr algn="r" indent="0" marL="0">
+              <a:buNone/>
+            </a:pPr>
+            <a:r>
+              <a:rPr lang="en-US" sz="900" dirty="0">
+                <a:solidFill>
+                  <a:srgbClr val="8C99AA"/>
+                </a:solidFill>
+                <a:latin typeface="Calibri" pitchFamily="34" charset="0"/>
+                <a:ea typeface="Calibri" pitchFamily="34" charset="-122"/>
+                <a:cs typeface="Calibri" pitchFamily="34" charset="-120"/>
+              </a:rPr>
+              <a:t>DR Agent: Autonomous DR Validation  ·  Team Azure Armada  ·  Azure Day 2026 Hackathon   15</a:t>
+            </a:r>
+            <a:endParaRPr lang="en-US" sz="900" dirty="0"/>
+          </a:p>
+        </p:txBody>
+      </p:sp>
+    </p:spTree>
+  </p:cSld>
+  <p:clrMapOvr>
+    <a:masterClrMapping/>
+  </p:clrMapOvr>
+</p:sld>
+</file>
+
+<file path=ppt/slides/slide16.xml><?xml version="1.0" encoding="utf-8"?>
+<p:sld xmlns:a="http://schemas.openxmlformats.org/drawingml/2006/main" xmlns:r="http://schemas.openxmlformats.org/officeDocument/2006/relationships" xmlns:p="http://schemas.openxmlformats.org/presentationml/2006/main">
+  <p:cSld name="Slide 16">
     <p:bg>
       <p:bgPr>
         <a:solidFill>
@@ -7392,7 +9252,7 @@
         <p:spPr>
           <a:xfrm>
             <a:off x="548640" y="4206240"/>
-            <a:ext cx="3474720" cy="914400"/>
+            <a:ext cx="2606040" cy="1188720"/>
           </a:xfrm>
           <a:prstGeom prst="rect">
             <a:avLst/>
@@ -7433,7 +9293,7 @@
                 <a:ea typeface="Calibri" pitchFamily="34" charset="-122"/>
                 <a:cs typeface="Calibri" pitchFamily="34" charset="-120"/>
               </a:rPr>
-              <a:t>Fail over, measure, fail back: 10 live drills, RTO about 30 s, data loss proven write by write</a:t>
+              <a:t>10 live drills, RTO 27.7–40.4 s, data loss proven write by write, also under payment load</a:t>
             </a:r>
             <a:endParaRPr lang="en-US" sz="1700" dirty="0"/>
           </a:p>
@@ -7447,8 +9307,8 @@
         </p:nvSpPr>
         <p:spPr>
           <a:xfrm>
-            <a:off x="4297680" y="4206240"/>
-            <a:ext cx="3474720" cy="914400"/>
+            <a:off x="3337560" y="4206240"/>
+            <a:ext cx="2606040" cy="1188720"/>
           </a:xfrm>
           <a:prstGeom prst="rect">
             <a:avLst/>
@@ -7472,6 +9332,62 @@
                 <a:ea typeface="Calibri" pitchFamily="34" charset="-122"/>
                 <a:cs typeface="Calibri" pitchFamily="34" charset="-120"/>
               </a:rPr>
+              <a:t>Autonomous, not reckless</a:t>
+            </a:r>
+            <a:endParaRPr lang="en-US" sz="1700" dirty="0"/>
+          </a:p>
+          <a:p>
+            <a:pPr indent="0" marL="0">
+              <a:buNone/>
+            </a:pPr>
+            <a:r>
+              <a:rPr lang="en-US" sz="1300" dirty="0">
+                <a:solidFill>
+                  <a:srgbClr val="C9C3E6"/>
+                </a:solidFill>
+                <a:latin typeface="Calibri" pitchFamily="34" charset="0"/>
+                <a:ea typeface="Calibri" pitchFamily="34" charset="-122"/>
+                <a:cs typeface="Calibri" pitchFamily="34" charset="-120"/>
+              </a:rPr>
+              <a:t>Autopilot checks readiness by itself; agents investigate with read-only tools</a:t>
+            </a:r>
+            <a:endParaRPr lang="en-US" sz="1700" dirty="0"/>
+          </a:p>
+        </p:txBody>
+      </p:sp>
+      <p:sp>
+        <p:nvSpPr>
+          <p:cNvPr id="8" name="Text 5"/>
+          <p:cNvSpPr txBox="1"/>
+          <p:nvPr/>
+        </p:nvSpPr>
+        <p:spPr>
+          <a:xfrm>
+            <a:off x="6126480" y="4206240"/>
+            <a:ext cx="2606040" cy="1188720"/>
+          </a:xfrm>
+          <a:prstGeom prst="rect">
+            <a:avLst/>
+          </a:prstGeom>
+          <a:noFill/>
+          <a:ln/>
+        </p:spPr>
+        <p:txBody>
+          <a:bodyPr wrap="square" lIns="0" tIns="0" rIns="0" bIns="0" rtlCol="0" anchor="t"/>
+          <a:lstStyle/>
+          <a:p>
+            <a:pPr indent="0" marL="0">
+              <a:buNone/>
+            </a:pPr>
+            <a:r>
+              <a:rPr lang="en-US" sz="1700" b="1" dirty="0">
+                <a:solidFill>
+                  <a:srgbClr val="FFFFFF"/>
+                </a:solidFill>
+                <a:latin typeface="Calibri" pitchFamily="34" charset="0"/>
+                <a:ea typeface="Calibri" pitchFamily="34" charset="-122"/>
+                <a:cs typeface="Calibri" pitchFamily="34" charset="-120"/>
+              </a:rPr>
               <a:t>Built 100% on Azure</a:t>
             </a:r>
             <a:endParaRPr lang="en-US" sz="1700" dirty="0"/>
@@ -7497,14 +9413,14 @@
       </p:sp>
       <p:sp>
         <p:nvSpPr>
-          <p:cNvPr id="8" name="Text 5"/>
-          <p:cNvSpPr txBox="1"/>
-          <p:nvPr/>
-        </p:nvSpPr>
-        <p:spPr>
-          <a:xfrm>
-            <a:off x="8046720" y="4206240"/>
-            <a:ext cx="3474720" cy="914400"/>
+          <p:cNvPr id="9" name="Text 6"/>
+          <p:cNvSpPr txBox="1"/>
+          <p:nvPr/>
+        </p:nvSpPr>
+        <p:spPr>
+          <a:xfrm>
+            <a:off x="8915400" y="4206240"/>
+            <a:ext cx="2606040" cy="1188720"/>
           </a:xfrm>
           <a:prstGeom prst="rect">
             <a:avLst/>
@@ -7553,7 +9469,7 @@
       </p:sp>
       <p:sp>
         <p:nvSpPr>
-          <p:cNvPr id="9" name="Text 6"/>
+          <p:cNvPr id="10" name="Text 7"/>
           <p:cNvSpPr txBox="1"/>
           <p:nvPr/>
         </p:nvSpPr>
@@ -14228,7 +16144,7 @@
                           <a:ea typeface="Calibri" pitchFamily="34" charset="-122"/>
                           <a:cs typeface="Calibri" pitchFamily="34" charset="-120"/>
                         </a:rPr>
-                        <a:t>Found by readiness checks, fixed with approval</a:t>
+                        <a:t>Found by Autopilot every 10 min, fixed with approval</a:t>
                       </a:r>
                       <a:endParaRPr lang="en-US" sz="1200" dirty="0">
                         <a:latin typeface="Calibri" charset="0"/>
@@ -15473,7 +17389,7 @@
                           <a:ea typeface="Calibri" pitchFamily="34" charset="-122"/>
                           <a:cs typeface="Calibri" pitchFamily="34" charset="-120"/>
                         </a:rPr>
-                        <a:t>7 deterministic checks with evidence</a:t>
+                        <a:t>7 deterministic checks + read-only tools it calls itself</a:t>
                       </a:r>
                       <a:endParaRPr lang="en-US" sz="1200" dirty="0">
                         <a:latin typeface="Calibri" charset="0"/>
@@ -16454,7 +18370,7 @@
                           <a:ea typeface="Calibri" pitchFamily="34" charset="-122"/>
                           <a:cs typeface="Calibri" pitchFamily="34" charset="-120"/>
                         </a:rPr>
-                        <a:t>Failed step, error, events, live probes</a:t>
+                        <a:t>Failed step, error, events + read-only tools it calls itself</a:t>
                       </a:r>
                       <a:endParaRPr lang="en-US" sz="1200" dirty="0">
                         <a:latin typeface="Calibri" charset="0"/>
@@ -17024,7 +18940,7 @@
                 <a:ea typeface="Calibri" pitchFamily="34" charset="-122"/>
                 <a:cs typeface="Calibri" pitchFamily="34" charset="-120"/>
               </a:rPr>
-              <a:t>Watch them think. </a:t>
+              <a:t>They investigate, and you can watch. </a:t>
             </a:r>
             <a:pPr indent="0" marL="0">
               <a:buNone/>
@@ -17038,7 +18954,21 @@
                 <a:ea typeface="Calibri" pitchFamily="34" charset="-122"/>
                 <a:cs typeface="Calibri" pitchFamily="34" charset="-120"/>
               </a:rPr>
-              <a:t>A live activity panel streams every Azure read, the Foundry call (agent version, latency, tokens) and the code check, as it happens. It caught a real defect: the Architect compared a cost multiplier with a dollar budget; we now give it Azure list prices and it is right first time (5 of 5 runs).</a:t>
+              <a:t>Validator and Readiness call read-only tools themselves (probe, traffic_manager, web_app, sql_failover_group, app_settings_diff, site_recovery); when something is wrong they must call one before answering. Each agent has its own tool allowlist. The live activity panel shows every call: </a:t>
+            </a:r>
+            <a:pPr indent="0" marL="0">
+              <a:buNone/>
+            </a:pPr>
+            <a:r>
+              <a:rPr lang="en-US" sz="1350" b="1" dirty="0">
+                <a:solidFill>
+                  <a:srgbClr val="5E2CFE"/>
+                </a:solidFill>
+                <a:latin typeface="Calibri" pitchFamily="34" charset="0"/>
+                <a:ea typeface="Calibri" pitchFamily="34" charset="-122"/>
+                <a:cs typeface="Calibri" pitchFamily="34" charset="-120"/>
+              </a:rPr>
+              <a:t>"AI agent called app_settings_diff() → PAYMENT_PROVIDER only in East Asia"</a:t>
             </a:r>
             <a:endParaRPr lang="en-US" sz="1350" dirty="0"/>
           </a:p>
@@ -17187,7 +19117,7 @@
                 <a:ea typeface="Calibri" pitchFamily="34" charset="-122"/>
                 <a:cs typeface="Calibri" pitchFamily="34" charset="-120"/>
               </a:rPr>
-              <a:t>DR touches production, so no model can call an Azure write API. Every action is allowlisted, ordered, approved and reversible.</a:t>
+              <a:t>DR touches production, so no model can call an Azure write API: agent tools only read. Every action is allowlisted, ordered, approved and reversible.</a:t>
             </a:r>
             <a:endParaRPr lang="en-US" sz="1500" dirty="0"/>
           </a:p>
@@ -17348,7 +19278,7 @@
                 <a:ea typeface="Calibri" pitchFamily="34" charset="-122"/>
                 <a:cs typeface="Calibri" pitchFamily="34" charset="-120"/>
               </a:rPr>
-              <a:t>15 known actions only (outage injection, start app, SQL failover, endpoint on/off, health waits, ASR test). Region-changing actions only where the safe sequence puts them.</a:t>
+              <a:t>Only the engine writes, and only 15 known actions (outage, start app, SQL failover, endpoint on/off, health waits, ASR test). Agent tools only read: probes, settings, status.</a:t>
             </a:r>
             <a:endParaRPr lang="en-US" sz="1200" dirty="0"/>
           </a:p>
@@ -17509,7 +19439,7 @@
                 <a:ea typeface="Calibri" pitchFamily="34" charset="-122"/>
                 <a:cs typeface="Calibri" pitchFamily="34" charset="-120"/>
               </a:rPr>
-              <a:t>Every plan must contain heartbeat → outage → SQL failover → reroute → verify → measure → fail back, in that order.</a:t>
+              <a:t>Every plan must contain heartbeat → outage → SQL failover → reroute → verify → measure → fail back, in that order. Plan safety rules are enforced by the engine.</a:t>
             </a:r>
             <a:endParaRPr lang="en-US" sz="1200" dirty="0"/>
           </a:p>
@@ -17670,7 +19600,7 @@
                 <a:ea typeface="Calibri" pitchFamily="34" charset="-122"/>
                 <a:cs typeface="Calibri" pitchFamily="34" charset="-120"/>
               </a:rPr>
-              <a:t>A named approver signs off the plan; the DB team gives the go for the forced failover; the app team approves failback; a human approves any fix. Plans without these gates are rejected.</a:t>
+              <a:t>A named approver signs off the plan; the engine requires the DB team's 'go' before the outage and the app team's before failback; a human approves any fix. Stale commands are refused.</a:t>
             </a:r>
             <a:endParaRPr lang="en-US" sz="1200" dirty="0"/>
           </a:p>

--- a/docs/deck/DR-Agent-Azure-Day-2026.pptx
+++ b/docs/deck/DR-Agent-Azure-Day-2026.pptx
@@ -4452,7 +4452,7 @@
                 <a:ea typeface="Calibri" pitchFamily="34" charset="-122"/>
                 <a:cs typeface="Calibri" pitchFamily="34" charset="-120"/>
               </a:rPr>
-              <a:t>a scheduled check, with no one asking, found PAYMENT_PROVIDER missing in Southeast Asia (the DR app answered HTTP 503). Had East Asia failed then, the DR site could not have taken payments.</a:t>
+              <a:t>a scheduled check, with no one asking, found PAYMENT_PROVIDER missing in Southeast Asia (the DR app answered HTTP 503). Had East Asia failed then, customers would have been sent to a DR site that was failing its health checks.</a:t>
             </a:r>
             <a:endParaRPr lang="en-US" sz="1400" dirty="0"/>
           </a:p>
